--- a/docs/00_thesis/figures/論文流程圖.pptx
+++ b/docs/00_thesis/figures/論文流程圖.pptx
@@ -5,11 +5,12 @@
     <p:sldMasterId id="2147483648" r:id="rId1"/>
   </p:sldMasterIdLst>
   <p:notesMasterIdLst>
-    <p:notesMasterId r:id="rId4"/>
+    <p:notesMasterId r:id="rId5"/>
   </p:notesMasterIdLst>
   <p:sldIdLst>
     <p:sldId id="256" r:id="rId2"/>
     <p:sldId id="257" r:id="rId3"/>
+    <p:sldId id="258" r:id="rId4"/>
   </p:sldIdLst>
   <p:sldSz cx="9144000" cy="6858000" type="screen4x3"/>
   <p:notesSz cx="6858000" cy="9144000"/>
@@ -112,6 +113,753 @@
 </file>
 
 <file path=ppt/diagrams/colors1.xml><?xml version="1.0" encoding="utf-8"?>
+<dgm:colorsDef xmlns:dgm="http://schemas.openxmlformats.org/drawingml/2006/diagram" xmlns:a="http://schemas.openxmlformats.org/drawingml/2006/main" uniqueId="urn:microsoft.com/office/officeart/2005/8/colors/accent1_2">
+  <dgm:title val=""/>
+  <dgm:desc val=""/>
+  <dgm:catLst>
+    <dgm:cat type="accent1" pri="11200"/>
+  </dgm:catLst>
+  <dgm:styleLbl name="node0">
+    <dgm:fillClrLst meth="repeat">
+      <a:schemeClr val="accent1"/>
+    </dgm:fillClrLst>
+    <dgm:linClrLst meth="repeat">
+      <a:schemeClr val="lt1"/>
+    </dgm:linClrLst>
+    <dgm:effectClrLst/>
+    <dgm:txLinClrLst/>
+    <dgm:txFillClrLst/>
+    <dgm:txEffectClrLst/>
+  </dgm:styleLbl>
+  <dgm:styleLbl name="alignNode1">
+    <dgm:fillClrLst meth="repeat">
+      <a:schemeClr val="accent1"/>
+    </dgm:fillClrLst>
+    <dgm:linClrLst meth="repeat">
+      <a:schemeClr val="accent1"/>
+    </dgm:linClrLst>
+    <dgm:effectClrLst/>
+    <dgm:txLinClrLst/>
+    <dgm:txFillClrLst/>
+    <dgm:txEffectClrLst/>
+  </dgm:styleLbl>
+  <dgm:styleLbl name="node1">
+    <dgm:fillClrLst meth="repeat">
+      <a:schemeClr val="accent1"/>
+    </dgm:fillClrLst>
+    <dgm:linClrLst meth="repeat">
+      <a:schemeClr val="lt1"/>
+    </dgm:linClrLst>
+    <dgm:effectClrLst/>
+    <dgm:txLinClrLst/>
+    <dgm:txFillClrLst/>
+    <dgm:txEffectClrLst/>
+  </dgm:styleLbl>
+  <dgm:styleLbl name="lnNode1">
+    <dgm:fillClrLst meth="repeat">
+      <a:schemeClr val="accent1"/>
+    </dgm:fillClrLst>
+    <dgm:linClrLst meth="repeat">
+      <a:schemeClr val="lt1"/>
+    </dgm:linClrLst>
+    <dgm:effectClrLst/>
+    <dgm:txLinClrLst/>
+    <dgm:txFillClrLst/>
+    <dgm:txEffectClrLst/>
+  </dgm:styleLbl>
+  <dgm:styleLbl name="vennNode1">
+    <dgm:fillClrLst meth="repeat">
+      <a:schemeClr val="accent1">
+        <a:alpha val="50000"/>
+      </a:schemeClr>
+    </dgm:fillClrLst>
+    <dgm:linClrLst meth="repeat">
+      <a:schemeClr val="lt1"/>
+    </dgm:linClrLst>
+    <dgm:effectClrLst/>
+    <dgm:txLinClrLst/>
+    <dgm:txFillClrLst/>
+    <dgm:txEffectClrLst/>
+  </dgm:styleLbl>
+  <dgm:styleLbl name="node2">
+    <dgm:fillClrLst meth="repeat">
+      <a:schemeClr val="accent1"/>
+    </dgm:fillClrLst>
+    <dgm:linClrLst meth="repeat">
+      <a:schemeClr val="lt1"/>
+    </dgm:linClrLst>
+    <dgm:effectClrLst/>
+    <dgm:txLinClrLst/>
+    <dgm:txFillClrLst/>
+    <dgm:txEffectClrLst/>
+  </dgm:styleLbl>
+  <dgm:styleLbl name="node3">
+    <dgm:fillClrLst meth="repeat">
+      <a:schemeClr val="accent1"/>
+    </dgm:fillClrLst>
+    <dgm:linClrLst meth="repeat">
+      <a:schemeClr val="lt1"/>
+    </dgm:linClrLst>
+    <dgm:effectClrLst/>
+    <dgm:txLinClrLst/>
+    <dgm:txFillClrLst/>
+    <dgm:txEffectClrLst/>
+  </dgm:styleLbl>
+  <dgm:styleLbl name="node4">
+    <dgm:fillClrLst meth="repeat">
+      <a:schemeClr val="accent1"/>
+    </dgm:fillClrLst>
+    <dgm:linClrLst meth="repeat">
+      <a:schemeClr val="lt1"/>
+    </dgm:linClrLst>
+    <dgm:effectClrLst/>
+    <dgm:txLinClrLst/>
+    <dgm:txFillClrLst/>
+    <dgm:txEffectClrLst/>
+  </dgm:styleLbl>
+  <dgm:styleLbl name="fgImgPlace1">
+    <dgm:fillClrLst meth="repeat">
+      <a:schemeClr val="accent1">
+        <a:tint val="50000"/>
+      </a:schemeClr>
+    </dgm:fillClrLst>
+    <dgm:linClrLst meth="repeat">
+      <a:schemeClr val="lt1"/>
+    </dgm:linClrLst>
+    <dgm:effectClrLst/>
+    <dgm:txLinClrLst/>
+    <dgm:txFillClrLst meth="repeat">
+      <a:schemeClr val="lt1"/>
+    </dgm:txFillClrLst>
+    <dgm:txEffectClrLst/>
+  </dgm:styleLbl>
+  <dgm:styleLbl name="alignImgPlace1">
+    <dgm:fillClrLst meth="repeat">
+      <a:schemeClr val="accent1">
+        <a:tint val="50000"/>
+      </a:schemeClr>
+    </dgm:fillClrLst>
+    <dgm:linClrLst meth="repeat">
+      <a:schemeClr val="lt1"/>
+    </dgm:linClrLst>
+    <dgm:effectClrLst/>
+    <dgm:txLinClrLst/>
+    <dgm:txFillClrLst meth="repeat">
+      <a:schemeClr val="lt1"/>
+    </dgm:txFillClrLst>
+    <dgm:txEffectClrLst/>
+  </dgm:styleLbl>
+  <dgm:styleLbl name="bgImgPlace1">
+    <dgm:fillClrLst meth="repeat">
+      <a:schemeClr val="accent1">
+        <a:tint val="50000"/>
+      </a:schemeClr>
+    </dgm:fillClrLst>
+    <dgm:linClrLst meth="repeat">
+      <a:schemeClr val="lt1"/>
+    </dgm:linClrLst>
+    <dgm:effectClrLst/>
+    <dgm:txLinClrLst/>
+    <dgm:txFillClrLst meth="repeat">
+      <a:schemeClr val="lt1"/>
+    </dgm:txFillClrLst>
+    <dgm:txEffectClrLst/>
+  </dgm:styleLbl>
+  <dgm:styleLbl name="sibTrans2D1">
+    <dgm:fillClrLst meth="repeat">
+      <a:schemeClr val="accent1">
+        <a:tint val="60000"/>
+      </a:schemeClr>
+    </dgm:fillClrLst>
+    <dgm:linClrLst meth="repeat">
+      <a:schemeClr val="accent1">
+        <a:tint val="60000"/>
+      </a:schemeClr>
+    </dgm:linClrLst>
+    <dgm:effectClrLst/>
+    <dgm:txLinClrLst/>
+    <dgm:txFillClrLst/>
+    <dgm:txEffectClrLst/>
+  </dgm:styleLbl>
+  <dgm:styleLbl name="fgSibTrans2D1">
+    <dgm:fillClrLst meth="repeat">
+      <a:schemeClr val="accent1">
+        <a:tint val="60000"/>
+      </a:schemeClr>
+    </dgm:fillClrLst>
+    <dgm:linClrLst meth="repeat">
+      <a:schemeClr val="accent1">
+        <a:tint val="60000"/>
+      </a:schemeClr>
+    </dgm:linClrLst>
+    <dgm:effectClrLst/>
+    <dgm:txLinClrLst/>
+    <dgm:txFillClrLst/>
+    <dgm:txEffectClrLst/>
+  </dgm:styleLbl>
+  <dgm:styleLbl name="bgSibTrans2D1">
+    <dgm:fillClrLst meth="repeat">
+      <a:schemeClr val="accent1">
+        <a:tint val="60000"/>
+      </a:schemeClr>
+    </dgm:fillClrLst>
+    <dgm:linClrLst meth="repeat">
+      <a:schemeClr val="accent1">
+        <a:tint val="60000"/>
+      </a:schemeClr>
+    </dgm:linClrLst>
+    <dgm:effectClrLst/>
+    <dgm:txLinClrLst/>
+    <dgm:txFillClrLst/>
+    <dgm:txEffectClrLst/>
+  </dgm:styleLbl>
+  <dgm:styleLbl name="sibTrans1D1">
+    <dgm:fillClrLst meth="repeat">
+      <a:schemeClr val="accent1"/>
+    </dgm:fillClrLst>
+    <dgm:linClrLst meth="repeat">
+      <a:schemeClr val="accent1"/>
+    </dgm:linClrLst>
+    <dgm:effectClrLst/>
+    <dgm:txLinClrLst/>
+    <dgm:txFillClrLst meth="repeat">
+      <a:schemeClr val="tx1"/>
+    </dgm:txFillClrLst>
+    <dgm:txEffectClrLst/>
+  </dgm:styleLbl>
+  <dgm:styleLbl name="callout">
+    <dgm:fillClrLst meth="repeat">
+      <a:schemeClr val="accent1"/>
+    </dgm:fillClrLst>
+    <dgm:linClrLst meth="repeat">
+      <a:schemeClr val="accent1">
+        <a:tint val="50000"/>
+      </a:schemeClr>
+    </dgm:linClrLst>
+    <dgm:effectClrLst/>
+    <dgm:txLinClrLst/>
+    <dgm:txFillClrLst meth="repeat">
+      <a:schemeClr val="tx1"/>
+    </dgm:txFillClrLst>
+    <dgm:txEffectClrLst/>
+  </dgm:styleLbl>
+  <dgm:styleLbl name="asst0">
+    <dgm:fillClrLst meth="repeat">
+      <a:schemeClr val="accent1"/>
+    </dgm:fillClrLst>
+    <dgm:linClrLst meth="repeat">
+      <a:schemeClr val="lt1"/>
+    </dgm:linClrLst>
+    <dgm:effectClrLst/>
+    <dgm:txLinClrLst/>
+    <dgm:txFillClrLst/>
+    <dgm:txEffectClrLst/>
+  </dgm:styleLbl>
+  <dgm:styleLbl name="asst1">
+    <dgm:fillClrLst meth="repeat">
+      <a:schemeClr val="accent1"/>
+    </dgm:fillClrLst>
+    <dgm:linClrLst meth="repeat">
+      <a:schemeClr val="lt1"/>
+    </dgm:linClrLst>
+    <dgm:effectClrLst/>
+    <dgm:txLinClrLst/>
+    <dgm:txFillClrLst/>
+    <dgm:txEffectClrLst/>
+  </dgm:styleLbl>
+  <dgm:styleLbl name="asst2">
+    <dgm:fillClrLst meth="repeat">
+      <a:schemeClr val="accent1"/>
+    </dgm:fillClrLst>
+    <dgm:linClrLst meth="repeat">
+      <a:schemeClr val="lt1"/>
+    </dgm:linClrLst>
+    <dgm:effectClrLst/>
+    <dgm:txLinClrLst/>
+    <dgm:txFillClrLst/>
+    <dgm:txEffectClrLst/>
+  </dgm:styleLbl>
+  <dgm:styleLbl name="asst3">
+    <dgm:fillClrLst meth="repeat">
+      <a:schemeClr val="accent1"/>
+    </dgm:fillClrLst>
+    <dgm:linClrLst meth="repeat">
+      <a:schemeClr val="lt1"/>
+    </dgm:linClrLst>
+    <dgm:effectClrLst/>
+    <dgm:txLinClrLst/>
+    <dgm:txFillClrLst/>
+    <dgm:txEffectClrLst/>
+  </dgm:styleLbl>
+  <dgm:styleLbl name="asst4">
+    <dgm:fillClrLst meth="repeat">
+      <a:schemeClr val="accent1"/>
+    </dgm:fillClrLst>
+    <dgm:linClrLst meth="repeat">
+      <a:schemeClr val="lt1"/>
+    </dgm:linClrLst>
+    <dgm:effectClrLst/>
+    <dgm:txLinClrLst/>
+    <dgm:txFillClrLst/>
+    <dgm:txEffectClrLst/>
+  </dgm:styleLbl>
+  <dgm:styleLbl name="parChTrans2D1">
+    <dgm:fillClrLst meth="repeat">
+      <a:schemeClr val="accent1">
+        <a:tint val="60000"/>
+      </a:schemeClr>
+    </dgm:fillClrLst>
+    <dgm:linClrLst meth="repeat">
+      <a:schemeClr val="accent1">
+        <a:tint val="60000"/>
+      </a:schemeClr>
+    </dgm:linClrLst>
+    <dgm:effectClrLst/>
+    <dgm:txLinClrLst/>
+    <dgm:txFillClrLst meth="repeat">
+      <a:schemeClr val="lt1"/>
+    </dgm:txFillClrLst>
+    <dgm:txEffectClrLst/>
+  </dgm:styleLbl>
+  <dgm:styleLbl name="parChTrans2D2">
+    <dgm:fillClrLst meth="repeat">
+      <a:schemeClr val="accent1"/>
+    </dgm:fillClrLst>
+    <dgm:linClrLst meth="repeat">
+      <a:schemeClr val="accent1"/>
+    </dgm:linClrLst>
+    <dgm:effectClrLst/>
+    <dgm:txLinClrLst/>
+    <dgm:txFillClrLst meth="repeat">
+      <a:schemeClr val="lt1"/>
+    </dgm:txFillClrLst>
+    <dgm:txEffectClrLst/>
+  </dgm:styleLbl>
+  <dgm:styleLbl name="parChTrans2D3">
+    <dgm:fillClrLst meth="repeat">
+      <a:schemeClr val="accent1"/>
+    </dgm:fillClrLst>
+    <dgm:linClrLst meth="repeat">
+      <a:schemeClr val="accent1"/>
+    </dgm:linClrLst>
+    <dgm:effectClrLst/>
+    <dgm:txLinClrLst/>
+    <dgm:txFillClrLst meth="repeat">
+      <a:schemeClr val="lt1"/>
+    </dgm:txFillClrLst>
+    <dgm:txEffectClrLst/>
+  </dgm:styleLbl>
+  <dgm:styleLbl name="parChTrans2D4">
+    <dgm:fillClrLst meth="repeat">
+      <a:schemeClr val="accent1"/>
+    </dgm:fillClrLst>
+    <dgm:linClrLst meth="repeat">
+      <a:schemeClr val="accent1"/>
+    </dgm:linClrLst>
+    <dgm:effectClrLst/>
+    <dgm:txLinClrLst/>
+    <dgm:txFillClrLst meth="repeat">
+      <a:schemeClr val="lt1"/>
+    </dgm:txFillClrLst>
+    <dgm:txEffectClrLst/>
+  </dgm:styleLbl>
+  <dgm:styleLbl name="parChTrans1D1">
+    <dgm:fillClrLst meth="repeat">
+      <a:schemeClr val="accent1"/>
+    </dgm:fillClrLst>
+    <dgm:linClrLst meth="repeat">
+      <a:schemeClr val="accent1">
+        <a:shade val="60000"/>
+      </a:schemeClr>
+    </dgm:linClrLst>
+    <dgm:effectClrLst/>
+    <dgm:txLinClrLst/>
+    <dgm:txFillClrLst meth="repeat">
+      <a:schemeClr val="tx1"/>
+    </dgm:txFillClrLst>
+    <dgm:txEffectClrLst/>
+  </dgm:styleLbl>
+  <dgm:styleLbl name="parChTrans1D2">
+    <dgm:fillClrLst meth="repeat">
+      <a:schemeClr val="accent1"/>
+    </dgm:fillClrLst>
+    <dgm:linClrLst meth="repeat">
+      <a:schemeClr val="accent1">
+        <a:shade val="60000"/>
+      </a:schemeClr>
+    </dgm:linClrLst>
+    <dgm:effectClrLst/>
+    <dgm:txLinClrLst/>
+    <dgm:txFillClrLst meth="repeat">
+      <a:schemeClr val="tx1"/>
+    </dgm:txFillClrLst>
+    <dgm:txEffectClrLst/>
+  </dgm:styleLbl>
+  <dgm:styleLbl name="parChTrans1D3">
+    <dgm:fillClrLst meth="repeat">
+      <a:schemeClr val="accent1"/>
+    </dgm:fillClrLst>
+    <dgm:linClrLst meth="repeat">
+      <a:schemeClr val="accent1">
+        <a:shade val="80000"/>
+      </a:schemeClr>
+    </dgm:linClrLst>
+    <dgm:effectClrLst/>
+    <dgm:txLinClrLst/>
+    <dgm:txFillClrLst meth="repeat">
+      <a:schemeClr val="tx1"/>
+    </dgm:txFillClrLst>
+    <dgm:txEffectClrLst/>
+  </dgm:styleLbl>
+  <dgm:styleLbl name="parChTrans1D4">
+    <dgm:fillClrLst meth="repeat">
+      <a:schemeClr val="accent1"/>
+    </dgm:fillClrLst>
+    <dgm:linClrLst meth="repeat">
+      <a:schemeClr val="accent1">
+        <a:shade val="80000"/>
+      </a:schemeClr>
+    </dgm:linClrLst>
+    <dgm:effectClrLst/>
+    <dgm:txLinClrLst/>
+    <dgm:txFillClrLst meth="repeat">
+      <a:schemeClr val="tx1"/>
+    </dgm:txFillClrLst>
+    <dgm:txEffectClrLst/>
+  </dgm:styleLbl>
+  <dgm:styleLbl name="fgAcc1">
+    <dgm:fillClrLst meth="repeat">
+      <a:schemeClr val="lt1">
+        <a:alpha val="90000"/>
+      </a:schemeClr>
+    </dgm:fillClrLst>
+    <dgm:linClrLst meth="repeat">
+      <a:schemeClr val="accent1"/>
+    </dgm:linClrLst>
+    <dgm:effectClrLst/>
+    <dgm:txLinClrLst/>
+    <dgm:txFillClrLst meth="repeat">
+      <a:schemeClr val="dk1"/>
+    </dgm:txFillClrLst>
+    <dgm:txEffectClrLst/>
+  </dgm:styleLbl>
+  <dgm:styleLbl name="conFgAcc1">
+    <dgm:fillClrLst meth="repeat">
+      <a:schemeClr val="lt1">
+        <a:alpha val="90000"/>
+      </a:schemeClr>
+    </dgm:fillClrLst>
+    <dgm:linClrLst meth="repeat">
+      <a:schemeClr val="accent1"/>
+    </dgm:linClrLst>
+    <dgm:effectClrLst/>
+    <dgm:txLinClrLst/>
+    <dgm:txFillClrLst meth="repeat">
+      <a:schemeClr val="dk1"/>
+    </dgm:txFillClrLst>
+    <dgm:txEffectClrLst/>
+  </dgm:styleLbl>
+  <dgm:styleLbl name="alignAcc1">
+    <dgm:fillClrLst meth="repeat">
+      <a:schemeClr val="lt1">
+        <a:alpha val="90000"/>
+      </a:schemeClr>
+    </dgm:fillClrLst>
+    <dgm:linClrLst meth="repeat">
+      <a:schemeClr val="accent1"/>
+    </dgm:linClrLst>
+    <dgm:effectClrLst/>
+    <dgm:txLinClrLst/>
+    <dgm:txFillClrLst meth="repeat">
+      <a:schemeClr val="dk1"/>
+    </dgm:txFillClrLst>
+    <dgm:txEffectClrLst/>
+  </dgm:styleLbl>
+  <dgm:styleLbl name="trAlignAcc1">
+    <dgm:fillClrLst meth="repeat">
+      <a:schemeClr val="lt1">
+        <a:alpha val="40000"/>
+      </a:schemeClr>
+    </dgm:fillClrLst>
+    <dgm:linClrLst meth="repeat">
+      <a:schemeClr val="accent1"/>
+    </dgm:linClrLst>
+    <dgm:effectClrLst/>
+    <dgm:txLinClrLst/>
+    <dgm:txFillClrLst meth="repeat">
+      <a:schemeClr val="dk1"/>
+    </dgm:txFillClrLst>
+    <dgm:txEffectClrLst/>
+  </dgm:styleLbl>
+  <dgm:styleLbl name="bgAcc1">
+    <dgm:fillClrLst meth="repeat">
+      <a:schemeClr val="lt1">
+        <a:alpha val="90000"/>
+      </a:schemeClr>
+    </dgm:fillClrLst>
+    <dgm:linClrLst meth="repeat">
+      <a:schemeClr val="accent1"/>
+    </dgm:linClrLst>
+    <dgm:effectClrLst/>
+    <dgm:txLinClrLst/>
+    <dgm:txFillClrLst meth="repeat">
+      <a:schemeClr val="dk1"/>
+    </dgm:txFillClrLst>
+    <dgm:txEffectClrLst/>
+  </dgm:styleLbl>
+  <dgm:styleLbl name="solidFgAcc1">
+    <dgm:fillClrLst meth="repeat">
+      <a:schemeClr val="lt1"/>
+    </dgm:fillClrLst>
+    <dgm:linClrLst meth="repeat">
+      <a:schemeClr val="accent1"/>
+    </dgm:linClrLst>
+    <dgm:effectClrLst/>
+    <dgm:txLinClrLst/>
+    <dgm:txFillClrLst meth="repeat">
+      <a:schemeClr val="dk1"/>
+    </dgm:txFillClrLst>
+    <dgm:txEffectClrLst/>
+  </dgm:styleLbl>
+  <dgm:styleLbl name="solidAlignAcc1">
+    <dgm:fillClrLst meth="repeat">
+      <a:schemeClr val="lt1"/>
+    </dgm:fillClrLst>
+    <dgm:linClrLst meth="repeat">
+      <a:schemeClr val="accent1"/>
+    </dgm:linClrLst>
+    <dgm:effectClrLst/>
+    <dgm:txLinClrLst/>
+    <dgm:txFillClrLst meth="repeat">
+      <a:schemeClr val="dk1"/>
+    </dgm:txFillClrLst>
+    <dgm:txEffectClrLst/>
+  </dgm:styleLbl>
+  <dgm:styleLbl name="solidBgAcc1">
+    <dgm:fillClrLst meth="repeat">
+      <a:schemeClr val="lt1"/>
+    </dgm:fillClrLst>
+    <dgm:linClrLst meth="repeat">
+      <a:schemeClr val="accent1"/>
+    </dgm:linClrLst>
+    <dgm:effectClrLst/>
+    <dgm:txLinClrLst/>
+    <dgm:txFillClrLst meth="repeat">
+      <a:schemeClr val="dk1"/>
+    </dgm:txFillClrLst>
+    <dgm:txEffectClrLst/>
+  </dgm:styleLbl>
+  <dgm:styleLbl name="fgAccFollowNode1">
+    <dgm:fillClrLst meth="repeat">
+      <a:schemeClr val="accent1">
+        <a:alpha val="90000"/>
+        <a:tint val="40000"/>
+      </a:schemeClr>
+    </dgm:fillClrLst>
+    <dgm:linClrLst meth="repeat">
+      <a:schemeClr val="accent1">
+        <a:alpha val="90000"/>
+        <a:tint val="40000"/>
+      </a:schemeClr>
+    </dgm:linClrLst>
+    <dgm:effectClrLst/>
+    <dgm:txLinClrLst/>
+    <dgm:txFillClrLst meth="repeat">
+      <a:schemeClr val="dk1"/>
+    </dgm:txFillClrLst>
+    <dgm:txEffectClrLst/>
+  </dgm:styleLbl>
+  <dgm:styleLbl name="alignAccFollowNode1">
+    <dgm:fillClrLst meth="repeat">
+      <a:schemeClr val="accent1">
+        <a:alpha val="90000"/>
+        <a:tint val="40000"/>
+      </a:schemeClr>
+    </dgm:fillClrLst>
+    <dgm:linClrLst meth="repeat">
+      <a:schemeClr val="accent1">
+        <a:alpha val="90000"/>
+        <a:tint val="40000"/>
+      </a:schemeClr>
+    </dgm:linClrLst>
+    <dgm:effectClrLst/>
+    <dgm:txLinClrLst/>
+    <dgm:txFillClrLst meth="repeat">
+      <a:schemeClr val="dk1"/>
+    </dgm:txFillClrLst>
+    <dgm:txEffectClrLst/>
+  </dgm:styleLbl>
+  <dgm:styleLbl name="bgAccFollowNode1">
+    <dgm:fillClrLst meth="repeat">
+      <a:schemeClr val="accent1">
+        <a:alpha val="90000"/>
+        <a:tint val="40000"/>
+      </a:schemeClr>
+    </dgm:fillClrLst>
+    <dgm:linClrLst meth="repeat">
+      <a:schemeClr val="accent1">
+        <a:alpha val="90000"/>
+        <a:tint val="40000"/>
+      </a:schemeClr>
+    </dgm:linClrLst>
+    <dgm:effectClrLst/>
+    <dgm:txLinClrLst/>
+    <dgm:txFillClrLst meth="repeat">
+      <a:schemeClr val="dk1"/>
+    </dgm:txFillClrLst>
+    <dgm:txEffectClrLst/>
+  </dgm:styleLbl>
+  <dgm:styleLbl name="fgAcc0">
+    <dgm:fillClrLst meth="repeat">
+      <a:schemeClr val="lt1">
+        <a:alpha val="90000"/>
+      </a:schemeClr>
+    </dgm:fillClrLst>
+    <dgm:linClrLst meth="repeat">
+      <a:schemeClr val="accent1"/>
+    </dgm:linClrLst>
+    <dgm:effectClrLst/>
+    <dgm:txLinClrLst/>
+    <dgm:txFillClrLst meth="repeat">
+      <a:schemeClr val="dk1"/>
+    </dgm:txFillClrLst>
+    <dgm:txEffectClrLst/>
+  </dgm:styleLbl>
+  <dgm:styleLbl name="fgAcc2">
+    <dgm:fillClrLst meth="repeat">
+      <a:schemeClr val="lt1">
+        <a:alpha val="90000"/>
+      </a:schemeClr>
+    </dgm:fillClrLst>
+    <dgm:linClrLst meth="repeat">
+      <a:schemeClr val="accent1"/>
+    </dgm:linClrLst>
+    <dgm:effectClrLst/>
+    <dgm:txLinClrLst/>
+    <dgm:txFillClrLst meth="repeat">
+      <a:schemeClr val="dk1"/>
+    </dgm:txFillClrLst>
+    <dgm:txEffectClrLst/>
+  </dgm:styleLbl>
+  <dgm:styleLbl name="fgAcc3">
+    <dgm:fillClrLst meth="repeat">
+      <a:schemeClr val="lt1">
+        <a:alpha val="90000"/>
+      </a:schemeClr>
+    </dgm:fillClrLst>
+    <dgm:linClrLst meth="repeat">
+      <a:schemeClr val="accent1"/>
+    </dgm:linClrLst>
+    <dgm:effectClrLst/>
+    <dgm:txLinClrLst/>
+    <dgm:txFillClrLst meth="repeat">
+      <a:schemeClr val="dk1"/>
+    </dgm:txFillClrLst>
+    <dgm:txEffectClrLst/>
+  </dgm:styleLbl>
+  <dgm:styleLbl name="fgAcc4">
+    <dgm:fillClrLst meth="repeat">
+      <a:schemeClr val="lt1">
+        <a:alpha val="90000"/>
+      </a:schemeClr>
+    </dgm:fillClrLst>
+    <dgm:linClrLst meth="repeat">
+      <a:schemeClr val="accent1"/>
+    </dgm:linClrLst>
+    <dgm:effectClrLst/>
+    <dgm:txLinClrLst/>
+    <dgm:txFillClrLst meth="repeat">
+      <a:schemeClr val="dk1"/>
+    </dgm:txFillClrLst>
+    <dgm:txEffectClrLst/>
+  </dgm:styleLbl>
+  <dgm:styleLbl name="bgShp">
+    <dgm:fillClrLst meth="repeat">
+      <a:schemeClr val="accent1">
+        <a:tint val="40000"/>
+      </a:schemeClr>
+    </dgm:fillClrLst>
+    <dgm:linClrLst meth="repeat">
+      <a:schemeClr val="accent1"/>
+    </dgm:linClrLst>
+    <dgm:effectClrLst/>
+    <dgm:txLinClrLst/>
+    <dgm:txFillClrLst meth="repeat">
+      <a:schemeClr val="dk1"/>
+    </dgm:txFillClrLst>
+    <dgm:txEffectClrLst/>
+  </dgm:styleLbl>
+  <dgm:styleLbl name="dkBgShp">
+    <dgm:fillClrLst meth="repeat">
+      <a:schemeClr val="accent1">
+        <a:shade val="80000"/>
+      </a:schemeClr>
+    </dgm:fillClrLst>
+    <dgm:linClrLst meth="repeat">
+      <a:schemeClr val="accent1"/>
+    </dgm:linClrLst>
+    <dgm:effectClrLst/>
+    <dgm:txLinClrLst/>
+    <dgm:txFillClrLst meth="repeat">
+      <a:schemeClr val="lt1"/>
+    </dgm:txFillClrLst>
+    <dgm:txEffectClrLst/>
+  </dgm:styleLbl>
+  <dgm:styleLbl name="trBgShp">
+    <dgm:fillClrLst meth="repeat">
+      <a:schemeClr val="accent1">
+        <a:tint val="50000"/>
+        <a:alpha val="40000"/>
+      </a:schemeClr>
+    </dgm:fillClrLst>
+    <dgm:linClrLst meth="repeat">
+      <a:schemeClr val="accent1"/>
+    </dgm:linClrLst>
+    <dgm:effectClrLst/>
+    <dgm:txLinClrLst/>
+    <dgm:txFillClrLst meth="repeat">
+      <a:schemeClr val="lt1"/>
+    </dgm:txFillClrLst>
+    <dgm:txEffectClrLst/>
+  </dgm:styleLbl>
+  <dgm:styleLbl name="fgShp">
+    <dgm:fillClrLst meth="repeat">
+      <a:schemeClr val="accent1">
+        <a:tint val="60000"/>
+      </a:schemeClr>
+    </dgm:fillClrLst>
+    <dgm:linClrLst meth="repeat">
+      <a:schemeClr val="lt1"/>
+    </dgm:linClrLst>
+    <dgm:effectClrLst/>
+    <dgm:txLinClrLst/>
+    <dgm:txFillClrLst meth="repeat">
+      <a:schemeClr val="dk1"/>
+    </dgm:txFillClrLst>
+    <dgm:txEffectClrLst/>
+  </dgm:styleLbl>
+  <dgm:styleLbl name="revTx">
+    <dgm:fillClrLst meth="repeat">
+      <a:schemeClr val="lt1">
+        <a:alpha val="0"/>
+      </a:schemeClr>
+    </dgm:fillClrLst>
+    <dgm:linClrLst meth="repeat">
+      <a:schemeClr val="dk1">
+        <a:alpha val="0"/>
+      </a:schemeClr>
+    </dgm:linClrLst>
+    <dgm:effectClrLst/>
+    <dgm:txLinClrLst/>
+    <dgm:txFillClrLst meth="repeat">
+      <a:schemeClr val="tx1"/>
+    </dgm:txFillClrLst>
+    <dgm:txEffectClrLst/>
+  </dgm:styleLbl>
+</dgm:colorsDef>
+</file>
+
+<file path=ppt/diagrams/colors2.xml><?xml version="1.0" encoding="utf-8"?>
 <dgm:colorsDef xmlns:dgm="http://schemas.openxmlformats.org/drawingml/2006/diagram" xmlns:a="http://schemas.openxmlformats.org/drawingml/2006/main" uniqueId="urn:microsoft.com/office/officeart/2005/8/colors/accent1_2">
   <dgm:title val=""/>
   <dgm:desc val=""/>
@@ -1861,6 +2609,1914 @@
   <dgm:extLst>
     <a:ext uri="http://schemas.microsoft.com/office/drawing/2008/diagram">
       <dsp:dataModelExt xmlns:dsp="http://schemas.microsoft.com/office/drawing/2008/diagram" relId="rId7" minVer="http://schemas.openxmlformats.org/drawingml/2006/diagram"/>
+    </a:ext>
+  </dgm:extLst>
+</dgm:dataModel>
+</file>
+
+<file path=ppt/diagrams/data2.xml><?xml version="1.0" encoding="utf-8"?>
+<dgm:dataModel xmlns:dgm="http://schemas.openxmlformats.org/drawingml/2006/diagram" xmlns:a="http://schemas.openxmlformats.org/drawingml/2006/main">
+  <dgm:ptLst>
+    <dgm:pt modelId="{F6D9FE41-73BC-40EF-BC24-17E24345C112}" type="doc">
+      <dgm:prSet loTypeId="urn:microsoft.com/office/officeart/2005/8/layout/orgChart1" loCatId="hierarchy" qsTypeId="urn:microsoft.com/office/officeart/2005/8/quickstyle/simple1" qsCatId="simple" csTypeId="urn:microsoft.com/office/officeart/2005/8/colors/accent1_2" csCatId="accent1" phldr="1"/>
+      <dgm:spPr/>
+      <dgm:t>
+        <a:bodyPr/>
+        <a:lstStyle/>
+        <a:p>
+          <a:endParaRPr lang="zh-TW" altLang="en-US"/>
+        </a:p>
+      </dgm:t>
+    </dgm:pt>
+    <dgm:pt modelId="{C0379C3D-44CF-4B46-B585-05D4CA04D08F}">
+      <dgm:prSet phldrT="[文字]"/>
+      <dgm:spPr>
+        <a:noFill/>
+        <a:ln>
+          <a:solidFill>
+            <a:schemeClr val="tx1"/>
+          </a:solidFill>
+        </a:ln>
+      </dgm:spPr>
+      <dgm:t>
+        <a:bodyPr/>
+        <a:lstStyle/>
+        <a:p>
+          <a:r>
+            <a:rPr lang="zh-TW" altLang="en-US" dirty="0" smtClean="0">
+              <a:solidFill>
+                <a:schemeClr val="tx1"/>
+              </a:solidFill>
+              <a:latin typeface="Times New Roman" panose="02020603050405020304" pitchFamily="18" charset="0"/>
+              <a:ea typeface="標楷體" panose="03000509000000000000" pitchFamily="65" charset="-120"/>
+              <a:cs typeface="Times New Roman" panose="02020603050405020304" pitchFamily="18" charset="0"/>
+            </a:rPr>
+            <a:t>預測模型</a:t>
+          </a:r>
+          <a:endParaRPr lang="zh-TW" altLang="en-US" dirty="0">
+            <a:solidFill>
+              <a:schemeClr val="tx1"/>
+            </a:solidFill>
+            <a:latin typeface="Times New Roman" panose="02020603050405020304" pitchFamily="18" charset="0"/>
+            <a:ea typeface="標楷體" panose="03000509000000000000" pitchFamily="65" charset="-120"/>
+            <a:cs typeface="Times New Roman" panose="02020603050405020304" pitchFamily="18" charset="0"/>
+          </a:endParaRPr>
+        </a:p>
+      </dgm:t>
+    </dgm:pt>
+    <dgm:pt modelId="{10912338-BE3D-4008-A98C-20FF266BA640}" type="parTrans" cxnId="{12269922-752E-4FFE-ADBE-32E860FDD1EC}">
+      <dgm:prSet/>
+      <dgm:spPr/>
+      <dgm:t>
+        <a:bodyPr/>
+        <a:lstStyle/>
+        <a:p>
+          <a:endParaRPr lang="zh-TW" altLang="en-US">
+            <a:solidFill>
+              <a:schemeClr val="tx1"/>
+            </a:solidFill>
+          </a:endParaRPr>
+        </a:p>
+      </dgm:t>
+    </dgm:pt>
+    <dgm:pt modelId="{B47AC820-1576-44FE-B75A-462F9A3E1A9E}" type="sibTrans" cxnId="{12269922-752E-4FFE-ADBE-32E860FDD1EC}">
+      <dgm:prSet/>
+      <dgm:spPr/>
+      <dgm:t>
+        <a:bodyPr/>
+        <a:lstStyle/>
+        <a:p>
+          <a:endParaRPr lang="zh-TW" altLang="en-US">
+            <a:solidFill>
+              <a:schemeClr val="tx1"/>
+            </a:solidFill>
+          </a:endParaRPr>
+        </a:p>
+      </dgm:t>
+    </dgm:pt>
+    <dgm:pt modelId="{E5CCB25E-C655-4324-8217-14EF320224DF}">
+      <dgm:prSet phldrT="[文字]"/>
+      <dgm:spPr>
+        <a:noFill/>
+        <a:ln>
+          <a:solidFill>
+            <a:schemeClr val="tx1"/>
+          </a:solidFill>
+        </a:ln>
+      </dgm:spPr>
+      <dgm:t>
+        <a:bodyPr/>
+        <a:lstStyle/>
+        <a:p>
+          <a:r>
+            <a:rPr lang="zh-TW" altLang="en-US" dirty="0" smtClean="0">
+              <a:solidFill>
+                <a:schemeClr val="tx1"/>
+              </a:solidFill>
+              <a:latin typeface="Times New Roman" panose="02020603050405020304" pitchFamily="18" charset="0"/>
+              <a:ea typeface="標楷體" panose="03000509000000000000" pitchFamily="65" charset="-120"/>
+              <a:cs typeface="Times New Roman" panose="02020603050405020304" pitchFamily="18" charset="0"/>
+            </a:rPr>
+            <a:t>傳統統計</a:t>
+          </a:r>
+          <a:endParaRPr lang="en-US" altLang="zh-TW" dirty="0" smtClean="0">
+            <a:solidFill>
+              <a:schemeClr val="tx1"/>
+            </a:solidFill>
+            <a:latin typeface="Times New Roman" panose="02020603050405020304" pitchFamily="18" charset="0"/>
+            <a:ea typeface="標楷體" panose="03000509000000000000" pitchFamily="65" charset="-120"/>
+            <a:cs typeface="Times New Roman" panose="02020603050405020304" pitchFamily="18" charset="0"/>
+          </a:endParaRPr>
+        </a:p>
+      </dgm:t>
+    </dgm:pt>
+    <dgm:pt modelId="{C6313A3D-C187-4442-A89E-4A7FE10EBD0B}" type="parTrans" cxnId="{37C086BA-50A8-48A6-BC88-F57613CE337F}">
+      <dgm:prSet/>
+      <dgm:spPr>
+        <a:noFill/>
+        <a:ln>
+          <a:solidFill>
+            <a:schemeClr val="tx1"/>
+          </a:solidFill>
+        </a:ln>
+      </dgm:spPr>
+      <dgm:t>
+        <a:bodyPr/>
+        <a:lstStyle/>
+        <a:p>
+          <a:endParaRPr lang="zh-TW" altLang="en-US">
+            <a:solidFill>
+              <a:schemeClr val="tx1"/>
+            </a:solidFill>
+            <a:latin typeface="Times New Roman" panose="02020603050405020304" pitchFamily="18" charset="0"/>
+            <a:ea typeface="標楷體" panose="03000509000000000000" pitchFamily="65" charset="-120"/>
+            <a:cs typeface="Times New Roman" panose="02020603050405020304" pitchFamily="18" charset="0"/>
+          </a:endParaRPr>
+        </a:p>
+      </dgm:t>
+    </dgm:pt>
+    <dgm:pt modelId="{F2E2BC6B-9378-45F0-9818-1DB3A2541053}" type="sibTrans" cxnId="{37C086BA-50A8-48A6-BC88-F57613CE337F}">
+      <dgm:prSet/>
+      <dgm:spPr/>
+      <dgm:t>
+        <a:bodyPr/>
+        <a:lstStyle/>
+        <a:p>
+          <a:endParaRPr lang="zh-TW" altLang="en-US">
+            <a:solidFill>
+              <a:schemeClr val="tx1"/>
+            </a:solidFill>
+          </a:endParaRPr>
+        </a:p>
+      </dgm:t>
+    </dgm:pt>
+    <dgm:pt modelId="{6C87DEF1-267E-484B-BC33-85913E3EC10F}">
+      <dgm:prSet phldrT="[文字]"/>
+      <dgm:spPr>
+        <a:noFill/>
+        <a:ln>
+          <a:solidFill>
+            <a:schemeClr val="tx1"/>
+          </a:solidFill>
+        </a:ln>
+      </dgm:spPr>
+      <dgm:t>
+        <a:bodyPr/>
+        <a:lstStyle/>
+        <a:p>
+          <a:r>
+            <a:rPr lang="zh-TW" altLang="en-US" dirty="0" smtClean="0">
+              <a:solidFill>
+                <a:schemeClr val="tx1"/>
+              </a:solidFill>
+              <a:latin typeface="Times New Roman" panose="02020603050405020304" pitchFamily="18" charset="0"/>
+              <a:ea typeface="標楷體" panose="03000509000000000000" pitchFamily="65" charset="-120"/>
+              <a:cs typeface="Times New Roman" panose="02020603050405020304" pitchFamily="18" charset="0"/>
+            </a:rPr>
+            <a:t>機器學習</a:t>
+          </a:r>
+          <a:endParaRPr lang="zh-TW" altLang="en-US" dirty="0">
+            <a:solidFill>
+              <a:schemeClr val="tx1"/>
+            </a:solidFill>
+            <a:latin typeface="Times New Roman" panose="02020603050405020304" pitchFamily="18" charset="0"/>
+            <a:ea typeface="標楷體" panose="03000509000000000000" pitchFamily="65" charset="-120"/>
+            <a:cs typeface="Times New Roman" panose="02020603050405020304" pitchFamily="18" charset="0"/>
+          </a:endParaRPr>
+        </a:p>
+      </dgm:t>
+    </dgm:pt>
+    <dgm:pt modelId="{F85D92B1-E28E-466A-B1AF-ADDB99C02FC6}" type="parTrans" cxnId="{7EDFCF15-729B-4032-9B17-7ABB32677736}">
+      <dgm:prSet/>
+      <dgm:spPr>
+        <a:noFill/>
+        <a:ln>
+          <a:solidFill>
+            <a:schemeClr val="tx1"/>
+          </a:solidFill>
+        </a:ln>
+      </dgm:spPr>
+      <dgm:t>
+        <a:bodyPr/>
+        <a:lstStyle/>
+        <a:p>
+          <a:endParaRPr lang="zh-TW" altLang="en-US">
+            <a:solidFill>
+              <a:schemeClr val="tx1"/>
+            </a:solidFill>
+            <a:latin typeface="Times New Roman" panose="02020603050405020304" pitchFamily="18" charset="0"/>
+            <a:ea typeface="標楷體" panose="03000509000000000000" pitchFamily="65" charset="-120"/>
+            <a:cs typeface="Times New Roman" panose="02020603050405020304" pitchFamily="18" charset="0"/>
+          </a:endParaRPr>
+        </a:p>
+      </dgm:t>
+    </dgm:pt>
+    <dgm:pt modelId="{DE255746-BC0D-4C76-8C21-7DB9F286F9DD}" type="sibTrans" cxnId="{7EDFCF15-729B-4032-9B17-7ABB32677736}">
+      <dgm:prSet/>
+      <dgm:spPr/>
+      <dgm:t>
+        <a:bodyPr/>
+        <a:lstStyle/>
+        <a:p>
+          <a:endParaRPr lang="zh-TW" altLang="en-US">
+            <a:solidFill>
+              <a:schemeClr val="tx1"/>
+            </a:solidFill>
+          </a:endParaRPr>
+        </a:p>
+      </dgm:t>
+    </dgm:pt>
+    <dgm:pt modelId="{F6631F0D-4003-4FCC-A63D-7640B86D3CF7}">
+      <dgm:prSet phldrT="[文字]"/>
+      <dgm:spPr>
+        <a:noFill/>
+        <a:ln>
+          <a:solidFill>
+            <a:schemeClr val="tx1"/>
+          </a:solidFill>
+        </a:ln>
+      </dgm:spPr>
+      <dgm:t>
+        <a:bodyPr/>
+        <a:lstStyle/>
+        <a:p>
+          <a:r>
+            <a:rPr lang="en-US" altLang="zh-TW" dirty="0" smtClean="0">
+              <a:solidFill>
+                <a:schemeClr val="tx1"/>
+              </a:solidFill>
+              <a:latin typeface="Times New Roman" panose="02020603050405020304" pitchFamily="18" charset="0"/>
+              <a:ea typeface="標楷體" panose="03000509000000000000" pitchFamily="65" charset="-120"/>
+              <a:cs typeface="Times New Roman" panose="02020603050405020304" pitchFamily="18" charset="0"/>
+            </a:rPr>
+            <a:t>LR</a:t>
+          </a:r>
+        </a:p>
+      </dgm:t>
+    </dgm:pt>
+    <dgm:pt modelId="{8D222D37-B8A0-43AD-9933-E6199901A620}" type="parTrans" cxnId="{7CF64986-F992-4523-93C3-5C373F05369E}">
+      <dgm:prSet/>
+      <dgm:spPr>
+        <a:noFill/>
+        <a:ln>
+          <a:solidFill>
+            <a:schemeClr val="tx1"/>
+          </a:solidFill>
+        </a:ln>
+      </dgm:spPr>
+      <dgm:t>
+        <a:bodyPr/>
+        <a:lstStyle/>
+        <a:p>
+          <a:endParaRPr lang="zh-TW" altLang="en-US">
+            <a:solidFill>
+              <a:schemeClr val="tx1"/>
+            </a:solidFill>
+            <a:latin typeface="Times New Roman" panose="02020603050405020304" pitchFamily="18" charset="0"/>
+            <a:ea typeface="標楷體" panose="03000509000000000000" pitchFamily="65" charset="-120"/>
+            <a:cs typeface="Times New Roman" panose="02020603050405020304" pitchFamily="18" charset="0"/>
+          </a:endParaRPr>
+        </a:p>
+      </dgm:t>
+    </dgm:pt>
+    <dgm:pt modelId="{3614496C-0600-46E1-9F6D-6FA1F7F4EDF8}" type="sibTrans" cxnId="{7CF64986-F992-4523-93C3-5C373F05369E}">
+      <dgm:prSet/>
+      <dgm:spPr/>
+      <dgm:t>
+        <a:bodyPr/>
+        <a:lstStyle/>
+        <a:p>
+          <a:endParaRPr lang="zh-TW" altLang="en-US">
+            <a:solidFill>
+              <a:schemeClr val="tx1"/>
+            </a:solidFill>
+          </a:endParaRPr>
+        </a:p>
+      </dgm:t>
+    </dgm:pt>
+    <dgm:pt modelId="{ACA71FF6-43D1-4D9C-8997-F22E3A014CCA}">
+      <dgm:prSet phldrT="[文字]"/>
+      <dgm:spPr>
+        <a:noFill/>
+        <a:ln>
+          <a:solidFill>
+            <a:schemeClr val="tx1"/>
+          </a:solidFill>
+        </a:ln>
+      </dgm:spPr>
+      <dgm:t>
+        <a:bodyPr/>
+        <a:lstStyle/>
+        <a:p>
+          <a:r>
+            <a:rPr lang="en-US" altLang="zh-TW" dirty="0" smtClean="0">
+              <a:solidFill>
+                <a:schemeClr val="tx1"/>
+              </a:solidFill>
+              <a:latin typeface="Times New Roman" panose="02020603050405020304" pitchFamily="18" charset="0"/>
+              <a:ea typeface="標楷體" panose="03000509000000000000" pitchFamily="65" charset="-120"/>
+              <a:cs typeface="Times New Roman" panose="02020603050405020304" pitchFamily="18" charset="0"/>
+            </a:rPr>
+            <a:t>NB</a:t>
+          </a:r>
+        </a:p>
+      </dgm:t>
+    </dgm:pt>
+    <dgm:pt modelId="{9F725B02-6E85-4887-8D8B-9306B1D3AB18}" type="parTrans" cxnId="{586F05A7-8C5A-4A3F-8306-5868E0C9DBC3}">
+      <dgm:prSet/>
+      <dgm:spPr>
+        <a:noFill/>
+        <a:ln>
+          <a:solidFill>
+            <a:schemeClr val="tx1"/>
+          </a:solidFill>
+        </a:ln>
+      </dgm:spPr>
+      <dgm:t>
+        <a:bodyPr/>
+        <a:lstStyle/>
+        <a:p>
+          <a:endParaRPr lang="zh-TW" altLang="en-US">
+            <a:solidFill>
+              <a:schemeClr val="tx1"/>
+            </a:solidFill>
+            <a:latin typeface="Times New Roman" panose="02020603050405020304" pitchFamily="18" charset="0"/>
+            <a:ea typeface="標楷體" panose="03000509000000000000" pitchFamily="65" charset="-120"/>
+            <a:cs typeface="Times New Roman" panose="02020603050405020304" pitchFamily="18" charset="0"/>
+          </a:endParaRPr>
+        </a:p>
+      </dgm:t>
+    </dgm:pt>
+    <dgm:pt modelId="{C39592C2-B966-4C4F-B193-F1D61E4F2F4C}" type="sibTrans" cxnId="{586F05A7-8C5A-4A3F-8306-5868E0C9DBC3}">
+      <dgm:prSet/>
+      <dgm:spPr/>
+      <dgm:t>
+        <a:bodyPr/>
+        <a:lstStyle/>
+        <a:p>
+          <a:endParaRPr lang="zh-TW" altLang="en-US">
+            <a:solidFill>
+              <a:schemeClr val="tx1"/>
+            </a:solidFill>
+          </a:endParaRPr>
+        </a:p>
+      </dgm:t>
+    </dgm:pt>
+    <dgm:pt modelId="{DBA5AD7A-C2C2-47CC-9C41-F03684C8A584}">
+      <dgm:prSet phldrT="[文字]"/>
+      <dgm:spPr>
+        <a:noFill/>
+        <a:ln>
+          <a:solidFill>
+            <a:schemeClr val="tx1"/>
+          </a:solidFill>
+        </a:ln>
+      </dgm:spPr>
+      <dgm:t>
+        <a:bodyPr/>
+        <a:lstStyle/>
+        <a:p>
+          <a:r>
+            <a:rPr lang="en-US" altLang="zh-TW" dirty="0" smtClean="0">
+              <a:solidFill>
+                <a:schemeClr val="tx1"/>
+              </a:solidFill>
+              <a:latin typeface="Times New Roman" panose="02020603050405020304" pitchFamily="18" charset="0"/>
+              <a:ea typeface="標楷體" panose="03000509000000000000" pitchFamily="65" charset="-120"/>
+              <a:cs typeface="Times New Roman" panose="02020603050405020304" pitchFamily="18" charset="0"/>
+            </a:rPr>
+            <a:t>LDA</a:t>
+          </a:r>
+        </a:p>
+      </dgm:t>
+    </dgm:pt>
+    <dgm:pt modelId="{DC6511A6-2DC1-4CCB-86DB-BEFDAB64DDE4}" type="parTrans" cxnId="{8DB37ED5-3602-4C34-885E-F678559BCBC9}">
+      <dgm:prSet/>
+      <dgm:spPr>
+        <a:noFill/>
+        <a:ln>
+          <a:solidFill>
+            <a:schemeClr val="tx1"/>
+          </a:solidFill>
+        </a:ln>
+      </dgm:spPr>
+      <dgm:t>
+        <a:bodyPr/>
+        <a:lstStyle/>
+        <a:p>
+          <a:endParaRPr lang="zh-TW" altLang="en-US">
+            <a:solidFill>
+              <a:schemeClr val="tx1"/>
+            </a:solidFill>
+            <a:latin typeface="Times New Roman" panose="02020603050405020304" pitchFamily="18" charset="0"/>
+            <a:ea typeface="標楷體" panose="03000509000000000000" pitchFamily="65" charset="-120"/>
+            <a:cs typeface="Times New Roman" panose="02020603050405020304" pitchFamily="18" charset="0"/>
+          </a:endParaRPr>
+        </a:p>
+      </dgm:t>
+    </dgm:pt>
+    <dgm:pt modelId="{8B91D15F-64A3-4AD7-8589-73646BCC8EA1}" type="sibTrans" cxnId="{8DB37ED5-3602-4C34-885E-F678559BCBC9}">
+      <dgm:prSet/>
+      <dgm:spPr/>
+      <dgm:t>
+        <a:bodyPr/>
+        <a:lstStyle/>
+        <a:p>
+          <a:endParaRPr lang="zh-TW" altLang="en-US">
+            <a:solidFill>
+              <a:schemeClr val="tx1"/>
+            </a:solidFill>
+          </a:endParaRPr>
+        </a:p>
+      </dgm:t>
+    </dgm:pt>
+    <dgm:pt modelId="{847724BD-9062-4C15-867D-9A40745D5942}">
+      <dgm:prSet phldrT="[文字]"/>
+      <dgm:spPr>
+        <a:noFill/>
+        <a:ln>
+          <a:solidFill>
+            <a:schemeClr val="tx1"/>
+          </a:solidFill>
+        </a:ln>
+      </dgm:spPr>
+      <dgm:t>
+        <a:bodyPr/>
+        <a:lstStyle/>
+        <a:p>
+          <a:r>
+            <a:rPr lang="en-US" altLang="zh-TW" dirty="0" smtClean="0">
+              <a:solidFill>
+                <a:schemeClr val="tx1"/>
+              </a:solidFill>
+              <a:latin typeface="Times New Roman" panose="02020603050405020304" pitchFamily="18" charset="0"/>
+              <a:ea typeface="標楷體" panose="03000509000000000000" pitchFamily="65" charset="-120"/>
+              <a:cs typeface="Times New Roman" panose="02020603050405020304" pitchFamily="18" charset="0"/>
+            </a:rPr>
+            <a:t>KNN</a:t>
+          </a:r>
+          <a:endParaRPr lang="zh-TW" altLang="en-US" dirty="0">
+            <a:solidFill>
+              <a:schemeClr val="tx1"/>
+            </a:solidFill>
+            <a:latin typeface="Times New Roman" panose="02020603050405020304" pitchFamily="18" charset="0"/>
+            <a:ea typeface="標楷體" panose="03000509000000000000" pitchFamily="65" charset="-120"/>
+            <a:cs typeface="Times New Roman" panose="02020603050405020304" pitchFamily="18" charset="0"/>
+          </a:endParaRPr>
+        </a:p>
+      </dgm:t>
+    </dgm:pt>
+    <dgm:pt modelId="{D21D1992-ADB0-4EF0-93AB-1E9F75434F52}" type="parTrans" cxnId="{A27B3C5F-DB75-41A4-8EBB-84770534D6B1}">
+      <dgm:prSet/>
+      <dgm:spPr>
+        <a:noFill/>
+        <a:ln>
+          <a:solidFill>
+            <a:schemeClr val="tx1"/>
+          </a:solidFill>
+        </a:ln>
+      </dgm:spPr>
+      <dgm:t>
+        <a:bodyPr/>
+        <a:lstStyle/>
+        <a:p>
+          <a:endParaRPr lang="zh-TW" altLang="en-US">
+            <a:solidFill>
+              <a:schemeClr val="tx1"/>
+            </a:solidFill>
+            <a:latin typeface="Times New Roman" panose="02020603050405020304" pitchFamily="18" charset="0"/>
+            <a:ea typeface="標楷體" panose="03000509000000000000" pitchFamily="65" charset="-120"/>
+            <a:cs typeface="Times New Roman" panose="02020603050405020304" pitchFamily="18" charset="0"/>
+          </a:endParaRPr>
+        </a:p>
+      </dgm:t>
+    </dgm:pt>
+    <dgm:pt modelId="{B070D5F0-61D4-4887-B12C-43BBA3301FE4}" type="sibTrans" cxnId="{A27B3C5F-DB75-41A4-8EBB-84770534D6B1}">
+      <dgm:prSet/>
+      <dgm:spPr/>
+      <dgm:t>
+        <a:bodyPr/>
+        <a:lstStyle/>
+        <a:p>
+          <a:endParaRPr lang="zh-TW" altLang="en-US">
+            <a:solidFill>
+              <a:schemeClr val="tx1"/>
+            </a:solidFill>
+          </a:endParaRPr>
+        </a:p>
+      </dgm:t>
+    </dgm:pt>
+    <dgm:pt modelId="{422C33F5-672E-4B0C-B552-ED3DD9F2941B}">
+      <dgm:prSet phldrT="[文字]"/>
+      <dgm:spPr>
+        <a:noFill/>
+        <a:ln>
+          <a:solidFill>
+            <a:schemeClr val="tx1"/>
+          </a:solidFill>
+        </a:ln>
+      </dgm:spPr>
+      <dgm:t>
+        <a:bodyPr/>
+        <a:lstStyle/>
+        <a:p>
+          <a:r>
+            <a:rPr lang="en-US" altLang="zh-TW" dirty="0" smtClean="0">
+              <a:solidFill>
+                <a:schemeClr val="tx1"/>
+              </a:solidFill>
+              <a:latin typeface="Times New Roman" panose="02020603050405020304" pitchFamily="18" charset="0"/>
+              <a:ea typeface="標楷體" panose="03000509000000000000" pitchFamily="65" charset="-120"/>
+              <a:cs typeface="Times New Roman" panose="02020603050405020304" pitchFamily="18" charset="0"/>
+            </a:rPr>
+            <a:t>DT</a:t>
+          </a:r>
+          <a:endParaRPr lang="zh-TW" altLang="en-US" dirty="0">
+            <a:solidFill>
+              <a:schemeClr val="tx1"/>
+            </a:solidFill>
+            <a:latin typeface="Times New Roman" panose="02020603050405020304" pitchFamily="18" charset="0"/>
+            <a:ea typeface="標楷體" panose="03000509000000000000" pitchFamily="65" charset="-120"/>
+            <a:cs typeface="Times New Roman" panose="02020603050405020304" pitchFamily="18" charset="0"/>
+          </a:endParaRPr>
+        </a:p>
+      </dgm:t>
+    </dgm:pt>
+    <dgm:pt modelId="{A9C07280-0A72-472E-BE76-F36D22C350B5}" type="parTrans" cxnId="{4F6B3212-C6D6-4F95-A1D1-266E5480D278}">
+      <dgm:prSet/>
+      <dgm:spPr>
+        <a:noFill/>
+        <a:ln>
+          <a:solidFill>
+            <a:schemeClr val="tx1"/>
+          </a:solidFill>
+        </a:ln>
+      </dgm:spPr>
+      <dgm:t>
+        <a:bodyPr/>
+        <a:lstStyle/>
+        <a:p>
+          <a:endParaRPr lang="zh-TW" altLang="en-US">
+            <a:solidFill>
+              <a:schemeClr val="tx1"/>
+            </a:solidFill>
+            <a:latin typeface="Times New Roman" panose="02020603050405020304" pitchFamily="18" charset="0"/>
+            <a:ea typeface="標楷體" panose="03000509000000000000" pitchFamily="65" charset="-120"/>
+            <a:cs typeface="Times New Roman" panose="02020603050405020304" pitchFamily="18" charset="0"/>
+          </a:endParaRPr>
+        </a:p>
+      </dgm:t>
+    </dgm:pt>
+    <dgm:pt modelId="{A03C0CAF-CC62-4B51-9DF9-C3283A2C0FD4}" type="sibTrans" cxnId="{4F6B3212-C6D6-4F95-A1D1-266E5480D278}">
+      <dgm:prSet/>
+      <dgm:spPr/>
+      <dgm:t>
+        <a:bodyPr/>
+        <a:lstStyle/>
+        <a:p>
+          <a:endParaRPr lang="zh-TW" altLang="en-US">
+            <a:solidFill>
+              <a:schemeClr val="tx1"/>
+            </a:solidFill>
+          </a:endParaRPr>
+        </a:p>
+      </dgm:t>
+    </dgm:pt>
+    <dgm:pt modelId="{65C778D0-7669-4D4B-B4D6-4CD1381A0BF3}">
+      <dgm:prSet phldrT="[文字]"/>
+      <dgm:spPr>
+        <a:noFill/>
+        <a:ln>
+          <a:solidFill>
+            <a:schemeClr val="tx1"/>
+          </a:solidFill>
+        </a:ln>
+      </dgm:spPr>
+      <dgm:t>
+        <a:bodyPr/>
+        <a:lstStyle/>
+        <a:p>
+          <a:r>
+            <a:rPr lang="zh-TW" altLang="en-US" dirty="0" smtClean="0">
+              <a:solidFill>
+                <a:schemeClr val="tx1"/>
+              </a:solidFill>
+              <a:latin typeface="Times New Roman" panose="02020603050405020304" pitchFamily="18" charset="0"/>
+              <a:ea typeface="標楷體" panose="03000509000000000000" pitchFamily="65" charset="-120"/>
+              <a:cs typeface="Times New Roman" panose="02020603050405020304" pitchFamily="18" charset="0"/>
+            </a:rPr>
+            <a:t>符號回歸</a:t>
+          </a:r>
+          <a:endParaRPr lang="zh-TW" altLang="en-US" dirty="0">
+            <a:solidFill>
+              <a:schemeClr val="tx1"/>
+            </a:solidFill>
+            <a:latin typeface="Times New Roman" panose="02020603050405020304" pitchFamily="18" charset="0"/>
+            <a:ea typeface="標楷體" panose="03000509000000000000" pitchFamily="65" charset="-120"/>
+            <a:cs typeface="Times New Roman" panose="02020603050405020304" pitchFamily="18" charset="0"/>
+          </a:endParaRPr>
+        </a:p>
+      </dgm:t>
+    </dgm:pt>
+    <dgm:pt modelId="{BECAC3D4-83DB-447E-8C69-B505D93CDF0D}" type="sibTrans" cxnId="{CE1CDD17-E178-411D-94F9-139C7C4277D5}">
+      <dgm:prSet/>
+      <dgm:spPr/>
+      <dgm:t>
+        <a:bodyPr/>
+        <a:lstStyle/>
+        <a:p>
+          <a:endParaRPr lang="zh-TW" altLang="en-US">
+            <a:solidFill>
+              <a:schemeClr val="tx1"/>
+            </a:solidFill>
+          </a:endParaRPr>
+        </a:p>
+      </dgm:t>
+    </dgm:pt>
+    <dgm:pt modelId="{7ADADAE6-FA49-433C-B86B-563F2A7A34E3}" type="parTrans" cxnId="{CE1CDD17-E178-411D-94F9-139C7C4277D5}">
+      <dgm:prSet/>
+      <dgm:spPr>
+        <a:noFill/>
+        <a:ln>
+          <a:solidFill>
+            <a:schemeClr val="tx1"/>
+          </a:solidFill>
+        </a:ln>
+      </dgm:spPr>
+      <dgm:t>
+        <a:bodyPr/>
+        <a:lstStyle/>
+        <a:p>
+          <a:endParaRPr lang="zh-TW" altLang="en-US">
+            <a:solidFill>
+              <a:schemeClr val="tx1"/>
+            </a:solidFill>
+            <a:latin typeface="Times New Roman" panose="02020603050405020304" pitchFamily="18" charset="0"/>
+            <a:ea typeface="標楷體" panose="03000509000000000000" pitchFamily="65" charset="-120"/>
+            <a:cs typeface="Times New Roman" panose="02020603050405020304" pitchFamily="18" charset="0"/>
+          </a:endParaRPr>
+        </a:p>
+      </dgm:t>
+    </dgm:pt>
+    <dgm:pt modelId="{1256CB85-BA23-4513-9CCD-B3AE1CAF87CC}">
+      <dgm:prSet phldrT="[文字]"/>
+      <dgm:spPr>
+        <a:noFill/>
+        <a:ln>
+          <a:solidFill>
+            <a:schemeClr val="tx1"/>
+          </a:solidFill>
+        </a:ln>
+      </dgm:spPr>
+      <dgm:t>
+        <a:bodyPr/>
+        <a:lstStyle/>
+        <a:p>
+          <a:r>
+            <a:rPr lang="en-US" altLang="zh-TW" dirty="0" err="1" smtClean="0">
+              <a:solidFill>
+                <a:schemeClr val="tx1"/>
+              </a:solidFill>
+              <a:latin typeface="Times New Roman" panose="02020603050405020304" pitchFamily="18" charset="0"/>
+              <a:ea typeface="標楷體" panose="03000509000000000000" pitchFamily="65" charset="-120"/>
+              <a:cs typeface="Times New Roman" panose="02020603050405020304" pitchFamily="18" charset="0"/>
+            </a:rPr>
+            <a:t>PySR</a:t>
+          </a:r>
+          <a:endParaRPr lang="zh-TW" altLang="en-US" dirty="0">
+            <a:solidFill>
+              <a:schemeClr val="tx1"/>
+            </a:solidFill>
+            <a:latin typeface="Times New Roman" panose="02020603050405020304" pitchFamily="18" charset="0"/>
+            <a:ea typeface="標楷體" panose="03000509000000000000" pitchFamily="65" charset="-120"/>
+            <a:cs typeface="Times New Roman" panose="02020603050405020304" pitchFamily="18" charset="0"/>
+          </a:endParaRPr>
+        </a:p>
+      </dgm:t>
+    </dgm:pt>
+    <dgm:pt modelId="{F5F23906-48D7-4EF9-A256-60463F51DB60}" type="parTrans" cxnId="{59C40AFD-10D9-4E4B-BECD-6F06668E797D}">
+      <dgm:prSet/>
+      <dgm:spPr>
+        <a:noFill/>
+        <a:ln>
+          <a:solidFill>
+            <a:schemeClr val="tx1"/>
+          </a:solidFill>
+        </a:ln>
+      </dgm:spPr>
+      <dgm:t>
+        <a:bodyPr/>
+        <a:lstStyle/>
+        <a:p>
+          <a:endParaRPr lang="zh-TW" altLang="en-US">
+            <a:solidFill>
+              <a:schemeClr val="tx1"/>
+            </a:solidFill>
+            <a:latin typeface="Times New Roman" panose="02020603050405020304" pitchFamily="18" charset="0"/>
+            <a:ea typeface="標楷體" panose="03000509000000000000" pitchFamily="65" charset="-120"/>
+            <a:cs typeface="Times New Roman" panose="02020603050405020304" pitchFamily="18" charset="0"/>
+          </a:endParaRPr>
+        </a:p>
+      </dgm:t>
+    </dgm:pt>
+    <dgm:pt modelId="{ADBE4A46-BE9F-481C-B56C-B6B8EDD11E1E}" type="sibTrans" cxnId="{59C40AFD-10D9-4E4B-BECD-6F06668E797D}">
+      <dgm:prSet/>
+      <dgm:spPr/>
+      <dgm:t>
+        <a:bodyPr/>
+        <a:lstStyle/>
+        <a:p>
+          <a:endParaRPr lang="zh-TW" altLang="en-US">
+            <a:solidFill>
+              <a:schemeClr val="tx1"/>
+            </a:solidFill>
+          </a:endParaRPr>
+        </a:p>
+      </dgm:t>
+    </dgm:pt>
+    <dgm:pt modelId="{1140E081-3CE3-4E40-84D1-D5CCA58BE7C7}">
+      <dgm:prSet phldrT="[文字]"/>
+      <dgm:spPr>
+        <a:noFill/>
+        <a:ln>
+          <a:solidFill>
+            <a:schemeClr val="tx1"/>
+          </a:solidFill>
+        </a:ln>
+      </dgm:spPr>
+      <dgm:t>
+        <a:bodyPr/>
+        <a:lstStyle/>
+        <a:p>
+          <a:r>
+            <a:rPr lang="en-US" altLang="zh-TW" dirty="0" smtClean="0">
+              <a:solidFill>
+                <a:schemeClr val="tx1"/>
+              </a:solidFill>
+              <a:latin typeface="Times New Roman" panose="02020603050405020304" pitchFamily="18" charset="0"/>
+              <a:ea typeface="標楷體" panose="03000509000000000000" pitchFamily="65" charset="-120"/>
+              <a:cs typeface="Times New Roman" panose="02020603050405020304" pitchFamily="18" charset="0"/>
+            </a:rPr>
+            <a:t>RF</a:t>
+          </a:r>
+          <a:endParaRPr lang="zh-TW" altLang="en-US" dirty="0">
+            <a:solidFill>
+              <a:schemeClr val="tx1"/>
+            </a:solidFill>
+            <a:latin typeface="Times New Roman" panose="02020603050405020304" pitchFamily="18" charset="0"/>
+            <a:ea typeface="標楷體" panose="03000509000000000000" pitchFamily="65" charset="-120"/>
+            <a:cs typeface="Times New Roman" panose="02020603050405020304" pitchFamily="18" charset="0"/>
+          </a:endParaRPr>
+        </a:p>
+      </dgm:t>
+    </dgm:pt>
+    <dgm:pt modelId="{97DF12F3-EBEE-4710-B22F-47A71C2D3BA0}" type="parTrans" cxnId="{7C069E50-9694-4531-B7A2-74D41359417F}">
+      <dgm:prSet/>
+      <dgm:spPr>
+        <a:noFill/>
+        <a:ln>
+          <a:solidFill>
+            <a:schemeClr val="tx1"/>
+          </a:solidFill>
+        </a:ln>
+      </dgm:spPr>
+      <dgm:t>
+        <a:bodyPr/>
+        <a:lstStyle/>
+        <a:p>
+          <a:endParaRPr lang="zh-TW" altLang="en-US">
+            <a:solidFill>
+              <a:schemeClr val="tx1"/>
+            </a:solidFill>
+            <a:latin typeface="Times New Roman" panose="02020603050405020304" pitchFamily="18" charset="0"/>
+            <a:ea typeface="標楷體" panose="03000509000000000000" pitchFamily="65" charset="-120"/>
+            <a:cs typeface="Times New Roman" panose="02020603050405020304" pitchFamily="18" charset="0"/>
+          </a:endParaRPr>
+        </a:p>
+      </dgm:t>
+    </dgm:pt>
+    <dgm:pt modelId="{C5F6C251-A1A6-4005-9D84-BF0C1D14B06A}" type="sibTrans" cxnId="{7C069E50-9694-4531-B7A2-74D41359417F}">
+      <dgm:prSet/>
+      <dgm:spPr/>
+      <dgm:t>
+        <a:bodyPr/>
+        <a:lstStyle/>
+        <a:p>
+          <a:endParaRPr lang="zh-TW" altLang="en-US">
+            <a:solidFill>
+              <a:schemeClr val="tx1"/>
+            </a:solidFill>
+          </a:endParaRPr>
+        </a:p>
+      </dgm:t>
+    </dgm:pt>
+    <dgm:pt modelId="{6B759DC2-3439-4108-98CB-B36DA3EC8CED}">
+      <dgm:prSet phldrT="[文字]"/>
+      <dgm:spPr>
+        <a:noFill/>
+        <a:ln>
+          <a:solidFill>
+            <a:schemeClr val="tx1"/>
+          </a:solidFill>
+        </a:ln>
+      </dgm:spPr>
+      <dgm:t>
+        <a:bodyPr/>
+        <a:lstStyle/>
+        <a:p>
+          <a:r>
+            <a:rPr lang="en-US" altLang="zh-TW" dirty="0" err="1" smtClean="0">
+              <a:solidFill>
+                <a:schemeClr val="tx1"/>
+              </a:solidFill>
+              <a:latin typeface="Times New Roman" panose="02020603050405020304" pitchFamily="18" charset="0"/>
+              <a:ea typeface="標楷體" panose="03000509000000000000" pitchFamily="65" charset="-120"/>
+              <a:cs typeface="Times New Roman" panose="02020603050405020304" pitchFamily="18" charset="0"/>
+            </a:rPr>
+            <a:t>XGBoost</a:t>
+          </a:r>
+          <a:endParaRPr lang="zh-TW" altLang="en-US" dirty="0">
+            <a:solidFill>
+              <a:schemeClr val="tx1"/>
+            </a:solidFill>
+            <a:latin typeface="Times New Roman" panose="02020603050405020304" pitchFamily="18" charset="0"/>
+            <a:ea typeface="標楷體" panose="03000509000000000000" pitchFamily="65" charset="-120"/>
+            <a:cs typeface="Times New Roman" panose="02020603050405020304" pitchFamily="18" charset="0"/>
+          </a:endParaRPr>
+        </a:p>
+      </dgm:t>
+    </dgm:pt>
+    <dgm:pt modelId="{9AB43360-E212-49CE-A503-6F806BF9B862}" type="parTrans" cxnId="{1BAA918E-7678-49B1-AE03-270D07DC379C}">
+      <dgm:prSet/>
+      <dgm:spPr>
+        <a:noFill/>
+        <a:ln>
+          <a:solidFill>
+            <a:schemeClr val="tx1"/>
+          </a:solidFill>
+        </a:ln>
+      </dgm:spPr>
+      <dgm:t>
+        <a:bodyPr/>
+        <a:lstStyle/>
+        <a:p>
+          <a:endParaRPr lang="zh-TW" altLang="en-US">
+            <a:solidFill>
+              <a:schemeClr val="tx1"/>
+            </a:solidFill>
+            <a:latin typeface="Times New Roman" panose="02020603050405020304" pitchFamily="18" charset="0"/>
+            <a:ea typeface="標楷體" panose="03000509000000000000" pitchFamily="65" charset="-120"/>
+            <a:cs typeface="Times New Roman" panose="02020603050405020304" pitchFamily="18" charset="0"/>
+          </a:endParaRPr>
+        </a:p>
+      </dgm:t>
+    </dgm:pt>
+    <dgm:pt modelId="{3EBA5F64-3216-49C6-895D-1AD7176E6164}" type="sibTrans" cxnId="{1BAA918E-7678-49B1-AE03-270D07DC379C}">
+      <dgm:prSet/>
+      <dgm:spPr/>
+      <dgm:t>
+        <a:bodyPr/>
+        <a:lstStyle/>
+        <a:p>
+          <a:endParaRPr lang="zh-TW" altLang="en-US">
+            <a:solidFill>
+              <a:schemeClr val="tx1"/>
+            </a:solidFill>
+          </a:endParaRPr>
+        </a:p>
+      </dgm:t>
+    </dgm:pt>
+    <dgm:pt modelId="{2F023172-4E61-4511-AFCA-923C95EC486B}">
+      <dgm:prSet phldrT="[文字]"/>
+      <dgm:spPr>
+        <a:noFill/>
+        <a:ln>
+          <a:solidFill>
+            <a:schemeClr val="tx1"/>
+          </a:solidFill>
+        </a:ln>
+      </dgm:spPr>
+      <dgm:t>
+        <a:bodyPr/>
+        <a:lstStyle/>
+        <a:p>
+          <a:r>
+            <a:rPr lang="en-US" altLang="zh-TW" dirty="0" err="1" smtClean="0">
+              <a:solidFill>
+                <a:schemeClr val="tx1"/>
+              </a:solidFill>
+              <a:latin typeface="Times New Roman" panose="02020603050405020304" pitchFamily="18" charset="0"/>
+              <a:ea typeface="標楷體" panose="03000509000000000000" pitchFamily="65" charset="-120"/>
+              <a:cs typeface="Times New Roman" panose="02020603050405020304" pitchFamily="18" charset="0"/>
+            </a:rPr>
+            <a:t>LightGBM</a:t>
+          </a:r>
+          <a:endParaRPr lang="zh-TW" altLang="en-US" dirty="0">
+            <a:solidFill>
+              <a:schemeClr val="tx1"/>
+            </a:solidFill>
+            <a:latin typeface="Times New Roman" panose="02020603050405020304" pitchFamily="18" charset="0"/>
+            <a:ea typeface="標楷體" panose="03000509000000000000" pitchFamily="65" charset="-120"/>
+            <a:cs typeface="Times New Roman" panose="02020603050405020304" pitchFamily="18" charset="0"/>
+          </a:endParaRPr>
+        </a:p>
+      </dgm:t>
+    </dgm:pt>
+    <dgm:pt modelId="{EFAA1426-84F3-4105-B915-EC8BECDA4C5D}" type="parTrans" cxnId="{4003D128-8F10-43A0-B6F3-71131E47FDCF}">
+      <dgm:prSet/>
+      <dgm:spPr>
+        <a:noFill/>
+        <a:ln>
+          <a:solidFill>
+            <a:schemeClr val="tx1"/>
+          </a:solidFill>
+        </a:ln>
+      </dgm:spPr>
+      <dgm:t>
+        <a:bodyPr/>
+        <a:lstStyle/>
+        <a:p>
+          <a:endParaRPr lang="zh-TW" altLang="en-US">
+            <a:solidFill>
+              <a:schemeClr val="tx1"/>
+            </a:solidFill>
+            <a:latin typeface="Times New Roman" panose="02020603050405020304" pitchFamily="18" charset="0"/>
+            <a:ea typeface="標楷體" panose="03000509000000000000" pitchFamily="65" charset="-120"/>
+            <a:cs typeface="Times New Roman" panose="02020603050405020304" pitchFamily="18" charset="0"/>
+          </a:endParaRPr>
+        </a:p>
+      </dgm:t>
+    </dgm:pt>
+    <dgm:pt modelId="{623BE7AE-2B15-4D80-8224-B9BB04470764}" type="sibTrans" cxnId="{4003D128-8F10-43A0-B6F3-71131E47FDCF}">
+      <dgm:prSet/>
+      <dgm:spPr/>
+      <dgm:t>
+        <a:bodyPr/>
+        <a:lstStyle/>
+        <a:p>
+          <a:endParaRPr lang="zh-TW" altLang="en-US">
+            <a:solidFill>
+              <a:schemeClr val="tx1"/>
+            </a:solidFill>
+          </a:endParaRPr>
+        </a:p>
+      </dgm:t>
+    </dgm:pt>
+    <dgm:pt modelId="{01E943C2-F60A-4160-9AE4-B70A3B038017}">
+      <dgm:prSet phldrT="[文字]"/>
+      <dgm:spPr>
+        <a:noFill/>
+        <a:ln>
+          <a:solidFill>
+            <a:schemeClr val="tx1"/>
+          </a:solidFill>
+        </a:ln>
+      </dgm:spPr>
+      <dgm:t>
+        <a:bodyPr/>
+        <a:lstStyle/>
+        <a:p>
+          <a:r>
+            <a:rPr lang="en-US" altLang="zh-TW" dirty="0" smtClean="0">
+              <a:solidFill>
+                <a:schemeClr val="tx1"/>
+              </a:solidFill>
+              <a:latin typeface="Times New Roman" panose="02020603050405020304" pitchFamily="18" charset="0"/>
+              <a:ea typeface="標楷體" panose="03000509000000000000" pitchFamily="65" charset="-120"/>
+              <a:cs typeface="Times New Roman" panose="02020603050405020304" pitchFamily="18" charset="0"/>
+            </a:rPr>
+            <a:t>SVM</a:t>
+          </a:r>
+          <a:endParaRPr lang="zh-TW" altLang="en-US" dirty="0">
+            <a:solidFill>
+              <a:schemeClr val="tx1"/>
+            </a:solidFill>
+            <a:latin typeface="Times New Roman" panose="02020603050405020304" pitchFamily="18" charset="0"/>
+            <a:ea typeface="標楷體" panose="03000509000000000000" pitchFamily="65" charset="-120"/>
+            <a:cs typeface="Times New Roman" panose="02020603050405020304" pitchFamily="18" charset="0"/>
+          </a:endParaRPr>
+        </a:p>
+      </dgm:t>
+    </dgm:pt>
+    <dgm:pt modelId="{02E01EF1-C250-4B76-9AAA-4A4D9BCAEAE0}" type="parTrans" cxnId="{BEE9318E-195B-4B53-BC4C-5CD437085BA5}">
+      <dgm:prSet/>
+      <dgm:spPr>
+        <a:ln>
+          <a:solidFill>
+            <a:schemeClr val="tx1"/>
+          </a:solidFill>
+        </a:ln>
+      </dgm:spPr>
+      <dgm:t>
+        <a:bodyPr/>
+        <a:lstStyle/>
+        <a:p>
+          <a:endParaRPr lang="zh-TW" altLang="en-US">
+            <a:solidFill>
+              <a:schemeClr val="tx1"/>
+            </a:solidFill>
+          </a:endParaRPr>
+        </a:p>
+      </dgm:t>
+    </dgm:pt>
+    <dgm:pt modelId="{1E2C944A-0A38-4685-A0BC-3B9082352F80}" type="sibTrans" cxnId="{BEE9318E-195B-4B53-BC4C-5CD437085BA5}">
+      <dgm:prSet/>
+      <dgm:spPr/>
+      <dgm:t>
+        <a:bodyPr/>
+        <a:lstStyle/>
+        <a:p>
+          <a:endParaRPr lang="zh-TW" altLang="en-US">
+            <a:solidFill>
+              <a:schemeClr val="tx1"/>
+            </a:solidFill>
+          </a:endParaRPr>
+        </a:p>
+      </dgm:t>
+    </dgm:pt>
+    <dgm:pt modelId="{1842372B-728C-4BC7-9D83-15230F10A614}">
+      <dgm:prSet phldrT="[文字]"/>
+      <dgm:spPr>
+        <a:noFill/>
+        <a:ln>
+          <a:solidFill>
+            <a:schemeClr val="tx1"/>
+          </a:solidFill>
+        </a:ln>
+      </dgm:spPr>
+      <dgm:t>
+        <a:bodyPr/>
+        <a:lstStyle/>
+        <a:p>
+          <a:r>
+            <a:rPr lang="en-US" altLang="zh-TW" dirty="0" smtClean="0">
+              <a:solidFill>
+                <a:schemeClr val="tx1"/>
+              </a:solidFill>
+              <a:latin typeface="Times New Roman" panose="02020603050405020304" pitchFamily="18" charset="0"/>
+              <a:ea typeface="標楷體" panose="03000509000000000000" pitchFamily="65" charset="-120"/>
+              <a:cs typeface="Times New Roman" panose="02020603050405020304" pitchFamily="18" charset="0"/>
+            </a:rPr>
+            <a:t>MLP</a:t>
+          </a:r>
+          <a:endParaRPr lang="zh-TW" altLang="en-US" dirty="0">
+            <a:solidFill>
+              <a:schemeClr val="tx1"/>
+            </a:solidFill>
+            <a:latin typeface="Times New Roman" panose="02020603050405020304" pitchFamily="18" charset="0"/>
+            <a:ea typeface="標楷體" panose="03000509000000000000" pitchFamily="65" charset="-120"/>
+            <a:cs typeface="Times New Roman" panose="02020603050405020304" pitchFamily="18" charset="0"/>
+          </a:endParaRPr>
+        </a:p>
+      </dgm:t>
+    </dgm:pt>
+    <dgm:pt modelId="{8CBAA709-5B5F-4F4E-823F-B523AAB1D352}" type="parTrans" cxnId="{DBCA2FE9-3991-492D-95E4-EAFCD18666FE}">
+      <dgm:prSet/>
+      <dgm:spPr>
+        <a:ln>
+          <a:solidFill>
+            <a:schemeClr val="tx1"/>
+          </a:solidFill>
+        </a:ln>
+      </dgm:spPr>
+      <dgm:t>
+        <a:bodyPr/>
+        <a:lstStyle/>
+        <a:p>
+          <a:endParaRPr lang="zh-TW" altLang="en-US">
+            <a:solidFill>
+              <a:schemeClr val="tx1"/>
+            </a:solidFill>
+          </a:endParaRPr>
+        </a:p>
+      </dgm:t>
+    </dgm:pt>
+    <dgm:pt modelId="{5A114E51-C5C1-4628-BAD2-613F15CC6CFB}" type="sibTrans" cxnId="{DBCA2FE9-3991-492D-95E4-EAFCD18666FE}">
+      <dgm:prSet/>
+      <dgm:spPr/>
+      <dgm:t>
+        <a:bodyPr/>
+        <a:lstStyle/>
+        <a:p>
+          <a:endParaRPr lang="zh-TW" altLang="en-US">
+            <a:solidFill>
+              <a:schemeClr val="tx1"/>
+            </a:solidFill>
+          </a:endParaRPr>
+        </a:p>
+      </dgm:t>
+    </dgm:pt>
+    <dgm:pt modelId="{7F34AD9F-69E3-46E3-9A0D-23B0CDB74BF3}" type="pres">
+      <dgm:prSet presAssocID="{F6D9FE41-73BC-40EF-BC24-17E24345C112}" presName="hierChild1" presStyleCnt="0">
+        <dgm:presLayoutVars>
+          <dgm:orgChart val="1"/>
+          <dgm:chPref val="1"/>
+          <dgm:dir/>
+          <dgm:animOne val="branch"/>
+          <dgm:animLvl val="lvl"/>
+          <dgm:resizeHandles/>
+        </dgm:presLayoutVars>
+      </dgm:prSet>
+      <dgm:spPr/>
+    </dgm:pt>
+    <dgm:pt modelId="{34D71FE7-425F-4EE3-AFDF-AA9C0005EC00}" type="pres">
+      <dgm:prSet presAssocID="{C0379C3D-44CF-4B46-B585-05D4CA04D08F}" presName="hierRoot1" presStyleCnt="0">
+        <dgm:presLayoutVars>
+          <dgm:hierBranch val="init"/>
+        </dgm:presLayoutVars>
+      </dgm:prSet>
+      <dgm:spPr/>
+    </dgm:pt>
+    <dgm:pt modelId="{F1890DE0-7062-4AEE-90BD-8033034F9ABC}" type="pres">
+      <dgm:prSet presAssocID="{C0379C3D-44CF-4B46-B585-05D4CA04D08F}" presName="rootComposite1" presStyleCnt="0"/>
+      <dgm:spPr/>
+    </dgm:pt>
+    <dgm:pt modelId="{1619B013-66DD-4112-A89F-479A43573186}" type="pres">
+      <dgm:prSet presAssocID="{C0379C3D-44CF-4B46-B585-05D4CA04D08F}" presName="rootText1" presStyleLbl="node0" presStyleIdx="0" presStyleCnt="1">
+        <dgm:presLayoutVars>
+          <dgm:chPref val="3"/>
+        </dgm:presLayoutVars>
+      </dgm:prSet>
+      <dgm:spPr/>
+    </dgm:pt>
+    <dgm:pt modelId="{61BDDE93-DD40-4087-A945-D2649C41B8E9}" type="pres">
+      <dgm:prSet presAssocID="{C0379C3D-44CF-4B46-B585-05D4CA04D08F}" presName="rootConnector1" presStyleLbl="node1" presStyleIdx="0" presStyleCnt="0"/>
+      <dgm:spPr/>
+    </dgm:pt>
+    <dgm:pt modelId="{8441C452-B462-474B-A346-A7EFDCA3D2F1}" type="pres">
+      <dgm:prSet presAssocID="{C0379C3D-44CF-4B46-B585-05D4CA04D08F}" presName="hierChild2" presStyleCnt="0"/>
+      <dgm:spPr/>
+    </dgm:pt>
+    <dgm:pt modelId="{3193C511-743D-4E69-9E1D-0740D16ABB9F}" type="pres">
+      <dgm:prSet presAssocID="{C6313A3D-C187-4442-A89E-4A7FE10EBD0B}" presName="Name37" presStyleLbl="parChTrans1D2" presStyleIdx="0" presStyleCnt="3"/>
+      <dgm:spPr/>
+    </dgm:pt>
+    <dgm:pt modelId="{AEC697C2-71C9-4A4D-B40B-8D6A25D4588F}" type="pres">
+      <dgm:prSet presAssocID="{E5CCB25E-C655-4324-8217-14EF320224DF}" presName="hierRoot2" presStyleCnt="0">
+        <dgm:presLayoutVars>
+          <dgm:hierBranch val="init"/>
+        </dgm:presLayoutVars>
+      </dgm:prSet>
+      <dgm:spPr/>
+    </dgm:pt>
+    <dgm:pt modelId="{29C8B329-CD3B-4C38-8238-BEF64227BD43}" type="pres">
+      <dgm:prSet presAssocID="{E5CCB25E-C655-4324-8217-14EF320224DF}" presName="rootComposite" presStyleCnt="0"/>
+      <dgm:spPr/>
+    </dgm:pt>
+    <dgm:pt modelId="{BE086ED0-A51B-4215-B42F-E94C05C504E5}" type="pres">
+      <dgm:prSet presAssocID="{E5CCB25E-C655-4324-8217-14EF320224DF}" presName="rootText" presStyleLbl="node2" presStyleIdx="0" presStyleCnt="3">
+        <dgm:presLayoutVars>
+          <dgm:chPref val="3"/>
+        </dgm:presLayoutVars>
+      </dgm:prSet>
+      <dgm:spPr/>
+      <dgm:t>
+        <a:bodyPr/>
+        <a:lstStyle/>
+        <a:p>
+          <a:endParaRPr lang="zh-TW" altLang="en-US"/>
+        </a:p>
+      </dgm:t>
+    </dgm:pt>
+    <dgm:pt modelId="{72AC598E-578D-4A32-8CE1-C7314E12EC37}" type="pres">
+      <dgm:prSet presAssocID="{E5CCB25E-C655-4324-8217-14EF320224DF}" presName="rootConnector" presStyleLbl="node2" presStyleIdx="0" presStyleCnt="3"/>
+      <dgm:spPr/>
+    </dgm:pt>
+    <dgm:pt modelId="{F6C77B8F-08AB-43F7-A50B-D3EF073FC12A}" type="pres">
+      <dgm:prSet presAssocID="{E5CCB25E-C655-4324-8217-14EF320224DF}" presName="hierChild4" presStyleCnt="0"/>
+      <dgm:spPr/>
+    </dgm:pt>
+    <dgm:pt modelId="{E6B87659-DCA8-4621-B7CA-CA955397BA11}" type="pres">
+      <dgm:prSet presAssocID="{8D222D37-B8A0-43AD-9933-E6199901A620}" presName="Name37" presStyleLbl="parChTrans1D3" presStyleIdx="0" presStyleCnt="8"/>
+      <dgm:spPr/>
+    </dgm:pt>
+    <dgm:pt modelId="{CC374027-09BA-4FC7-8623-E69442FA328E}" type="pres">
+      <dgm:prSet presAssocID="{F6631F0D-4003-4FCC-A63D-7640B86D3CF7}" presName="hierRoot2" presStyleCnt="0">
+        <dgm:presLayoutVars>
+          <dgm:hierBranch val="init"/>
+        </dgm:presLayoutVars>
+      </dgm:prSet>
+      <dgm:spPr/>
+    </dgm:pt>
+    <dgm:pt modelId="{2AE9A917-15E5-4688-BA26-130AE0D5AACB}" type="pres">
+      <dgm:prSet presAssocID="{F6631F0D-4003-4FCC-A63D-7640B86D3CF7}" presName="rootComposite" presStyleCnt="0"/>
+      <dgm:spPr/>
+    </dgm:pt>
+    <dgm:pt modelId="{52D48C03-8467-41A2-BB1B-AA409C672855}" type="pres">
+      <dgm:prSet presAssocID="{F6631F0D-4003-4FCC-A63D-7640B86D3CF7}" presName="rootText" presStyleLbl="node3" presStyleIdx="0" presStyleCnt="8">
+        <dgm:presLayoutVars>
+          <dgm:chPref val="3"/>
+        </dgm:presLayoutVars>
+      </dgm:prSet>
+      <dgm:spPr/>
+      <dgm:t>
+        <a:bodyPr/>
+        <a:lstStyle/>
+        <a:p>
+          <a:endParaRPr lang="zh-TW" altLang="en-US"/>
+        </a:p>
+      </dgm:t>
+    </dgm:pt>
+    <dgm:pt modelId="{3FE6DC64-57E8-4D54-A2F6-7F35A6B26A3C}" type="pres">
+      <dgm:prSet presAssocID="{F6631F0D-4003-4FCC-A63D-7640B86D3CF7}" presName="rootConnector" presStyleLbl="node3" presStyleIdx="0" presStyleCnt="8"/>
+      <dgm:spPr/>
+    </dgm:pt>
+    <dgm:pt modelId="{87A74855-54C6-406F-A62A-3F4DC0154CAD}" type="pres">
+      <dgm:prSet presAssocID="{F6631F0D-4003-4FCC-A63D-7640B86D3CF7}" presName="hierChild4" presStyleCnt="0"/>
+      <dgm:spPr/>
+    </dgm:pt>
+    <dgm:pt modelId="{108F2F3E-224C-40C0-90FA-92628D65C6E0}" type="pres">
+      <dgm:prSet presAssocID="{F6631F0D-4003-4FCC-A63D-7640B86D3CF7}" presName="hierChild5" presStyleCnt="0"/>
+      <dgm:spPr/>
+    </dgm:pt>
+    <dgm:pt modelId="{060ACBB8-EB96-4241-88F8-0A4B28010FA5}" type="pres">
+      <dgm:prSet presAssocID="{9F725B02-6E85-4887-8D8B-9306B1D3AB18}" presName="Name37" presStyleLbl="parChTrans1D3" presStyleIdx="1" presStyleCnt="8"/>
+      <dgm:spPr/>
+    </dgm:pt>
+    <dgm:pt modelId="{5980EB20-8273-42D1-BD97-ABD17A5CBBD6}" type="pres">
+      <dgm:prSet presAssocID="{ACA71FF6-43D1-4D9C-8997-F22E3A014CCA}" presName="hierRoot2" presStyleCnt="0">
+        <dgm:presLayoutVars>
+          <dgm:hierBranch val="init"/>
+        </dgm:presLayoutVars>
+      </dgm:prSet>
+      <dgm:spPr/>
+    </dgm:pt>
+    <dgm:pt modelId="{5B352A79-DAF3-4A09-B119-42431B557B32}" type="pres">
+      <dgm:prSet presAssocID="{ACA71FF6-43D1-4D9C-8997-F22E3A014CCA}" presName="rootComposite" presStyleCnt="0"/>
+      <dgm:spPr/>
+    </dgm:pt>
+    <dgm:pt modelId="{06EACE6F-B329-4F8A-9DF8-AA96E79B9847}" type="pres">
+      <dgm:prSet presAssocID="{ACA71FF6-43D1-4D9C-8997-F22E3A014CCA}" presName="rootText" presStyleLbl="node3" presStyleIdx="1" presStyleCnt="8">
+        <dgm:presLayoutVars>
+          <dgm:chPref val="3"/>
+        </dgm:presLayoutVars>
+      </dgm:prSet>
+      <dgm:spPr/>
+    </dgm:pt>
+    <dgm:pt modelId="{88497726-0A8F-4453-B9B5-15C1B21B5E45}" type="pres">
+      <dgm:prSet presAssocID="{ACA71FF6-43D1-4D9C-8997-F22E3A014CCA}" presName="rootConnector" presStyleLbl="node3" presStyleIdx="1" presStyleCnt="8"/>
+      <dgm:spPr/>
+    </dgm:pt>
+    <dgm:pt modelId="{8763669A-C80D-4647-AE45-C7B6A524B694}" type="pres">
+      <dgm:prSet presAssocID="{ACA71FF6-43D1-4D9C-8997-F22E3A014CCA}" presName="hierChild4" presStyleCnt="0"/>
+      <dgm:spPr/>
+    </dgm:pt>
+    <dgm:pt modelId="{8344D6D7-7134-46C5-A89C-8651C601C900}" type="pres">
+      <dgm:prSet presAssocID="{ACA71FF6-43D1-4D9C-8997-F22E3A014CCA}" presName="hierChild5" presStyleCnt="0"/>
+      <dgm:spPr/>
+    </dgm:pt>
+    <dgm:pt modelId="{077A16B0-89CC-4A48-832B-C25F0878DF36}" type="pres">
+      <dgm:prSet presAssocID="{DC6511A6-2DC1-4CCB-86DB-BEFDAB64DDE4}" presName="Name37" presStyleLbl="parChTrans1D3" presStyleIdx="2" presStyleCnt="8"/>
+      <dgm:spPr/>
+    </dgm:pt>
+    <dgm:pt modelId="{03EBD7C5-A39C-4D61-8FC1-A64B1467CAC0}" type="pres">
+      <dgm:prSet presAssocID="{DBA5AD7A-C2C2-47CC-9C41-F03684C8A584}" presName="hierRoot2" presStyleCnt="0">
+        <dgm:presLayoutVars>
+          <dgm:hierBranch val="init"/>
+        </dgm:presLayoutVars>
+      </dgm:prSet>
+      <dgm:spPr/>
+    </dgm:pt>
+    <dgm:pt modelId="{58D4601D-84E2-4FE4-9772-953F092AA6C0}" type="pres">
+      <dgm:prSet presAssocID="{DBA5AD7A-C2C2-47CC-9C41-F03684C8A584}" presName="rootComposite" presStyleCnt="0"/>
+      <dgm:spPr/>
+    </dgm:pt>
+    <dgm:pt modelId="{A1098950-1343-4150-AB97-8EE58E881BBC}" type="pres">
+      <dgm:prSet presAssocID="{DBA5AD7A-C2C2-47CC-9C41-F03684C8A584}" presName="rootText" presStyleLbl="node3" presStyleIdx="2" presStyleCnt="8">
+        <dgm:presLayoutVars>
+          <dgm:chPref val="3"/>
+        </dgm:presLayoutVars>
+      </dgm:prSet>
+      <dgm:spPr/>
+    </dgm:pt>
+    <dgm:pt modelId="{8AE016EA-9964-4DAC-9E10-04A800F48939}" type="pres">
+      <dgm:prSet presAssocID="{DBA5AD7A-C2C2-47CC-9C41-F03684C8A584}" presName="rootConnector" presStyleLbl="node3" presStyleIdx="2" presStyleCnt="8"/>
+      <dgm:spPr/>
+    </dgm:pt>
+    <dgm:pt modelId="{15841B15-E005-4D95-8111-4450B8F876B0}" type="pres">
+      <dgm:prSet presAssocID="{DBA5AD7A-C2C2-47CC-9C41-F03684C8A584}" presName="hierChild4" presStyleCnt="0"/>
+      <dgm:spPr/>
+    </dgm:pt>
+    <dgm:pt modelId="{7CF4B498-9CDD-47B9-8839-31BBDAE1014A}" type="pres">
+      <dgm:prSet presAssocID="{DBA5AD7A-C2C2-47CC-9C41-F03684C8A584}" presName="hierChild5" presStyleCnt="0"/>
+      <dgm:spPr/>
+    </dgm:pt>
+    <dgm:pt modelId="{A8570125-FF94-48DF-8A90-5A3103E80F89}" type="pres">
+      <dgm:prSet presAssocID="{E5CCB25E-C655-4324-8217-14EF320224DF}" presName="hierChild5" presStyleCnt="0"/>
+      <dgm:spPr/>
+    </dgm:pt>
+    <dgm:pt modelId="{CD932D47-FAA9-4BEA-94A0-664BBD2AA555}" type="pres">
+      <dgm:prSet presAssocID="{F85D92B1-E28E-466A-B1AF-ADDB99C02FC6}" presName="Name37" presStyleLbl="parChTrans1D2" presStyleIdx="1" presStyleCnt="3"/>
+      <dgm:spPr/>
+    </dgm:pt>
+    <dgm:pt modelId="{F2359C8B-E123-493B-9B89-048E791E2169}" type="pres">
+      <dgm:prSet presAssocID="{6C87DEF1-267E-484B-BC33-85913E3EC10F}" presName="hierRoot2" presStyleCnt="0">
+        <dgm:presLayoutVars>
+          <dgm:hierBranch val="init"/>
+        </dgm:presLayoutVars>
+      </dgm:prSet>
+      <dgm:spPr/>
+    </dgm:pt>
+    <dgm:pt modelId="{06B18B84-A25A-49BC-B35C-E8EA5DA8EA83}" type="pres">
+      <dgm:prSet presAssocID="{6C87DEF1-267E-484B-BC33-85913E3EC10F}" presName="rootComposite" presStyleCnt="0"/>
+      <dgm:spPr/>
+    </dgm:pt>
+    <dgm:pt modelId="{A92999D2-594E-4F7C-AC3B-8EAC9358F8AD}" type="pres">
+      <dgm:prSet presAssocID="{6C87DEF1-267E-484B-BC33-85913E3EC10F}" presName="rootText" presStyleLbl="node2" presStyleIdx="1" presStyleCnt="3">
+        <dgm:presLayoutVars>
+          <dgm:chPref val="3"/>
+        </dgm:presLayoutVars>
+      </dgm:prSet>
+      <dgm:spPr/>
+      <dgm:t>
+        <a:bodyPr/>
+        <a:lstStyle/>
+        <a:p>
+          <a:endParaRPr lang="zh-TW" altLang="en-US"/>
+        </a:p>
+      </dgm:t>
+    </dgm:pt>
+    <dgm:pt modelId="{EB5C76B9-D527-4D3B-989E-1EAE2115F0ED}" type="pres">
+      <dgm:prSet presAssocID="{6C87DEF1-267E-484B-BC33-85913E3EC10F}" presName="rootConnector" presStyleLbl="node2" presStyleIdx="1" presStyleCnt="3"/>
+      <dgm:spPr/>
+    </dgm:pt>
+    <dgm:pt modelId="{E6E0D52E-2965-4827-BB76-3FC5E37FA703}" type="pres">
+      <dgm:prSet presAssocID="{6C87DEF1-267E-484B-BC33-85913E3EC10F}" presName="hierChild4" presStyleCnt="0"/>
+      <dgm:spPr/>
+    </dgm:pt>
+    <dgm:pt modelId="{AD79323F-1B49-4729-A289-6D620D749A9F}" type="pres">
+      <dgm:prSet presAssocID="{D21D1992-ADB0-4EF0-93AB-1E9F75434F52}" presName="Name37" presStyleLbl="parChTrans1D3" presStyleIdx="3" presStyleCnt="8"/>
+      <dgm:spPr/>
+    </dgm:pt>
+    <dgm:pt modelId="{E44A8880-D179-421A-BDBE-FF75BD67D32D}" type="pres">
+      <dgm:prSet presAssocID="{847724BD-9062-4C15-867D-9A40745D5942}" presName="hierRoot2" presStyleCnt="0">
+        <dgm:presLayoutVars>
+          <dgm:hierBranch val="init"/>
+        </dgm:presLayoutVars>
+      </dgm:prSet>
+      <dgm:spPr/>
+    </dgm:pt>
+    <dgm:pt modelId="{E942DB70-7965-43C8-A044-BC36341C1459}" type="pres">
+      <dgm:prSet presAssocID="{847724BD-9062-4C15-867D-9A40745D5942}" presName="rootComposite" presStyleCnt="0"/>
+      <dgm:spPr/>
+    </dgm:pt>
+    <dgm:pt modelId="{471E24C0-93B7-4A88-8409-904FB0ABBFE3}" type="pres">
+      <dgm:prSet presAssocID="{847724BD-9062-4C15-867D-9A40745D5942}" presName="rootText" presStyleLbl="node3" presStyleIdx="3" presStyleCnt="8">
+        <dgm:presLayoutVars>
+          <dgm:chPref val="3"/>
+        </dgm:presLayoutVars>
+      </dgm:prSet>
+      <dgm:spPr/>
+      <dgm:t>
+        <a:bodyPr/>
+        <a:lstStyle/>
+        <a:p>
+          <a:endParaRPr lang="zh-TW" altLang="en-US"/>
+        </a:p>
+      </dgm:t>
+    </dgm:pt>
+    <dgm:pt modelId="{003BFD0D-2BBC-46B3-A380-154B3A06829E}" type="pres">
+      <dgm:prSet presAssocID="{847724BD-9062-4C15-867D-9A40745D5942}" presName="rootConnector" presStyleLbl="node3" presStyleIdx="3" presStyleCnt="8"/>
+      <dgm:spPr/>
+    </dgm:pt>
+    <dgm:pt modelId="{F7C775FA-93FB-4EFB-B25E-9EAAFE65ED7B}" type="pres">
+      <dgm:prSet presAssocID="{847724BD-9062-4C15-867D-9A40745D5942}" presName="hierChild4" presStyleCnt="0"/>
+      <dgm:spPr/>
+    </dgm:pt>
+    <dgm:pt modelId="{4714D7A2-A307-4028-BB69-263A46444659}" type="pres">
+      <dgm:prSet presAssocID="{847724BD-9062-4C15-867D-9A40745D5942}" presName="hierChild5" presStyleCnt="0"/>
+      <dgm:spPr/>
+    </dgm:pt>
+    <dgm:pt modelId="{F67BB4F9-FCC2-4C90-A5EA-73862D03E224}" type="pres">
+      <dgm:prSet presAssocID="{A9C07280-0A72-472E-BE76-F36D22C350B5}" presName="Name37" presStyleLbl="parChTrans1D3" presStyleIdx="4" presStyleCnt="8"/>
+      <dgm:spPr/>
+    </dgm:pt>
+    <dgm:pt modelId="{61EFBF08-F3FD-4234-850E-27EEB7C3840C}" type="pres">
+      <dgm:prSet presAssocID="{422C33F5-672E-4B0C-B552-ED3DD9F2941B}" presName="hierRoot2" presStyleCnt="0">
+        <dgm:presLayoutVars>
+          <dgm:hierBranch val="init"/>
+        </dgm:presLayoutVars>
+      </dgm:prSet>
+      <dgm:spPr/>
+    </dgm:pt>
+    <dgm:pt modelId="{C399CF59-6DE0-47AF-AB0B-69A396442F8E}" type="pres">
+      <dgm:prSet presAssocID="{422C33F5-672E-4B0C-B552-ED3DD9F2941B}" presName="rootComposite" presStyleCnt="0"/>
+      <dgm:spPr/>
+    </dgm:pt>
+    <dgm:pt modelId="{0F256B01-4570-4068-A359-7B9777BAC5E2}" type="pres">
+      <dgm:prSet presAssocID="{422C33F5-672E-4B0C-B552-ED3DD9F2941B}" presName="rootText" presStyleLbl="node3" presStyleIdx="4" presStyleCnt="8">
+        <dgm:presLayoutVars>
+          <dgm:chPref val="3"/>
+        </dgm:presLayoutVars>
+      </dgm:prSet>
+      <dgm:spPr/>
+    </dgm:pt>
+    <dgm:pt modelId="{B7FD21A3-9BC2-4ED9-A7A1-C733E512343E}" type="pres">
+      <dgm:prSet presAssocID="{422C33F5-672E-4B0C-B552-ED3DD9F2941B}" presName="rootConnector" presStyleLbl="node3" presStyleIdx="4" presStyleCnt="8"/>
+      <dgm:spPr/>
+    </dgm:pt>
+    <dgm:pt modelId="{C77B128E-43FB-4EA9-8528-90CD104B401C}" type="pres">
+      <dgm:prSet presAssocID="{422C33F5-672E-4B0C-B552-ED3DD9F2941B}" presName="hierChild4" presStyleCnt="0"/>
+      <dgm:spPr/>
+    </dgm:pt>
+    <dgm:pt modelId="{A827EF7B-3FD3-4F9A-8747-368E792DAF1A}" type="pres">
+      <dgm:prSet presAssocID="{97DF12F3-EBEE-4710-B22F-47A71C2D3BA0}" presName="Name37" presStyleLbl="parChTrans1D4" presStyleIdx="0" presStyleCnt="3"/>
+      <dgm:spPr/>
+    </dgm:pt>
+    <dgm:pt modelId="{63FC3916-A554-49C1-891A-AA19B7D5C0B3}" type="pres">
+      <dgm:prSet presAssocID="{1140E081-3CE3-4E40-84D1-D5CCA58BE7C7}" presName="hierRoot2" presStyleCnt="0">
+        <dgm:presLayoutVars>
+          <dgm:hierBranch val="init"/>
+        </dgm:presLayoutVars>
+      </dgm:prSet>
+      <dgm:spPr/>
+    </dgm:pt>
+    <dgm:pt modelId="{E6035742-818A-478F-A019-62950F9AF1A5}" type="pres">
+      <dgm:prSet presAssocID="{1140E081-3CE3-4E40-84D1-D5CCA58BE7C7}" presName="rootComposite" presStyleCnt="0"/>
+      <dgm:spPr/>
+    </dgm:pt>
+    <dgm:pt modelId="{E92B3A66-DD20-43A7-B574-7DCF7E4CEB01}" type="pres">
+      <dgm:prSet presAssocID="{1140E081-3CE3-4E40-84D1-D5CCA58BE7C7}" presName="rootText" presStyleLbl="node4" presStyleIdx="0" presStyleCnt="3">
+        <dgm:presLayoutVars>
+          <dgm:chPref val="3"/>
+        </dgm:presLayoutVars>
+      </dgm:prSet>
+      <dgm:spPr/>
+      <dgm:t>
+        <a:bodyPr/>
+        <a:lstStyle/>
+        <a:p>
+          <a:endParaRPr lang="zh-TW" altLang="en-US"/>
+        </a:p>
+      </dgm:t>
+    </dgm:pt>
+    <dgm:pt modelId="{9D3CD290-6F82-471F-948C-49054C263DDB}" type="pres">
+      <dgm:prSet presAssocID="{1140E081-3CE3-4E40-84D1-D5CCA58BE7C7}" presName="rootConnector" presStyleLbl="node4" presStyleIdx="0" presStyleCnt="3"/>
+      <dgm:spPr/>
+    </dgm:pt>
+    <dgm:pt modelId="{5FB6C452-5109-44F6-ADC6-6176B854ABBC}" type="pres">
+      <dgm:prSet presAssocID="{1140E081-3CE3-4E40-84D1-D5CCA58BE7C7}" presName="hierChild4" presStyleCnt="0"/>
+      <dgm:spPr/>
+    </dgm:pt>
+    <dgm:pt modelId="{218FC863-11ED-4535-80E2-521960AC596D}" type="pres">
+      <dgm:prSet presAssocID="{1140E081-3CE3-4E40-84D1-D5CCA58BE7C7}" presName="hierChild5" presStyleCnt="0"/>
+      <dgm:spPr/>
+    </dgm:pt>
+    <dgm:pt modelId="{E40D1708-260F-4EE2-8BF4-0AF5CCE2572C}" type="pres">
+      <dgm:prSet presAssocID="{9AB43360-E212-49CE-A503-6F806BF9B862}" presName="Name37" presStyleLbl="parChTrans1D4" presStyleIdx="1" presStyleCnt="3"/>
+      <dgm:spPr/>
+    </dgm:pt>
+    <dgm:pt modelId="{235B3544-6DF5-4DE6-B763-09C412CE3761}" type="pres">
+      <dgm:prSet presAssocID="{6B759DC2-3439-4108-98CB-B36DA3EC8CED}" presName="hierRoot2" presStyleCnt="0">
+        <dgm:presLayoutVars>
+          <dgm:hierBranch val="init"/>
+        </dgm:presLayoutVars>
+      </dgm:prSet>
+      <dgm:spPr/>
+    </dgm:pt>
+    <dgm:pt modelId="{14B40ABD-982E-4220-A243-0AD6F2C54601}" type="pres">
+      <dgm:prSet presAssocID="{6B759DC2-3439-4108-98CB-B36DA3EC8CED}" presName="rootComposite" presStyleCnt="0"/>
+      <dgm:spPr/>
+    </dgm:pt>
+    <dgm:pt modelId="{CB29D046-9C3E-498D-9B0F-548827F377BC}" type="pres">
+      <dgm:prSet presAssocID="{6B759DC2-3439-4108-98CB-B36DA3EC8CED}" presName="rootText" presStyleLbl="node4" presStyleIdx="1" presStyleCnt="3">
+        <dgm:presLayoutVars>
+          <dgm:chPref val="3"/>
+        </dgm:presLayoutVars>
+      </dgm:prSet>
+      <dgm:spPr/>
+      <dgm:t>
+        <a:bodyPr/>
+        <a:lstStyle/>
+        <a:p>
+          <a:endParaRPr lang="zh-TW" altLang="en-US"/>
+        </a:p>
+      </dgm:t>
+    </dgm:pt>
+    <dgm:pt modelId="{85433A55-D717-48BC-8149-9AC20B91C08B}" type="pres">
+      <dgm:prSet presAssocID="{6B759DC2-3439-4108-98CB-B36DA3EC8CED}" presName="rootConnector" presStyleLbl="node4" presStyleIdx="1" presStyleCnt="3"/>
+      <dgm:spPr/>
+    </dgm:pt>
+    <dgm:pt modelId="{2D342578-2CBA-4143-94A7-BD4245625C52}" type="pres">
+      <dgm:prSet presAssocID="{6B759DC2-3439-4108-98CB-B36DA3EC8CED}" presName="hierChild4" presStyleCnt="0"/>
+      <dgm:spPr/>
+    </dgm:pt>
+    <dgm:pt modelId="{382608F6-D16C-448E-8972-379705B77DAB}" type="pres">
+      <dgm:prSet presAssocID="{6B759DC2-3439-4108-98CB-B36DA3EC8CED}" presName="hierChild5" presStyleCnt="0"/>
+      <dgm:spPr/>
+    </dgm:pt>
+    <dgm:pt modelId="{4D520FF4-990B-4A55-A2D2-83A63539A647}" type="pres">
+      <dgm:prSet presAssocID="{EFAA1426-84F3-4105-B915-EC8BECDA4C5D}" presName="Name37" presStyleLbl="parChTrans1D4" presStyleIdx="2" presStyleCnt="3"/>
+      <dgm:spPr/>
+    </dgm:pt>
+    <dgm:pt modelId="{39C7AD21-223F-4497-88DB-891105BF6347}" type="pres">
+      <dgm:prSet presAssocID="{2F023172-4E61-4511-AFCA-923C95EC486B}" presName="hierRoot2" presStyleCnt="0">
+        <dgm:presLayoutVars>
+          <dgm:hierBranch val="init"/>
+        </dgm:presLayoutVars>
+      </dgm:prSet>
+      <dgm:spPr/>
+    </dgm:pt>
+    <dgm:pt modelId="{12AC61A5-FDF9-4F9F-B047-884F5393E4BE}" type="pres">
+      <dgm:prSet presAssocID="{2F023172-4E61-4511-AFCA-923C95EC486B}" presName="rootComposite" presStyleCnt="0"/>
+      <dgm:spPr/>
+    </dgm:pt>
+    <dgm:pt modelId="{5A047950-A498-4E53-A417-C812BDE16A6B}" type="pres">
+      <dgm:prSet presAssocID="{2F023172-4E61-4511-AFCA-923C95EC486B}" presName="rootText" presStyleLbl="node4" presStyleIdx="2" presStyleCnt="3">
+        <dgm:presLayoutVars>
+          <dgm:chPref val="3"/>
+        </dgm:presLayoutVars>
+      </dgm:prSet>
+      <dgm:spPr/>
+      <dgm:t>
+        <a:bodyPr/>
+        <a:lstStyle/>
+        <a:p>
+          <a:endParaRPr lang="zh-TW" altLang="en-US"/>
+        </a:p>
+      </dgm:t>
+    </dgm:pt>
+    <dgm:pt modelId="{3B846DCB-5246-4C95-9EC1-CF6D85158CF9}" type="pres">
+      <dgm:prSet presAssocID="{2F023172-4E61-4511-AFCA-923C95EC486B}" presName="rootConnector" presStyleLbl="node4" presStyleIdx="2" presStyleCnt="3"/>
+      <dgm:spPr/>
+    </dgm:pt>
+    <dgm:pt modelId="{EB8432E4-ECAB-44FC-A1FD-6FA259D0157A}" type="pres">
+      <dgm:prSet presAssocID="{2F023172-4E61-4511-AFCA-923C95EC486B}" presName="hierChild4" presStyleCnt="0"/>
+      <dgm:spPr/>
+    </dgm:pt>
+    <dgm:pt modelId="{EC22E159-6F1A-4F9B-AA55-923FC11AAEC4}" type="pres">
+      <dgm:prSet presAssocID="{2F023172-4E61-4511-AFCA-923C95EC486B}" presName="hierChild5" presStyleCnt="0"/>
+      <dgm:spPr/>
+    </dgm:pt>
+    <dgm:pt modelId="{9059E626-9BCA-4403-8BCF-1CFF5238A3C3}" type="pres">
+      <dgm:prSet presAssocID="{422C33F5-672E-4B0C-B552-ED3DD9F2941B}" presName="hierChild5" presStyleCnt="0"/>
+      <dgm:spPr/>
+    </dgm:pt>
+    <dgm:pt modelId="{AB1BFC6C-8F27-4F6C-97A6-D6FB13839B51}" type="pres">
+      <dgm:prSet presAssocID="{02E01EF1-C250-4B76-9AAA-4A4D9BCAEAE0}" presName="Name37" presStyleLbl="parChTrans1D3" presStyleIdx="5" presStyleCnt="8"/>
+      <dgm:spPr/>
+    </dgm:pt>
+    <dgm:pt modelId="{201740FA-0624-498F-9EAA-7E43A2DAA88B}" type="pres">
+      <dgm:prSet presAssocID="{01E943C2-F60A-4160-9AE4-B70A3B038017}" presName="hierRoot2" presStyleCnt="0">
+        <dgm:presLayoutVars>
+          <dgm:hierBranch val="init"/>
+        </dgm:presLayoutVars>
+      </dgm:prSet>
+      <dgm:spPr/>
+    </dgm:pt>
+    <dgm:pt modelId="{86A80C55-1065-4693-9799-84B06A0433A7}" type="pres">
+      <dgm:prSet presAssocID="{01E943C2-F60A-4160-9AE4-B70A3B038017}" presName="rootComposite" presStyleCnt="0"/>
+      <dgm:spPr/>
+    </dgm:pt>
+    <dgm:pt modelId="{F0E27AB9-22B8-45F7-A29B-1D5ABB37A7A1}" type="pres">
+      <dgm:prSet presAssocID="{01E943C2-F60A-4160-9AE4-B70A3B038017}" presName="rootText" presStyleLbl="node3" presStyleIdx="5" presStyleCnt="8">
+        <dgm:presLayoutVars>
+          <dgm:chPref val="3"/>
+        </dgm:presLayoutVars>
+      </dgm:prSet>
+      <dgm:spPr/>
+      <dgm:t>
+        <a:bodyPr/>
+        <a:lstStyle/>
+        <a:p>
+          <a:endParaRPr lang="zh-TW" altLang="en-US"/>
+        </a:p>
+      </dgm:t>
+    </dgm:pt>
+    <dgm:pt modelId="{0AC2DA91-A00E-43D1-A5D1-CA5DB1708CE7}" type="pres">
+      <dgm:prSet presAssocID="{01E943C2-F60A-4160-9AE4-B70A3B038017}" presName="rootConnector" presStyleLbl="node3" presStyleIdx="5" presStyleCnt="8"/>
+      <dgm:spPr/>
+    </dgm:pt>
+    <dgm:pt modelId="{B32D8C34-E30F-4CA2-AD5C-0CA79DF6CA93}" type="pres">
+      <dgm:prSet presAssocID="{01E943C2-F60A-4160-9AE4-B70A3B038017}" presName="hierChild4" presStyleCnt="0"/>
+      <dgm:spPr/>
+    </dgm:pt>
+    <dgm:pt modelId="{81C00972-281C-490F-815A-F836F9471161}" type="pres">
+      <dgm:prSet presAssocID="{01E943C2-F60A-4160-9AE4-B70A3B038017}" presName="hierChild5" presStyleCnt="0"/>
+      <dgm:spPr/>
+    </dgm:pt>
+    <dgm:pt modelId="{9D42B076-C679-4CE2-BF26-8BA0F459E855}" type="pres">
+      <dgm:prSet presAssocID="{8CBAA709-5B5F-4F4E-823F-B523AAB1D352}" presName="Name37" presStyleLbl="parChTrans1D3" presStyleIdx="6" presStyleCnt="8"/>
+      <dgm:spPr/>
+    </dgm:pt>
+    <dgm:pt modelId="{E1E43C58-5AEB-473A-A912-49DFC2C8A53F}" type="pres">
+      <dgm:prSet presAssocID="{1842372B-728C-4BC7-9D83-15230F10A614}" presName="hierRoot2" presStyleCnt="0">
+        <dgm:presLayoutVars>
+          <dgm:hierBranch val="init"/>
+        </dgm:presLayoutVars>
+      </dgm:prSet>
+      <dgm:spPr/>
+    </dgm:pt>
+    <dgm:pt modelId="{AF80B871-FC14-4B02-BFF4-4E410FA2564F}" type="pres">
+      <dgm:prSet presAssocID="{1842372B-728C-4BC7-9D83-15230F10A614}" presName="rootComposite" presStyleCnt="0"/>
+      <dgm:spPr/>
+    </dgm:pt>
+    <dgm:pt modelId="{6526E14F-2EB7-47D7-868A-C44A055D4594}" type="pres">
+      <dgm:prSet presAssocID="{1842372B-728C-4BC7-9D83-15230F10A614}" presName="rootText" presStyleLbl="node3" presStyleIdx="6" presStyleCnt="8">
+        <dgm:presLayoutVars>
+          <dgm:chPref val="3"/>
+        </dgm:presLayoutVars>
+      </dgm:prSet>
+      <dgm:spPr/>
+    </dgm:pt>
+    <dgm:pt modelId="{6B9FBD9E-2002-4113-8EDF-34E3BA90846F}" type="pres">
+      <dgm:prSet presAssocID="{1842372B-728C-4BC7-9D83-15230F10A614}" presName="rootConnector" presStyleLbl="node3" presStyleIdx="6" presStyleCnt="8"/>
+      <dgm:spPr/>
+    </dgm:pt>
+    <dgm:pt modelId="{EDD88F62-777B-4A85-B340-2CEA09FBE2E3}" type="pres">
+      <dgm:prSet presAssocID="{1842372B-728C-4BC7-9D83-15230F10A614}" presName="hierChild4" presStyleCnt="0"/>
+      <dgm:spPr/>
+    </dgm:pt>
+    <dgm:pt modelId="{1BBD8426-DCE1-428B-B8FD-F42A25503DE7}" type="pres">
+      <dgm:prSet presAssocID="{1842372B-728C-4BC7-9D83-15230F10A614}" presName="hierChild5" presStyleCnt="0"/>
+      <dgm:spPr/>
+    </dgm:pt>
+    <dgm:pt modelId="{63D30C63-A9CB-4538-8066-FCD31EE92EFD}" type="pres">
+      <dgm:prSet presAssocID="{6C87DEF1-267E-484B-BC33-85913E3EC10F}" presName="hierChild5" presStyleCnt="0"/>
+      <dgm:spPr/>
+    </dgm:pt>
+    <dgm:pt modelId="{E3D46B2D-06D6-4D5B-AB6B-02310BD3571E}" type="pres">
+      <dgm:prSet presAssocID="{7ADADAE6-FA49-433C-B86B-563F2A7A34E3}" presName="Name37" presStyleLbl="parChTrans1D2" presStyleIdx="2" presStyleCnt="3"/>
+      <dgm:spPr/>
+    </dgm:pt>
+    <dgm:pt modelId="{4BF979C6-F76A-412C-BBDF-F897DC87EE64}" type="pres">
+      <dgm:prSet presAssocID="{65C778D0-7669-4D4B-B4D6-4CD1381A0BF3}" presName="hierRoot2" presStyleCnt="0">
+        <dgm:presLayoutVars>
+          <dgm:hierBranch val="init"/>
+        </dgm:presLayoutVars>
+      </dgm:prSet>
+      <dgm:spPr/>
+    </dgm:pt>
+    <dgm:pt modelId="{63D6E332-1CFE-41B8-B760-E0E052578F6C}" type="pres">
+      <dgm:prSet presAssocID="{65C778D0-7669-4D4B-B4D6-4CD1381A0BF3}" presName="rootComposite" presStyleCnt="0"/>
+      <dgm:spPr/>
+    </dgm:pt>
+    <dgm:pt modelId="{5B674A70-3154-4944-B2C8-8AFF4B2D7C3C}" type="pres">
+      <dgm:prSet presAssocID="{65C778D0-7669-4D4B-B4D6-4CD1381A0BF3}" presName="rootText" presStyleLbl="node2" presStyleIdx="2" presStyleCnt="3">
+        <dgm:presLayoutVars>
+          <dgm:chPref val="3"/>
+        </dgm:presLayoutVars>
+      </dgm:prSet>
+      <dgm:spPr/>
+      <dgm:t>
+        <a:bodyPr/>
+        <a:lstStyle/>
+        <a:p>
+          <a:endParaRPr lang="zh-TW" altLang="en-US"/>
+        </a:p>
+      </dgm:t>
+    </dgm:pt>
+    <dgm:pt modelId="{370DC1AA-D00A-4062-9EAA-2B2F33F61C82}" type="pres">
+      <dgm:prSet presAssocID="{65C778D0-7669-4D4B-B4D6-4CD1381A0BF3}" presName="rootConnector" presStyleLbl="node2" presStyleIdx="2" presStyleCnt="3"/>
+      <dgm:spPr/>
+    </dgm:pt>
+    <dgm:pt modelId="{349A7559-2FB9-41B2-92EF-D297E9A3A3E9}" type="pres">
+      <dgm:prSet presAssocID="{65C778D0-7669-4D4B-B4D6-4CD1381A0BF3}" presName="hierChild4" presStyleCnt="0"/>
+      <dgm:spPr/>
+    </dgm:pt>
+    <dgm:pt modelId="{50609ABF-9BA2-4F31-946D-BF9C35D435FA}" type="pres">
+      <dgm:prSet presAssocID="{F5F23906-48D7-4EF9-A256-60463F51DB60}" presName="Name37" presStyleLbl="parChTrans1D3" presStyleIdx="7" presStyleCnt="8"/>
+      <dgm:spPr/>
+    </dgm:pt>
+    <dgm:pt modelId="{27CD699F-7113-4516-89F4-F2E20D446619}" type="pres">
+      <dgm:prSet presAssocID="{1256CB85-BA23-4513-9CCD-B3AE1CAF87CC}" presName="hierRoot2" presStyleCnt="0">
+        <dgm:presLayoutVars>
+          <dgm:hierBranch val="init"/>
+        </dgm:presLayoutVars>
+      </dgm:prSet>
+      <dgm:spPr/>
+    </dgm:pt>
+    <dgm:pt modelId="{DA47DD6C-2714-4E90-BF28-EEA552104C47}" type="pres">
+      <dgm:prSet presAssocID="{1256CB85-BA23-4513-9CCD-B3AE1CAF87CC}" presName="rootComposite" presStyleCnt="0"/>
+      <dgm:spPr/>
+    </dgm:pt>
+    <dgm:pt modelId="{F225889A-7CC3-4DBC-816A-0F9DBFD05802}" type="pres">
+      <dgm:prSet presAssocID="{1256CB85-BA23-4513-9CCD-B3AE1CAF87CC}" presName="rootText" presStyleLbl="node3" presStyleIdx="7" presStyleCnt="8">
+        <dgm:presLayoutVars>
+          <dgm:chPref val="3"/>
+        </dgm:presLayoutVars>
+      </dgm:prSet>
+      <dgm:spPr/>
+      <dgm:t>
+        <a:bodyPr/>
+        <a:lstStyle/>
+        <a:p>
+          <a:endParaRPr lang="zh-TW" altLang="en-US"/>
+        </a:p>
+      </dgm:t>
+    </dgm:pt>
+    <dgm:pt modelId="{A2A59F6A-7566-4E8D-8E63-E8C4DA376E5F}" type="pres">
+      <dgm:prSet presAssocID="{1256CB85-BA23-4513-9CCD-B3AE1CAF87CC}" presName="rootConnector" presStyleLbl="node3" presStyleIdx="7" presStyleCnt="8"/>
+      <dgm:spPr/>
+    </dgm:pt>
+    <dgm:pt modelId="{4E517C8C-D5AB-45CF-A17D-B3EF77DDCBD8}" type="pres">
+      <dgm:prSet presAssocID="{1256CB85-BA23-4513-9CCD-B3AE1CAF87CC}" presName="hierChild4" presStyleCnt="0"/>
+      <dgm:spPr/>
+    </dgm:pt>
+    <dgm:pt modelId="{0075BD85-BE26-4D98-8B51-585F347ED75B}" type="pres">
+      <dgm:prSet presAssocID="{1256CB85-BA23-4513-9CCD-B3AE1CAF87CC}" presName="hierChild5" presStyleCnt="0"/>
+      <dgm:spPr/>
+    </dgm:pt>
+    <dgm:pt modelId="{2B06B934-8BCE-4FFB-A955-DDA94526D187}" type="pres">
+      <dgm:prSet presAssocID="{65C778D0-7669-4D4B-B4D6-4CD1381A0BF3}" presName="hierChild5" presStyleCnt="0"/>
+      <dgm:spPr/>
+    </dgm:pt>
+    <dgm:pt modelId="{E830106F-A813-48E5-A896-6C28DFD2EE33}" type="pres">
+      <dgm:prSet presAssocID="{C0379C3D-44CF-4B46-B585-05D4CA04D08F}" presName="hierChild3" presStyleCnt="0"/>
+      <dgm:spPr/>
+    </dgm:pt>
+  </dgm:ptLst>
+  <dgm:cxnLst>
+    <dgm:cxn modelId="{EE756A95-7060-4C59-91C5-E31ABF186BFC}" type="presOf" srcId="{65C778D0-7669-4D4B-B4D6-4CD1381A0BF3}" destId="{370DC1AA-D00A-4062-9EAA-2B2F33F61C82}" srcOrd="1" destOrd="0" presId="urn:microsoft.com/office/officeart/2005/8/layout/orgChart1"/>
+    <dgm:cxn modelId="{4F6B3212-C6D6-4F95-A1D1-266E5480D278}" srcId="{6C87DEF1-267E-484B-BC33-85913E3EC10F}" destId="{422C33F5-672E-4B0C-B552-ED3DD9F2941B}" srcOrd="1" destOrd="0" parTransId="{A9C07280-0A72-472E-BE76-F36D22C350B5}" sibTransId="{A03C0CAF-CC62-4B51-9DF9-C3283A2C0FD4}"/>
+    <dgm:cxn modelId="{2F490ACC-C135-4B98-B151-626C345CCD1A}" type="presOf" srcId="{8CBAA709-5B5F-4F4E-823F-B523AAB1D352}" destId="{9D42B076-C679-4CE2-BF26-8BA0F459E855}" srcOrd="0" destOrd="0" presId="urn:microsoft.com/office/officeart/2005/8/layout/orgChart1"/>
+    <dgm:cxn modelId="{E0AD15E1-166E-4AD6-A4E5-79E4C6730600}" type="presOf" srcId="{847724BD-9062-4C15-867D-9A40745D5942}" destId="{471E24C0-93B7-4A88-8409-904FB0ABBFE3}" srcOrd="0" destOrd="0" presId="urn:microsoft.com/office/officeart/2005/8/layout/orgChart1"/>
+    <dgm:cxn modelId="{C0490902-9416-479A-A65B-1F53953BD05E}" type="presOf" srcId="{1842372B-728C-4BC7-9D83-15230F10A614}" destId="{6526E14F-2EB7-47D7-868A-C44A055D4594}" srcOrd="0" destOrd="0" presId="urn:microsoft.com/office/officeart/2005/8/layout/orgChart1"/>
+    <dgm:cxn modelId="{12269922-752E-4FFE-ADBE-32E860FDD1EC}" srcId="{F6D9FE41-73BC-40EF-BC24-17E24345C112}" destId="{C0379C3D-44CF-4B46-B585-05D4CA04D08F}" srcOrd="0" destOrd="0" parTransId="{10912338-BE3D-4008-A98C-20FF266BA640}" sibTransId="{B47AC820-1576-44FE-B75A-462F9A3E1A9E}"/>
+    <dgm:cxn modelId="{3852DE4C-3E13-4A0B-B796-8B24FB1CD4B5}" type="presOf" srcId="{D21D1992-ADB0-4EF0-93AB-1E9F75434F52}" destId="{AD79323F-1B49-4729-A289-6D620D749A9F}" srcOrd="0" destOrd="0" presId="urn:microsoft.com/office/officeart/2005/8/layout/orgChart1"/>
+    <dgm:cxn modelId="{BB2A7FAC-1E29-4F83-9A2E-5F954D36FD38}" type="presOf" srcId="{DC6511A6-2DC1-4CCB-86DB-BEFDAB64DDE4}" destId="{077A16B0-89CC-4A48-832B-C25F0878DF36}" srcOrd="0" destOrd="0" presId="urn:microsoft.com/office/officeart/2005/8/layout/orgChart1"/>
+    <dgm:cxn modelId="{577BC35A-F66A-4BBD-9E22-41C20C76A6D6}" type="presOf" srcId="{A9C07280-0A72-472E-BE76-F36D22C350B5}" destId="{F67BB4F9-FCC2-4C90-A5EA-73862D03E224}" srcOrd="0" destOrd="0" presId="urn:microsoft.com/office/officeart/2005/8/layout/orgChart1"/>
+    <dgm:cxn modelId="{9CF24023-7CFF-445B-96D8-25F45AE94B9D}" type="presOf" srcId="{F6631F0D-4003-4FCC-A63D-7640B86D3CF7}" destId="{3FE6DC64-57E8-4D54-A2F6-7F35A6B26A3C}" srcOrd="1" destOrd="0" presId="urn:microsoft.com/office/officeart/2005/8/layout/orgChart1"/>
+    <dgm:cxn modelId="{63317037-27B8-408D-9A70-965E41D3ABFC}" type="presOf" srcId="{01E943C2-F60A-4160-9AE4-B70A3B038017}" destId="{0AC2DA91-A00E-43D1-A5D1-CA5DB1708CE7}" srcOrd="1" destOrd="0" presId="urn:microsoft.com/office/officeart/2005/8/layout/orgChart1"/>
+    <dgm:cxn modelId="{16A039EF-929E-4D75-BCF1-AF42B6CB5EA1}" type="presOf" srcId="{C0379C3D-44CF-4B46-B585-05D4CA04D08F}" destId="{1619B013-66DD-4112-A89F-479A43573186}" srcOrd="0" destOrd="0" presId="urn:microsoft.com/office/officeart/2005/8/layout/orgChart1"/>
+    <dgm:cxn modelId="{8DB37ED5-3602-4C34-885E-F678559BCBC9}" srcId="{E5CCB25E-C655-4324-8217-14EF320224DF}" destId="{DBA5AD7A-C2C2-47CC-9C41-F03684C8A584}" srcOrd="2" destOrd="0" parTransId="{DC6511A6-2DC1-4CCB-86DB-BEFDAB64DDE4}" sibTransId="{8B91D15F-64A3-4AD7-8589-73646BCC8EA1}"/>
+    <dgm:cxn modelId="{C8F33616-4B8E-417C-A253-087A371A8EAB}" type="presOf" srcId="{ACA71FF6-43D1-4D9C-8997-F22E3A014CCA}" destId="{06EACE6F-B329-4F8A-9DF8-AA96E79B9847}" srcOrd="0" destOrd="0" presId="urn:microsoft.com/office/officeart/2005/8/layout/orgChart1"/>
+    <dgm:cxn modelId="{ECF41754-E2B8-44CC-99FC-E1E4DDA4CF46}" type="presOf" srcId="{1256CB85-BA23-4513-9CCD-B3AE1CAF87CC}" destId="{A2A59F6A-7566-4E8D-8E63-E8C4DA376E5F}" srcOrd="1" destOrd="0" presId="urn:microsoft.com/office/officeart/2005/8/layout/orgChart1"/>
+    <dgm:cxn modelId="{59C40AFD-10D9-4E4B-BECD-6F06668E797D}" srcId="{65C778D0-7669-4D4B-B4D6-4CD1381A0BF3}" destId="{1256CB85-BA23-4513-9CCD-B3AE1CAF87CC}" srcOrd="0" destOrd="0" parTransId="{F5F23906-48D7-4EF9-A256-60463F51DB60}" sibTransId="{ADBE4A46-BE9F-481C-B56C-B6B8EDD11E1E}"/>
+    <dgm:cxn modelId="{787823C2-5318-4AEF-926F-23543DB53719}" type="presOf" srcId="{8D222D37-B8A0-43AD-9933-E6199901A620}" destId="{E6B87659-DCA8-4621-B7CA-CA955397BA11}" srcOrd="0" destOrd="0" presId="urn:microsoft.com/office/officeart/2005/8/layout/orgChart1"/>
+    <dgm:cxn modelId="{0E0EF20E-EF6C-471E-A1CF-0CBEA2F88E17}" type="presOf" srcId="{01E943C2-F60A-4160-9AE4-B70A3B038017}" destId="{F0E27AB9-22B8-45F7-A29B-1D5ABB37A7A1}" srcOrd="0" destOrd="0" presId="urn:microsoft.com/office/officeart/2005/8/layout/orgChart1"/>
+    <dgm:cxn modelId="{3EF35756-3F98-4356-9146-9CB399B4034D}" type="presOf" srcId="{DBA5AD7A-C2C2-47CC-9C41-F03684C8A584}" destId="{A1098950-1343-4150-AB97-8EE58E881BBC}" srcOrd="0" destOrd="0" presId="urn:microsoft.com/office/officeart/2005/8/layout/orgChart1"/>
+    <dgm:cxn modelId="{26BD471B-F22A-4FB4-85C3-5B1ED3F7F8A2}" type="presOf" srcId="{E5CCB25E-C655-4324-8217-14EF320224DF}" destId="{72AC598E-578D-4A32-8CE1-C7314E12EC37}" srcOrd="1" destOrd="0" presId="urn:microsoft.com/office/officeart/2005/8/layout/orgChart1"/>
+    <dgm:cxn modelId="{1BAA918E-7678-49B1-AE03-270D07DC379C}" srcId="{422C33F5-672E-4B0C-B552-ED3DD9F2941B}" destId="{6B759DC2-3439-4108-98CB-B36DA3EC8CED}" srcOrd="1" destOrd="0" parTransId="{9AB43360-E212-49CE-A503-6F806BF9B862}" sibTransId="{3EBA5F64-3216-49C6-895D-1AD7176E6164}"/>
+    <dgm:cxn modelId="{E5BCC7D4-C778-4DFA-9D99-D4CCA6E21C4C}" type="presOf" srcId="{02E01EF1-C250-4B76-9AAA-4A4D9BCAEAE0}" destId="{AB1BFC6C-8F27-4F6C-97A6-D6FB13839B51}" srcOrd="0" destOrd="0" presId="urn:microsoft.com/office/officeart/2005/8/layout/orgChart1"/>
+    <dgm:cxn modelId="{DF4A1E84-C851-4C3D-B0C5-275D06AC7C84}" type="presOf" srcId="{E5CCB25E-C655-4324-8217-14EF320224DF}" destId="{BE086ED0-A51B-4215-B42F-E94C05C504E5}" srcOrd="0" destOrd="0" presId="urn:microsoft.com/office/officeart/2005/8/layout/orgChart1"/>
+    <dgm:cxn modelId="{0FFBBE3C-75C4-4EC4-925D-0B374733E7CD}" type="presOf" srcId="{422C33F5-672E-4B0C-B552-ED3DD9F2941B}" destId="{0F256B01-4570-4068-A359-7B9777BAC5E2}" srcOrd="0" destOrd="0" presId="urn:microsoft.com/office/officeart/2005/8/layout/orgChart1"/>
+    <dgm:cxn modelId="{75B35406-F01A-498A-BD80-03CF0EA5A03F}" type="presOf" srcId="{F85D92B1-E28E-466A-B1AF-ADDB99C02FC6}" destId="{CD932D47-FAA9-4BEA-94A0-664BBD2AA555}" srcOrd="0" destOrd="0" presId="urn:microsoft.com/office/officeart/2005/8/layout/orgChart1"/>
+    <dgm:cxn modelId="{3E7FE24D-958E-4913-AAF7-8D0EB1E07640}" type="presOf" srcId="{6B759DC2-3439-4108-98CB-B36DA3EC8CED}" destId="{CB29D046-9C3E-498D-9B0F-548827F377BC}" srcOrd="0" destOrd="0" presId="urn:microsoft.com/office/officeart/2005/8/layout/orgChart1"/>
+    <dgm:cxn modelId="{FC8D6FE8-44D1-4893-9A68-D4A14F718688}" type="presOf" srcId="{422C33F5-672E-4B0C-B552-ED3DD9F2941B}" destId="{B7FD21A3-9BC2-4ED9-A7A1-C733E512343E}" srcOrd="1" destOrd="0" presId="urn:microsoft.com/office/officeart/2005/8/layout/orgChart1"/>
+    <dgm:cxn modelId="{71CB9AFD-B018-4D1D-BBC9-D98D08CC723E}" type="presOf" srcId="{9AB43360-E212-49CE-A503-6F806BF9B862}" destId="{E40D1708-260F-4EE2-8BF4-0AF5CCE2572C}" srcOrd="0" destOrd="0" presId="urn:microsoft.com/office/officeart/2005/8/layout/orgChart1"/>
+    <dgm:cxn modelId="{4003D128-8F10-43A0-B6F3-71131E47FDCF}" srcId="{422C33F5-672E-4B0C-B552-ED3DD9F2941B}" destId="{2F023172-4E61-4511-AFCA-923C95EC486B}" srcOrd="2" destOrd="0" parTransId="{EFAA1426-84F3-4105-B915-EC8BECDA4C5D}" sibTransId="{623BE7AE-2B15-4D80-8224-B9BB04470764}"/>
+    <dgm:cxn modelId="{6737E2B2-C690-453C-B99B-59653A7E8FA4}" type="presOf" srcId="{F6631F0D-4003-4FCC-A63D-7640B86D3CF7}" destId="{52D48C03-8467-41A2-BB1B-AA409C672855}" srcOrd="0" destOrd="0" presId="urn:microsoft.com/office/officeart/2005/8/layout/orgChart1"/>
+    <dgm:cxn modelId="{E439C1C7-854A-4D8C-8D80-EB117F31A47C}" type="presOf" srcId="{847724BD-9062-4C15-867D-9A40745D5942}" destId="{003BFD0D-2BBC-46B3-A380-154B3A06829E}" srcOrd="1" destOrd="0" presId="urn:microsoft.com/office/officeart/2005/8/layout/orgChart1"/>
+    <dgm:cxn modelId="{8AD1475D-2600-4C89-9E12-2D3173936D7A}" type="presOf" srcId="{1256CB85-BA23-4513-9CCD-B3AE1CAF87CC}" destId="{F225889A-7CC3-4DBC-816A-0F9DBFD05802}" srcOrd="0" destOrd="0" presId="urn:microsoft.com/office/officeart/2005/8/layout/orgChart1"/>
+    <dgm:cxn modelId="{9D151346-9D01-4501-A5D2-05AAC8E43844}" type="presOf" srcId="{9F725B02-6E85-4887-8D8B-9306B1D3AB18}" destId="{060ACBB8-EB96-4241-88F8-0A4B28010FA5}" srcOrd="0" destOrd="0" presId="urn:microsoft.com/office/officeart/2005/8/layout/orgChart1"/>
+    <dgm:cxn modelId="{7343985B-FF23-4ABD-9625-C96E3889ECF9}" type="presOf" srcId="{2F023172-4E61-4511-AFCA-923C95EC486B}" destId="{3B846DCB-5246-4C95-9EC1-CF6D85158CF9}" srcOrd="1" destOrd="0" presId="urn:microsoft.com/office/officeart/2005/8/layout/orgChart1"/>
+    <dgm:cxn modelId="{7CF64986-F992-4523-93C3-5C373F05369E}" srcId="{E5CCB25E-C655-4324-8217-14EF320224DF}" destId="{F6631F0D-4003-4FCC-A63D-7640B86D3CF7}" srcOrd="0" destOrd="0" parTransId="{8D222D37-B8A0-43AD-9933-E6199901A620}" sibTransId="{3614496C-0600-46E1-9F6D-6FA1F7F4EDF8}"/>
+    <dgm:cxn modelId="{30A1F083-28D9-420B-8338-E645749A0574}" type="presOf" srcId="{6C87DEF1-267E-484B-BC33-85913E3EC10F}" destId="{EB5C76B9-D527-4D3B-989E-1EAE2115F0ED}" srcOrd="1" destOrd="0" presId="urn:microsoft.com/office/officeart/2005/8/layout/orgChart1"/>
+    <dgm:cxn modelId="{3715A702-2990-4779-853F-F58E6308CCAC}" type="presOf" srcId="{F6D9FE41-73BC-40EF-BC24-17E24345C112}" destId="{7F34AD9F-69E3-46E3-9A0D-23B0CDB74BF3}" srcOrd="0" destOrd="0" presId="urn:microsoft.com/office/officeart/2005/8/layout/orgChart1"/>
+    <dgm:cxn modelId="{A27B3C5F-DB75-41A4-8EBB-84770534D6B1}" srcId="{6C87DEF1-267E-484B-BC33-85913E3EC10F}" destId="{847724BD-9062-4C15-867D-9A40745D5942}" srcOrd="0" destOrd="0" parTransId="{D21D1992-ADB0-4EF0-93AB-1E9F75434F52}" sibTransId="{B070D5F0-61D4-4887-B12C-43BBA3301FE4}"/>
+    <dgm:cxn modelId="{37C086BA-50A8-48A6-BC88-F57613CE337F}" srcId="{C0379C3D-44CF-4B46-B585-05D4CA04D08F}" destId="{E5CCB25E-C655-4324-8217-14EF320224DF}" srcOrd="0" destOrd="0" parTransId="{C6313A3D-C187-4442-A89E-4A7FE10EBD0B}" sibTransId="{F2E2BC6B-9378-45F0-9818-1DB3A2541053}"/>
+    <dgm:cxn modelId="{BEE9318E-195B-4B53-BC4C-5CD437085BA5}" srcId="{6C87DEF1-267E-484B-BC33-85913E3EC10F}" destId="{01E943C2-F60A-4160-9AE4-B70A3B038017}" srcOrd="2" destOrd="0" parTransId="{02E01EF1-C250-4B76-9AAA-4A4D9BCAEAE0}" sibTransId="{1E2C944A-0A38-4685-A0BC-3B9082352F80}"/>
+    <dgm:cxn modelId="{B2D7024A-36EC-41B1-B6B4-AD878B90E3D5}" type="presOf" srcId="{C6313A3D-C187-4442-A89E-4A7FE10EBD0B}" destId="{3193C511-743D-4E69-9E1D-0740D16ABB9F}" srcOrd="0" destOrd="0" presId="urn:microsoft.com/office/officeart/2005/8/layout/orgChart1"/>
+    <dgm:cxn modelId="{D4984BE0-C415-454F-887F-272459B53897}" type="presOf" srcId="{1842372B-728C-4BC7-9D83-15230F10A614}" destId="{6B9FBD9E-2002-4113-8EDF-34E3BA90846F}" srcOrd="1" destOrd="0" presId="urn:microsoft.com/office/officeart/2005/8/layout/orgChart1"/>
+    <dgm:cxn modelId="{96322DE2-0E2C-4518-B0C3-ACA03CC26944}" type="presOf" srcId="{DBA5AD7A-C2C2-47CC-9C41-F03684C8A584}" destId="{8AE016EA-9964-4DAC-9E10-04A800F48939}" srcOrd="1" destOrd="0" presId="urn:microsoft.com/office/officeart/2005/8/layout/orgChart1"/>
+    <dgm:cxn modelId="{F2F418A4-DD23-47BA-B48E-E1A136286599}" type="presOf" srcId="{6B759DC2-3439-4108-98CB-B36DA3EC8CED}" destId="{85433A55-D717-48BC-8149-9AC20B91C08B}" srcOrd="1" destOrd="0" presId="urn:microsoft.com/office/officeart/2005/8/layout/orgChart1"/>
+    <dgm:cxn modelId="{A59A3917-3430-4887-B7BB-607F305BD5D3}" type="presOf" srcId="{2F023172-4E61-4511-AFCA-923C95EC486B}" destId="{5A047950-A498-4E53-A417-C812BDE16A6B}" srcOrd="0" destOrd="0" presId="urn:microsoft.com/office/officeart/2005/8/layout/orgChart1"/>
+    <dgm:cxn modelId="{51AF7F02-7677-4A26-BD2A-D6630CAAF4A2}" type="presOf" srcId="{ACA71FF6-43D1-4D9C-8997-F22E3A014CCA}" destId="{88497726-0A8F-4453-B9B5-15C1B21B5E45}" srcOrd="1" destOrd="0" presId="urn:microsoft.com/office/officeart/2005/8/layout/orgChart1"/>
+    <dgm:cxn modelId="{326146F0-26C8-47F7-8E0C-14B88C9F3262}" type="presOf" srcId="{7ADADAE6-FA49-433C-B86B-563F2A7A34E3}" destId="{E3D46B2D-06D6-4D5B-AB6B-02310BD3571E}" srcOrd="0" destOrd="0" presId="urn:microsoft.com/office/officeart/2005/8/layout/orgChart1"/>
+    <dgm:cxn modelId="{380037F8-4EB3-4846-9D1F-E132FED828F8}" type="presOf" srcId="{97DF12F3-EBEE-4710-B22F-47A71C2D3BA0}" destId="{A827EF7B-3FD3-4F9A-8747-368E792DAF1A}" srcOrd="0" destOrd="0" presId="urn:microsoft.com/office/officeart/2005/8/layout/orgChart1"/>
+    <dgm:cxn modelId="{DC37FE11-C388-4BB7-BD2D-F5169A5056DB}" type="presOf" srcId="{6C87DEF1-267E-484B-BC33-85913E3EC10F}" destId="{A92999D2-594E-4F7C-AC3B-8EAC9358F8AD}" srcOrd="0" destOrd="0" presId="urn:microsoft.com/office/officeart/2005/8/layout/orgChart1"/>
+    <dgm:cxn modelId="{C3BBBF89-454D-4003-BF18-86C84AEA71FD}" type="presOf" srcId="{1140E081-3CE3-4E40-84D1-D5CCA58BE7C7}" destId="{9D3CD290-6F82-471F-948C-49054C263DDB}" srcOrd="1" destOrd="0" presId="urn:microsoft.com/office/officeart/2005/8/layout/orgChart1"/>
+    <dgm:cxn modelId="{AB312A38-ACB4-41A2-A988-39AECE046E4D}" type="presOf" srcId="{F5F23906-48D7-4EF9-A256-60463F51DB60}" destId="{50609ABF-9BA2-4F31-946D-BF9C35D435FA}" srcOrd="0" destOrd="0" presId="urn:microsoft.com/office/officeart/2005/8/layout/orgChart1"/>
+    <dgm:cxn modelId="{DD68B110-2365-4AFD-B783-5ECCE1DAADFB}" type="presOf" srcId="{1140E081-3CE3-4E40-84D1-D5CCA58BE7C7}" destId="{E92B3A66-DD20-43A7-B574-7DCF7E4CEB01}" srcOrd="0" destOrd="0" presId="urn:microsoft.com/office/officeart/2005/8/layout/orgChart1"/>
+    <dgm:cxn modelId="{DBCA2FE9-3991-492D-95E4-EAFCD18666FE}" srcId="{6C87DEF1-267E-484B-BC33-85913E3EC10F}" destId="{1842372B-728C-4BC7-9D83-15230F10A614}" srcOrd="3" destOrd="0" parTransId="{8CBAA709-5B5F-4F4E-823F-B523AAB1D352}" sibTransId="{5A114E51-C5C1-4628-BAD2-613F15CC6CFB}"/>
+    <dgm:cxn modelId="{73F09D0E-1071-422C-AB1A-C9B2B24539FB}" type="presOf" srcId="{65C778D0-7669-4D4B-B4D6-4CD1381A0BF3}" destId="{5B674A70-3154-4944-B2C8-8AFF4B2D7C3C}" srcOrd="0" destOrd="0" presId="urn:microsoft.com/office/officeart/2005/8/layout/orgChart1"/>
+    <dgm:cxn modelId="{79C1DC50-BE1A-4B01-A9CF-B533299D421C}" type="presOf" srcId="{EFAA1426-84F3-4105-B915-EC8BECDA4C5D}" destId="{4D520FF4-990B-4A55-A2D2-83A63539A647}" srcOrd="0" destOrd="0" presId="urn:microsoft.com/office/officeart/2005/8/layout/orgChart1"/>
+    <dgm:cxn modelId="{7EDFCF15-729B-4032-9B17-7ABB32677736}" srcId="{C0379C3D-44CF-4B46-B585-05D4CA04D08F}" destId="{6C87DEF1-267E-484B-BC33-85913E3EC10F}" srcOrd="1" destOrd="0" parTransId="{F85D92B1-E28E-466A-B1AF-ADDB99C02FC6}" sibTransId="{DE255746-BC0D-4C76-8C21-7DB9F286F9DD}"/>
+    <dgm:cxn modelId="{7C069E50-9694-4531-B7A2-74D41359417F}" srcId="{422C33F5-672E-4B0C-B552-ED3DD9F2941B}" destId="{1140E081-3CE3-4E40-84D1-D5CCA58BE7C7}" srcOrd="0" destOrd="0" parTransId="{97DF12F3-EBEE-4710-B22F-47A71C2D3BA0}" sibTransId="{C5F6C251-A1A6-4005-9D84-BF0C1D14B06A}"/>
+    <dgm:cxn modelId="{CE1CDD17-E178-411D-94F9-139C7C4277D5}" srcId="{C0379C3D-44CF-4B46-B585-05D4CA04D08F}" destId="{65C778D0-7669-4D4B-B4D6-4CD1381A0BF3}" srcOrd="2" destOrd="0" parTransId="{7ADADAE6-FA49-433C-B86B-563F2A7A34E3}" sibTransId="{BECAC3D4-83DB-447E-8C69-B505D93CDF0D}"/>
+    <dgm:cxn modelId="{586F05A7-8C5A-4A3F-8306-5868E0C9DBC3}" srcId="{E5CCB25E-C655-4324-8217-14EF320224DF}" destId="{ACA71FF6-43D1-4D9C-8997-F22E3A014CCA}" srcOrd="1" destOrd="0" parTransId="{9F725B02-6E85-4887-8D8B-9306B1D3AB18}" sibTransId="{C39592C2-B966-4C4F-B193-F1D61E4F2F4C}"/>
+    <dgm:cxn modelId="{F0C538F1-1BCD-4137-AF7D-994EEBD8D569}" type="presOf" srcId="{C0379C3D-44CF-4B46-B585-05D4CA04D08F}" destId="{61BDDE93-DD40-4087-A945-D2649C41B8E9}" srcOrd="1" destOrd="0" presId="urn:microsoft.com/office/officeart/2005/8/layout/orgChart1"/>
+    <dgm:cxn modelId="{F07FBA25-C6BC-4DC2-AEBC-1082D32992C1}" type="presParOf" srcId="{7F34AD9F-69E3-46E3-9A0D-23B0CDB74BF3}" destId="{34D71FE7-425F-4EE3-AFDF-AA9C0005EC00}" srcOrd="0" destOrd="0" presId="urn:microsoft.com/office/officeart/2005/8/layout/orgChart1"/>
+    <dgm:cxn modelId="{751D16DE-4A9C-415E-B6D6-D9F5646A95FF}" type="presParOf" srcId="{34D71FE7-425F-4EE3-AFDF-AA9C0005EC00}" destId="{F1890DE0-7062-4AEE-90BD-8033034F9ABC}" srcOrd="0" destOrd="0" presId="urn:microsoft.com/office/officeart/2005/8/layout/orgChart1"/>
+    <dgm:cxn modelId="{3B5924F0-87EB-4C5D-96DD-47C6E12902EE}" type="presParOf" srcId="{F1890DE0-7062-4AEE-90BD-8033034F9ABC}" destId="{1619B013-66DD-4112-A89F-479A43573186}" srcOrd="0" destOrd="0" presId="urn:microsoft.com/office/officeart/2005/8/layout/orgChart1"/>
+    <dgm:cxn modelId="{71F2C5F0-D9DD-4B50-9615-DC8CA0816F25}" type="presParOf" srcId="{F1890DE0-7062-4AEE-90BD-8033034F9ABC}" destId="{61BDDE93-DD40-4087-A945-D2649C41B8E9}" srcOrd="1" destOrd="0" presId="urn:microsoft.com/office/officeart/2005/8/layout/orgChart1"/>
+    <dgm:cxn modelId="{149DBEB9-E880-4978-872F-A0E3A62C79AE}" type="presParOf" srcId="{34D71FE7-425F-4EE3-AFDF-AA9C0005EC00}" destId="{8441C452-B462-474B-A346-A7EFDCA3D2F1}" srcOrd="1" destOrd="0" presId="urn:microsoft.com/office/officeart/2005/8/layout/orgChart1"/>
+    <dgm:cxn modelId="{05D3FE71-ED22-4CE2-BDCB-0D0ADA734211}" type="presParOf" srcId="{8441C452-B462-474B-A346-A7EFDCA3D2F1}" destId="{3193C511-743D-4E69-9E1D-0740D16ABB9F}" srcOrd="0" destOrd="0" presId="urn:microsoft.com/office/officeart/2005/8/layout/orgChart1"/>
+    <dgm:cxn modelId="{F62ECE26-B7E0-4326-B0C1-CBC4F28BF0E1}" type="presParOf" srcId="{8441C452-B462-474B-A346-A7EFDCA3D2F1}" destId="{AEC697C2-71C9-4A4D-B40B-8D6A25D4588F}" srcOrd="1" destOrd="0" presId="urn:microsoft.com/office/officeart/2005/8/layout/orgChart1"/>
+    <dgm:cxn modelId="{EF4D82ED-159B-4F06-A2D5-8B382CF5CCFE}" type="presParOf" srcId="{AEC697C2-71C9-4A4D-B40B-8D6A25D4588F}" destId="{29C8B329-CD3B-4C38-8238-BEF64227BD43}" srcOrd="0" destOrd="0" presId="urn:microsoft.com/office/officeart/2005/8/layout/orgChart1"/>
+    <dgm:cxn modelId="{DB833EBF-4FAF-4E26-BE9F-746AA87B2667}" type="presParOf" srcId="{29C8B329-CD3B-4C38-8238-BEF64227BD43}" destId="{BE086ED0-A51B-4215-B42F-E94C05C504E5}" srcOrd="0" destOrd="0" presId="urn:microsoft.com/office/officeart/2005/8/layout/orgChart1"/>
+    <dgm:cxn modelId="{E405D1BC-55C5-46DA-A452-1AD17F91D406}" type="presParOf" srcId="{29C8B329-CD3B-4C38-8238-BEF64227BD43}" destId="{72AC598E-578D-4A32-8CE1-C7314E12EC37}" srcOrd="1" destOrd="0" presId="urn:microsoft.com/office/officeart/2005/8/layout/orgChart1"/>
+    <dgm:cxn modelId="{94322454-20D4-48DE-9009-794CCE7373FC}" type="presParOf" srcId="{AEC697C2-71C9-4A4D-B40B-8D6A25D4588F}" destId="{F6C77B8F-08AB-43F7-A50B-D3EF073FC12A}" srcOrd="1" destOrd="0" presId="urn:microsoft.com/office/officeart/2005/8/layout/orgChart1"/>
+    <dgm:cxn modelId="{7B25ACB2-CF47-4C73-9C55-D186702A0C5D}" type="presParOf" srcId="{F6C77B8F-08AB-43F7-A50B-D3EF073FC12A}" destId="{E6B87659-DCA8-4621-B7CA-CA955397BA11}" srcOrd="0" destOrd="0" presId="urn:microsoft.com/office/officeart/2005/8/layout/orgChart1"/>
+    <dgm:cxn modelId="{81C18708-1973-449C-BB23-2B93A33002AC}" type="presParOf" srcId="{F6C77B8F-08AB-43F7-A50B-D3EF073FC12A}" destId="{CC374027-09BA-4FC7-8623-E69442FA328E}" srcOrd="1" destOrd="0" presId="urn:microsoft.com/office/officeart/2005/8/layout/orgChart1"/>
+    <dgm:cxn modelId="{F8287993-CC59-463B-B27E-28C3A0FB3FE2}" type="presParOf" srcId="{CC374027-09BA-4FC7-8623-E69442FA328E}" destId="{2AE9A917-15E5-4688-BA26-130AE0D5AACB}" srcOrd="0" destOrd="0" presId="urn:microsoft.com/office/officeart/2005/8/layout/orgChart1"/>
+    <dgm:cxn modelId="{6E9EF4A3-75A8-45FE-A356-30A1D3B02E44}" type="presParOf" srcId="{2AE9A917-15E5-4688-BA26-130AE0D5AACB}" destId="{52D48C03-8467-41A2-BB1B-AA409C672855}" srcOrd="0" destOrd="0" presId="urn:microsoft.com/office/officeart/2005/8/layout/orgChart1"/>
+    <dgm:cxn modelId="{A1995A95-04D6-4EF9-9780-CB1DECE05EEC}" type="presParOf" srcId="{2AE9A917-15E5-4688-BA26-130AE0D5AACB}" destId="{3FE6DC64-57E8-4D54-A2F6-7F35A6B26A3C}" srcOrd="1" destOrd="0" presId="urn:microsoft.com/office/officeart/2005/8/layout/orgChart1"/>
+    <dgm:cxn modelId="{EC6824DF-C822-4003-B7D8-9310B53DBF6B}" type="presParOf" srcId="{CC374027-09BA-4FC7-8623-E69442FA328E}" destId="{87A74855-54C6-406F-A62A-3F4DC0154CAD}" srcOrd="1" destOrd="0" presId="urn:microsoft.com/office/officeart/2005/8/layout/orgChart1"/>
+    <dgm:cxn modelId="{E39036D7-4DF9-48CA-969F-D770D6012FE8}" type="presParOf" srcId="{CC374027-09BA-4FC7-8623-E69442FA328E}" destId="{108F2F3E-224C-40C0-90FA-92628D65C6E0}" srcOrd="2" destOrd="0" presId="urn:microsoft.com/office/officeart/2005/8/layout/orgChart1"/>
+    <dgm:cxn modelId="{ECCBD34D-DDEB-40C6-924E-80BE3640BBC7}" type="presParOf" srcId="{F6C77B8F-08AB-43F7-A50B-D3EF073FC12A}" destId="{060ACBB8-EB96-4241-88F8-0A4B28010FA5}" srcOrd="2" destOrd="0" presId="urn:microsoft.com/office/officeart/2005/8/layout/orgChart1"/>
+    <dgm:cxn modelId="{520C1B58-7E16-4140-AA8E-E31252D3115A}" type="presParOf" srcId="{F6C77B8F-08AB-43F7-A50B-D3EF073FC12A}" destId="{5980EB20-8273-42D1-BD97-ABD17A5CBBD6}" srcOrd="3" destOrd="0" presId="urn:microsoft.com/office/officeart/2005/8/layout/orgChart1"/>
+    <dgm:cxn modelId="{CD8ACCFD-2372-4ACC-8FC1-A413344822D1}" type="presParOf" srcId="{5980EB20-8273-42D1-BD97-ABD17A5CBBD6}" destId="{5B352A79-DAF3-4A09-B119-42431B557B32}" srcOrd="0" destOrd="0" presId="urn:microsoft.com/office/officeart/2005/8/layout/orgChart1"/>
+    <dgm:cxn modelId="{94115041-7330-4F5C-9EEA-0A280C7FEF21}" type="presParOf" srcId="{5B352A79-DAF3-4A09-B119-42431B557B32}" destId="{06EACE6F-B329-4F8A-9DF8-AA96E79B9847}" srcOrd="0" destOrd="0" presId="urn:microsoft.com/office/officeart/2005/8/layout/orgChart1"/>
+    <dgm:cxn modelId="{D1ABDD1B-188B-426E-B37B-EB699F51EBFC}" type="presParOf" srcId="{5B352A79-DAF3-4A09-B119-42431B557B32}" destId="{88497726-0A8F-4453-B9B5-15C1B21B5E45}" srcOrd="1" destOrd="0" presId="urn:microsoft.com/office/officeart/2005/8/layout/orgChart1"/>
+    <dgm:cxn modelId="{108337F9-F8DE-494D-81A2-A3FBCB5BECCA}" type="presParOf" srcId="{5980EB20-8273-42D1-BD97-ABD17A5CBBD6}" destId="{8763669A-C80D-4647-AE45-C7B6A524B694}" srcOrd="1" destOrd="0" presId="urn:microsoft.com/office/officeart/2005/8/layout/orgChart1"/>
+    <dgm:cxn modelId="{33A7FA83-DA63-4793-B901-1FFF5EB75D97}" type="presParOf" srcId="{5980EB20-8273-42D1-BD97-ABD17A5CBBD6}" destId="{8344D6D7-7134-46C5-A89C-8651C601C900}" srcOrd="2" destOrd="0" presId="urn:microsoft.com/office/officeart/2005/8/layout/orgChart1"/>
+    <dgm:cxn modelId="{4827263B-6E63-4BA1-848F-BE341C051868}" type="presParOf" srcId="{F6C77B8F-08AB-43F7-A50B-D3EF073FC12A}" destId="{077A16B0-89CC-4A48-832B-C25F0878DF36}" srcOrd="4" destOrd="0" presId="urn:microsoft.com/office/officeart/2005/8/layout/orgChart1"/>
+    <dgm:cxn modelId="{29603BA0-5383-40E2-BAF8-1D461FA97F74}" type="presParOf" srcId="{F6C77B8F-08AB-43F7-A50B-D3EF073FC12A}" destId="{03EBD7C5-A39C-4D61-8FC1-A64B1467CAC0}" srcOrd="5" destOrd="0" presId="urn:microsoft.com/office/officeart/2005/8/layout/orgChart1"/>
+    <dgm:cxn modelId="{54473FDE-D005-4AB6-8B52-BBB8FFD153D0}" type="presParOf" srcId="{03EBD7C5-A39C-4D61-8FC1-A64B1467CAC0}" destId="{58D4601D-84E2-4FE4-9772-953F092AA6C0}" srcOrd="0" destOrd="0" presId="urn:microsoft.com/office/officeart/2005/8/layout/orgChart1"/>
+    <dgm:cxn modelId="{5B36FFF1-07BD-4FF7-B575-6614AC8C498F}" type="presParOf" srcId="{58D4601D-84E2-4FE4-9772-953F092AA6C0}" destId="{A1098950-1343-4150-AB97-8EE58E881BBC}" srcOrd="0" destOrd="0" presId="urn:microsoft.com/office/officeart/2005/8/layout/orgChart1"/>
+    <dgm:cxn modelId="{F2789A89-0EA5-468C-A6BC-70300293FD29}" type="presParOf" srcId="{58D4601D-84E2-4FE4-9772-953F092AA6C0}" destId="{8AE016EA-9964-4DAC-9E10-04A800F48939}" srcOrd="1" destOrd="0" presId="urn:microsoft.com/office/officeart/2005/8/layout/orgChart1"/>
+    <dgm:cxn modelId="{1774AEBA-8695-467D-8442-81EA4592AEAA}" type="presParOf" srcId="{03EBD7C5-A39C-4D61-8FC1-A64B1467CAC0}" destId="{15841B15-E005-4D95-8111-4450B8F876B0}" srcOrd="1" destOrd="0" presId="urn:microsoft.com/office/officeart/2005/8/layout/orgChart1"/>
+    <dgm:cxn modelId="{AE8A8B50-7862-4D15-AD30-5B8AB46143C7}" type="presParOf" srcId="{03EBD7C5-A39C-4D61-8FC1-A64B1467CAC0}" destId="{7CF4B498-9CDD-47B9-8839-31BBDAE1014A}" srcOrd="2" destOrd="0" presId="urn:microsoft.com/office/officeart/2005/8/layout/orgChart1"/>
+    <dgm:cxn modelId="{5604B73C-BB44-49E9-B431-B567EBC50C8C}" type="presParOf" srcId="{AEC697C2-71C9-4A4D-B40B-8D6A25D4588F}" destId="{A8570125-FF94-48DF-8A90-5A3103E80F89}" srcOrd="2" destOrd="0" presId="urn:microsoft.com/office/officeart/2005/8/layout/orgChart1"/>
+    <dgm:cxn modelId="{778E4F83-E21C-40BD-8BFB-37F21C331491}" type="presParOf" srcId="{8441C452-B462-474B-A346-A7EFDCA3D2F1}" destId="{CD932D47-FAA9-4BEA-94A0-664BBD2AA555}" srcOrd="2" destOrd="0" presId="urn:microsoft.com/office/officeart/2005/8/layout/orgChart1"/>
+    <dgm:cxn modelId="{D138C8AF-0983-436B-85BA-3468663ADA6C}" type="presParOf" srcId="{8441C452-B462-474B-A346-A7EFDCA3D2F1}" destId="{F2359C8B-E123-493B-9B89-048E791E2169}" srcOrd="3" destOrd="0" presId="urn:microsoft.com/office/officeart/2005/8/layout/orgChart1"/>
+    <dgm:cxn modelId="{4B6272E4-3BD0-4958-B04F-02B9B460D6B7}" type="presParOf" srcId="{F2359C8B-E123-493B-9B89-048E791E2169}" destId="{06B18B84-A25A-49BC-B35C-E8EA5DA8EA83}" srcOrd="0" destOrd="0" presId="urn:microsoft.com/office/officeart/2005/8/layout/orgChart1"/>
+    <dgm:cxn modelId="{AB18E783-8BA1-4992-9C02-B5449D94BA52}" type="presParOf" srcId="{06B18B84-A25A-49BC-B35C-E8EA5DA8EA83}" destId="{A92999D2-594E-4F7C-AC3B-8EAC9358F8AD}" srcOrd="0" destOrd="0" presId="urn:microsoft.com/office/officeart/2005/8/layout/orgChart1"/>
+    <dgm:cxn modelId="{C640B0E6-2BE2-47F8-806A-72709FAA6D76}" type="presParOf" srcId="{06B18B84-A25A-49BC-B35C-E8EA5DA8EA83}" destId="{EB5C76B9-D527-4D3B-989E-1EAE2115F0ED}" srcOrd="1" destOrd="0" presId="urn:microsoft.com/office/officeart/2005/8/layout/orgChart1"/>
+    <dgm:cxn modelId="{F3E93CA6-5E5F-42AA-BACF-D903F5F312C8}" type="presParOf" srcId="{F2359C8B-E123-493B-9B89-048E791E2169}" destId="{E6E0D52E-2965-4827-BB76-3FC5E37FA703}" srcOrd="1" destOrd="0" presId="urn:microsoft.com/office/officeart/2005/8/layout/orgChart1"/>
+    <dgm:cxn modelId="{60FE7FA4-E41D-4C01-A8A1-DAC83166B036}" type="presParOf" srcId="{E6E0D52E-2965-4827-BB76-3FC5E37FA703}" destId="{AD79323F-1B49-4729-A289-6D620D749A9F}" srcOrd="0" destOrd="0" presId="urn:microsoft.com/office/officeart/2005/8/layout/orgChart1"/>
+    <dgm:cxn modelId="{6CC9C66A-68CF-4C58-AAC9-68F3E792F9F7}" type="presParOf" srcId="{E6E0D52E-2965-4827-BB76-3FC5E37FA703}" destId="{E44A8880-D179-421A-BDBE-FF75BD67D32D}" srcOrd="1" destOrd="0" presId="urn:microsoft.com/office/officeart/2005/8/layout/orgChart1"/>
+    <dgm:cxn modelId="{938A028E-DC9F-4039-96B5-30472CF4B435}" type="presParOf" srcId="{E44A8880-D179-421A-BDBE-FF75BD67D32D}" destId="{E942DB70-7965-43C8-A044-BC36341C1459}" srcOrd="0" destOrd="0" presId="urn:microsoft.com/office/officeart/2005/8/layout/orgChart1"/>
+    <dgm:cxn modelId="{79043B97-EBA6-4170-B039-EF93EEE867F5}" type="presParOf" srcId="{E942DB70-7965-43C8-A044-BC36341C1459}" destId="{471E24C0-93B7-4A88-8409-904FB0ABBFE3}" srcOrd="0" destOrd="0" presId="urn:microsoft.com/office/officeart/2005/8/layout/orgChart1"/>
+    <dgm:cxn modelId="{7A95D783-8376-4CF6-B518-431DDFF2F5EE}" type="presParOf" srcId="{E942DB70-7965-43C8-A044-BC36341C1459}" destId="{003BFD0D-2BBC-46B3-A380-154B3A06829E}" srcOrd="1" destOrd="0" presId="urn:microsoft.com/office/officeart/2005/8/layout/orgChart1"/>
+    <dgm:cxn modelId="{7E903E99-F7C6-45E7-92F0-399E9BDD94BD}" type="presParOf" srcId="{E44A8880-D179-421A-BDBE-FF75BD67D32D}" destId="{F7C775FA-93FB-4EFB-B25E-9EAAFE65ED7B}" srcOrd="1" destOrd="0" presId="urn:microsoft.com/office/officeart/2005/8/layout/orgChart1"/>
+    <dgm:cxn modelId="{8CAD1E39-B931-4B1A-918F-045549573260}" type="presParOf" srcId="{E44A8880-D179-421A-BDBE-FF75BD67D32D}" destId="{4714D7A2-A307-4028-BB69-263A46444659}" srcOrd="2" destOrd="0" presId="urn:microsoft.com/office/officeart/2005/8/layout/orgChart1"/>
+    <dgm:cxn modelId="{A7FC8E37-8F35-4B24-9F09-AA247AB10C6B}" type="presParOf" srcId="{E6E0D52E-2965-4827-BB76-3FC5E37FA703}" destId="{F67BB4F9-FCC2-4C90-A5EA-73862D03E224}" srcOrd="2" destOrd="0" presId="urn:microsoft.com/office/officeart/2005/8/layout/orgChart1"/>
+    <dgm:cxn modelId="{D18709D6-29F0-444D-8369-9F2144CCE5E6}" type="presParOf" srcId="{E6E0D52E-2965-4827-BB76-3FC5E37FA703}" destId="{61EFBF08-F3FD-4234-850E-27EEB7C3840C}" srcOrd="3" destOrd="0" presId="urn:microsoft.com/office/officeart/2005/8/layout/orgChart1"/>
+    <dgm:cxn modelId="{3C7A0B01-73F7-47E5-AAEC-A6363F71070B}" type="presParOf" srcId="{61EFBF08-F3FD-4234-850E-27EEB7C3840C}" destId="{C399CF59-6DE0-47AF-AB0B-69A396442F8E}" srcOrd="0" destOrd="0" presId="urn:microsoft.com/office/officeart/2005/8/layout/orgChart1"/>
+    <dgm:cxn modelId="{5A0F974B-97E4-474F-9563-ED25F2312DA5}" type="presParOf" srcId="{C399CF59-6DE0-47AF-AB0B-69A396442F8E}" destId="{0F256B01-4570-4068-A359-7B9777BAC5E2}" srcOrd="0" destOrd="0" presId="urn:microsoft.com/office/officeart/2005/8/layout/orgChart1"/>
+    <dgm:cxn modelId="{4512AA13-982A-43F3-A3C2-099BAE23C5BC}" type="presParOf" srcId="{C399CF59-6DE0-47AF-AB0B-69A396442F8E}" destId="{B7FD21A3-9BC2-4ED9-A7A1-C733E512343E}" srcOrd="1" destOrd="0" presId="urn:microsoft.com/office/officeart/2005/8/layout/orgChart1"/>
+    <dgm:cxn modelId="{7C66D77C-270A-47C5-826C-156A24AD9CAF}" type="presParOf" srcId="{61EFBF08-F3FD-4234-850E-27EEB7C3840C}" destId="{C77B128E-43FB-4EA9-8528-90CD104B401C}" srcOrd="1" destOrd="0" presId="urn:microsoft.com/office/officeart/2005/8/layout/orgChart1"/>
+    <dgm:cxn modelId="{3770A1CF-1B03-42F3-B430-3A34B94C127C}" type="presParOf" srcId="{C77B128E-43FB-4EA9-8528-90CD104B401C}" destId="{A827EF7B-3FD3-4F9A-8747-368E792DAF1A}" srcOrd="0" destOrd="0" presId="urn:microsoft.com/office/officeart/2005/8/layout/orgChart1"/>
+    <dgm:cxn modelId="{F5B9182F-23C0-4256-9C30-311EB1424486}" type="presParOf" srcId="{C77B128E-43FB-4EA9-8528-90CD104B401C}" destId="{63FC3916-A554-49C1-891A-AA19B7D5C0B3}" srcOrd="1" destOrd="0" presId="urn:microsoft.com/office/officeart/2005/8/layout/orgChart1"/>
+    <dgm:cxn modelId="{67075589-24A1-46D9-B0B6-01F9024F306D}" type="presParOf" srcId="{63FC3916-A554-49C1-891A-AA19B7D5C0B3}" destId="{E6035742-818A-478F-A019-62950F9AF1A5}" srcOrd="0" destOrd="0" presId="urn:microsoft.com/office/officeart/2005/8/layout/orgChart1"/>
+    <dgm:cxn modelId="{191B8C0A-043C-425B-A64E-571CABF0BE39}" type="presParOf" srcId="{E6035742-818A-478F-A019-62950F9AF1A5}" destId="{E92B3A66-DD20-43A7-B574-7DCF7E4CEB01}" srcOrd="0" destOrd="0" presId="urn:microsoft.com/office/officeart/2005/8/layout/orgChart1"/>
+    <dgm:cxn modelId="{4AD3B3E7-1C11-4235-A2FD-87434294135A}" type="presParOf" srcId="{E6035742-818A-478F-A019-62950F9AF1A5}" destId="{9D3CD290-6F82-471F-948C-49054C263DDB}" srcOrd="1" destOrd="0" presId="urn:microsoft.com/office/officeart/2005/8/layout/orgChart1"/>
+    <dgm:cxn modelId="{56C8155D-6F6F-45B3-A6C8-FD8594BBDC5A}" type="presParOf" srcId="{63FC3916-A554-49C1-891A-AA19B7D5C0B3}" destId="{5FB6C452-5109-44F6-ADC6-6176B854ABBC}" srcOrd="1" destOrd="0" presId="urn:microsoft.com/office/officeart/2005/8/layout/orgChart1"/>
+    <dgm:cxn modelId="{C6537453-EBEA-4452-8490-3F0CAFD8A116}" type="presParOf" srcId="{63FC3916-A554-49C1-891A-AA19B7D5C0B3}" destId="{218FC863-11ED-4535-80E2-521960AC596D}" srcOrd="2" destOrd="0" presId="urn:microsoft.com/office/officeart/2005/8/layout/orgChart1"/>
+    <dgm:cxn modelId="{EBD44252-CC23-41D9-9668-B447D9A325F5}" type="presParOf" srcId="{C77B128E-43FB-4EA9-8528-90CD104B401C}" destId="{E40D1708-260F-4EE2-8BF4-0AF5CCE2572C}" srcOrd="2" destOrd="0" presId="urn:microsoft.com/office/officeart/2005/8/layout/orgChart1"/>
+    <dgm:cxn modelId="{1C11B58D-9CA1-4F2A-A2F0-B8FD8CC0C23A}" type="presParOf" srcId="{C77B128E-43FB-4EA9-8528-90CD104B401C}" destId="{235B3544-6DF5-4DE6-B763-09C412CE3761}" srcOrd="3" destOrd="0" presId="urn:microsoft.com/office/officeart/2005/8/layout/orgChart1"/>
+    <dgm:cxn modelId="{674D7059-A3ED-4FE5-A38A-6C05A456618D}" type="presParOf" srcId="{235B3544-6DF5-4DE6-B763-09C412CE3761}" destId="{14B40ABD-982E-4220-A243-0AD6F2C54601}" srcOrd="0" destOrd="0" presId="urn:microsoft.com/office/officeart/2005/8/layout/orgChart1"/>
+    <dgm:cxn modelId="{F06B3815-06FE-4360-B50A-9D7A3413AC41}" type="presParOf" srcId="{14B40ABD-982E-4220-A243-0AD6F2C54601}" destId="{CB29D046-9C3E-498D-9B0F-548827F377BC}" srcOrd="0" destOrd="0" presId="urn:microsoft.com/office/officeart/2005/8/layout/orgChart1"/>
+    <dgm:cxn modelId="{7EE001F9-A6CA-4732-8E98-B2CFA0BF330C}" type="presParOf" srcId="{14B40ABD-982E-4220-A243-0AD6F2C54601}" destId="{85433A55-D717-48BC-8149-9AC20B91C08B}" srcOrd="1" destOrd="0" presId="urn:microsoft.com/office/officeart/2005/8/layout/orgChart1"/>
+    <dgm:cxn modelId="{42E91946-5766-4929-9851-D8ECAB35D1BF}" type="presParOf" srcId="{235B3544-6DF5-4DE6-B763-09C412CE3761}" destId="{2D342578-2CBA-4143-94A7-BD4245625C52}" srcOrd="1" destOrd="0" presId="urn:microsoft.com/office/officeart/2005/8/layout/orgChart1"/>
+    <dgm:cxn modelId="{D8CF9FFD-07F7-4293-9B0B-55EB1411D8E9}" type="presParOf" srcId="{235B3544-6DF5-4DE6-B763-09C412CE3761}" destId="{382608F6-D16C-448E-8972-379705B77DAB}" srcOrd="2" destOrd="0" presId="urn:microsoft.com/office/officeart/2005/8/layout/orgChart1"/>
+    <dgm:cxn modelId="{7BDD0EB8-A707-47A1-A7E8-FFE86A276ECD}" type="presParOf" srcId="{C77B128E-43FB-4EA9-8528-90CD104B401C}" destId="{4D520FF4-990B-4A55-A2D2-83A63539A647}" srcOrd="4" destOrd="0" presId="urn:microsoft.com/office/officeart/2005/8/layout/orgChart1"/>
+    <dgm:cxn modelId="{DBB922EF-3ACF-4E0B-B427-A8F0483AE2CF}" type="presParOf" srcId="{C77B128E-43FB-4EA9-8528-90CD104B401C}" destId="{39C7AD21-223F-4497-88DB-891105BF6347}" srcOrd="5" destOrd="0" presId="urn:microsoft.com/office/officeart/2005/8/layout/orgChart1"/>
+    <dgm:cxn modelId="{22F504E8-FCE9-4AF7-BF7E-840E4DCB323C}" type="presParOf" srcId="{39C7AD21-223F-4497-88DB-891105BF6347}" destId="{12AC61A5-FDF9-4F9F-B047-884F5393E4BE}" srcOrd="0" destOrd="0" presId="urn:microsoft.com/office/officeart/2005/8/layout/orgChart1"/>
+    <dgm:cxn modelId="{188C1BB1-4F5F-4FC0-81C7-516376A1FEBA}" type="presParOf" srcId="{12AC61A5-FDF9-4F9F-B047-884F5393E4BE}" destId="{5A047950-A498-4E53-A417-C812BDE16A6B}" srcOrd="0" destOrd="0" presId="urn:microsoft.com/office/officeart/2005/8/layout/orgChart1"/>
+    <dgm:cxn modelId="{B3CA591D-6F41-4EE9-A0D0-3CA2D508D0C7}" type="presParOf" srcId="{12AC61A5-FDF9-4F9F-B047-884F5393E4BE}" destId="{3B846DCB-5246-4C95-9EC1-CF6D85158CF9}" srcOrd="1" destOrd="0" presId="urn:microsoft.com/office/officeart/2005/8/layout/orgChart1"/>
+    <dgm:cxn modelId="{DCE88FDE-7A45-465B-88AB-EC19F433A7C2}" type="presParOf" srcId="{39C7AD21-223F-4497-88DB-891105BF6347}" destId="{EB8432E4-ECAB-44FC-A1FD-6FA259D0157A}" srcOrd="1" destOrd="0" presId="urn:microsoft.com/office/officeart/2005/8/layout/orgChart1"/>
+    <dgm:cxn modelId="{086D9844-5439-43D0-B725-B166726ED65A}" type="presParOf" srcId="{39C7AD21-223F-4497-88DB-891105BF6347}" destId="{EC22E159-6F1A-4F9B-AA55-923FC11AAEC4}" srcOrd="2" destOrd="0" presId="urn:microsoft.com/office/officeart/2005/8/layout/orgChart1"/>
+    <dgm:cxn modelId="{4EF6DEEC-5B93-4785-836E-C9EF9B1C5AA7}" type="presParOf" srcId="{61EFBF08-F3FD-4234-850E-27EEB7C3840C}" destId="{9059E626-9BCA-4403-8BCF-1CFF5238A3C3}" srcOrd="2" destOrd="0" presId="urn:microsoft.com/office/officeart/2005/8/layout/orgChart1"/>
+    <dgm:cxn modelId="{A894528A-F008-49E7-8343-7A5A6A7C5865}" type="presParOf" srcId="{E6E0D52E-2965-4827-BB76-3FC5E37FA703}" destId="{AB1BFC6C-8F27-4F6C-97A6-D6FB13839B51}" srcOrd="4" destOrd="0" presId="urn:microsoft.com/office/officeart/2005/8/layout/orgChart1"/>
+    <dgm:cxn modelId="{759AE698-0D9E-4B82-81C1-70CDDDD62496}" type="presParOf" srcId="{E6E0D52E-2965-4827-BB76-3FC5E37FA703}" destId="{201740FA-0624-498F-9EAA-7E43A2DAA88B}" srcOrd="5" destOrd="0" presId="urn:microsoft.com/office/officeart/2005/8/layout/orgChart1"/>
+    <dgm:cxn modelId="{0B33395B-2471-4BAF-8877-58AB272E3A43}" type="presParOf" srcId="{201740FA-0624-498F-9EAA-7E43A2DAA88B}" destId="{86A80C55-1065-4693-9799-84B06A0433A7}" srcOrd="0" destOrd="0" presId="urn:microsoft.com/office/officeart/2005/8/layout/orgChart1"/>
+    <dgm:cxn modelId="{619AC8B1-FE75-49C9-8C73-30ECB4ED4757}" type="presParOf" srcId="{86A80C55-1065-4693-9799-84B06A0433A7}" destId="{F0E27AB9-22B8-45F7-A29B-1D5ABB37A7A1}" srcOrd="0" destOrd="0" presId="urn:microsoft.com/office/officeart/2005/8/layout/orgChart1"/>
+    <dgm:cxn modelId="{4AC5C5D6-E211-44A8-9547-77065CBCD1D4}" type="presParOf" srcId="{86A80C55-1065-4693-9799-84B06A0433A7}" destId="{0AC2DA91-A00E-43D1-A5D1-CA5DB1708CE7}" srcOrd="1" destOrd="0" presId="urn:microsoft.com/office/officeart/2005/8/layout/orgChart1"/>
+    <dgm:cxn modelId="{63F2558B-F9E1-45A1-93E8-001A7B00B1CB}" type="presParOf" srcId="{201740FA-0624-498F-9EAA-7E43A2DAA88B}" destId="{B32D8C34-E30F-4CA2-AD5C-0CA79DF6CA93}" srcOrd="1" destOrd="0" presId="urn:microsoft.com/office/officeart/2005/8/layout/orgChart1"/>
+    <dgm:cxn modelId="{4D6202F7-348B-43A4-81C2-3AE8B15AEE32}" type="presParOf" srcId="{201740FA-0624-498F-9EAA-7E43A2DAA88B}" destId="{81C00972-281C-490F-815A-F836F9471161}" srcOrd="2" destOrd="0" presId="urn:microsoft.com/office/officeart/2005/8/layout/orgChart1"/>
+    <dgm:cxn modelId="{FF7CFF6B-0E2A-4D5A-A59F-57F65ADD9F97}" type="presParOf" srcId="{E6E0D52E-2965-4827-BB76-3FC5E37FA703}" destId="{9D42B076-C679-4CE2-BF26-8BA0F459E855}" srcOrd="6" destOrd="0" presId="urn:microsoft.com/office/officeart/2005/8/layout/orgChart1"/>
+    <dgm:cxn modelId="{5AF0473F-5C07-4492-8E2B-88C9091B1D43}" type="presParOf" srcId="{E6E0D52E-2965-4827-BB76-3FC5E37FA703}" destId="{E1E43C58-5AEB-473A-A912-49DFC2C8A53F}" srcOrd="7" destOrd="0" presId="urn:microsoft.com/office/officeart/2005/8/layout/orgChart1"/>
+    <dgm:cxn modelId="{0297F8F0-BAF9-4AF9-A1AA-59542DFD9D40}" type="presParOf" srcId="{E1E43C58-5AEB-473A-A912-49DFC2C8A53F}" destId="{AF80B871-FC14-4B02-BFF4-4E410FA2564F}" srcOrd="0" destOrd="0" presId="urn:microsoft.com/office/officeart/2005/8/layout/orgChart1"/>
+    <dgm:cxn modelId="{56C0ACFE-D7EA-4E7B-8126-6A5A14E3F697}" type="presParOf" srcId="{AF80B871-FC14-4B02-BFF4-4E410FA2564F}" destId="{6526E14F-2EB7-47D7-868A-C44A055D4594}" srcOrd="0" destOrd="0" presId="urn:microsoft.com/office/officeart/2005/8/layout/orgChart1"/>
+    <dgm:cxn modelId="{5A4DC12A-BFC5-4BDC-A6E0-D0A74AC62D2D}" type="presParOf" srcId="{AF80B871-FC14-4B02-BFF4-4E410FA2564F}" destId="{6B9FBD9E-2002-4113-8EDF-34E3BA90846F}" srcOrd="1" destOrd="0" presId="urn:microsoft.com/office/officeart/2005/8/layout/orgChart1"/>
+    <dgm:cxn modelId="{464F1A3F-57E2-4379-8E15-3B71C1175763}" type="presParOf" srcId="{E1E43C58-5AEB-473A-A912-49DFC2C8A53F}" destId="{EDD88F62-777B-4A85-B340-2CEA09FBE2E3}" srcOrd="1" destOrd="0" presId="urn:microsoft.com/office/officeart/2005/8/layout/orgChart1"/>
+    <dgm:cxn modelId="{57E7D696-A135-40EE-9C32-AB53D37873A9}" type="presParOf" srcId="{E1E43C58-5AEB-473A-A912-49DFC2C8A53F}" destId="{1BBD8426-DCE1-428B-B8FD-F42A25503DE7}" srcOrd="2" destOrd="0" presId="urn:microsoft.com/office/officeart/2005/8/layout/orgChart1"/>
+    <dgm:cxn modelId="{D664F73A-B719-480A-9E61-A991DD8A7127}" type="presParOf" srcId="{F2359C8B-E123-493B-9B89-048E791E2169}" destId="{63D30C63-A9CB-4538-8066-FCD31EE92EFD}" srcOrd="2" destOrd="0" presId="urn:microsoft.com/office/officeart/2005/8/layout/orgChart1"/>
+    <dgm:cxn modelId="{C7DE1ECB-3EBA-48C0-8BB8-CB59B4D58402}" type="presParOf" srcId="{8441C452-B462-474B-A346-A7EFDCA3D2F1}" destId="{E3D46B2D-06D6-4D5B-AB6B-02310BD3571E}" srcOrd="4" destOrd="0" presId="urn:microsoft.com/office/officeart/2005/8/layout/orgChart1"/>
+    <dgm:cxn modelId="{CFE9F783-AC9E-478C-921F-78DAAFB30762}" type="presParOf" srcId="{8441C452-B462-474B-A346-A7EFDCA3D2F1}" destId="{4BF979C6-F76A-412C-BBDF-F897DC87EE64}" srcOrd="5" destOrd="0" presId="urn:microsoft.com/office/officeart/2005/8/layout/orgChart1"/>
+    <dgm:cxn modelId="{36B92423-578B-476D-A8C1-A207CF76CC9E}" type="presParOf" srcId="{4BF979C6-F76A-412C-BBDF-F897DC87EE64}" destId="{63D6E332-1CFE-41B8-B760-E0E052578F6C}" srcOrd="0" destOrd="0" presId="urn:microsoft.com/office/officeart/2005/8/layout/orgChart1"/>
+    <dgm:cxn modelId="{291135B1-728E-4776-95C3-9ED838ACA1BB}" type="presParOf" srcId="{63D6E332-1CFE-41B8-B760-E0E052578F6C}" destId="{5B674A70-3154-4944-B2C8-8AFF4B2D7C3C}" srcOrd="0" destOrd="0" presId="urn:microsoft.com/office/officeart/2005/8/layout/orgChart1"/>
+    <dgm:cxn modelId="{F90B635D-9953-43E0-9686-4C337A8DC5C7}" type="presParOf" srcId="{63D6E332-1CFE-41B8-B760-E0E052578F6C}" destId="{370DC1AA-D00A-4062-9EAA-2B2F33F61C82}" srcOrd="1" destOrd="0" presId="urn:microsoft.com/office/officeart/2005/8/layout/orgChart1"/>
+    <dgm:cxn modelId="{588D91A8-E533-400A-B679-4C23F5ED1E1C}" type="presParOf" srcId="{4BF979C6-F76A-412C-BBDF-F897DC87EE64}" destId="{349A7559-2FB9-41B2-92EF-D297E9A3A3E9}" srcOrd="1" destOrd="0" presId="urn:microsoft.com/office/officeart/2005/8/layout/orgChart1"/>
+    <dgm:cxn modelId="{DFB6072A-6189-4C10-A351-09DDB3D93B93}" type="presParOf" srcId="{349A7559-2FB9-41B2-92EF-D297E9A3A3E9}" destId="{50609ABF-9BA2-4F31-946D-BF9C35D435FA}" srcOrd="0" destOrd="0" presId="urn:microsoft.com/office/officeart/2005/8/layout/orgChart1"/>
+    <dgm:cxn modelId="{40096BAA-4D46-4208-9C28-D7335014C4C3}" type="presParOf" srcId="{349A7559-2FB9-41B2-92EF-D297E9A3A3E9}" destId="{27CD699F-7113-4516-89F4-F2E20D446619}" srcOrd="1" destOrd="0" presId="urn:microsoft.com/office/officeart/2005/8/layout/orgChart1"/>
+    <dgm:cxn modelId="{0D14E796-CD47-4341-B9CE-5C9296533516}" type="presParOf" srcId="{27CD699F-7113-4516-89F4-F2E20D446619}" destId="{DA47DD6C-2714-4E90-BF28-EEA552104C47}" srcOrd="0" destOrd="0" presId="urn:microsoft.com/office/officeart/2005/8/layout/orgChart1"/>
+    <dgm:cxn modelId="{FB47155D-626B-4EC2-9849-9B5D1F0EBC00}" type="presParOf" srcId="{DA47DD6C-2714-4E90-BF28-EEA552104C47}" destId="{F225889A-7CC3-4DBC-816A-0F9DBFD05802}" srcOrd="0" destOrd="0" presId="urn:microsoft.com/office/officeart/2005/8/layout/orgChart1"/>
+    <dgm:cxn modelId="{B51A868F-2A54-4E65-8F22-EE55B9A3FDC4}" type="presParOf" srcId="{DA47DD6C-2714-4E90-BF28-EEA552104C47}" destId="{A2A59F6A-7566-4E8D-8E63-E8C4DA376E5F}" srcOrd="1" destOrd="0" presId="urn:microsoft.com/office/officeart/2005/8/layout/orgChart1"/>
+    <dgm:cxn modelId="{7C405A5E-128C-462D-91BE-9E39BD99C33A}" type="presParOf" srcId="{27CD699F-7113-4516-89F4-F2E20D446619}" destId="{4E517C8C-D5AB-45CF-A17D-B3EF77DDCBD8}" srcOrd="1" destOrd="0" presId="urn:microsoft.com/office/officeart/2005/8/layout/orgChart1"/>
+    <dgm:cxn modelId="{37DE0FE8-1518-43A1-A97E-C93E13C3B972}" type="presParOf" srcId="{27CD699F-7113-4516-89F4-F2E20D446619}" destId="{0075BD85-BE26-4D98-8B51-585F347ED75B}" srcOrd="2" destOrd="0" presId="urn:microsoft.com/office/officeart/2005/8/layout/orgChart1"/>
+    <dgm:cxn modelId="{CC909B77-FDC7-45B2-B403-0DCCA10F64AC}" type="presParOf" srcId="{4BF979C6-F76A-412C-BBDF-F897DC87EE64}" destId="{2B06B934-8BCE-4FFB-A955-DDA94526D187}" srcOrd="2" destOrd="0" presId="urn:microsoft.com/office/officeart/2005/8/layout/orgChart1"/>
+    <dgm:cxn modelId="{AFB41816-E529-457C-910A-51FA7D4A6E57}" type="presParOf" srcId="{34D71FE7-425F-4EE3-AFDF-AA9C0005EC00}" destId="{E830106F-A813-48E5-A896-6C28DFD2EE33}" srcOrd="2" destOrd="0" presId="urn:microsoft.com/office/officeart/2005/8/layout/orgChart1"/>
+  </dgm:cxnLst>
+  <dgm:bg/>
+  <dgm:whole/>
+  <dgm:extLst>
+    <a:ext uri="http://schemas.microsoft.com/office/drawing/2008/diagram">
+      <dsp:dataModelExt xmlns:dsp="http://schemas.microsoft.com/office/drawing/2008/diagram" relId="rId6" minVer="http://schemas.openxmlformats.org/drawingml/2006/diagram"/>
     </a:ext>
   </dgm:extLst>
 </dgm:dataModel>
@@ -3085,6 +5741,1928 @@
 </dsp:drawing>
 </file>
 
+<file path=ppt/diagrams/drawing2.xml><?xml version="1.0" encoding="utf-8"?>
+<dsp:drawing xmlns:dgm="http://schemas.openxmlformats.org/drawingml/2006/diagram" xmlns:dsp="http://schemas.microsoft.com/office/drawing/2008/diagram" xmlns:a="http://schemas.openxmlformats.org/drawingml/2006/main">
+  <dsp:spTree>
+    <dsp:nvGrpSpPr>
+      <dsp:cNvPr id="0" name=""/>
+      <dsp:cNvGrpSpPr/>
+    </dsp:nvGrpSpPr>
+    <dsp:grpSpPr/>
+    <dsp:sp modelId="{50609ABF-9BA2-4F31-946D-BF9C35D435FA}">
+      <dsp:nvSpPr>
+        <dsp:cNvPr id="0" name=""/>
+        <dsp:cNvSpPr/>
+      </dsp:nvSpPr>
+      <dsp:spPr>
+        <a:xfrm>
+          <a:off x="5133919" y="1351990"/>
+          <a:ext cx="125155" cy="383809"/>
+        </a:xfrm>
+        <a:custGeom>
+          <a:avLst/>
+          <a:gdLst/>
+          <a:ahLst/>
+          <a:cxnLst/>
+          <a:rect l="0" t="0" r="0" b="0"/>
+          <a:pathLst>
+            <a:path>
+              <a:moveTo>
+                <a:pt x="0" y="0"/>
+              </a:moveTo>
+              <a:lnTo>
+                <a:pt x="0" y="383809"/>
+              </a:lnTo>
+              <a:lnTo>
+                <a:pt x="125155" y="383809"/>
+              </a:lnTo>
+            </a:path>
+          </a:pathLst>
+        </a:custGeom>
+        <a:noFill/>
+        <a:ln w="25400" cap="flat" cmpd="sng" algn="ctr">
+          <a:solidFill>
+            <a:schemeClr val="tx1"/>
+          </a:solidFill>
+          <a:prstDash val="solid"/>
+        </a:ln>
+        <a:effectLst/>
+      </dsp:spPr>
+      <dsp:style>
+        <a:lnRef idx="2">
+          <a:scrgbClr r="0" g="0" b="0"/>
+        </a:lnRef>
+        <a:fillRef idx="0">
+          <a:scrgbClr r="0" g="0" b="0"/>
+        </a:fillRef>
+        <a:effectRef idx="0">
+          <a:scrgbClr r="0" g="0" b="0"/>
+        </a:effectRef>
+        <a:fontRef idx="minor"/>
+      </dsp:style>
+    </dsp:sp>
+    <dsp:sp modelId="{E3D46B2D-06D6-4D5B-AB6B-02310BD3571E}">
+      <dsp:nvSpPr>
+        <dsp:cNvPr id="0" name=""/>
+        <dsp:cNvSpPr/>
+      </dsp:nvSpPr>
+      <dsp:spPr>
+        <a:xfrm>
+          <a:off x="2943704" y="759589"/>
+          <a:ext cx="2523962" cy="175217"/>
+        </a:xfrm>
+        <a:custGeom>
+          <a:avLst/>
+          <a:gdLst/>
+          <a:ahLst/>
+          <a:cxnLst/>
+          <a:rect l="0" t="0" r="0" b="0"/>
+          <a:pathLst>
+            <a:path>
+              <a:moveTo>
+                <a:pt x="0" y="0"/>
+              </a:moveTo>
+              <a:lnTo>
+                <a:pt x="0" y="87608"/>
+              </a:lnTo>
+              <a:lnTo>
+                <a:pt x="2523962" y="87608"/>
+              </a:lnTo>
+              <a:lnTo>
+                <a:pt x="2523962" y="175217"/>
+              </a:lnTo>
+            </a:path>
+          </a:pathLst>
+        </a:custGeom>
+        <a:noFill/>
+        <a:ln w="25400" cap="flat" cmpd="sng" algn="ctr">
+          <a:solidFill>
+            <a:schemeClr val="tx1"/>
+          </a:solidFill>
+          <a:prstDash val="solid"/>
+        </a:ln>
+        <a:effectLst/>
+      </dsp:spPr>
+      <dsp:style>
+        <a:lnRef idx="2">
+          <a:scrgbClr r="0" g="0" b="0"/>
+        </a:lnRef>
+        <a:fillRef idx="0">
+          <a:scrgbClr r="0" g="0" b="0"/>
+        </a:fillRef>
+        <a:effectRef idx="0">
+          <a:scrgbClr r="0" g="0" b="0"/>
+        </a:effectRef>
+        <a:fontRef idx="minor"/>
+      </dsp:style>
+    </dsp:sp>
+    <dsp:sp modelId="{9D42B076-C679-4CE2-BF26-8BA0F459E855}">
+      <dsp:nvSpPr>
+        <dsp:cNvPr id="0" name=""/>
+        <dsp:cNvSpPr/>
+      </dsp:nvSpPr>
+      <dsp:spPr>
+        <a:xfrm>
+          <a:off x="3152295" y="1351990"/>
+          <a:ext cx="1514377" cy="175217"/>
+        </a:xfrm>
+        <a:custGeom>
+          <a:avLst/>
+          <a:gdLst/>
+          <a:ahLst/>
+          <a:cxnLst/>
+          <a:rect l="0" t="0" r="0" b="0"/>
+          <a:pathLst>
+            <a:path>
+              <a:moveTo>
+                <a:pt x="0" y="0"/>
+              </a:moveTo>
+              <a:lnTo>
+                <a:pt x="0" y="87608"/>
+              </a:lnTo>
+              <a:lnTo>
+                <a:pt x="1514377" y="87608"/>
+              </a:lnTo>
+              <a:lnTo>
+                <a:pt x="1514377" y="175217"/>
+              </a:lnTo>
+            </a:path>
+          </a:pathLst>
+        </a:custGeom>
+        <a:noFill/>
+        <a:ln w="25400" cap="flat" cmpd="sng" algn="ctr">
+          <a:solidFill>
+            <a:schemeClr val="tx1"/>
+          </a:solidFill>
+          <a:prstDash val="solid"/>
+        </a:ln>
+        <a:effectLst/>
+      </dsp:spPr>
+      <dsp:style>
+        <a:lnRef idx="2">
+          <a:scrgbClr r="0" g="0" b="0"/>
+        </a:lnRef>
+        <a:fillRef idx="0">
+          <a:scrgbClr r="0" g="0" b="0"/>
+        </a:fillRef>
+        <a:effectRef idx="0">
+          <a:scrgbClr r="0" g="0" b="0"/>
+        </a:effectRef>
+        <a:fontRef idx="minor"/>
+      </dsp:style>
+    </dsp:sp>
+    <dsp:sp modelId="{AB1BFC6C-8F27-4F6C-97A6-D6FB13839B51}">
+      <dsp:nvSpPr>
+        <dsp:cNvPr id="0" name=""/>
+        <dsp:cNvSpPr/>
+      </dsp:nvSpPr>
+      <dsp:spPr>
+        <a:xfrm>
+          <a:off x="3152295" y="1351990"/>
+          <a:ext cx="504792" cy="175217"/>
+        </a:xfrm>
+        <a:custGeom>
+          <a:avLst/>
+          <a:gdLst/>
+          <a:ahLst/>
+          <a:cxnLst/>
+          <a:rect l="0" t="0" r="0" b="0"/>
+          <a:pathLst>
+            <a:path>
+              <a:moveTo>
+                <a:pt x="0" y="0"/>
+              </a:moveTo>
+              <a:lnTo>
+                <a:pt x="0" y="87608"/>
+              </a:lnTo>
+              <a:lnTo>
+                <a:pt x="504792" y="87608"/>
+              </a:lnTo>
+              <a:lnTo>
+                <a:pt x="504792" y="175217"/>
+              </a:lnTo>
+            </a:path>
+          </a:pathLst>
+        </a:custGeom>
+        <a:noFill/>
+        <a:ln w="25400" cap="flat" cmpd="sng" algn="ctr">
+          <a:solidFill>
+            <a:schemeClr val="tx1"/>
+          </a:solidFill>
+          <a:prstDash val="solid"/>
+        </a:ln>
+        <a:effectLst/>
+      </dsp:spPr>
+      <dsp:style>
+        <a:lnRef idx="2">
+          <a:scrgbClr r="0" g="0" b="0"/>
+        </a:lnRef>
+        <a:fillRef idx="0">
+          <a:scrgbClr r="0" g="0" b="0"/>
+        </a:fillRef>
+        <a:effectRef idx="0">
+          <a:scrgbClr r="0" g="0" b="0"/>
+        </a:effectRef>
+        <a:fontRef idx="minor"/>
+      </dsp:style>
+    </dsp:sp>
+    <dsp:sp modelId="{4D520FF4-990B-4A55-A2D2-83A63539A647}">
+      <dsp:nvSpPr>
+        <dsp:cNvPr id="0" name=""/>
+        <dsp:cNvSpPr/>
+      </dsp:nvSpPr>
+      <dsp:spPr>
+        <a:xfrm>
+          <a:off x="2313756" y="1944391"/>
+          <a:ext cx="125155" cy="1568611"/>
+        </a:xfrm>
+        <a:custGeom>
+          <a:avLst/>
+          <a:gdLst/>
+          <a:ahLst/>
+          <a:cxnLst/>
+          <a:rect l="0" t="0" r="0" b="0"/>
+          <a:pathLst>
+            <a:path>
+              <a:moveTo>
+                <a:pt x="0" y="0"/>
+              </a:moveTo>
+              <a:lnTo>
+                <a:pt x="0" y="1568611"/>
+              </a:lnTo>
+              <a:lnTo>
+                <a:pt x="125155" y="1568611"/>
+              </a:lnTo>
+            </a:path>
+          </a:pathLst>
+        </a:custGeom>
+        <a:noFill/>
+        <a:ln w="25400" cap="flat" cmpd="sng" algn="ctr">
+          <a:solidFill>
+            <a:schemeClr val="tx1"/>
+          </a:solidFill>
+          <a:prstDash val="solid"/>
+        </a:ln>
+        <a:effectLst/>
+      </dsp:spPr>
+      <dsp:style>
+        <a:lnRef idx="2">
+          <a:scrgbClr r="0" g="0" b="0"/>
+        </a:lnRef>
+        <a:fillRef idx="0">
+          <a:scrgbClr r="0" g="0" b="0"/>
+        </a:fillRef>
+        <a:effectRef idx="0">
+          <a:scrgbClr r="0" g="0" b="0"/>
+        </a:effectRef>
+        <a:fontRef idx="minor"/>
+      </dsp:style>
+    </dsp:sp>
+    <dsp:sp modelId="{E40D1708-260F-4EE2-8BF4-0AF5CCE2572C}">
+      <dsp:nvSpPr>
+        <dsp:cNvPr id="0" name=""/>
+        <dsp:cNvSpPr/>
+      </dsp:nvSpPr>
+      <dsp:spPr>
+        <a:xfrm>
+          <a:off x="2313756" y="1944391"/>
+          <a:ext cx="125155" cy="976210"/>
+        </a:xfrm>
+        <a:custGeom>
+          <a:avLst/>
+          <a:gdLst/>
+          <a:ahLst/>
+          <a:cxnLst/>
+          <a:rect l="0" t="0" r="0" b="0"/>
+          <a:pathLst>
+            <a:path>
+              <a:moveTo>
+                <a:pt x="0" y="0"/>
+              </a:moveTo>
+              <a:lnTo>
+                <a:pt x="0" y="976210"/>
+              </a:lnTo>
+              <a:lnTo>
+                <a:pt x="125155" y="976210"/>
+              </a:lnTo>
+            </a:path>
+          </a:pathLst>
+        </a:custGeom>
+        <a:noFill/>
+        <a:ln w="25400" cap="flat" cmpd="sng" algn="ctr">
+          <a:solidFill>
+            <a:schemeClr val="tx1"/>
+          </a:solidFill>
+          <a:prstDash val="solid"/>
+        </a:ln>
+        <a:effectLst/>
+      </dsp:spPr>
+      <dsp:style>
+        <a:lnRef idx="2">
+          <a:scrgbClr r="0" g="0" b="0"/>
+        </a:lnRef>
+        <a:fillRef idx="0">
+          <a:scrgbClr r="0" g="0" b="0"/>
+        </a:fillRef>
+        <a:effectRef idx="0">
+          <a:scrgbClr r="0" g="0" b="0"/>
+        </a:effectRef>
+        <a:fontRef idx="minor"/>
+      </dsp:style>
+    </dsp:sp>
+    <dsp:sp modelId="{A827EF7B-3FD3-4F9A-8747-368E792DAF1A}">
+      <dsp:nvSpPr>
+        <dsp:cNvPr id="0" name=""/>
+        <dsp:cNvSpPr/>
+      </dsp:nvSpPr>
+      <dsp:spPr>
+        <a:xfrm>
+          <a:off x="2313756" y="1944391"/>
+          <a:ext cx="125155" cy="383809"/>
+        </a:xfrm>
+        <a:custGeom>
+          <a:avLst/>
+          <a:gdLst/>
+          <a:ahLst/>
+          <a:cxnLst/>
+          <a:rect l="0" t="0" r="0" b="0"/>
+          <a:pathLst>
+            <a:path>
+              <a:moveTo>
+                <a:pt x="0" y="0"/>
+              </a:moveTo>
+              <a:lnTo>
+                <a:pt x="0" y="383809"/>
+              </a:lnTo>
+              <a:lnTo>
+                <a:pt x="125155" y="383809"/>
+              </a:lnTo>
+            </a:path>
+          </a:pathLst>
+        </a:custGeom>
+        <a:noFill/>
+        <a:ln w="25400" cap="flat" cmpd="sng" algn="ctr">
+          <a:solidFill>
+            <a:schemeClr val="tx1"/>
+          </a:solidFill>
+          <a:prstDash val="solid"/>
+        </a:ln>
+        <a:effectLst/>
+      </dsp:spPr>
+      <dsp:style>
+        <a:lnRef idx="2">
+          <a:scrgbClr r="0" g="0" b="0"/>
+        </a:lnRef>
+        <a:fillRef idx="0">
+          <a:scrgbClr r="0" g="0" b="0"/>
+        </a:fillRef>
+        <a:effectRef idx="0">
+          <a:scrgbClr r="0" g="0" b="0"/>
+        </a:effectRef>
+        <a:fontRef idx="minor"/>
+      </dsp:style>
+    </dsp:sp>
+    <dsp:sp modelId="{F67BB4F9-FCC2-4C90-A5EA-73862D03E224}">
+      <dsp:nvSpPr>
+        <dsp:cNvPr id="0" name=""/>
+        <dsp:cNvSpPr/>
+      </dsp:nvSpPr>
+      <dsp:spPr>
+        <a:xfrm>
+          <a:off x="2647503" y="1351990"/>
+          <a:ext cx="504792" cy="175217"/>
+        </a:xfrm>
+        <a:custGeom>
+          <a:avLst/>
+          <a:gdLst/>
+          <a:ahLst/>
+          <a:cxnLst/>
+          <a:rect l="0" t="0" r="0" b="0"/>
+          <a:pathLst>
+            <a:path>
+              <a:moveTo>
+                <a:pt x="504792" y="0"/>
+              </a:moveTo>
+              <a:lnTo>
+                <a:pt x="504792" y="87608"/>
+              </a:lnTo>
+              <a:lnTo>
+                <a:pt x="0" y="87608"/>
+              </a:lnTo>
+              <a:lnTo>
+                <a:pt x="0" y="175217"/>
+              </a:lnTo>
+            </a:path>
+          </a:pathLst>
+        </a:custGeom>
+        <a:noFill/>
+        <a:ln w="25400" cap="flat" cmpd="sng" algn="ctr">
+          <a:solidFill>
+            <a:schemeClr val="tx1"/>
+          </a:solidFill>
+          <a:prstDash val="solid"/>
+        </a:ln>
+        <a:effectLst/>
+      </dsp:spPr>
+      <dsp:style>
+        <a:lnRef idx="2">
+          <a:scrgbClr r="0" g="0" b="0"/>
+        </a:lnRef>
+        <a:fillRef idx="0">
+          <a:scrgbClr r="0" g="0" b="0"/>
+        </a:fillRef>
+        <a:effectRef idx="0">
+          <a:scrgbClr r="0" g="0" b="0"/>
+        </a:effectRef>
+        <a:fontRef idx="minor"/>
+      </dsp:style>
+    </dsp:sp>
+    <dsp:sp modelId="{AD79323F-1B49-4729-A289-6D620D749A9F}">
+      <dsp:nvSpPr>
+        <dsp:cNvPr id="0" name=""/>
+        <dsp:cNvSpPr/>
+      </dsp:nvSpPr>
+      <dsp:spPr>
+        <a:xfrm>
+          <a:off x="1637918" y="1351990"/>
+          <a:ext cx="1514377" cy="175217"/>
+        </a:xfrm>
+        <a:custGeom>
+          <a:avLst/>
+          <a:gdLst/>
+          <a:ahLst/>
+          <a:cxnLst/>
+          <a:rect l="0" t="0" r="0" b="0"/>
+          <a:pathLst>
+            <a:path>
+              <a:moveTo>
+                <a:pt x="1514377" y="0"/>
+              </a:moveTo>
+              <a:lnTo>
+                <a:pt x="1514377" y="87608"/>
+              </a:lnTo>
+              <a:lnTo>
+                <a:pt x="0" y="87608"/>
+              </a:lnTo>
+              <a:lnTo>
+                <a:pt x="0" y="175217"/>
+              </a:lnTo>
+            </a:path>
+          </a:pathLst>
+        </a:custGeom>
+        <a:noFill/>
+        <a:ln w="25400" cap="flat" cmpd="sng" algn="ctr">
+          <a:solidFill>
+            <a:schemeClr val="tx1"/>
+          </a:solidFill>
+          <a:prstDash val="solid"/>
+        </a:ln>
+        <a:effectLst/>
+      </dsp:spPr>
+      <dsp:style>
+        <a:lnRef idx="2">
+          <a:scrgbClr r="0" g="0" b="0"/>
+        </a:lnRef>
+        <a:fillRef idx="0">
+          <a:scrgbClr r="0" g="0" b="0"/>
+        </a:fillRef>
+        <a:effectRef idx="0">
+          <a:scrgbClr r="0" g="0" b="0"/>
+        </a:effectRef>
+        <a:fontRef idx="minor"/>
+      </dsp:style>
+    </dsp:sp>
+    <dsp:sp modelId="{CD932D47-FAA9-4BEA-94A0-664BBD2AA555}">
+      <dsp:nvSpPr>
+        <dsp:cNvPr id="0" name=""/>
+        <dsp:cNvSpPr/>
+      </dsp:nvSpPr>
+      <dsp:spPr>
+        <a:xfrm>
+          <a:off x="2943704" y="759589"/>
+          <a:ext cx="208591" cy="175217"/>
+        </a:xfrm>
+        <a:custGeom>
+          <a:avLst/>
+          <a:gdLst/>
+          <a:ahLst/>
+          <a:cxnLst/>
+          <a:rect l="0" t="0" r="0" b="0"/>
+          <a:pathLst>
+            <a:path>
+              <a:moveTo>
+                <a:pt x="0" y="0"/>
+              </a:moveTo>
+              <a:lnTo>
+                <a:pt x="0" y="87608"/>
+              </a:lnTo>
+              <a:lnTo>
+                <a:pt x="208591" y="87608"/>
+              </a:lnTo>
+              <a:lnTo>
+                <a:pt x="208591" y="175217"/>
+              </a:lnTo>
+            </a:path>
+          </a:pathLst>
+        </a:custGeom>
+        <a:noFill/>
+        <a:ln w="25400" cap="flat" cmpd="sng" algn="ctr">
+          <a:solidFill>
+            <a:schemeClr val="tx1"/>
+          </a:solidFill>
+          <a:prstDash val="solid"/>
+        </a:ln>
+        <a:effectLst/>
+      </dsp:spPr>
+      <dsp:style>
+        <a:lnRef idx="2">
+          <a:scrgbClr r="0" g="0" b="0"/>
+        </a:lnRef>
+        <a:fillRef idx="0">
+          <a:scrgbClr r="0" g="0" b="0"/>
+        </a:fillRef>
+        <a:effectRef idx="0">
+          <a:scrgbClr r="0" g="0" b="0"/>
+        </a:effectRef>
+        <a:fontRef idx="minor"/>
+      </dsp:style>
+    </dsp:sp>
+    <dsp:sp modelId="{077A16B0-89CC-4A48-832B-C25F0878DF36}">
+      <dsp:nvSpPr>
+        <dsp:cNvPr id="0" name=""/>
+        <dsp:cNvSpPr/>
+      </dsp:nvSpPr>
+      <dsp:spPr>
+        <a:xfrm>
+          <a:off x="85994" y="1351990"/>
+          <a:ext cx="125155" cy="1568611"/>
+        </a:xfrm>
+        <a:custGeom>
+          <a:avLst/>
+          <a:gdLst/>
+          <a:ahLst/>
+          <a:cxnLst/>
+          <a:rect l="0" t="0" r="0" b="0"/>
+          <a:pathLst>
+            <a:path>
+              <a:moveTo>
+                <a:pt x="0" y="0"/>
+              </a:moveTo>
+              <a:lnTo>
+                <a:pt x="0" y="1568611"/>
+              </a:lnTo>
+              <a:lnTo>
+                <a:pt x="125155" y="1568611"/>
+              </a:lnTo>
+            </a:path>
+          </a:pathLst>
+        </a:custGeom>
+        <a:noFill/>
+        <a:ln w="25400" cap="flat" cmpd="sng" algn="ctr">
+          <a:solidFill>
+            <a:schemeClr val="tx1"/>
+          </a:solidFill>
+          <a:prstDash val="solid"/>
+        </a:ln>
+        <a:effectLst/>
+      </dsp:spPr>
+      <dsp:style>
+        <a:lnRef idx="2">
+          <a:scrgbClr r="0" g="0" b="0"/>
+        </a:lnRef>
+        <a:fillRef idx="0">
+          <a:scrgbClr r="0" g="0" b="0"/>
+        </a:fillRef>
+        <a:effectRef idx="0">
+          <a:scrgbClr r="0" g="0" b="0"/>
+        </a:effectRef>
+        <a:fontRef idx="minor"/>
+      </dsp:style>
+    </dsp:sp>
+    <dsp:sp modelId="{060ACBB8-EB96-4241-88F8-0A4B28010FA5}">
+      <dsp:nvSpPr>
+        <dsp:cNvPr id="0" name=""/>
+        <dsp:cNvSpPr/>
+      </dsp:nvSpPr>
+      <dsp:spPr>
+        <a:xfrm>
+          <a:off x="85994" y="1351990"/>
+          <a:ext cx="125155" cy="976210"/>
+        </a:xfrm>
+        <a:custGeom>
+          <a:avLst/>
+          <a:gdLst/>
+          <a:ahLst/>
+          <a:cxnLst/>
+          <a:rect l="0" t="0" r="0" b="0"/>
+          <a:pathLst>
+            <a:path>
+              <a:moveTo>
+                <a:pt x="0" y="0"/>
+              </a:moveTo>
+              <a:lnTo>
+                <a:pt x="0" y="976210"/>
+              </a:lnTo>
+              <a:lnTo>
+                <a:pt x="125155" y="976210"/>
+              </a:lnTo>
+            </a:path>
+          </a:pathLst>
+        </a:custGeom>
+        <a:noFill/>
+        <a:ln w="25400" cap="flat" cmpd="sng" algn="ctr">
+          <a:solidFill>
+            <a:schemeClr val="tx1"/>
+          </a:solidFill>
+          <a:prstDash val="solid"/>
+        </a:ln>
+        <a:effectLst/>
+      </dsp:spPr>
+      <dsp:style>
+        <a:lnRef idx="2">
+          <a:scrgbClr r="0" g="0" b="0"/>
+        </a:lnRef>
+        <a:fillRef idx="0">
+          <a:scrgbClr r="0" g="0" b="0"/>
+        </a:fillRef>
+        <a:effectRef idx="0">
+          <a:scrgbClr r="0" g="0" b="0"/>
+        </a:effectRef>
+        <a:fontRef idx="minor"/>
+      </dsp:style>
+    </dsp:sp>
+    <dsp:sp modelId="{E6B87659-DCA8-4621-B7CA-CA955397BA11}">
+      <dsp:nvSpPr>
+        <dsp:cNvPr id="0" name=""/>
+        <dsp:cNvSpPr/>
+      </dsp:nvSpPr>
+      <dsp:spPr>
+        <a:xfrm>
+          <a:off x="85994" y="1351990"/>
+          <a:ext cx="125155" cy="383809"/>
+        </a:xfrm>
+        <a:custGeom>
+          <a:avLst/>
+          <a:gdLst/>
+          <a:ahLst/>
+          <a:cxnLst/>
+          <a:rect l="0" t="0" r="0" b="0"/>
+          <a:pathLst>
+            <a:path>
+              <a:moveTo>
+                <a:pt x="0" y="0"/>
+              </a:moveTo>
+              <a:lnTo>
+                <a:pt x="0" y="383809"/>
+              </a:lnTo>
+              <a:lnTo>
+                <a:pt x="125155" y="383809"/>
+              </a:lnTo>
+            </a:path>
+          </a:pathLst>
+        </a:custGeom>
+        <a:noFill/>
+        <a:ln w="25400" cap="flat" cmpd="sng" algn="ctr">
+          <a:solidFill>
+            <a:schemeClr val="tx1"/>
+          </a:solidFill>
+          <a:prstDash val="solid"/>
+        </a:ln>
+        <a:effectLst/>
+      </dsp:spPr>
+      <dsp:style>
+        <a:lnRef idx="2">
+          <a:scrgbClr r="0" g="0" b="0"/>
+        </a:lnRef>
+        <a:fillRef idx="0">
+          <a:scrgbClr r="0" g="0" b="0"/>
+        </a:fillRef>
+        <a:effectRef idx="0">
+          <a:scrgbClr r="0" g="0" b="0"/>
+        </a:effectRef>
+        <a:fontRef idx="minor"/>
+      </dsp:style>
+    </dsp:sp>
+    <dsp:sp modelId="{3193C511-743D-4E69-9E1D-0740D16ABB9F}">
+      <dsp:nvSpPr>
+        <dsp:cNvPr id="0" name=""/>
+        <dsp:cNvSpPr/>
+      </dsp:nvSpPr>
+      <dsp:spPr>
+        <a:xfrm>
+          <a:off x="419741" y="759589"/>
+          <a:ext cx="2523962" cy="175217"/>
+        </a:xfrm>
+        <a:custGeom>
+          <a:avLst/>
+          <a:gdLst/>
+          <a:ahLst/>
+          <a:cxnLst/>
+          <a:rect l="0" t="0" r="0" b="0"/>
+          <a:pathLst>
+            <a:path>
+              <a:moveTo>
+                <a:pt x="2523962" y="0"/>
+              </a:moveTo>
+              <a:lnTo>
+                <a:pt x="2523962" y="87608"/>
+              </a:lnTo>
+              <a:lnTo>
+                <a:pt x="0" y="87608"/>
+              </a:lnTo>
+              <a:lnTo>
+                <a:pt x="0" y="175217"/>
+              </a:lnTo>
+            </a:path>
+          </a:pathLst>
+        </a:custGeom>
+        <a:noFill/>
+        <a:ln w="25400" cap="flat" cmpd="sng" algn="ctr">
+          <a:solidFill>
+            <a:schemeClr val="tx1"/>
+          </a:solidFill>
+          <a:prstDash val="solid"/>
+        </a:ln>
+        <a:effectLst/>
+      </dsp:spPr>
+      <dsp:style>
+        <a:lnRef idx="2">
+          <a:scrgbClr r="0" g="0" b="0"/>
+        </a:lnRef>
+        <a:fillRef idx="0">
+          <a:scrgbClr r="0" g="0" b="0"/>
+        </a:fillRef>
+        <a:effectRef idx="0">
+          <a:scrgbClr r="0" g="0" b="0"/>
+        </a:effectRef>
+        <a:fontRef idx="minor"/>
+      </dsp:style>
+    </dsp:sp>
+    <dsp:sp modelId="{1619B013-66DD-4112-A89F-479A43573186}">
+      <dsp:nvSpPr>
+        <dsp:cNvPr id="0" name=""/>
+        <dsp:cNvSpPr/>
+      </dsp:nvSpPr>
+      <dsp:spPr>
+        <a:xfrm>
+          <a:off x="2526520" y="342405"/>
+          <a:ext cx="834367" cy="417183"/>
+        </a:xfrm>
+        <a:prstGeom prst="rect">
+          <a:avLst/>
+        </a:prstGeom>
+        <a:noFill/>
+        <a:ln w="25400" cap="flat" cmpd="sng" algn="ctr">
+          <a:solidFill>
+            <a:schemeClr val="tx1"/>
+          </a:solidFill>
+          <a:prstDash val="solid"/>
+        </a:ln>
+        <a:effectLst/>
+      </dsp:spPr>
+      <dsp:style>
+        <a:lnRef idx="2">
+          <a:scrgbClr r="0" g="0" b="0"/>
+        </a:lnRef>
+        <a:fillRef idx="1">
+          <a:scrgbClr r="0" g="0" b="0"/>
+        </a:fillRef>
+        <a:effectRef idx="0">
+          <a:scrgbClr r="0" g="0" b="0"/>
+        </a:effectRef>
+        <a:fontRef idx="minor">
+          <a:schemeClr val="lt1"/>
+        </a:fontRef>
+      </dsp:style>
+      <dsp:txBody>
+        <a:bodyPr spcFirstLastPara="0" vert="horz" wrap="square" lIns="8890" tIns="8890" rIns="8890" bIns="8890" numCol="1" spcCol="1270" anchor="ctr" anchorCtr="0">
+          <a:noAutofit/>
+        </a:bodyPr>
+        <a:lstStyle/>
+        <a:p>
+          <a:pPr lvl="0" algn="ctr" defTabSz="622300">
+            <a:lnSpc>
+              <a:spcPct val="90000"/>
+            </a:lnSpc>
+            <a:spcBef>
+              <a:spcPct val="0"/>
+            </a:spcBef>
+            <a:spcAft>
+              <a:spcPct val="35000"/>
+            </a:spcAft>
+          </a:pPr>
+          <a:r>
+            <a:rPr lang="zh-TW" altLang="en-US" sz="1400" kern="1200" dirty="0" smtClean="0">
+              <a:solidFill>
+                <a:schemeClr val="tx1"/>
+              </a:solidFill>
+              <a:latin typeface="Times New Roman" panose="02020603050405020304" pitchFamily="18" charset="0"/>
+              <a:ea typeface="標楷體" panose="03000509000000000000" pitchFamily="65" charset="-120"/>
+              <a:cs typeface="Times New Roman" panose="02020603050405020304" pitchFamily="18" charset="0"/>
+            </a:rPr>
+            <a:t>預測模型</a:t>
+          </a:r>
+          <a:endParaRPr lang="zh-TW" altLang="en-US" sz="1400" kern="1200" dirty="0">
+            <a:solidFill>
+              <a:schemeClr val="tx1"/>
+            </a:solidFill>
+            <a:latin typeface="Times New Roman" panose="02020603050405020304" pitchFamily="18" charset="0"/>
+            <a:ea typeface="標楷體" panose="03000509000000000000" pitchFamily="65" charset="-120"/>
+            <a:cs typeface="Times New Roman" panose="02020603050405020304" pitchFamily="18" charset="0"/>
+          </a:endParaRPr>
+        </a:p>
+      </dsp:txBody>
+      <dsp:txXfrm>
+        <a:off x="2526520" y="342405"/>
+        <a:ext cx="834367" cy="417183"/>
+      </dsp:txXfrm>
+    </dsp:sp>
+    <dsp:sp modelId="{BE086ED0-A51B-4215-B42F-E94C05C504E5}">
+      <dsp:nvSpPr>
+        <dsp:cNvPr id="0" name=""/>
+        <dsp:cNvSpPr/>
+      </dsp:nvSpPr>
+      <dsp:spPr>
+        <a:xfrm>
+          <a:off x="2557" y="934806"/>
+          <a:ext cx="834367" cy="417183"/>
+        </a:xfrm>
+        <a:prstGeom prst="rect">
+          <a:avLst/>
+        </a:prstGeom>
+        <a:noFill/>
+        <a:ln w="25400" cap="flat" cmpd="sng" algn="ctr">
+          <a:solidFill>
+            <a:schemeClr val="tx1"/>
+          </a:solidFill>
+          <a:prstDash val="solid"/>
+        </a:ln>
+        <a:effectLst/>
+      </dsp:spPr>
+      <dsp:style>
+        <a:lnRef idx="2">
+          <a:scrgbClr r="0" g="0" b="0"/>
+        </a:lnRef>
+        <a:fillRef idx="1">
+          <a:scrgbClr r="0" g="0" b="0"/>
+        </a:fillRef>
+        <a:effectRef idx="0">
+          <a:scrgbClr r="0" g="0" b="0"/>
+        </a:effectRef>
+        <a:fontRef idx="minor">
+          <a:schemeClr val="lt1"/>
+        </a:fontRef>
+      </dsp:style>
+      <dsp:txBody>
+        <a:bodyPr spcFirstLastPara="0" vert="horz" wrap="square" lIns="8890" tIns="8890" rIns="8890" bIns="8890" numCol="1" spcCol="1270" anchor="ctr" anchorCtr="0">
+          <a:noAutofit/>
+        </a:bodyPr>
+        <a:lstStyle/>
+        <a:p>
+          <a:pPr lvl="0" algn="ctr" defTabSz="622300">
+            <a:lnSpc>
+              <a:spcPct val="90000"/>
+            </a:lnSpc>
+            <a:spcBef>
+              <a:spcPct val="0"/>
+            </a:spcBef>
+            <a:spcAft>
+              <a:spcPct val="35000"/>
+            </a:spcAft>
+          </a:pPr>
+          <a:r>
+            <a:rPr lang="zh-TW" altLang="en-US" sz="1400" kern="1200" dirty="0" smtClean="0">
+              <a:solidFill>
+                <a:schemeClr val="tx1"/>
+              </a:solidFill>
+              <a:latin typeface="Times New Roman" panose="02020603050405020304" pitchFamily="18" charset="0"/>
+              <a:ea typeface="標楷體" panose="03000509000000000000" pitchFamily="65" charset="-120"/>
+              <a:cs typeface="Times New Roman" panose="02020603050405020304" pitchFamily="18" charset="0"/>
+            </a:rPr>
+            <a:t>傳統統計</a:t>
+          </a:r>
+          <a:endParaRPr lang="en-US" altLang="zh-TW" sz="1400" kern="1200" dirty="0" smtClean="0">
+            <a:solidFill>
+              <a:schemeClr val="tx1"/>
+            </a:solidFill>
+            <a:latin typeface="Times New Roman" panose="02020603050405020304" pitchFamily="18" charset="0"/>
+            <a:ea typeface="標楷體" panose="03000509000000000000" pitchFamily="65" charset="-120"/>
+            <a:cs typeface="Times New Roman" panose="02020603050405020304" pitchFamily="18" charset="0"/>
+          </a:endParaRPr>
+        </a:p>
+      </dsp:txBody>
+      <dsp:txXfrm>
+        <a:off x="2557" y="934806"/>
+        <a:ext cx="834367" cy="417183"/>
+      </dsp:txXfrm>
+    </dsp:sp>
+    <dsp:sp modelId="{52D48C03-8467-41A2-BB1B-AA409C672855}">
+      <dsp:nvSpPr>
+        <dsp:cNvPr id="0" name=""/>
+        <dsp:cNvSpPr/>
+      </dsp:nvSpPr>
+      <dsp:spPr>
+        <a:xfrm>
+          <a:off x="211149" y="1527207"/>
+          <a:ext cx="834367" cy="417183"/>
+        </a:xfrm>
+        <a:prstGeom prst="rect">
+          <a:avLst/>
+        </a:prstGeom>
+        <a:noFill/>
+        <a:ln w="25400" cap="flat" cmpd="sng" algn="ctr">
+          <a:solidFill>
+            <a:schemeClr val="tx1"/>
+          </a:solidFill>
+          <a:prstDash val="solid"/>
+        </a:ln>
+        <a:effectLst/>
+      </dsp:spPr>
+      <dsp:style>
+        <a:lnRef idx="2">
+          <a:scrgbClr r="0" g="0" b="0"/>
+        </a:lnRef>
+        <a:fillRef idx="1">
+          <a:scrgbClr r="0" g="0" b="0"/>
+        </a:fillRef>
+        <a:effectRef idx="0">
+          <a:scrgbClr r="0" g="0" b="0"/>
+        </a:effectRef>
+        <a:fontRef idx="minor">
+          <a:schemeClr val="lt1"/>
+        </a:fontRef>
+      </dsp:style>
+      <dsp:txBody>
+        <a:bodyPr spcFirstLastPara="0" vert="horz" wrap="square" lIns="8890" tIns="8890" rIns="8890" bIns="8890" numCol="1" spcCol="1270" anchor="ctr" anchorCtr="0">
+          <a:noAutofit/>
+        </a:bodyPr>
+        <a:lstStyle/>
+        <a:p>
+          <a:pPr lvl="0" algn="ctr" defTabSz="622300">
+            <a:lnSpc>
+              <a:spcPct val="90000"/>
+            </a:lnSpc>
+            <a:spcBef>
+              <a:spcPct val="0"/>
+            </a:spcBef>
+            <a:spcAft>
+              <a:spcPct val="35000"/>
+            </a:spcAft>
+          </a:pPr>
+          <a:r>
+            <a:rPr lang="en-US" altLang="zh-TW" sz="1400" kern="1200" dirty="0" smtClean="0">
+              <a:solidFill>
+                <a:schemeClr val="tx1"/>
+              </a:solidFill>
+              <a:latin typeface="Times New Roman" panose="02020603050405020304" pitchFamily="18" charset="0"/>
+              <a:ea typeface="標楷體" panose="03000509000000000000" pitchFamily="65" charset="-120"/>
+              <a:cs typeface="Times New Roman" panose="02020603050405020304" pitchFamily="18" charset="0"/>
+            </a:rPr>
+            <a:t>LR</a:t>
+          </a:r>
+        </a:p>
+      </dsp:txBody>
+      <dsp:txXfrm>
+        <a:off x="211149" y="1527207"/>
+        <a:ext cx="834367" cy="417183"/>
+      </dsp:txXfrm>
+    </dsp:sp>
+    <dsp:sp modelId="{06EACE6F-B329-4F8A-9DF8-AA96E79B9847}">
+      <dsp:nvSpPr>
+        <dsp:cNvPr id="0" name=""/>
+        <dsp:cNvSpPr/>
+      </dsp:nvSpPr>
+      <dsp:spPr>
+        <a:xfrm>
+          <a:off x="211149" y="2119608"/>
+          <a:ext cx="834367" cy="417183"/>
+        </a:xfrm>
+        <a:prstGeom prst="rect">
+          <a:avLst/>
+        </a:prstGeom>
+        <a:noFill/>
+        <a:ln w="25400" cap="flat" cmpd="sng" algn="ctr">
+          <a:solidFill>
+            <a:schemeClr val="tx1"/>
+          </a:solidFill>
+          <a:prstDash val="solid"/>
+        </a:ln>
+        <a:effectLst/>
+      </dsp:spPr>
+      <dsp:style>
+        <a:lnRef idx="2">
+          <a:scrgbClr r="0" g="0" b="0"/>
+        </a:lnRef>
+        <a:fillRef idx="1">
+          <a:scrgbClr r="0" g="0" b="0"/>
+        </a:fillRef>
+        <a:effectRef idx="0">
+          <a:scrgbClr r="0" g="0" b="0"/>
+        </a:effectRef>
+        <a:fontRef idx="minor">
+          <a:schemeClr val="lt1"/>
+        </a:fontRef>
+      </dsp:style>
+      <dsp:txBody>
+        <a:bodyPr spcFirstLastPara="0" vert="horz" wrap="square" lIns="8890" tIns="8890" rIns="8890" bIns="8890" numCol="1" spcCol="1270" anchor="ctr" anchorCtr="0">
+          <a:noAutofit/>
+        </a:bodyPr>
+        <a:lstStyle/>
+        <a:p>
+          <a:pPr lvl="0" algn="ctr" defTabSz="622300">
+            <a:lnSpc>
+              <a:spcPct val="90000"/>
+            </a:lnSpc>
+            <a:spcBef>
+              <a:spcPct val="0"/>
+            </a:spcBef>
+            <a:spcAft>
+              <a:spcPct val="35000"/>
+            </a:spcAft>
+          </a:pPr>
+          <a:r>
+            <a:rPr lang="en-US" altLang="zh-TW" sz="1400" kern="1200" dirty="0" smtClean="0">
+              <a:solidFill>
+                <a:schemeClr val="tx1"/>
+              </a:solidFill>
+              <a:latin typeface="Times New Roman" panose="02020603050405020304" pitchFamily="18" charset="0"/>
+              <a:ea typeface="標楷體" panose="03000509000000000000" pitchFamily="65" charset="-120"/>
+              <a:cs typeface="Times New Roman" panose="02020603050405020304" pitchFamily="18" charset="0"/>
+            </a:rPr>
+            <a:t>NB</a:t>
+          </a:r>
+        </a:p>
+      </dsp:txBody>
+      <dsp:txXfrm>
+        <a:off x="211149" y="2119608"/>
+        <a:ext cx="834367" cy="417183"/>
+      </dsp:txXfrm>
+    </dsp:sp>
+    <dsp:sp modelId="{A1098950-1343-4150-AB97-8EE58E881BBC}">
+      <dsp:nvSpPr>
+        <dsp:cNvPr id="0" name=""/>
+        <dsp:cNvSpPr/>
+      </dsp:nvSpPr>
+      <dsp:spPr>
+        <a:xfrm>
+          <a:off x="211149" y="2712009"/>
+          <a:ext cx="834367" cy="417183"/>
+        </a:xfrm>
+        <a:prstGeom prst="rect">
+          <a:avLst/>
+        </a:prstGeom>
+        <a:noFill/>
+        <a:ln w="25400" cap="flat" cmpd="sng" algn="ctr">
+          <a:solidFill>
+            <a:schemeClr val="tx1"/>
+          </a:solidFill>
+          <a:prstDash val="solid"/>
+        </a:ln>
+        <a:effectLst/>
+      </dsp:spPr>
+      <dsp:style>
+        <a:lnRef idx="2">
+          <a:scrgbClr r="0" g="0" b="0"/>
+        </a:lnRef>
+        <a:fillRef idx="1">
+          <a:scrgbClr r="0" g="0" b="0"/>
+        </a:fillRef>
+        <a:effectRef idx="0">
+          <a:scrgbClr r="0" g="0" b="0"/>
+        </a:effectRef>
+        <a:fontRef idx="minor">
+          <a:schemeClr val="lt1"/>
+        </a:fontRef>
+      </dsp:style>
+      <dsp:txBody>
+        <a:bodyPr spcFirstLastPara="0" vert="horz" wrap="square" lIns="8890" tIns="8890" rIns="8890" bIns="8890" numCol="1" spcCol="1270" anchor="ctr" anchorCtr="0">
+          <a:noAutofit/>
+        </a:bodyPr>
+        <a:lstStyle/>
+        <a:p>
+          <a:pPr lvl="0" algn="ctr" defTabSz="622300">
+            <a:lnSpc>
+              <a:spcPct val="90000"/>
+            </a:lnSpc>
+            <a:spcBef>
+              <a:spcPct val="0"/>
+            </a:spcBef>
+            <a:spcAft>
+              <a:spcPct val="35000"/>
+            </a:spcAft>
+          </a:pPr>
+          <a:r>
+            <a:rPr lang="en-US" altLang="zh-TW" sz="1400" kern="1200" dirty="0" smtClean="0">
+              <a:solidFill>
+                <a:schemeClr val="tx1"/>
+              </a:solidFill>
+              <a:latin typeface="Times New Roman" panose="02020603050405020304" pitchFamily="18" charset="0"/>
+              <a:ea typeface="標楷體" panose="03000509000000000000" pitchFamily="65" charset="-120"/>
+              <a:cs typeface="Times New Roman" panose="02020603050405020304" pitchFamily="18" charset="0"/>
+            </a:rPr>
+            <a:t>LDA</a:t>
+          </a:r>
+        </a:p>
+      </dsp:txBody>
+      <dsp:txXfrm>
+        <a:off x="211149" y="2712009"/>
+        <a:ext cx="834367" cy="417183"/>
+      </dsp:txXfrm>
+    </dsp:sp>
+    <dsp:sp modelId="{A92999D2-594E-4F7C-AC3B-8EAC9358F8AD}">
+      <dsp:nvSpPr>
+        <dsp:cNvPr id="0" name=""/>
+        <dsp:cNvSpPr/>
+      </dsp:nvSpPr>
+      <dsp:spPr>
+        <a:xfrm>
+          <a:off x="2735112" y="934806"/>
+          <a:ext cx="834367" cy="417183"/>
+        </a:xfrm>
+        <a:prstGeom prst="rect">
+          <a:avLst/>
+        </a:prstGeom>
+        <a:noFill/>
+        <a:ln w="25400" cap="flat" cmpd="sng" algn="ctr">
+          <a:solidFill>
+            <a:schemeClr val="tx1"/>
+          </a:solidFill>
+          <a:prstDash val="solid"/>
+        </a:ln>
+        <a:effectLst/>
+      </dsp:spPr>
+      <dsp:style>
+        <a:lnRef idx="2">
+          <a:scrgbClr r="0" g="0" b="0"/>
+        </a:lnRef>
+        <a:fillRef idx="1">
+          <a:scrgbClr r="0" g="0" b="0"/>
+        </a:fillRef>
+        <a:effectRef idx="0">
+          <a:scrgbClr r="0" g="0" b="0"/>
+        </a:effectRef>
+        <a:fontRef idx="minor">
+          <a:schemeClr val="lt1"/>
+        </a:fontRef>
+      </dsp:style>
+      <dsp:txBody>
+        <a:bodyPr spcFirstLastPara="0" vert="horz" wrap="square" lIns="8890" tIns="8890" rIns="8890" bIns="8890" numCol="1" spcCol="1270" anchor="ctr" anchorCtr="0">
+          <a:noAutofit/>
+        </a:bodyPr>
+        <a:lstStyle/>
+        <a:p>
+          <a:pPr lvl="0" algn="ctr" defTabSz="622300">
+            <a:lnSpc>
+              <a:spcPct val="90000"/>
+            </a:lnSpc>
+            <a:spcBef>
+              <a:spcPct val="0"/>
+            </a:spcBef>
+            <a:spcAft>
+              <a:spcPct val="35000"/>
+            </a:spcAft>
+          </a:pPr>
+          <a:r>
+            <a:rPr lang="zh-TW" altLang="en-US" sz="1400" kern="1200" dirty="0" smtClean="0">
+              <a:solidFill>
+                <a:schemeClr val="tx1"/>
+              </a:solidFill>
+              <a:latin typeface="Times New Roman" panose="02020603050405020304" pitchFamily="18" charset="0"/>
+              <a:ea typeface="標楷體" panose="03000509000000000000" pitchFamily="65" charset="-120"/>
+              <a:cs typeface="Times New Roman" panose="02020603050405020304" pitchFamily="18" charset="0"/>
+            </a:rPr>
+            <a:t>機器學習</a:t>
+          </a:r>
+          <a:endParaRPr lang="zh-TW" altLang="en-US" sz="1400" kern="1200" dirty="0">
+            <a:solidFill>
+              <a:schemeClr val="tx1"/>
+            </a:solidFill>
+            <a:latin typeface="Times New Roman" panose="02020603050405020304" pitchFamily="18" charset="0"/>
+            <a:ea typeface="標楷體" panose="03000509000000000000" pitchFamily="65" charset="-120"/>
+            <a:cs typeface="Times New Roman" panose="02020603050405020304" pitchFamily="18" charset="0"/>
+          </a:endParaRPr>
+        </a:p>
+      </dsp:txBody>
+      <dsp:txXfrm>
+        <a:off x="2735112" y="934806"/>
+        <a:ext cx="834367" cy="417183"/>
+      </dsp:txXfrm>
+    </dsp:sp>
+    <dsp:sp modelId="{471E24C0-93B7-4A88-8409-904FB0ABBFE3}">
+      <dsp:nvSpPr>
+        <dsp:cNvPr id="0" name=""/>
+        <dsp:cNvSpPr/>
+      </dsp:nvSpPr>
+      <dsp:spPr>
+        <a:xfrm>
+          <a:off x="1220734" y="1527207"/>
+          <a:ext cx="834367" cy="417183"/>
+        </a:xfrm>
+        <a:prstGeom prst="rect">
+          <a:avLst/>
+        </a:prstGeom>
+        <a:noFill/>
+        <a:ln w="25400" cap="flat" cmpd="sng" algn="ctr">
+          <a:solidFill>
+            <a:schemeClr val="tx1"/>
+          </a:solidFill>
+          <a:prstDash val="solid"/>
+        </a:ln>
+        <a:effectLst/>
+      </dsp:spPr>
+      <dsp:style>
+        <a:lnRef idx="2">
+          <a:scrgbClr r="0" g="0" b="0"/>
+        </a:lnRef>
+        <a:fillRef idx="1">
+          <a:scrgbClr r="0" g="0" b="0"/>
+        </a:fillRef>
+        <a:effectRef idx="0">
+          <a:scrgbClr r="0" g="0" b="0"/>
+        </a:effectRef>
+        <a:fontRef idx="minor">
+          <a:schemeClr val="lt1"/>
+        </a:fontRef>
+      </dsp:style>
+      <dsp:txBody>
+        <a:bodyPr spcFirstLastPara="0" vert="horz" wrap="square" lIns="8890" tIns="8890" rIns="8890" bIns="8890" numCol="1" spcCol="1270" anchor="ctr" anchorCtr="0">
+          <a:noAutofit/>
+        </a:bodyPr>
+        <a:lstStyle/>
+        <a:p>
+          <a:pPr lvl="0" algn="ctr" defTabSz="622300">
+            <a:lnSpc>
+              <a:spcPct val="90000"/>
+            </a:lnSpc>
+            <a:spcBef>
+              <a:spcPct val="0"/>
+            </a:spcBef>
+            <a:spcAft>
+              <a:spcPct val="35000"/>
+            </a:spcAft>
+          </a:pPr>
+          <a:r>
+            <a:rPr lang="en-US" altLang="zh-TW" sz="1400" kern="1200" dirty="0" smtClean="0">
+              <a:solidFill>
+                <a:schemeClr val="tx1"/>
+              </a:solidFill>
+              <a:latin typeface="Times New Roman" panose="02020603050405020304" pitchFamily="18" charset="0"/>
+              <a:ea typeface="標楷體" panose="03000509000000000000" pitchFamily="65" charset="-120"/>
+              <a:cs typeface="Times New Roman" panose="02020603050405020304" pitchFamily="18" charset="0"/>
+            </a:rPr>
+            <a:t>KNN</a:t>
+          </a:r>
+          <a:endParaRPr lang="zh-TW" altLang="en-US" sz="1400" kern="1200" dirty="0">
+            <a:solidFill>
+              <a:schemeClr val="tx1"/>
+            </a:solidFill>
+            <a:latin typeface="Times New Roman" panose="02020603050405020304" pitchFamily="18" charset="0"/>
+            <a:ea typeface="標楷體" panose="03000509000000000000" pitchFamily="65" charset="-120"/>
+            <a:cs typeface="Times New Roman" panose="02020603050405020304" pitchFamily="18" charset="0"/>
+          </a:endParaRPr>
+        </a:p>
+      </dsp:txBody>
+      <dsp:txXfrm>
+        <a:off x="1220734" y="1527207"/>
+        <a:ext cx="834367" cy="417183"/>
+      </dsp:txXfrm>
+    </dsp:sp>
+    <dsp:sp modelId="{0F256B01-4570-4068-A359-7B9777BAC5E2}">
+      <dsp:nvSpPr>
+        <dsp:cNvPr id="0" name=""/>
+        <dsp:cNvSpPr/>
+      </dsp:nvSpPr>
+      <dsp:spPr>
+        <a:xfrm>
+          <a:off x="2230319" y="1527207"/>
+          <a:ext cx="834367" cy="417183"/>
+        </a:xfrm>
+        <a:prstGeom prst="rect">
+          <a:avLst/>
+        </a:prstGeom>
+        <a:noFill/>
+        <a:ln w="25400" cap="flat" cmpd="sng" algn="ctr">
+          <a:solidFill>
+            <a:schemeClr val="tx1"/>
+          </a:solidFill>
+          <a:prstDash val="solid"/>
+        </a:ln>
+        <a:effectLst/>
+      </dsp:spPr>
+      <dsp:style>
+        <a:lnRef idx="2">
+          <a:scrgbClr r="0" g="0" b="0"/>
+        </a:lnRef>
+        <a:fillRef idx="1">
+          <a:scrgbClr r="0" g="0" b="0"/>
+        </a:fillRef>
+        <a:effectRef idx="0">
+          <a:scrgbClr r="0" g="0" b="0"/>
+        </a:effectRef>
+        <a:fontRef idx="minor">
+          <a:schemeClr val="lt1"/>
+        </a:fontRef>
+      </dsp:style>
+      <dsp:txBody>
+        <a:bodyPr spcFirstLastPara="0" vert="horz" wrap="square" lIns="8890" tIns="8890" rIns="8890" bIns="8890" numCol="1" spcCol="1270" anchor="ctr" anchorCtr="0">
+          <a:noAutofit/>
+        </a:bodyPr>
+        <a:lstStyle/>
+        <a:p>
+          <a:pPr lvl="0" algn="ctr" defTabSz="622300">
+            <a:lnSpc>
+              <a:spcPct val="90000"/>
+            </a:lnSpc>
+            <a:spcBef>
+              <a:spcPct val="0"/>
+            </a:spcBef>
+            <a:spcAft>
+              <a:spcPct val="35000"/>
+            </a:spcAft>
+          </a:pPr>
+          <a:r>
+            <a:rPr lang="en-US" altLang="zh-TW" sz="1400" kern="1200" dirty="0" smtClean="0">
+              <a:solidFill>
+                <a:schemeClr val="tx1"/>
+              </a:solidFill>
+              <a:latin typeface="Times New Roman" panose="02020603050405020304" pitchFamily="18" charset="0"/>
+              <a:ea typeface="標楷體" panose="03000509000000000000" pitchFamily="65" charset="-120"/>
+              <a:cs typeface="Times New Roman" panose="02020603050405020304" pitchFamily="18" charset="0"/>
+            </a:rPr>
+            <a:t>DT</a:t>
+          </a:r>
+          <a:endParaRPr lang="zh-TW" altLang="en-US" sz="1400" kern="1200" dirty="0">
+            <a:solidFill>
+              <a:schemeClr val="tx1"/>
+            </a:solidFill>
+            <a:latin typeface="Times New Roman" panose="02020603050405020304" pitchFamily="18" charset="0"/>
+            <a:ea typeface="標楷體" panose="03000509000000000000" pitchFamily="65" charset="-120"/>
+            <a:cs typeface="Times New Roman" panose="02020603050405020304" pitchFamily="18" charset="0"/>
+          </a:endParaRPr>
+        </a:p>
+      </dsp:txBody>
+      <dsp:txXfrm>
+        <a:off x="2230319" y="1527207"/>
+        <a:ext cx="834367" cy="417183"/>
+      </dsp:txXfrm>
+    </dsp:sp>
+    <dsp:sp modelId="{E92B3A66-DD20-43A7-B574-7DCF7E4CEB01}">
+      <dsp:nvSpPr>
+        <dsp:cNvPr id="0" name=""/>
+        <dsp:cNvSpPr/>
+      </dsp:nvSpPr>
+      <dsp:spPr>
+        <a:xfrm>
+          <a:off x="2438911" y="2119608"/>
+          <a:ext cx="834367" cy="417183"/>
+        </a:xfrm>
+        <a:prstGeom prst="rect">
+          <a:avLst/>
+        </a:prstGeom>
+        <a:noFill/>
+        <a:ln w="25400" cap="flat" cmpd="sng" algn="ctr">
+          <a:solidFill>
+            <a:schemeClr val="tx1"/>
+          </a:solidFill>
+          <a:prstDash val="solid"/>
+        </a:ln>
+        <a:effectLst/>
+      </dsp:spPr>
+      <dsp:style>
+        <a:lnRef idx="2">
+          <a:scrgbClr r="0" g="0" b="0"/>
+        </a:lnRef>
+        <a:fillRef idx="1">
+          <a:scrgbClr r="0" g="0" b="0"/>
+        </a:fillRef>
+        <a:effectRef idx="0">
+          <a:scrgbClr r="0" g="0" b="0"/>
+        </a:effectRef>
+        <a:fontRef idx="minor">
+          <a:schemeClr val="lt1"/>
+        </a:fontRef>
+      </dsp:style>
+      <dsp:txBody>
+        <a:bodyPr spcFirstLastPara="0" vert="horz" wrap="square" lIns="8890" tIns="8890" rIns="8890" bIns="8890" numCol="1" spcCol="1270" anchor="ctr" anchorCtr="0">
+          <a:noAutofit/>
+        </a:bodyPr>
+        <a:lstStyle/>
+        <a:p>
+          <a:pPr lvl="0" algn="ctr" defTabSz="622300">
+            <a:lnSpc>
+              <a:spcPct val="90000"/>
+            </a:lnSpc>
+            <a:spcBef>
+              <a:spcPct val="0"/>
+            </a:spcBef>
+            <a:spcAft>
+              <a:spcPct val="35000"/>
+            </a:spcAft>
+          </a:pPr>
+          <a:r>
+            <a:rPr lang="en-US" altLang="zh-TW" sz="1400" kern="1200" dirty="0" smtClean="0">
+              <a:solidFill>
+                <a:schemeClr val="tx1"/>
+              </a:solidFill>
+              <a:latin typeface="Times New Roman" panose="02020603050405020304" pitchFamily="18" charset="0"/>
+              <a:ea typeface="標楷體" panose="03000509000000000000" pitchFamily="65" charset="-120"/>
+              <a:cs typeface="Times New Roman" panose="02020603050405020304" pitchFamily="18" charset="0"/>
+            </a:rPr>
+            <a:t>RF</a:t>
+          </a:r>
+          <a:endParaRPr lang="zh-TW" altLang="en-US" sz="1400" kern="1200" dirty="0">
+            <a:solidFill>
+              <a:schemeClr val="tx1"/>
+            </a:solidFill>
+            <a:latin typeface="Times New Roman" panose="02020603050405020304" pitchFamily="18" charset="0"/>
+            <a:ea typeface="標楷體" panose="03000509000000000000" pitchFamily="65" charset="-120"/>
+            <a:cs typeface="Times New Roman" panose="02020603050405020304" pitchFamily="18" charset="0"/>
+          </a:endParaRPr>
+        </a:p>
+      </dsp:txBody>
+      <dsp:txXfrm>
+        <a:off x="2438911" y="2119608"/>
+        <a:ext cx="834367" cy="417183"/>
+      </dsp:txXfrm>
+    </dsp:sp>
+    <dsp:sp modelId="{CB29D046-9C3E-498D-9B0F-548827F377BC}">
+      <dsp:nvSpPr>
+        <dsp:cNvPr id="0" name=""/>
+        <dsp:cNvSpPr/>
+      </dsp:nvSpPr>
+      <dsp:spPr>
+        <a:xfrm>
+          <a:off x="2438911" y="2712009"/>
+          <a:ext cx="834367" cy="417183"/>
+        </a:xfrm>
+        <a:prstGeom prst="rect">
+          <a:avLst/>
+        </a:prstGeom>
+        <a:noFill/>
+        <a:ln w="25400" cap="flat" cmpd="sng" algn="ctr">
+          <a:solidFill>
+            <a:schemeClr val="tx1"/>
+          </a:solidFill>
+          <a:prstDash val="solid"/>
+        </a:ln>
+        <a:effectLst/>
+      </dsp:spPr>
+      <dsp:style>
+        <a:lnRef idx="2">
+          <a:scrgbClr r="0" g="0" b="0"/>
+        </a:lnRef>
+        <a:fillRef idx="1">
+          <a:scrgbClr r="0" g="0" b="0"/>
+        </a:fillRef>
+        <a:effectRef idx="0">
+          <a:scrgbClr r="0" g="0" b="0"/>
+        </a:effectRef>
+        <a:fontRef idx="minor">
+          <a:schemeClr val="lt1"/>
+        </a:fontRef>
+      </dsp:style>
+      <dsp:txBody>
+        <a:bodyPr spcFirstLastPara="0" vert="horz" wrap="square" lIns="8890" tIns="8890" rIns="8890" bIns="8890" numCol="1" spcCol="1270" anchor="ctr" anchorCtr="0">
+          <a:noAutofit/>
+        </a:bodyPr>
+        <a:lstStyle/>
+        <a:p>
+          <a:pPr lvl="0" algn="ctr" defTabSz="622300">
+            <a:lnSpc>
+              <a:spcPct val="90000"/>
+            </a:lnSpc>
+            <a:spcBef>
+              <a:spcPct val="0"/>
+            </a:spcBef>
+            <a:spcAft>
+              <a:spcPct val="35000"/>
+            </a:spcAft>
+          </a:pPr>
+          <a:r>
+            <a:rPr lang="en-US" altLang="zh-TW" sz="1400" kern="1200" dirty="0" err="1" smtClean="0">
+              <a:solidFill>
+                <a:schemeClr val="tx1"/>
+              </a:solidFill>
+              <a:latin typeface="Times New Roman" panose="02020603050405020304" pitchFamily="18" charset="0"/>
+              <a:ea typeface="標楷體" panose="03000509000000000000" pitchFamily="65" charset="-120"/>
+              <a:cs typeface="Times New Roman" panose="02020603050405020304" pitchFamily="18" charset="0"/>
+            </a:rPr>
+            <a:t>XGBoost</a:t>
+          </a:r>
+          <a:endParaRPr lang="zh-TW" altLang="en-US" sz="1400" kern="1200" dirty="0">
+            <a:solidFill>
+              <a:schemeClr val="tx1"/>
+            </a:solidFill>
+            <a:latin typeface="Times New Roman" panose="02020603050405020304" pitchFamily="18" charset="0"/>
+            <a:ea typeface="標楷體" panose="03000509000000000000" pitchFamily="65" charset="-120"/>
+            <a:cs typeface="Times New Roman" panose="02020603050405020304" pitchFamily="18" charset="0"/>
+          </a:endParaRPr>
+        </a:p>
+      </dsp:txBody>
+      <dsp:txXfrm>
+        <a:off x="2438911" y="2712009"/>
+        <a:ext cx="834367" cy="417183"/>
+      </dsp:txXfrm>
+    </dsp:sp>
+    <dsp:sp modelId="{5A047950-A498-4E53-A417-C812BDE16A6B}">
+      <dsp:nvSpPr>
+        <dsp:cNvPr id="0" name=""/>
+        <dsp:cNvSpPr/>
+      </dsp:nvSpPr>
+      <dsp:spPr>
+        <a:xfrm>
+          <a:off x="2438911" y="3304410"/>
+          <a:ext cx="834367" cy="417183"/>
+        </a:xfrm>
+        <a:prstGeom prst="rect">
+          <a:avLst/>
+        </a:prstGeom>
+        <a:noFill/>
+        <a:ln w="25400" cap="flat" cmpd="sng" algn="ctr">
+          <a:solidFill>
+            <a:schemeClr val="tx1"/>
+          </a:solidFill>
+          <a:prstDash val="solid"/>
+        </a:ln>
+        <a:effectLst/>
+      </dsp:spPr>
+      <dsp:style>
+        <a:lnRef idx="2">
+          <a:scrgbClr r="0" g="0" b="0"/>
+        </a:lnRef>
+        <a:fillRef idx="1">
+          <a:scrgbClr r="0" g="0" b="0"/>
+        </a:fillRef>
+        <a:effectRef idx="0">
+          <a:scrgbClr r="0" g="0" b="0"/>
+        </a:effectRef>
+        <a:fontRef idx="minor">
+          <a:schemeClr val="lt1"/>
+        </a:fontRef>
+      </dsp:style>
+      <dsp:txBody>
+        <a:bodyPr spcFirstLastPara="0" vert="horz" wrap="square" lIns="8890" tIns="8890" rIns="8890" bIns="8890" numCol="1" spcCol="1270" anchor="ctr" anchorCtr="0">
+          <a:noAutofit/>
+        </a:bodyPr>
+        <a:lstStyle/>
+        <a:p>
+          <a:pPr lvl="0" algn="ctr" defTabSz="622300">
+            <a:lnSpc>
+              <a:spcPct val="90000"/>
+            </a:lnSpc>
+            <a:spcBef>
+              <a:spcPct val="0"/>
+            </a:spcBef>
+            <a:spcAft>
+              <a:spcPct val="35000"/>
+            </a:spcAft>
+          </a:pPr>
+          <a:r>
+            <a:rPr lang="en-US" altLang="zh-TW" sz="1400" kern="1200" dirty="0" err="1" smtClean="0">
+              <a:solidFill>
+                <a:schemeClr val="tx1"/>
+              </a:solidFill>
+              <a:latin typeface="Times New Roman" panose="02020603050405020304" pitchFamily="18" charset="0"/>
+              <a:ea typeface="標楷體" panose="03000509000000000000" pitchFamily="65" charset="-120"/>
+              <a:cs typeface="Times New Roman" panose="02020603050405020304" pitchFamily="18" charset="0"/>
+            </a:rPr>
+            <a:t>LightGBM</a:t>
+          </a:r>
+          <a:endParaRPr lang="zh-TW" altLang="en-US" sz="1400" kern="1200" dirty="0">
+            <a:solidFill>
+              <a:schemeClr val="tx1"/>
+            </a:solidFill>
+            <a:latin typeface="Times New Roman" panose="02020603050405020304" pitchFamily="18" charset="0"/>
+            <a:ea typeface="標楷體" panose="03000509000000000000" pitchFamily="65" charset="-120"/>
+            <a:cs typeface="Times New Roman" panose="02020603050405020304" pitchFamily="18" charset="0"/>
+          </a:endParaRPr>
+        </a:p>
+      </dsp:txBody>
+      <dsp:txXfrm>
+        <a:off x="2438911" y="3304410"/>
+        <a:ext cx="834367" cy="417183"/>
+      </dsp:txXfrm>
+    </dsp:sp>
+    <dsp:sp modelId="{F0E27AB9-22B8-45F7-A29B-1D5ABB37A7A1}">
+      <dsp:nvSpPr>
+        <dsp:cNvPr id="0" name=""/>
+        <dsp:cNvSpPr/>
+      </dsp:nvSpPr>
+      <dsp:spPr>
+        <a:xfrm>
+          <a:off x="3239904" y="1527207"/>
+          <a:ext cx="834367" cy="417183"/>
+        </a:xfrm>
+        <a:prstGeom prst="rect">
+          <a:avLst/>
+        </a:prstGeom>
+        <a:noFill/>
+        <a:ln w="25400" cap="flat" cmpd="sng" algn="ctr">
+          <a:solidFill>
+            <a:schemeClr val="tx1"/>
+          </a:solidFill>
+          <a:prstDash val="solid"/>
+        </a:ln>
+        <a:effectLst/>
+      </dsp:spPr>
+      <dsp:style>
+        <a:lnRef idx="2">
+          <a:scrgbClr r="0" g="0" b="0"/>
+        </a:lnRef>
+        <a:fillRef idx="1">
+          <a:scrgbClr r="0" g="0" b="0"/>
+        </a:fillRef>
+        <a:effectRef idx="0">
+          <a:scrgbClr r="0" g="0" b="0"/>
+        </a:effectRef>
+        <a:fontRef idx="minor">
+          <a:schemeClr val="lt1"/>
+        </a:fontRef>
+      </dsp:style>
+      <dsp:txBody>
+        <a:bodyPr spcFirstLastPara="0" vert="horz" wrap="square" lIns="8890" tIns="8890" rIns="8890" bIns="8890" numCol="1" spcCol="1270" anchor="ctr" anchorCtr="0">
+          <a:noAutofit/>
+        </a:bodyPr>
+        <a:lstStyle/>
+        <a:p>
+          <a:pPr lvl="0" algn="ctr" defTabSz="622300">
+            <a:lnSpc>
+              <a:spcPct val="90000"/>
+            </a:lnSpc>
+            <a:spcBef>
+              <a:spcPct val="0"/>
+            </a:spcBef>
+            <a:spcAft>
+              <a:spcPct val="35000"/>
+            </a:spcAft>
+          </a:pPr>
+          <a:r>
+            <a:rPr lang="en-US" altLang="zh-TW" sz="1400" kern="1200" dirty="0" smtClean="0">
+              <a:solidFill>
+                <a:schemeClr val="tx1"/>
+              </a:solidFill>
+              <a:latin typeface="Times New Roman" panose="02020603050405020304" pitchFamily="18" charset="0"/>
+              <a:ea typeface="標楷體" panose="03000509000000000000" pitchFamily="65" charset="-120"/>
+              <a:cs typeface="Times New Roman" panose="02020603050405020304" pitchFamily="18" charset="0"/>
+            </a:rPr>
+            <a:t>SVM</a:t>
+          </a:r>
+          <a:endParaRPr lang="zh-TW" altLang="en-US" sz="1400" kern="1200" dirty="0">
+            <a:solidFill>
+              <a:schemeClr val="tx1"/>
+            </a:solidFill>
+            <a:latin typeface="Times New Roman" panose="02020603050405020304" pitchFamily="18" charset="0"/>
+            <a:ea typeface="標楷體" panose="03000509000000000000" pitchFamily="65" charset="-120"/>
+            <a:cs typeface="Times New Roman" panose="02020603050405020304" pitchFamily="18" charset="0"/>
+          </a:endParaRPr>
+        </a:p>
+      </dsp:txBody>
+      <dsp:txXfrm>
+        <a:off x="3239904" y="1527207"/>
+        <a:ext cx="834367" cy="417183"/>
+      </dsp:txXfrm>
+    </dsp:sp>
+    <dsp:sp modelId="{6526E14F-2EB7-47D7-868A-C44A055D4594}">
+      <dsp:nvSpPr>
+        <dsp:cNvPr id="0" name=""/>
+        <dsp:cNvSpPr/>
+      </dsp:nvSpPr>
+      <dsp:spPr>
+        <a:xfrm>
+          <a:off x="4249489" y="1527207"/>
+          <a:ext cx="834367" cy="417183"/>
+        </a:xfrm>
+        <a:prstGeom prst="rect">
+          <a:avLst/>
+        </a:prstGeom>
+        <a:noFill/>
+        <a:ln w="25400" cap="flat" cmpd="sng" algn="ctr">
+          <a:solidFill>
+            <a:schemeClr val="tx1"/>
+          </a:solidFill>
+          <a:prstDash val="solid"/>
+        </a:ln>
+        <a:effectLst/>
+      </dsp:spPr>
+      <dsp:style>
+        <a:lnRef idx="2">
+          <a:scrgbClr r="0" g="0" b="0"/>
+        </a:lnRef>
+        <a:fillRef idx="1">
+          <a:scrgbClr r="0" g="0" b="0"/>
+        </a:fillRef>
+        <a:effectRef idx="0">
+          <a:scrgbClr r="0" g="0" b="0"/>
+        </a:effectRef>
+        <a:fontRef idx="minor">
+          <a:schemeClr val="lt1"/>
+        </a:fontRef>
+      </dsp:style>
+      <dsp:txBody>
+        <a:bodyPr spcFirstLastPara="0" vert="horz" wrap="square" lIns="8890" tIns="8890" rIns="8890" bIns="8890" numCol="1" spcCol="1270" anchor="ctr" anchorCtr="0">
+          <a:noAutofit/>
+        </a:bodyPr>
+        <a:lstStyle/>
+        <a:p>
+          <a:pPr lvl="0" algn="ctr" defTabSz="622300">
+            <a:lnSpc>
+              <a:spcPct val="90000"/>
+            </a:lnSpc>
+            <a:spcBef>
+              <a:spcPct val="0"/>
+            </a:spcBef>
+            <a:spcAft>
+              <a:spcPct val="35000"/>
+            </a:spcAft>
+          </a:pPr>
+          <a:r>
+            <a:rPr lang="en-US" altLang="zh-TW" sz="1400" kern="1200" dirty="0" smtClean="0">
+              <a:solidFill>
+                <a:schemeClr val="tx1"/>
+              </a:solidFill>
+              <a:latin typeface="Times New Roman" panose="02020603050405020304" pitchFamily="18" charset="0"/>
+              <a:ea typeface="標楷體" panose="03000509000000000000" pitchFamily="65" charset="-120"/>
+              <a:cs typeface="Times New Roman" panose="02020603050405020304" pitchFamily="18" charset="0"/>
+            </a:rPr>
+            <a:t>MLP</a:t>
+          </a:r>
+          <a:endParaRPr lang="zh-TW" altLang="en-US" sz="1400" kern="1200" dirty="0">
+            <a:solidFill>
+              <a:schemeClr val="tx1"/>
+            </a:solidFill>
+            <a:latin typeface="Times New Roman" panose="02020603050405020304" pitchFamily="18" charset="0"/>
+            <a:ea typeface="標楷體" panose="03000509000000000000" pitchFamily="65" charset="-120"/>
+            <a:cs typeface="Times New Roman" panose="02020603050405020304" pitchFamily="18" charset="0"/>
+          </a:endParaRPr>
+        </a:p>
+      </dsp:txBody>
+      <dsp:txXfrm>
+        <a:off x="4249489" y="1527207"/>
+        <a:ext cx="834367" cy="417183"/>
+      </dsp:txXfrm>
+    </dsp:sp>
+    <dsp:sp modelId="{5B674A70-3154-4944-B2C8-8AFF4B2D7C3C}">
+      <dsp:nvSpPr>
+        <dsp:cNvPr id="0" name=""/>
+        <dsp:cNvSpPr/>
+      </dsp:nvSpPr>
+      <dsp:spPr>
+        <a:xfrm>
+          <a:off x="5050482" y="934806"/>
+          <a:ext cx="834367" cy="417183"/>
+        </a:xfrm>
+        <a:prstGeom prst="rect">
+          <a:avLst/>
+        </a:prstGeom>
+        <a:noFill/>
+        <a:ln w="25400" cap="flat" cmpd="sng" algn="ctr">
+          <a:solidFill>
+            <a:schemeClr val="tx1"/>
+          </a:solidFill>
+          <a:prstDash val="solid"/>
+        </a:ln>
+        <a:effectLst/>
+      </dsp:spPr>
+      <dsp:style>
+        <a:lnRef idx="2">
+          <a:scrgbClr r="0" g="0" b="0"/>
+        </a:lnRef>
+        <a:fillRef idx="1">
+          <a:scrgbClr r="0" g="0" b="0"/>
+        </a:fillRef>
+        <a:effectRef idx="0">
+          <a:scrgbClr r="0" g="0" b="0"/>
+        </a:effectRef>
+        <a:fontRef idx="minor">
+          <a:schemeClr val="lt1"/>
+        </a:fontRef>
+      </dsp:style>
+      <dsp:txBody>
+        <a:bodyPr spcFirstLastPara="0" vert="horz" wrap="square" lIns="8890" tIns="8890" rIns="8890" bIns="8890" numCol="1" spcCol="1270" anchor="ctr" anchorCtr="0">
+          <a:noAutofit/>
+        </a:bodyPr>
+        <a:lstStyle/>
+        <a:p>
+          <a:pPr lvl="0" algn="ctr" defTabSz="622300">
+            <a:lnSpc>
+              <a:spcPct val="90000"/>
+            </a:lnSpc>
+            <a:spcBef>
+              <a:spcPct val="0"/>
+            </a:spcBef>
+            <a:spcAft>
+              <a:spcPct val="35000"/>
+            </a:spcAft>
+          </a:pPr>
+          <a:r>
+            <a:rPr lang="zh-TW" altLang="en-US" sz="1400" kern="1200" dirty="0" smtClean="0">
+              <a:solidFill>
+                <a:schemeClr val="tx1"/>
+              </a:solidFill>
+              <a:latin typeface="Times New Roman" panose="02020603050405020304" pitchFamily="18" charset="0"/>
+              <a:ea typeface="標楷體" panose="03000509000000000000" pitchFamily="65" charset="-120"/>
+              <a:cs typeface="Times New Roman" panose="02020603050405020304" pitchFamily="18" charset="0"/>
+            </a:rPr>
+            <a:t>符號回歸</a:t>
+          </a:r>
+          <a:endParaRPr lang="zh-TW" altLang="en-US" sz="1400" kern="1200" dirty="0">
+            <a:solidFill>
+              <a:schemeClr val="tx1"/>
+            </a:solidFill>
+            <a:latin typeface="Times New Roman" panose="02020603050405020304" pitchFamily="18" charset="0"/>
+            <a:ea typeface="標楷體" panose="03000509000000000000" pitchFamily="65" charset="-120"/>
+            <a:cs typeface="Times New Roman" panose="02020603050405020304" pitchFamily="18" charset="0"/>
+          </a:endParaRPr>
+        </a:p>
+      </dsp:txBody>
+      <dsp:txXfrm>
+        <a:off x="5050482" y="934806"/>
+        <a:ext cx="834367" cy="417183"/>
+      </dsp:txXfrm>
+    </dsp:sp>
+    <dsp:sp modelId="{F225889A-7CC3-4DBC-816A-0F9DBFD05802}">
+      <dsp:nvSpPr>
+        <dsp:cNvPr id="0" name=""/>
+        <dsp:cNvSpPr/>
+      </dsp:nvSpPr>
+      <dsp:spPr>
+        <a:xfrm>
+          <a:off x="5259074" y="1527207"/>
+          <a:ext cx="834367" cy="417183"/>
+        </a:xfrm>
+        <a:prstGeom prst="rect">
+          <a:avLst/>
+        </a:prstGeom>
+        <a:noFill/>
+        <a:ln w="25400" cap="flat" cmpd="sng" algn="ctr">
+          <a:solidFill>
+            <a:schemeClr val="tx1"/>
+          </a:solidFill>
+          <a:prstDash val="solid"/>
+        </a:ln>
+        <a:effectLst/>
+      </dsp:spPr>
+      <dsp:style>
+        <a:lnRef idx="2">
+          <a:scrgbClr r="0" g="0" b="0"/>
+        </a:lnRef>
+        <a:fillRef idx="1">
+          <a:scrgbClr r="0" g="0" b="0"/>
+        </a:fillRef>
+        <a:effectRef idx="0">
+          <a:scrgbClr r="0" g="0" b="0"/>
+        </a:effectRef>
+        <a:fontRef idx="minor">
+          <a:schemeClr val="lt1"/>
+        </a:fontRef>
+      </dsp:style>
+      <dsp:txBody>
+        <a:bodyPr spcFirstLastPara="0" vert="horz" wrap="square" lIns="8890" tIns="8890" rIns="8890" bIns="8890" numCol="1" spcCol="1270" anchor="ctr" anchorCtr="0">
+          <a:noAutofit/>
+        </a:bodyPr>
+        <a:lstStyle/>
+        <a:p>
+          <a:pPr lvl="0" algn="ctr" defTabSz="622300">
+            <a:lnSpc>
+              <a:spcPct val="90000"/>
+            </a:lnSpc>
+            <a:spcBef>
+              <a:spcPct val="0"/>
+            </a:spcBef>
+            <a:spcAft>
+              <a:spcPct val="35000"/>
+            </a:spcAft>
+          </a:pPr>
+          <a:r>
+            <a:rPr lang="en-US" altLang="zh-TW" sz="1400" kern="1200" dirty="0" err="1" smtClean="0">
+              <a:solidFill>
+                <a:schemeClr val="tx1"/>
+              </a:solidFill>
+              <a:latin typeface="Times New Roman" panose="02020603050405020304" pitchFamily="18" charset="0"/>
+              <a:ea typeface="標楷體" panose="03000509000000000000" pitchFamily="65" charset="-120"/>
+              <a:cs typeface="Times New Roman" panose="02020603050405020304" pitchFamily="18" charset="0"/>
+            </a:rPr>
+            <a:t>PySR</a:t>
+          </a:r>
+          <a:endParaRPr lang="zh-TW" altLang="en-US" sz="1400" kern="1200" dirty="0">
+            <a:solidFill>
+              <a:schemeClr val="tx1"/>
+            </a:solidFill>
+            <a:latin typeface="Times New Roman" panose="02020603050405020304" pitchFamily="18" charset="0"/>
+            <a:ea typeface="標楷體" panose="03000509000000000000" pitchFamily="65" charset="-120"/>
+            <a:cs typeface="Times New Roman" panose="02020603050405020304" pitchFamily="18" charset="0"/>
+          </a:endParaRPr>
+        </a:p>
+      </dsp:txBody>
+      <dsp:txXfrm>
+        <a:off x="5259074" y="1527207"/>
+        <a:ext cx="834367" cy="417183"/>
+      </dsp:txXfrm>
+    </dsp:sp>
+  </dsp:spTree>
+</dsp:drawing>
+</file>
+
 <file path=ppt/diagrams/layout1.xml><?xml version="1.0" encoding="utf-8"?>
 <dgm:layoutDef xmlns:dgm="http://schemas.openxmlformats.org/drawingml/2006/diagram" xmlns:a="http://schemas.openxmlformats.org/drawingml/2006/main" uniqueId="urn:microsoft.com/office/officeart/2005/8/layout/process2">
   <dgm:title val=""/>
@@ -3234,7 +7812,2187 @@
 </dgm:layoutDef>
 </file>
 
+<file path=ppt/diagrams/layout2.xml><?xml version="1.0" encoding="utf-8"?>
+<dgm:layoutDef xmlns:dgm="http://schemas.openxmlformats.org/drawingml/2006/diagram" xmlns:a="http://schemas.openxmlformats.org/drawingml/2006/main" uniqueId="urn:microsoft.com/office/officeart/2005/8/layout/orgChart1">
+  <dgm:title val=""/>
+  <dgm:desc val=""/>
+  <dgm:catLst>
+    <dgm:cat type="hierarchy" pri="1000"/>
+    <dgm:cat type="convert" pri="6000"/>
+  </dgm:catLst>
+  <dgm:sampData>
+    <dgm:dataModel>
+      <dgm:ptLst>
+        <dgm:pt modelId="0" type="doc"/>
+        <dgm:pt modelId="1">
+          <dgm:prSet phldr="1"/>
+        </dgm:pt>
+        <dgm:pt modelId="2" type="asst">
+          <dgm:prSet phldr="1"/>
+        </dgm:pt>
+        <dgm:pt modelId="3">
+          <dgm:prSet phldr="1"/>
+        </dgm:pt>
+        <dgm:pt modelId="4">
+          <dgm:prSet phldr="1"/>
+        </dgm:pt>
+        <dgm:pt modelId="5">
+          <dgm:prSet phldr="1"/>
+        </dgm:pt>
+      </dgm:ptLst>
+      <dgm:cxnLst>
+        <dgm:cxn modelId="5" srcId="0" destId="1" srcOrd="0" destOrd="0"/>
+        <dgm:cxn modelId="6" srcId="1" destId="2" srcOrd="0" destOrd="0"/>
+        <dgm:cxn modelId="7" srcId="1" destId="3" srcOrd="1" destOrd="0"/>
+        <dgm:cxn modelId="8" srcId="1" destId="4" srcOrd="2" destOrd="0"/>
+        <dgm:cxn modelId="9" srcId="1" destId="5" srcOrd="3" destOrd="0"/>
+      </dgm:cxnLst>
+      <dgm:bg/>
+      <dgm:whole/>
+    </dgm:dataModel>
+  </dgm:sampData>
+  <dgm:styleData>
+    <dgm:dataModel>
+      <dgm:ptLst>
+        <dgm:pt modelId="0" type="doc"/>
+        <dgm:pt modelId="1"/>
+        <dgm:pt modelId="12"/>
+        <dgm:pt modelId="13"/>
+      </dgm:ptLst>
+      <dgm:cxnLst>
+        <dgm:cxn modelId="2" srcId="0" destId="1" srcOrd="0" destOrd="0"/>
+        <dgm:cxn modelId="16" srcId="1" destId="12" srcOrd="1" destOrd="0"/>
+        <dgm:cxn modelId="17" srcId="1" destId="13" srcOrd="2" destOrd="0"/>
+      </dgm:cxnLst>
+      <dgm:bg/>
+      <dgm:whole/>
+    </dgm:dataModel>
+  </dgm:styleData>
+  <dgm:clrData>
+    <dgm:dataModel>
+      <dgm:ptLst>
+        <dgm:pt modelId="0" type="doc"/>
+        <dgm:pt modelId="1"/>
+        <dgm:pt modelId="11" type="asst"/>
+        <dgm:pt modelId="12"/>
+        <dgm:pt modelId="13"/>
+        <dgm:pt modelId="14"/>
+      </dgm:ptLst>
+      <dgm:cxnLst>
+        <dgm:cxn modelId="2" srcId="0" destId="1" srcOrd="0" destOrd="0"/>
+        <dgm:cxn modelId="15" srcId="1" destId="11" srcOrd="0" destOrd="0"/>
+        <dgm:cxn modelId="16" srcId="1" destId="12" srcOrd="1" destOrd="0"/>
+        <dgm:cxn modelId="17" srcId="1" destId="13" srcOrd="2" destOrd="0"/>
+        <dgm:cxn modelId="18" srcId="1" destId="14" srcOrd="2" destOrd="0"/>
+      </dgm:cxnLst>
+      <dgm:bg/>
+      <dgm:whole/>
+    </dgm:dataModel>
+  </dgm:clrData>
+  <dgm:layoutNode name="hierChild1">
+    <dgm:varLst>
+      <dgm:orgChart val="1"/>
+      <dgm:chPref val="1"/>
+      <dgm:dir/>
+      <dgm:animOne val="branch"/>
+      <dgm:animLvl val="lvl"/>
+      <dgm:resizeHandles/>
+    </dgm:varLst>
+    <dgm:choose name="Name0">
+      <dgm:if name="Name1" func="var" arg="dir" op="equ" val="norm">
+        <dgm:alg type="hierChild">
+          <dgm:param type="linDir" val="fromL"/>
+        </dgm:alg>
+      </dgm:if>
+      <dgm:else name="Name2">
+        <dgm:alg type="hierChild">
+          <dgm:param type="linDir" val="fromR"/>
+        </dgm:alg>
+      </dgm:else>
+    </dgm:choose>
+    <dgm:shape xmlns:r="http://schemas.openxmlformats.org/officeDocument/2006/relationships" r:blip="">
+      <dgm:adjLst/>
+    </dgm:shape>
+    <dgm:presOf/>
+    <dgm:constrLst>
+      <dgm:constr type="w" for="des" forName="rootComposite1" refType="w" fact="10"/>
+      <dgm:constr type="h" for="des" forName="rootComposite1" refType="w" refFor="des" refForName="rootComposite1" fact="0.5"/>
+      <dgm:constr type="w" for="des" forName="rootComposite" refType="w" fact="10"/>
+      <dgm:constr type="h" for="des" forName="rootComposite" refType="w" refFor="des" refForName="rootComposite1" fact="0.5"/>
+      <dgm:constr type="w" for="des" forName="rootComposite3" refType="w" fact="10"/>
+      <dgm:constr type="h" for="des" forName="rootComposite3" refType="w" refFor="des" refForName="rootComposite1" fact="0.5"/>
+      <dgm:constr type="primFontSz" for="des" ptType="node" op="equ"/>
+      <dgm:constr type="sp" for="des" op="equ"/>
+      <dgm:constr type="sp" for="des" forName="hierRoot1" refType="w" refFor="des" refForName="rootComposite1" fact="0.21"/>
+      <dgm:constr type="sp" for="des" forName="hierRoot2" refType="sp" refFor="des" refForName="hierRoot1"/>
+      <dgm:constr type="sp" for="des" forName="hierRoot3" refType="sp" refFor="des" refForName="hierRoot1"/>
+      <dgm:constr type="sibSp" refType="w" refFor="des" refForName="rootComposite1" fact="0.21"/>
+      <dgm:constr type="sibSp" for="des" forName="hierChild2" refType="sibSp"/>
+      <dgm:constr type="sibSp" for="des" forName="hierChild3" refType="sibSp"/>
+      <dgm:constr type="sibSp" for="des" forName="hierChild4" refType="sibSp"/>
+      <dgm:constr type="sibSp" for="des" forName="hierChild5" refType="sibSp"/>
+      <dgm:constr type="sibSp" for="des" forName="hierChild6" refType="sibSp"/>
+      <dgm:constr type="sibSp" for="des" forName="hierChild7" refType="sibSp"/>
+      <dgm:constr type="secSibSp" refType="w" refFor="des" refForName="rootComposite1" fact="0.21"/>
+      <dgm:constr type="secSibSp" for="des" forName="hierChild2" refType="secSibSp"/>
+      <dgm:constr type="secSibSp" for="des" forName="hierChild3" refType="secSibSp"/>
+      <dgm:constr type="secSibSp" for="des" forName="hierChild4" refType="secSibSp"/>
+      <dgm:constr type="secSibSp" for="des" forName="hierChild5" refType="secSibSp"/>
+      <dgm:constr type="secSibSp" for="des" forName="hierChild6" refType="secSibSp"/>
+      <dgm:constr type="secSibSp" for="des" forName="hierChild7" refType="secSibSp"/>
+    </dgm:constrLst>
+    <dgm:ruleLst/>
+    <dgm:forEach name="Name3" axis="ch">
+      <dgm:forEach name="Name4" axis="self" ptType="node">
+        <dgm:layoutNode name="hierRoot1">
+          <dgm:varLst>
+            <dgm:hierBranch val="init"/>
+          </dgm:varLst>
+          <dgm:choose name="Name5">
+            <dgm:if name="Name6" func="var" arg="hierBranch" op="equ" val="l">
+              <dgm:choose name="Name7">
+                <dgm:if name="Name8" axis="ch" ptType="asst" func="cnt" op="gte" val="1">
+                  <dgm:alg type="hierRoot">
+                    <dgm:param type="hierAlign" val="tR"/>
+                  </dgm:alg>
+                  <dgm:constrLst>
+                    <dgm:constr type="alignOff" val="0.65"/>
+                  </dgm:constrLst>
+                </dgm:if>
+                <dgm:else name="Name9">
+                  <dgm:alg type="hierRoot">
+                    <dgm:param type="hierAlign" val="tR"/>
+                  </dgm:alg>
+                  <dgm:constrLst>
+                    <dgm:constr type="alignOff" val="0.25"/>
+                  </dgm:constrLst>
+                </dgm:else>
+              </dgm:choose>
+            </dgm:if>
+            <dgm:if name="Name10" func="var" arg="hierBranch" op="equ" val="r">
+              <dgm:choose name="Name11">
+                <dgm:if name="Name12" axis="ch" ptType="asst" func="cnt" op="gte" val="1">
+                  <dgm:alg type="hierRoot">
+                    <dgm:param type="hierAlign" val="tL"/>
+                  </dgm:alg>
+                  <dgm:constrLst>
+                    <dgm:constr type="alignOff" val="0.65"/>
+                  </dgm:constrLst>
+                </dgm:if>
+                <dgm:else name="Name13">
+                  <dgm:alg type="hierRoot">
+                    <dgm:param type="hierAlign" val="tL"/>
+                  </dgm:alg>
+                  <dgm:constrLst>
+                    <dgm:constr type="alignOff" val="0.25"/>
+                  </dgm:constrLst>
+                </dgm:else>
+              </dgm:choose>
+            </dgm:if>
+            <dgm:if name="Name14" func="var" arg="hierBranch" op="equ" val="hang">
+              <dgm:alg type="hierRoot"/>
+              <dgm:constrLst>
+                <dgm:constr type="alignOff" val="0.65"/>
+              </dgm:constrLst>
+            </dgm:if>
+            <dgm:else name="Name15">
+              <dgm:alg type="hierRoot"/>
+              <dgm:constrLst>
+                <dgm:constr type="alignOff"/>
+                <dgm:constr type="bendDist" for="des" ptType="parTrans" refType="sp" fact="0.5"/>
+              </dgm:constrLst>
+            </dgm:else>
+          </dgm:choose>
+          <dgm:shape xmlns:r="http://schemas.openxmlformats.org/officeDocument/2006/relationships" r:blip="">
+            <dgm:adjLst/>
+          </dgm:shape>
+          <dgm:presOf/>
+          <dgm:ruleLst/>
+          <dgm:layoutNode name="rootComposite1">
+            <dgm:alg type="composite"/>
+            <dgm:shape xmlns:r="http://schemas.openxmlformats.org/officeDocument/2006/relationships" r:blip="">
+              <dgm:adjLst/>
+            </dgm:shape>
+            <dgm:presOf axis="self" ptType="node" cnt="1"/>
+            <dgm:choose name="Name16">
+              <dgm:if name="Name17" func="var" arg="hierBranch" op="equ" val="init">
+                <dgm:constrLst>
+                  <dgm:constr type="l" for="ch" forName="rootText1"/>
+                  <dgm:constr type="t" for="ch" forName="rootText1"/>
+                  <dgm:constr type="w" for="ch" forName="rootText1" refType="w"/>
+                  <dgm:constr type="h" for="ch" forName="rootText1" refType="h"/>
+                  <dgm:constr type="l" for="ch" forName="rootConnector1"/>
+                  <dgm:constr type="t" for="ch" forName="rootConnector1"/>
+                  <dgm:constr type="w" for="ch" forName="rootConnector1" refType="w" refFor="ch" refForName="rootText1" fact="0.2"/>
+                  <dgm:constr type="h" for="ch" forName="rootConnector1" refType="h" refFor="ch" refForName="rootText1"/>
+                </dgm:constrLst>
+              </dgm:if>
+              <dgm:if name="Name18" func="var" arg="hierBranch" op="equ" val="l">
+                <dgm:constrLst>
+                  <dgm:constr type="l" for="ch" forName="rootText1"/>
+                  <dgm:constr type="t" for="ch" forName="rootText1"/>
+                  <dgm:constr type="w" for="ch" forName="rootText1" refType="w"/>
+                  <dgm:constr type="h" for="ch" forName="rootText1" refType="h"/>
+                  <dgm:constr type="r" for="ch" forName="rootConnector1" refType="w"/>
+                  <dgm:constr type="t" for="ch" forName="rootConnector1"/>
+                  <dgm:constr type="w" for="ch" forName="rootConnector1" refType="w" refFor="ch" refForName="rootText1" fact="0.2"/>
+                  <dgm:constr type="h" for="ch" forName="rootConnector1" refType="h" refFor="ch" refForName="rootText1"/>
+                </dgm:constrLst>
+              </dgm:if>
+              <dgm:if name="Name19" func="var" arg="hierBranch" op="equ" val="r">
+                <dgm:constrLst>
+                  <dgm:constr type="l" for="ch" forName="rootText1"/>
+                  <dgm:constr type="t" for="ch" forName="rootText1"/>
+                  <dgm:constr type="w" for="ch" forName="rootText1" refType="w"/>
+                  <dgm:constr type="h" for="ch" forName="rootText1" refType="h"/>
+                  <dgm:constr type="l" for="ch" forName="rootConnector1"/>
+                  <dgm:constr type="t" for="ch" forName="rootConnector1"/>
+                  <dgm:constr type="w" for="ch" forName="rootConnector1" refType="w" refFor="ch" refForName="rootText1" fact="0.2"/>
+                  <dgm:constr type="h" for="ch" forName="rootConnector1" refType="h" refFor="ch" refForName="rootText1"/>
+                </dgm:constrLst>
+              </dgm:if>
+              <dgm:else name="Name20">
+                <dgm:constrLst>
+                  <dgm:constr type="l" for="ch" forName="rootText1"/>
+                  <dgm:constr type="t" for="ch" forName="rootText1"/>
+                  <dgm:constr type="w" for="ch" forName="rootText1" refType="w"/>
+                  <dgm:constr type="h" for="ch" forName="rootText1" refType="h"/>
+                  <dgm:constr type="r" for="ch" forName="rootConnector1" refType="w"/>
+                  <dgm:constr type="t" for="ch" forName="rootConnector1"/>
+                  <dgm:constr type="w" for="ch" forName="rootConnector1" refType="w" refFor="ch" refForName="rootText1" fact="0.2"/>
+                  <dgm:constr type="h" for="ch" forName="rootConnector1" refType="h" refFor="ch" refForName="rootText1"/>
+                </dgm:constrLst>
+              </dgm:else>
+            </dgm:choose>
+            <dgm:ruleLst/>
+            <dgm:layoutNode name="rootText1" styleLbl="node0">
+              <dgm:varLst>
+                <dgm:chPref val="3"/>
+              </dgm:varLst>
+              <dgm:alg type="tx"/>
+              <dgm:shape xmlns:r="http://schemas.openxmlformats.org/officeDocument/2006/relationships" type="rect" r:blip="">
+                <dgm:adjLst/>
+              </dgm:shape>
+              <dgm:presOf axis="self" ptType="node" cnt="1"/>
+              <dgm:constrLst>
+                <dgm:constr type="primFontSz" val="65"/>
+                <dgm:constr type="lMarg" refType="primFontSz" fact="0.05"/>
+                <dgm:constr type="rMarg" refType="primFontSz" fact="0.05"/>
+                <dgm:constr type="tMarg" refType="primFontSz" fact="0.05"/>
+                <dgm:constr type="bMarg" refType="primFontSz" fact="0.05"/>
+              </dgm:constrLst>
+              <dgm:ruleLst>
+                <dgm:rule type="primFontSz" val="5" fact="NaN" max="NaN"/>
+              </dgm:ruleLst>
+            </dgm:layoutNode>
+            <dgm:layoutNode name="rootConnector1" moveWith="rootText1">
+              <dgm:alg type="sp"/>
+              <dgm:shape xmlns:r="http://schemas.openxmlformats.org/officeDocument/2006/relationships" type="rect" r:blip="" hideGeom="1">
+                <dgm:adjLst/>
+              </dgm:shape>
+              <dgm:presOf axis="self" ptType="node" cnt="1"/>
+              <dgm:constrLst/>
+              <dgm:ruleLst/>
+            </dgm:layoutNode>
+          </dgm:layoutNode>
+          <dgm:layoutNode name="hierChild2">
+            <dgm:choose name="Name21">
+              <dgm:if name="Name22" func="var" arg="hierBranch" op="equ" val="l">
+                <dgm:alg type="hierChild">
+                  <dgm:param type="chAlign" val="r"/>
+                  <dgm:param type="linDir" val="fromT"/>
+                </dgm:alg>
+              </dgm:if>
+              <dgm:if name="Name23" func="var" arg="hierBranch" op="equ" val="r">
+                <dgm:alg type="hierChild">
+                  <dgm:param type="chAlign" val="l"/>
+                  <dgm:param type="linDir" val="fromT"/>
+                </dgm:alg>
+              </dgm:if>
+              <dgm:if name="Name24" func="var" arg="hierBranch" op="equ" val="hang">
+                <dgm:choose name="Name25">
+                  <dgm:if name="Name26" func="var" arg="dir" op="equ" val="norm">
+                    <dgm:alg type="hierChild">
+                      <dgm:param type="chAlign" val="l"/>
+                      <dgm:param type="linDir" val="fromL"/>
+                      <dgm:param type="secChAlign" val="t"/>
+                      <dgm:param type="secLinDir" val="fromT"/>
+                    </dgm:alg>
+                  </dgm:if>
+                  <dgm:else name="Name27">
+                    <dgm:alg type="hierChild">
+                      <dgm:param type="chAlign" val="l"/>
+                      <dgm:param type="linDir" val="fromR"/>
+                      <dgm:param type="secChAlign" val="t"/>
+                      <dgm:param type="secLinDir" val="fromT"/>
+                    </dgm:alg>
+                  </dgm:else>
+                </dgm:choose>
+              </dgm:if>
+              <dgm:else name="Name28">
+                <dgm:choose name="Name29">
+                  <dgm:if name="Name30" func="var" arg="dir" op="equ" val="norm">
+                    <dgm:alg type="hierChild"/>
+                  </dgm:if>
+                  <dgm:else name="Name31">
+                    <dgm:alg type="hierChild">
+                      <dgm:param type="linDir" val="fromR"/>
+                    </dgm:alg>
+                  </dgm:else>
+                </dgm:choose>
+              </dgm:else>
+            </dgm:choose>
+            <dgm:shape xmlns:r="http://schemas.openxmlformats.org/officeDocument/2006/relationships" r:blip="">
+              <dgm:adjLst/>
+            </dgm:shape>
+            <dgm:presOf/>
+            <dgm:constrLst/>
+            <dgm:ruleLst/>
+            <dgm:forEach name="rep2a" axis="ch" ptType="nonAsst">
+              <dgm:forEach name="Name32" axis="precedSib" ptType="parTrans" st="-1" cnt="1">
+                <dgm:choose name="Name33">
+                  <dgm:if name="Name34" func="var" arg="hierBranch" op="equ" val="std">
+                    <dgm:layoutNode name="Name35">
+                      <dgm:alg type="conn">
+                        <dgm:param type="connRout" val="bend"/>
+                        <dgm:param type="dim" val="1D"/>
+                        <dgm:param type="endSty" val="noArr"/>
+                        <dgm:param type="begPts" val="bCtr"/>
+                        <dgm:param type="endPts" val="tCtr"/>
+                        <dgm:param type="bendPt" val="end"/>
+                      </dgm:alg>
+                      <dgm:shape xmlns:r="http://schemas.openxmlformats.org/officeDocument/2006/relationships" type="conn" r:blip="" zOrderOff="-99999">
+                        <dgm:adjLst/>
+                      </dgm:shape>
+                      <dgm:presOf axis="self"/>
+                      <dgm:constrLst>
+                        <dgm:constr type="begPad"/>
+                        <dgm:constr type="endPad"/>
+                      </dgm:constrLst>
+                      <dgm:ruleLst/>
+                    </dgm:layoutNode>
+                  </dgm:if>
+                  <dgm:if name="Name36" func="var" arg="hierBranch" op="equ" val="init">
+                    <dgm:layoutNode name="Name37">
+                      <dgm:choose name="Name38">
+                        <dgm:if name="Name39" axis="self" func="depth" op="lte" val="2">
+                          <dgm:alg type="conn">
+                            <dgm:param type="connRout" val="bend"/>
+                            <dgm:param type="dim" val="1D"/>
+                            <dgm:param type="endSty" val="noArr"/>
+                            <dgm:param type="begPts" val="bCtr"/>
+                            <dgm:param type="endPts" val="tCtr"/>
+                            <dgm:param type="bendPt" val="end"/>
+                          </dgm:alg>
+                        </dgm:if>
+                        <dgm:else name="Name40">
+                          <dgm:choose name="Name41">
+                            <dgm:if name="Name42" axis="par des" func="maxDepth" op="lte" val="1">
+                              <dgm:choose name="Name43">
+                                <dgm:if name="Name44" axis="par ch" ptType="node asst" func="cnt" op="gte" val="1">
+                                  <dgm:alg type="conn">
+                                    <dgm:param type="connRout" val="bend"/>
+                                    <dgm:param type="dim" val="1D"/>
+                                    <dgm:param type="endSty" val="noArr"/>
+                                    <dgm:param type="begPts" val="bCtr"/>
+                                    <dgm:param type="endPts" val="midL midR"/>
+                                  </dgm:alg>
+                                </dgm:if>
+                                <dgm:else name="Name45">
+                                  <dgm:alg type="conn">
+                                    <dgm:param type="connRout" val="bend"/>
+                                    <dgm:param type="dim" val="1D"/>
+                                    <dgm:param type="endSty" val="noArr"/>
+                                    <dgm:param type="begPts" val="bCtr"/>
+                                    <dgm:param type="endPts" val="midL midR"/>
+                                    <dgm:param type="srcNode" val="rootConnector"/>
+                                  </dgm:alg>
+                                </dgm:else>
+                              </dgm:choose>
+                            </dgm:if>
+                            <dgm:else name="Name46">
+                              <dgm:alg type="conn">
+                                <dgm:param type="connRout" val="bend"/>
+                                <dgm:param type="dim" val="1D"/>
+                                <dgm:param type="endSty" val="noArr"/>
+                                <dgm:param type="begPts" val="bCtr"/>
+                                <dgm:param type="endPts" val="tCtr"/>
+                                <dgm:param type="bendPt" val="end"/>
+                              </dgm:alg>
+                            </dgm:else>
+                          </dgm:choose>
+                        </dgm:else>
+                      </dgm:choose>
+                      <dgm:shape xmlns:r="http://schemas.openxmlformats.org/officeDocument/2006/relationships" type="conn" r:blip="" zOrderOff="-99999">
+                        <dgm:adjLst/>
+                      </dgm:shape>
+                      <dgm:presOf axis="self"/>
+                      <dgm:constrLst>
+                        <dgm:constr type="begPad"/>
+                        <dgm:constr type="endPad"/>
+                      </dgm:constrLst>
+                      <dgm:ruleLst/>
+                    </dgm:layoutNode>
+                  </dgm:if>
+                  <dgm:if name="Name47" func="var" arg="hierBranch" op="equ" val="hang">
+                    <dgm:layoutNode name="Name48">
+                      <dgm:alg type="conn">
+                        <dgm:param type="connRout" val="bend"/>
+                        <dgm:param type="dim" val="1D"/>
+                        <dgm:param type="endSty" val="noArr"/>
+                        <dgm:param type="begPts" val="bCtr"/>
+                        <dgm:param type="endPts" val="midL midR"/>
+                      </dgm:alg>
+                      <dgm:shape xmlns:r="http://schemas.openxmlformats.org/officeDocument/2006/relationships" type="conn" r:blip="" zOrderOff="-99999">
+                        <dgm:adjLst/>
+                      </dgm:shape>
+                      <dgm:presOf axis="self"/>
+                      <dgm:constrLst>
+                        <dgm:constr type="begPad"/>
+                        <dgm:constr type="endPad"/>
+                      </dgm:constrLst>
+                      <dgm:ruleLst/>
+                    </dgm:layoutNode>
+                  </dgm:if>
+                  <dgm:else name="Name49">
+                    <dgm:layoutNode name="Name50">
+                      <dgm:choose name="Name51">
+                        <dgm:if name="Name52" axis="self" func="depth" op="lte" val="2">
+                          <dgm:choose name="Name53">
+                            <dgm:if name="Name54" axis="par ch" ptType="node asst" func="cnt" op="gte" val="1">
+                              <dgm:alg type="conn">
+                                <dgm:param type="connRout" val="bend"/>
+                                <dgm:param type="dim" val="1D"/>
+                                <dgm:param type="endSty" val="noArr"/>
+                                <dgm:param type="begPts" val="bCtr"/>
+                                <dgm:param type="endPts" val="midL midR"/>
+                              </dgm:alg>
+                            </dgm:if>
+                            <dgm:else name="Name55">
+                              <dgm:alg type="conn">
+                                <dgm:param type="connRout" val="bend"/>
+                                <dgm:param type="dim" val="1D"/>
+                                <dgm:param type="endSty" val="noArr"/>
+                                <dgm:param type="begPts" val="bCtr"/>
+                                <dgm:param type="endPts" val="midL midR"/>
+                                <dgm:param type="srcNode" val="rootConnector1"/>
+                              </dgm:alg>
+                            </dgm:else>
+                          </dgm:choose>
+                        </dgm:if>
+                        <dgm:else name="Name56">
+                          <dgm:choose name="Name57">
+                            <dgm:if name="Name58" axis="par ch" ptType="node asst" func="cnt" op="gte" val="1">
+                              <dgm:alg type="conn">
+                                <dgm:param type="connRout" val="bend"/>
+                                <dgm:param type="dim" val="1D"/>
+                                <dgm:param type="endSty" val="noArr"/>
+                                <dgm:param type="begPts" val="bCtr"/>
+                                <dgm:param type="endPts" val="midL midR"/>
+                              </dgm:alg>
+                            </dgm:if>
+                            <dgm:else name="Name59">
+                              <dgm:alg type="conn">
+                                <dgm:param type="connRout" val="bend"/>
+                                <dgm:param type="dim" val="1D"/>
+                                <dgm:param type="endSty" val="noArr"/>
+                                <dgm:param type="begPts" val="bCtr"/>
+                                <dgm:param type="endPts" val="midL midR"/>
+                                <dgm:param type="srcNode" val="rootConnector"/>
+                              </dgm:alg>
+                            </dgm:else>
+                          </dgm:choose>
+                        </dgm:else>
+                      </dgm:choose>
+                      <dgm:shape xmlns:r="http://schemas.openxmlformats.org/officeDocument/2006/relationships" type="conn" r:blip="" zOrderOff="-99999">
+                        <dgm:adjLst/>
+                      </dgm:shape>
+                      <dgm:presOf axis="self"/>
+                      <dgm:constrLst>
+                        <dgm:constr type="begPad"/>
+                        <dgm:constr type="endPad"/>
+                      </dgm:constrLst>
+                      <dgm:ruleLst/>
+                    </dgm:layoutNode>
+                  </dgm:else>
+                </dgm:choose>
+              </dgm:forEach>
+              <dgm:layoutNode name="hierRoot2">
+                <dgm:varLst>
+                  <dgm:hierBranch val="init"/>
+                </dgm:varLst>
+                <dgm:choose name="Name60">
+                  <dgm:if name="Name61" func="var" arg="hierBranch" op="equ" val="l">
+                    <dgm:choose name="Name62">
+                      <dgm:if name="Name63" axis="ch" ptType="asst" func="cnt" op="gte" val="1">
+                        <dgm:alg type="hierRoot">
+                          <dgm:param type="hierAlign" val="tR"/>
+                        </dgm:alg>
+                        <dgm:shape xmlns:r="http://schemas.openxmlformats.org/officeDocument/2006/relationships" r:blip="">
+                          <dgm:adjLst/>
+                        </dgm:shape>
+                        <dgm:presOf/>
+                        <dgm:constrLst>
+                          <dgm:constr type="alignOff" val="0.65"/>
+                        </dgm:constrLst>
+                      </dgm:if>
+                      <dgm:else name="Name64">
+                        <dgm:alg type="hierRoot">
+                          <dgm:param type="hierAlign" val="tR"/>
+                        </dgm:alg>
+                        <dgm:shape xmlns:r="http://schemas.openxmlformats.org/officeDocument/2006/relationships" r:blip="">
+                          <dgm:adjLst/>
+                        </dgm:shape>
+                        <dgm:presOf/>
+                        <dgm:constrLst>
+                          <dgm:constr type="alignOff" val="0.25"/>
+                        </dgm:constrLst>
+                      </dgm:else>
+                    </dgm:choose>
+                  </dgm:if>
+                  <dgm:if name="Name65" func="var" arg="hierBranch" op="equ" val="r">
+                    <dgm:choose name="Name66">
+                      <dgm:if name="Name67" axis="ch" ptType="asst" func="cnt" op="gte" val="1">
+                        <dgm:alg type="hierRoot">
+                          <dgm:param type="hierAlign" val="tL"/>
+                        </dgm:alg>
+                        <dgm:shape xmlns:r="http://schemas.openxmlformats.org/officeDocument/2006/relationships" r:blip="">
+                          <dgm:adjLst/>
+                        </dgm:shape>
+                        <dgm:presOf/>
+                        <dgm:constrLst>
+                          <dgm:constr type="alignOff" val="0.65"/>
+                        </dgm:constrLst>
+                      </dgm:if>
+                      <dgm:else name="Name68">
+                        <dgm:alg type="hierRoot">
+                          <dgm:param type="hierAlign" val="tL"/>
+                        </dgm:alg>
+                        <dgm:shape xmlns:r="http://schemas.openxmlformats.org/officeDocument/2006/relationships" r:blip="">
+                          <dgm:adjLst/>
+                        </dgm:shape>
+                        <dgm:presOf/>
+                        <dgm:constrLst>
+                          <dgm:constr type="alignOff" val="0.25"/>
+                        </dgm:constrLst>
+                      </dgm:else>
+                    </dgm:choose>
+                  </dgm:if>
+                  <dgm:if name="Name69" func="var" arg="hierBranch" op="equ" val="std">
+                    <dgm:alg type="hierRoot"/>
+                    <dgm:shape xmlns:r="http://schemas.openxmlformats.org/officeDocument/2006/relationships" r:blip="">
+                      <dgm:adjLst/>
+                    </dgm:shape>
+                    <dgm:presOf/>
+                    <dgm:constrLst>
+                      <dgm:constr type="alignOff"/>
+                      <dgm:constr type="bendDist" for="des" ptType="parTrans" refType="sp" fact="0.5"/>
+                    </dgm:constrLst>
+                  </dgm:if>
+                  <dgm:if name="Name70" func="var" arg="hierBranch" op="equ" val="init">
+                    <dgm:choose name="Name71">
+                      <dgm:if name="Name72" axis="des" func="maxDepth" op="lte" val="1">
+                        <dgm:choose name="Name73">
+                          <dgm:if name="Name74" axis="ch" ptType="asst" func="cnt" op="gte" val="1">
+                            <dgm:alg type="hierRoot">
+                              <dgm:param type="hierAlign" val="tL"/>
+                            </dgm:alg>
+                            <dgm:shape xmlns:r="http://schemas.openxmlformats.org/officeDocument/2006/relationships" r:blip="">
+                              <dgm:adjLst/>
+                            </dgm:shape>
+                            <dgm:presOf/>
+                            <dgm:constrLst>
+                              <dgm:constr type="alignOff" val="0.65"/>
+                            </dgm:constrLst>
+                          </dgm:if>
+                          <dgm:else name="Name75">
+                            <dgm:alg type="hierRoot">
+                              <dgm:param type="hierAlign" val="tL"/>
+                            </dgm:alg>
+                            <dgm:shape xmlns:r="http://schemas.openxmlformats.org/officeDocument/2006/relationships" r:blip="">
+                              <dgm:adjLst/>
+                            </dgm:shape>
+                            <dgm:presOf/>
+                            <dgm:constrLst>
+                              <dgm:constr type="alignOff" val="0.25"/>
+                            </dgm:constrLst>
+                          </dgm:else>
+                        </dgm:choose>
+                      </dgm:if>
+                      <dgm:else name="Name76">
+                        <dgm:alg type="hierRoot"/>
+                        <dgm:shape xmlns:r="http://schemas.openxmlformats.org/officeDocument/2006/relationships" r:blip="">
+                          <dgm:adjLst/>
+                        </dgm:shape>
+                        <dgm:presOf/>
+                        <dgm:constrLst>
+                          <dgm:constr type="alignOff"/>
+                          <dgm:constr type="bendDist" for="des" ptType="parTrans" refType="sp" fact="0.5"/>
+                        </dgm:constrLst>
+                      </dgm:else>
+                    </dgm:choose>
+                  </dgm:if>
+                  <dgm:else name="Name77">
+                    <dgm:alg type="hierRoot"/>
+                    <dgm:shape xmlns:r="http://schemas.openxmlformats.org/officeDocument/2006/relationships" r:blip="">
+                      <dgm:adjLst/>
+                    </dgm:shape>
+                    <dgm:presOf/>
+                    <dgm:constrLst>
+                      <dgm:constr type="alignOff" val="0.65"/>
+                    </dgm:constrLst>
+                  </dgm:else>
+                </dgm:choose>
+                <dgm:ruleLst/>
+                <dgm:layoutNode name="rootComposite">
+                  <dgm:alg type="composite"/>
+                  <dgm:shape xmlns:r="http://schemas.openxmlformats.org/officeDocument/2006/relationships" r:blip="">
+                    <dgm:adjLst/>
+                  </dgm:shape>
+                  <dgm:presOf axis="self" ptType="node" cnt="1"/>
+                  <dgm:choose name="Name78">
+                    <dgm:if name="Name79" func="var" arg="hierBranch" op="equ" val="init">
+                      <dgm:constrLst>
+                        <dgm:constr type="l" for="ch" forName="rootText"/>
+                        <dgm:constr type="t" for="ch" forName="rootText"/>
+                        <dgm:constr type="w" for="ch" forName="rootText" refType="w"/>
+                        <dgm:constr type="h" for="ch" forName="rootText" refType="h"/>
+                        <dgm:constr type="l" for="ch" forName="rootConnector"/>
+                        <dgm:constr type="t" for="ch" forName="rootConnector"/>
+                        <dgm:constr type="w" for="ch" forName="rootConnector" refType="w" refFor="ch" refForName="rootText" fact="0.2"/>
+                        <dgm:constr type="h" for="ch" forName="rootConnector" refType="h" refFor="ch" refForName="rootText"/>
+                      </dgm:constrLst>
+                    </dgm:if>
+                    <dgm:if name="Name80" func="var" arg="hierBranch" op="equ" val="l">
+                      <dgm:constrLst>
+                        <dgm:constr type="l" for="ch" forName="rootText"/>
+                        <dgm:constr type="t" for="ch" forName="rootText"/>
+                        <dgm:constr type="w" for="ch" forName="rootText" refType="w"/>
+                        <dgm:constr type="h" for="ch" forName="rootText" refType="h"/>
+                        <dgm:constr type="r" for="ch" forName="rootConnector" refType="w"/>
+                        <dgm:constr type="t" for="ch" forName="rootConnector"/>
+                        <dgm:constr type="w" for="ch" forName="rootConnector" refType="w" refFor="ch" refForName="rootText" fact="0.2"/>
+                        <dgm:constr type="h" for="ch" forName="rootConnector" refType="h" refFor="ch" refForName="rootText"/>
+                      </dgm:constrLst>
+                    </dgm:if>
+                    <dgm:if name="Name81" func="var" arg="hierBranch" op="equ" val="r">
+                      <dgm:constrLst>
+                        <dgm:constr type="l" for="ch" forName="rootText"/>
+                        <dgm:constr type="t" for="ch" forName="rootText"/>
+                        <dgm:constr type="w" for="ch" forName="rootText" refType="w"/>
+                        <dgm:constr type="h" for="ch" forName="rootText" refType="h"/>
+                        <dgm:constr type="l" for="ch" forName="rootConnector"/>
+                        <dgm:constr type="t" for="ch" forName="rootConnector"/>
+                        <dgm:constr type="w" for="ch" forName="rootConnector" refType="w" refFor="ch" refForName="rootText" fact="0.2"/>
+                        <dgm:constr type="h" for="ch" forName="rootConnector" refType="h" refFor="ch" refForName="rootText"/>
+                      </dgm:constrLst>
+                    </dgm:if>
+                    <dgm:else name="Name82">
+                      <dgm:constrLst>
+                        <dgm:constr type="l" for="ch" forName="rootText"/>
+                        <dgm:constr type="t" for="ch" forName="rootText"/>
+                        <dgm:constr type="w" for="ch" forName="rootText" refType="w"/>
+                        <dgm:constr type="h" for="ch" forName="rootText" refType="h"/>
+                        <dgm:constr type="r" for="ch" forName="rootConnector" refType="w"/>
+                        <dgm:constr type="t" for="ch" forName="rootConnector"/>
+                        <dgm:constr type="w" for="ch" forName="rootConnector" refType="w" refFor="ch" refForName="rootText" fact="0.2"/>
+                        <dgm:constr type="h" for="ch" forName="rootConnector" refType="h" refFor="ch" refForName="rootText"/>
+                      </dgm:constrLst>
+                    </dgm:else>
+                  </dgm:choose>
+                  <dgm:ruleLst/>
+                  <dgm:layoutNode name="rootText">
+                    <dgm:varLst>
+                      <dgm:chPref val="3"/>
+                    </dgm:varLst>
+                    <dgm:alg type="tx"/>
+                    <dgm:shape xmlns:r="http://schemas.openxmlformats.org/officeDocument/2006/relationships" type="rect" r:blip="">
+                      <dgm:adjLst/>
+                    </dgm:shape>
+                    <dgm:presOf axis="self" ptType="node" cnt="1"/>
+                    <dgm:constrLst>
+                      <dgm:constr type="primFontSz" val="65"/>
+                      <dgm:constr type="lMarg" refType="primFontSz" fact="0.05"/>
+                      <dgm:constr type="rMarg" refType="primFontSz" fact="0.05"/>
+                      <dgm:constr type="tMarg" refType="primFontSz" fact="0.05"/>
+                      <dgm:constr type="bMarg" refType="primFontSz" fact="0.05"/>
+                    </dgm:constrLst>
+                    <dgm:ruleLst>
+                      <dgm:rule type="primFontSz" val="5" fact="NaN" max="NaN"/>
+                    </dgm:ruleLst>
+                  </dgm:layoutNode>
+                  <dgm:layoutNode name="rootConnector" moveWith="rootText">
+                    <dgm:alg type="sp"/>
+                    <dgm:shape xmlns:r="http://schemas.openxmlformats.org/officeDocument/2006/relationships" type="rect" r:blip="" hideGeom="1">
+                      <dgm:adjLst/>
+                    </dgm:shape>
+                    <dgm:presOf axis="self" ptType="node" cnt="1"/>
+                    <dgm:constrLst/>
+                    <dgm:ruleLst/>
+                  </dgm:layoutNode>
+                </dgm:layoutNode>
+                <dgm:layoutNode name="hierChild4">
+                  <dgm:choose name="Name83">
+                    <dgm:if name="Name84" func="var" arg="hierBranch" op="equ" val="l">
+                      <dgm:alg type="hierChild">
+                        <dgm:param type="chAlign" val="r"/>
+                        <dgm:param type="linDir" val="fromT"/>
+                      </dgm:alg>
+                    </dgm:if>
+                    <dgm:if name="Name85" func="var" arg="hierBranch" op="equ" val="r">
+                      <dgm:alg type="hierChild">
+                        <dgm:param type="chAlign" val="l"/>
+                        <dgm:param type="linDir" val="fromT"/>
+                      </dgm:alg>
+                    </dgm:if>
+                    <dgm:if name="Name86" func="var" arg="hierBranch" op="equ" val="hang">
+                      <dgm:choose name="Name87">
+                        <dgm:if name="Name88" func="var" arg="dir" op="equ" val="norm">
+                          <dgm:alg type="hierChild">
+                            <dgm:param type="chAlign" val="l"/>
+                            <dgm:param type="linDir" val="fromL"/>
+                            <dgm:param type="secChAlign" val="t"/>
+                            <dgm:param type="secLinDir" val="fromT"/>
+                          </dgm:alg>
+                        </dgm:if>
+                        <dgm:else name="Name89">
+                          <dgm:alg type="hierChild">
+                            <dgm:param type="chAlign" val="l"/>
+                            <dgm:param type="linDir" val="fromR"/>
+                            <dgm:param type="secChAlign" val="t"/>
+                            <dgm:param type="secLinDir" val="fromT"/>
+                          </dgm:alg>
+                        </dgm:else>
+                      </dgm:choose>
+                    </dgm:if>
+                    <dgm:if name="Name90" func="var" arg="hierBranch" op="equ" val="std">
+                      <dgm:choose name="Name91">
+                        <dgm:if name="Name92" func="var" arg="dir" op="equ" val="norm">
+                          <dgm:alg type="hierChild"/>
+                        </dgm:if>
+                        <dgm:else name="Name93">
+                          <dgm:alg type="hierChild">
+                            <dgm:param type="linDir" val="fromR"/>
+                          </dgm:alg>
+                        </dgm:else>
+                      </dgm:choose>
+                    </dgm:if>
+                    <dgm:if name="Name94" func="var" arg="hierBranch" op="equ" val="init">
+                      <dgm:choose name="Name95">
+                        <dgm:if name="Name96" axis="des" func="maxDepth" op="lte" val="1">
+                          <dgm:alg type="hierChild">
+                            <dgm:param type="chAlign" val="l"/>
+                            <dgm:param type="linDir" val="fromT"/>
+                          </dgm:alg>
+                        </dgm:if>
+                        <dgm:else name="Name97">
+                          <dgm:choose name="Name98">
+                            <dgm:if name="Name99" func="var" arg="dir" op="equ" val="norm">
+                              <dgm:alg type="hierChild"/>
+                            </dgm:if>
+                            <dgm:else name="Name100">
+                              <dgm:alg type="hierChild">
+                                <dgm:param type="linDir" val="fromR"/>
+                              </dgm:alg>
+                            </dgm:else>
+                          </dgm:choose>
+                        </dgm:else>
+                      </dgm:choose>
+                    </dgm:if>
+                    <dgm:else name="Name101"/>
+                  </dgm:choose>
+                  <dgm:shape xmlns:r="http://schemas.openxmlformats.org/officeDocument/2006/relationships" r:blip="">
+                    <dgm:adjLst/>
+                  </dgm:shape>
+                  <dgm:presOf/>
+                  <dgm:constrLst/>
+                  <dgm:ruleLst/>
+                  <dgm:forEach name="Name102" ref="rep2a"/>
+                </dgm:layoutNode>
+                <dgm:layoutNode name="hierChild5">
+                  <dgm:choose name="Name103">
+                    <dgm:if name="Name104" func="var" arg="dir" op="equ" val="norm">
+                      <dgm:alg type="hierChild">
+                        <dgm:param type="chAlign" val="l"/>
+                        <dgm:param type="linDir" val="fromL"/>
+                        <dgm:param type="secChAlign" val="t"/>
+                        <dgm:param type="secLinDir" val="fromT"/>
+                      </dgm:alg>
+                    </dgm:if>
+                    <dgm:else name="Name105">
+                      <dgm:alg type="hierChild">
+                        <dgm:param type="chAlign" val="l"/>
+                        <dgm:param type="linDir" val="fromR"/>
+                        <dgm:param type="secChAlign" val="t"/>
+                        <dgm:param type="secLinDir" val="fromT"/>
+                      </dgm:alg>
+                    </dgm:else>
+                  </dgm:choose>
+                  <dgm:shape xmlns:r="http://schemas.openxmlformats.org/officeDocument/2006/relationships" r:blip="">
+                    <dgm:adjLst/>
+                  </dgm:shape>
+                  <dgm:presOf/>
+                  <dgm:constrLst/>
+                  <dgm:ruleLst/>
+                  <dgm:forEach name="Name106" ref="rep2b"/>
+                </dgm:layoutNode>
+              </dgm:layoutNode>
+            </dgm:forEach>
+          </dgm:layoutNode>
+          <dgm:layoutNode name="hierChild3">
+            <dgm:choose name="Name107">
+              <dgm:if name="Name108" func="var" arg="dir" op="equ" val="norm">
+                <dgm:alg type="hierChild">
+                  <dgm:param type="chAlign" val="l"/>
+                  <dgm:param type="linDir" val="fromL"/>
+                  <dgm:param type="secChAlign" val="t"/>
+                  <dgm:param type="secLinDir" val="fromT"/>
+                </dgm:alg>
+              </dgm:if>
+              <dgm:else name="Name109">
+                <dgm:alg type="hierChild">
+                  <dgm:param type="chAlign" val="l"/>
+                  <dgm:param type="linDir" val="fromR"/>
+                  <dgm:param type="secChAlign" val="t"/>
+                  <dgm:param type="secLinDir" val="fromT"/>
+                </dgm:alg>
+              </dgm:else>
+            </dgm:choose>
+            <dgm:shape xmlns:r="http://schemas.openxmlformats.org/officeDocument/2006/relationships" r:blip="">
+              <dgm:adjLst/>
+            </dgm:shape>
+            <dgm:presOf/>
+            <dgm:constrLst/>
+            <dgm:ruleLst/>
+            <dgm:forEach name="rep2b" axis="ch" ptType="asst">
+              <dgm:forEach name="Name110" axis="precedSib" ptType="parTrans" st="-1" cnt="1">
+                <dgm:layoutNode name="Name111">
+                  <dgm:alg type="conn">
+                    <dgm:param type="connRout" val="bend"/>
+                    <dgm:param type="dim" val="1D"/>
+                    <dgm:param type="endSty" val="noArr"/>
+                    <dgm:param type="begPts" val="bCtr"/>
+                    <dgm:param type="endPts" val="midL midR"/>
+                  </dgm:alg>
+                  <dgm:shape xmlns:r="http://schemas.openxmlformats.org/officeDocument/2006/relationships" type="conn" r:blip="" zOrderOff="-99999">
+                    <dgm:adjLst/>
+                  </dgm:shape>
+                  <dgm:presOf axis="self"/>
+                  <dgm:constrLst>
+                    <dgm:constr type="begPad"/>
+                    <dgm:constr type="endPad"/>
+                  </dgm:constrLst>
+                  <dgm:ruleLst/>
+                </dgm:layoutNode>
+              </dgm:forEach>
+              <dgm:layoutNode name="hierRoot3">
+                <dgm:varLst>
+                  <dgm:hierBranch val="init"/>
+                </dgm:varLst>
+                <dgm:choose name="Name112">
+                  <dgm:if name="Name113" func="var" arg="hierBranch" op="equ" val="l">
+                    <dgm:alg type="hierRoot">
+                      <dgm:param type="hierAlign" val="tR"/>
+                    </dgm:alg>
+                    <dgm:shape xmlns:r="http://schemas.openxmlformats.org/officeDocument/2006/relationships" r:blip="">
+                      <dgm:adjLst/>
+                    </dgm:shape>
+                    <dgm:presOf/>
+                    <dgm:constrLst>
+                      <dgm:constr type="alignOff" val="0.65"/>
+                    </dgm:constrLst>
+                  </dgm:if>
+                  <dgm:if name="Name114" func="var" arg="hierBranch" op="equ" val="r">
+                    <dgm:alg type="hierRoot">
+                      <dgm:param type="hierAlign" val="tL"/>
+                    </dgm:alg>
+                    <dgm:shape xmlns:r="http://schemas.openxmlformats.org/officeDocument/2006/relationships" r:blip="">
+                      <dgm:adjLst/>
+                    </dgm:shape>
+                    <dgm:presOf/>
+                    <dgm:constrLst>
+                      <dgm:constr type="alignOff" val="0.65"/>
+                    </dgm:constrLst>
+                  </dgm:if>
+                  <dgm:if name="Name115" func="var" arg="hierBranch" op="equ" val="hang">
+                    <dgm:alg type="hierRoot"/>
+                    <dgm:shape xmlns:r="http://schemas.openxmlformats.org/officeDocument/2006/relationships" r:blip="">
+                      <dgm:adjLst/>
+                    </dgm:shape>
+                    <dgm:presOf/>
+                    <dgm:constrLst>
+                      <dgm:constr type="alignOff" val="0.65"/>
+                    </dgm:constrLst>
+                  </dgm:if>
+                  <dgm:if name="Name116" func="var" arg="hierBranch" op="equ" val="std">
+                    <dgm:alg type="hierRoot"/>
+                    <dgm:shape xmlns:r="http://schemas.openxmlformats.org/officeDocument/2006/relationships" r:blip="">
+                      <dgm:adjLst/>
+                    </dgm:shape>
+                    <dgm:presOf/>
+                    <dgm:constrLst>
+                      <dgm:constr type="alignOff"/>
+                      <dgm:constr type="bendDist" for="des" ptType="parTrans" refType="sp" fact="0.5"/>
+                    </dgm:constrLst>
+                  </dgm:if>
+                  <dgm:if name="Name117" func="var" arg="hierBranch" op="equ" val="init">
+                    <dgm:choose name="Name118">
+                      <dgm:if name="Name119" axis="des" func="maxDepth" op="lte" val="1">
+                        <dgm:alg type="hierRoot">
+                          <dgm:param type="hierAlign" val="tL"/>
+                        </dgm:alg>
+                        <dgm:shape xmlns:r="http://schemas.openxmlformats.org/officeDocument/2006/relationships" r:blip="">
+                          <dgm:adjLst/>
+                        </dgm:shape>
+                        <dgm:presOf/>
+                        <dgm:constrLst>
+                          <dgm:constr type="alignOff" val="0.65"/>
+                        </dgm:constrLst>
+                      </dgm:if>
+                      <dgm:else name="Name120">
+                        <dgm:alg type="hierRoot"/>
+                        <dgm:shape xmlns:r="http://schemas.openxmlformats.org/officeDocument/2006/relationships" r:blip="">
+                          <dgm:adjLst/>
+                        </dgm:shape>
+                        <dgm:presOf/>
+                        <dgm:constrLst>
+                          <dgm:constr type="alignOff"/>
+                          <dgm:constr type="bendDist" for="des" ptType="parTrans" refType="sp" fact="0.5"/>
+                        </dgm:constrLst>
+                      </dgm:else>
+                    </dgm:choose>
+                  </dgm:if>
+                  <dgm:else name="Name121"/>
+                </dgm:choose>
+                <dgm:ruleLst/>
+                <dgm:layoutNode name="rootComposite3">
+                  <dgm:alg type="composite"/>
+                  <dgm:shape xmlns:r="http://schemas.openxmlformats.org/officeDocument/2006/relationships" r:blip="">
+                    <dgm:adjLst/>
+                  </dgm:shape>
+                  <dgm:presOf axis="self" ptType="node" cnt="1"/>
+                  <dgm:choose name="Name122">
+                    <dgm:if name="Name123" func="var" arg="hierBranch" op="equ" val="init">
+                      <dgm:constrLst>
+                        <dgm:constr type="l" for="ch" forName="rootText3"/>
+                        <dgm:constr type="t" for="ch" forName="rootText3"/>
+                        <dgm:constr type="w" for="ch" forName="rootText3" refType="w"/>
+                        <dgm:constr type="h" for="ch" forName="rootText3" refType="h"/>
+                        <dgm:constr type="l" for="ch" forName="rootConnector3"/>
+                        <dgm:constr type="t" for="ch" forName="rootConnector3"/>
+                        <dgm:constr type="w" for="ch" forName="rootConnector3" refType="w" refFor="ch" refForName="rootText3" fact="0.2"/>
+                        <dgm:constr type="h" for="ch" forName="rootConnector3" refType="h" refFor="ch" refForName="rootText3"/>
+                      </dgm:constrLst>
+                    </dgm:if>
+                    <dgm:if name="Name124" func="var" arg="hierBranch" op="equ" val="l">
+                      <dgm:constrLst>
+                        <dgm:constr type="l" for="ch" forName="rootText3"/>
+                        <dgm:constr type="t" for="ch" forName="rootText3"/>
+                        <dgm:constr type="w" for="ch" forName="rootText3" refType="w"/>
+                        <dgm:constr type="h" for="ch" forName="rootText3" refType="h"/>
+                        <dgm:constr type="r" for="ch" forName="rootConnector3" refType="w"/>
+                        <dgm:constr type="t" for="ch" forName="rootConnector3"/>
+                        <dgm:constr type="w" for="ch" forName="rootConnector3" refType="w" refFor="ch" refForName="rootText3" fact="0.2"/>
+                        <dgm:constr type="h" for="ch" forName="rootConnector3" refType="h" refFor="ch" refForName="rootText3"/>
+                      </dgm:constrLst>
+                    </dgm:if>
+                    <dgm:if name="Name125" func="var" arg="hierBranch" op="equ" val="r">
+                      <dgm:constrLst>
+                        <dgm:constr type="l" for="ch" forName="rootText3"/>
+                        <dgm:constr type="t" for="ch" forName="rootText3"/>
+                        <dgm:constr type="w" for="ch" forName="rootText3" refType="w"/>
+                        <dgm:constr type="h" for="ch" forName="rootText3" refType="h"/>
+                        <dgm:constr type="l" for="ch" forName="rootConnector3"/>
+                        <dgm:constr type="t" for="ch" forName="rootConnector3"/>
+                        <dgm:constr type="w" for="ch" forName="rootConnector3" refType="w" refFor="ch" refForName="rootText3" fact="0.2"/>
+                        <dgm:constr type="h" for="ch" forName="rootConnector3" refType="h" refFor="ch" refForName="rootText3"/>
+                      </dgm:constrLst>
+                    </dgm:if>
+                    <dgm:else name="Name126">
+                      <dgm:constrLst>
+                        <dgm:constr type="l" for="ch" forName="rootText3"/>
+                        <dgm:constr type="t" for="ch" forName="rootText3"/>
+                        <dgm:constr type="w" for="ch" forName="rootText3" refType="w"/>
+                        <dgm:constr type="h" for="ch" forName="rootText3" refType="h"/>
+                        <dgm:constr type="r" for="ch" forName="rootConnector3" refType="w"/>
+                        <dgm:constr type="t" for="ch" forName="rootConnector3"/>
+                        <dgm:constr type="w" for="ch" forName="rootConnector3" refType="w" refFor="ch" refForName="rootText3" fact="0.2"/>
+                        <dgm:constr type="h" for="ch" forName="rootConnector3" refType="h" refFor="ch" refForName="rootText3"/>
+                      </dgm:constrLst>
+                    </dgm:else>
+                  </dgm:choose>
+                  <dgm:ruleLst/>
+                  <dgm:layoutNode name="rootText3">
+                    <dgm:varLst>
+                      <dgm:chPref val="3"/>
+                    </dgm:varLst>
+                    <dgm:alg type="tx"/>
+                    <dgm:shape xmlns:r="http://schemas.openxmlformats.org/officeDocument/2006/relationships" type="rect" r:blip="">
+                      <dgm:adjLst/>
+                    </dgm:shape>
+                    <dgm:presOf axis="self" ptType="node" cnt="1"/>
+                    <dgm:constrLst>
+                      <dgm:constr type="primFontSz" val="65"/>
+                      <dgm:constr type="lMarg" refType="primFontSz" fact="0.05"/>
+                      <dgm:constr type="rMarg" refType="primFontSz" fact="0.05"/>
+                      <dgm:constr type="tMarg" refType="primFontSz" fact="0.05"/>
+                      <dgm:constr type="bMarg" refType="primFontSz" fact="0.05"/>
+                    </dgm:constrLst>
+                    <dgm:ruleLst>
+                      <dgm:rule type="primFontSz" val="5" fact="NaN" max="NaN"/>
+                    </dgm:ruleLst>
+                  </dgm:layoutNode>
+                  <dgm:layoutNode name="rootConnector3" moveWith="rootText1">
+                    <dgm:alg type="sp"/>
+                    <dgm:shape xmlns:r="http://schemas.openxmlformats.org/officeDocument/2006/relationships" type="rect" r:blip="" hideGeom="1">
+                      <dgm:adjLst/>
+                    </dgm:shape>
+                    <dgm:presOf axis="self" ptType="node" cnt="1"/>
+                    <dgm:constrLst/>
+                    <dgm:ruleLst/>
+                  </dgm:layoutNode>
+                </dgm:layoutNode>
+                <dgm:layoutNode name="hierChild6">
+                  <dgm:choose name="Name127">
+                    <dgm:if name="Name128" func="var" arg="hierBranch" op="equ" val="l">
+                      <dgm:alg type="hierChild">
+                        <dgm:param type="chAlign" val="r"/>
+                        <dgm:param type="linDir" val="fromT"/>
+                      </dgm:alg>
+                    </dgm:if>
+                    <dgm:if name="Name129" func="var" arg="hierBranch" op="equ" val="r">
+                      <dgm:alg type="hierChild">
+                        <dgm:param type="chAlign" val="l"/>
+                        <dgm:param type="linDir" val="fromT"/>
+                      </dgm:alg>
+                    </dgm:if>
+                    <dgm:if name="Name130" func="var" arg="hierBranch" op="equ" val="hang">
+                      <dgm:choose name="Name131">
+                        <dgm:if name="Name132" func="var" arg="dir" op="equ" val="norm">
+                          <dgm:alg type="hierChild">
+                            <dgm:param type="chAlign" val="l"/>
+                            <dgm:param type="linDir" val="fromL"/>
+                            <dgm:param type="secChAlign" val="t"/>
+                            <dgm:param type="secLinDir" val="fromT"/>
+                          </dgm:alg>
+                        </dgm:if>
+                        <dgm:else name="Name133">
+                          <dgm:alg type="hierChild">
+                            <dgm:param type="chAlign" val="l"/>
+                            <dgm:param type="linDir" val="fromR"/>
+                            <dgm:param type="secChAlign" val="t"/>
+                            <dgm:param type="secLinDir" val="fromT"/>
+                          </dgm:alg>
+                        </dgm:else>
+                      </dgm:choose>
+                    </dgm:if>
+                    <dgm:if name="Name134" func="var" arg="hierBranch" op="equ" val="std">
+                      <dgm:choose name="Name135">
+                        <dgm:if name="Name136" func="var" arg="dir" op="equ" val="norm">
+                          <dgm:alg type="hierChild"/>
+                        </dgm:if>
+                        <dgm:else name="Name137">
+                          <dgm:alg type="hierChild">
+                            <dgm:param type="linDir" val="fromR"/>
+                          </dgm:alg>
+                        </dgm:else>
+                      </dgm:choose>
+                    </dgm:if>
+                    <dgm:if name="Name138" func="var" arg="hierBranch" op="equ" val="init">
+                      <dgm:choose name="Name139">
+                        <dgm:if name="Name140" axis="des" func="maxDepth" op="lte" val="1">
+                          <dgm:alg type="hierChild">
+                            <dgm:param type="chAlign" val="l"/>
+                            <dgm:param type="linDir" val="fromT"/>
+                          </dgm:alg>
+                        </dgm:if>
+                        <dgm:else name="Name141">
+                          <dgm:alg type="hierChild"/>
+                        </dgm:else>
+                      </dgm:choose>
+                    </dgm:if>
+                    <dgm:else name="Name142"/>
+                  </dgm:choose>
+                  <dgm:shape xmlns:r="http://schemas.openxmlformats.org/officeDocument/2006/relationships" r:blip="">
+                    <dgm:adjLst/>
+                  </dgm:shape>
+                  <dgm:presOf/>
+                  <dgm:constrLst/>
+                  <dgm:ruleLst/>
+                  <dgm:forEach name="Name143" ref="rep2a"/>
+                </dgm:layoutNode>
+                <dgm:layoutNode name="hierChild7">
+                  <dgm:choose name="Name144">
+                    <dgm:if name="Name145" func="var" arg="dir" op="equ" val="norm">
+                      <dgm:alg type="hierChild">
+                        <dgm:param type="chAlign" val="l"/>
+                        <dgm:param type="linDir" val="fromL"/>
+                        <dgm:param type="secChAlign" val="t"/>
+                        <dgm:param type="secLinDir" val="fromT"/>
+                      </dgm:alg>
+                    </dgm:if>
+                    <dgm:else name="Name146">
+                      <dgm:alg type="hierChild">
+                        <dgm:param type="chAlign" val="l"/>
+                        <dgm:param type="linDir" val="fromR"/>
+                        <dgm:param type="secChAlign" val="t"/>
+                        <dgm:param type="secLinDir" val="fromT"/>
+                      </dgm:alg>
+                    </dgm:else>
+                  </dgm:choose>
+                  <dgm:shape xmlns:r="http://schemas.openxmlformats.org/officeDocument/2006/relationships" r:blip="">
+                    <dgm:adjLst/>
+                  </dgm:shape>
+                  <dgm:presOf/>
+                  <dgm:constrLst/>
+                  <dgm:ruleLst/>
+                  <dgm:forEach name="Name147" ref="rep2b"/>
+                </dgm:layoutNode>
+              </dgm:layoutNode>
+            </dgm:forEach>
+          </dgm:layoutNode>
+        </dgm:layoutNode>
+      </dgm:forEach>
+    </dgm:forEach>
+  </dgm:layoutNode>
+</dgm:layoutDef>
+</file>
+
 <file path=ppt/diagrams/quickStyle1.xml><?xml version="1.0" encoding="utf-8"?>
+<dgm:styleDef xmlns:dgm="http://schemas.openxmlformats.org/drawingml/2006/diagram" xmlns:a="http://schemas.openxmlformats.org/drawingml/2006/main" uniqueId="urn:microsoft.com/office/officeart/2005/8/quickstyle/simple1">
+  <dgm:title val=""/>
+  <dgm:desc val=""/>
+  <dgm:catLst>
+    <dgm:cat type="simple" pri="10100"/>
+  </dgm:catLst>
+  <dgm:scene3d>
+    <a:camera prst="orthographicFront"/>
+    <a:lightRig rig="threePt" dir="t"/>
+  </dgm:scene3d>
+  <dgm:styleLbl name="node0">
+    <dgm:scene3d>
+      <a:camera prst="orthographicFront"/>
+      <a:lightRig rig="threePt" dir="t"/>
+    </dgm:scene3d>
+    <dgm:sp3d/>
+    <dgm:txPr/>
+    <dgm:style>
+      <a:lnRef idx="2">
+        <a:scrgbClr r="0" g="0" b="0"/>
+      </a:lnRef>
+      <a:fillRef idx="1">
+        <a:scrgbClr r="0" g="0" b="0"/>
+      </a:fillRef>
+      <a:effectRef idx="0">
+        <a:scrgbClr r="0" g="0" b="0"/>
+      </a:effectRef>
+      <a:fontRef idx="minor">
+        <a:schemeClr val="lt1"/>
+      </a:fontRef>
+    </dgm:style>
+  </dgm:styleLbl>
+  <dgm:styleLbl name="lnNode1">
+    <dgm:scene3d>
+      <a:camera prst="orthographicFront"/>
+      <a:lightRig rig="threePt" dir="t"/>
+    </dgm:scene3d>
+    <dgm:sp3d/>
+    <dgm:txPr/>
+    <dgm:style>
+      <a:lnRef idx="2">
+        <a:scrgbClr r="0" g="0" b="0"/>
+      </a:lnRef>
+      <a:fillRef idx="1">
+        <a:scrgbClr r="0" g="0" b="0"/>
+      </a:fillRef>
+      <a:effectRef idx="0">
+        <a:scrgbClr r="0" g="0" b="0"/>
+      </a:effectRef>
+      <a:fontRef idx="minor">
+        <a:schemeClr val="lt1"/>
+      </a:fontRef>
+    </dgm:style>
+  </dgm:styleLbl>
+  <dgm:styleLbl name="vennNode1">
+    <dgm:scene3d>
+      <a:camera prst="orthographicFront"/>
+      <a:lightRig rig="threePt" dir="t"/>
+    </dgm:scene3d>
+    <dgm:sp3d/>
+    <dgm:txPr/>
+    <dgm:style>
+      <a:lnRef idx="2">
+        <a:scrgbClr r="0" g="0" b="0"/>
+      </a:lnRef>
+      <a:fillRef idx="1">
+        <a:scrgbClr r="0" g="0" b="0"/>
+      </a:fillRef>
+      <a:effectRef idx="0">
+        <a:scrgbClr r="0" g="0" b="0"/>
+      </a:effectRef>
+      <a:fontRef idx="minor">
+        <a:schemeClr val="tx1"/>
+      </a:fontRef>
+    </dgm:style>
+  </dgm:styleLbl>
+  <dgm:styleLbl name="alignNode1">
+    <dgm:scene3d>
+      <a:camera prst="orthographicFront"/>
+      <a:lightRig rig="threePt" dir="t"/>
+    </dgm:scene3d>
+    <dgm:sp3d/>
+    <dgm:txPr/>
+    <dgm:style>
+      <a:lnRef idx="2">
+        <a:scrgbClr r="0" g="0" b="0"/>
+      </a:lnRef>
+      <a:fillRef idx="1">
+        <a:scrgbClr r="0" g="0" b="0"/>
+      </a:fillRef>
+      <a:effectRef idx="0">
+        <a:scrgbClr r="0" g="0" b="0"/>
+      </a:effectRef>
+      <a:fontRef idx="minor">
+        <a:schemeClr val="lt1"/>
+      </a:fontRef>
+    </dgm:style>
+  </dgm:styleLbl>
+  <dgm:styleLbl name="node1">
+    <dgm:scene3d>
+      <a:camera prst="orthographicFront"/>
+      <a:lightRig rig="threePt" dir="t"/>
+    </dgm:scene3d>
+    <dgm:sp3d/>
+    <dgm:txPr/>
+    <dgm:style>
+      <a:lnRef idx="2">
+        <a:scrgbClr r="0" g="0" b="0"/>
+      </a:lnRef>
+      <a:fillRef idx="1">
+        <a:scrgbClr r="0" g="0" b="0"/>
+      </a:fillRef>
+      <a:effectRef idx="0">
+        <a:scrgbClr r="0" g="0" b="0"/>
+      </a:effectRef>
+      <a:fontRef idx="minor">
+        <a:schemeClr val="lt1"/>
+      </a:fontRef>
+    </dgm:style>
+  </dgm:styleLbl>
+  <dgm:styleLbl name="node2">
+    <dgm:scene3d>
+      <a:camera prst="orthographicFront"/>
+      <a:lightRig rig="threePt" dir="t"/>
+    </dgm:scene3d>
+    <dgm:sp3d/>
+    <dgm:txPr/>
+    <dgm:style>
+      <a:lnRef idx="2">
+        <a:scrgbClr r="0" g="0" b="0"/>
+      </a:lnRef>
+      <a:fillRef idx="1">
+        <a:scrgbClr r="0" g="0" b="0"/>
+      </a:fillRef>
+      <a:effectRef idx="0">
+        <a:scrgbClr r="0" g="0" b="0"/>
+      </a:effectRef>
+      <a:fontRef idx="minor">
+        <a:schemeClr val="lt1"/>
+      </a:fontRef>
+    </dgm:style>
+  </dgm:styleLbl>
+  <dgm:styleLbl name="node3">
+    <dgm:scene3d>
+      <a:camera prst="orthographicFront"/>
+      <a:lightRig rig="threePt" dir="t"/>
+    </dgm:scene3d>
+    <dgm:sp3d/>
+    <dgm:txPr/>
+    <dgm:style>
+      <a:lnRef idx="2">
+        <a:scrgbClr r="0" g="0" b="0"/>
+      </a:lnRef>
+      <a:fillRef idx="1">
+        <a:scrgbClr r="0" g="0" b="0"/>
+      </a:fillRef>
+      <a:effectRef idx="0">
+        <a:scrgbClr r="0" g="0" b="0"/>
+      </a:effectRef>
+      <a:fontRef idx="minor">
+        <a:schemeClr val="lt1"/>
+      </a:fontRef>
+    </dgm:style>
+  </dgm:styleLbl>
+  <dgm:styleLbl name="node4">
+    <dgm:scene3d>
+      <a:camera prst="orthographicFront"/>
+      <a:lightRig rig="threePt" dir="t"/>
+    </dgm:scene3d>
+    <dgm:sp3d/>
+    <dgm:txPr/>
+    <dgm:style>
+      <a:lnRef idx="2">
+        <a:scrgbClr r="0" g="0" b="0"/>
+      </a:lnRef>
+      <a:fillRef idx="1">
+        <a:scrgbClr r="0" g="0" b="0"/>
+      </a:fillRef>
+      <a:effectRef idx="0">
+        <a:scrgbClr r="0" g="0" b="0"/>
+      </a:effectRef>
+      <a:fontRef idx="minor">
+        <a:schemeClr val="lt1"/>
+      </a:fontRef>
+    </dgm:style>
+  </dgm:styleLbl>
+  <dgm:styleLbl name="fgImgPlace1">
+    <dgm:scene3d>
+      <a:camera prst="orthographicFront"/>
+      <a:lightRig rig="threePt" dir="t"/>
+    </dgm:scene3d>
+    <dgm:sp3d/>
+    <dgm:txPr/>
+    <dgm:style>
+      <a:lnRef idx="2">
+        <a:scrgbClr r="0" g="0" b="0"/>
+      </a:lnRef>
+      <a:fillRef idx="1">
+        <a:scrgbClr r="0" g="0" b="0"/>
+      </a:fillRef>
+      <a:effectRef idx="0">
+        <a:scrgbClr r="0" g="0" b="0"/>
+      </a:effectRef>
+      <a:fontRef idx="minor"/>
+    </dgm:style>
+  </dgm:styleLbl>
+  <dgm:styleLbl name="alignImgPlace1">
+    <dgm:scene3d>
+      <a:camera prst="orthographicFront"/>
+      <a:lightRig rig="threePt" dir="t"/>
+    </dgm:scene3d>
+    <dgm:sp3d/>
+    <dgm:txPr/>
+    <dgm:style>
+      <a:lnRef idx="2">
+        <a:scrgbClr r="0" g="0" b="0"/>
+      </a:lnRef>
+      <a:fillRef idx="1">
+        <a:scrgbClr r="0" g="0" b="0"/>
+      </a:fillRef>
+      <a:effectRef idx="0">
+        <a:scrgbClr r="0" g="0" b="0"/>
+      </a:effectRef>
+      <a:fontRef idx="minor"/>
+    </dgm:style>
+  </dgm:styleLbl>
+  <dgm:styleLbl name="bgImgPlace1">
+    <dgm:scene3d>
+      <a:camera prst="orthographicFront"/>
+      <a:lightRig rig="threePt" dir="t"/>
+    </dgm:scene3d>
+    <dgm:sp3d/>
+    <dgm:txPr/>
+    <dgm:style>
+      <a:lnRef idx="2">
+        <a:scrgbClr r="0" g="0" b="0"/>
+      </a:lnRef>
+      <a:fillRef idx="1">
+        <a:scrgbClr r="0" g="0" b="0"/>
+      </a:fillRef>
+      <a:effectRef idx="0">
+        <a:scrgbClr r="0" g="0" b="0"/>
+      </a:effectRef>
+      <a:fontRef idx="minor"/>
+    </dgm:style>
+  </dgm:styleLbl>
+  <dgm:styleLbl name="sibTrans2D1">
+    <dgm:scene3d>
+      <a:camera prst="orthographicFront"/>
+      <a:lightRig rig="threePt" dir="t"/>
+    </dgm:scene3d>
+    <dgm:sp3d/>
+    <dgm:txPr/>
+    <dgm:style>
+      <a:lnRef idx="0">
+        <a:scrgbClr r="0" g="0" b="0"/>
+      </a:lnRef>
+      <a:fillRef idx="1">
+        <a:scrgbClr r="0" g="0" b="0"/>
+      </a:fillRef>
+      <a:effectRef idx="0">
+        <a:scrgbClr r="0" g="0" b="0"/>
+      </a:effectRef>
+      <a:fontRef idx="minor">
+        <a:schemeClr val="lt1"/>
+      </a:fontRef>
+    </dgm:style>
+  </dgm:styleLbl>
+  <dgm:styleLbl name="fgSibTrans2D1">
+    <dgm:scene3d>
+      <a:camera prst="orthographicFront"/>
+      <a:lightRig rig="threePt" dir="t"/>
+    </dgm:scene3d>
+    <dgm:sp3d/>
+    <dgm:txPr/>
+    <dgm:style>
+      <a:lnRef idx="0">
+        <a:scrgbClr r="0" g="0" b="0"/>
+      </a:lnRef>
+      <a:fillRef idx="1">
+        <a:scrgbClr r="0" g="0" b="0"/>
+      </a:fillRef>
+      <a:effectRef idx="0">
+        <a:scrgbClr r="0" g="0" b="0"/>
+      </a:effectRef>
+      <a:fontRef idx="minor">
+        <a:schemeClr val="lt1"/>
+      </a:fontRef>
+    </dgm:style>
+  </dgm:styleLbl>
+  <dgm:styleLbl name="bgSibTrans2D1">
+    <dgm:scene3d>
+      <a:camera prst="orthographicFront"/>
+      <a:lightRig rig="threePt" dir="t"/>
+    </dgm:scene3d>
+    <dgm:sp3d/>
+    <dgm:txPr/>
+    <dgm:style>
+      <a:lnRef idx="0">
+        <a:scrgbClr r="0" g="0" b="0"/>
+      </a:lnRef>
+      <a:fillRef idx="1">
+        <a:scrgbClr r="0" g="0" b="0"/>
+      </a:fillRef>
+      <a:effectRef idx="0">
+        <a:scrgbClr r="0" g="0" b="0"/>
+      </a:effectRef>
+      <a:fontRef idx="minor">
+        <a:schemeClr val="lt1"/>
+      </a:fontRef>
+    </dgm:style>
+  </dgm:styleLbl>
+  <dgm:styleLbl name="sibTrans1D1">
+    <dgm:scene3d>
+      <a:camera prst="orthographicFront"/>
+      <a:lightRig rig="threePt" dir="t"/>
+    </dgm:scene3d>
+    <dgm:sp3d/>
+    <dgm:txPr/>
+    <dgm:style>
+      <a:lnRef idx="1">
+        <a:scrgbClr r="0" g="0" b="0"/>
+      </a:lnRef>
+      <a:fillRef idx="0">
+        <a:scrgbClr r="0" g="0" b="0"/>
+      </a:fillRef>
+      <a:effectRef idx="0">
+        <a:scrgbClr r="0" g="0" b="0"/>
+      </a:effectRef>
+      <a:fontRef idx="minor"/>
+    </dgm:style>
+  </dgm:styleLbl>
+  <dgm:styleLbl name="callout">
+    <dgm:scene3d>
+      <a:camera prst="orthographicFront"/>
+      <a:lightRig rig="threePt" dir="t"/>
+    </dgm:scene3d>
+    <dgm:sp3d/>
+    <dgm:txPr/>
+    <dgm:style>
+      <a:lnRef idx="2">
+        <a:scrgbClr r="0" g="0" b="0"/>
+      </a:lnRef>
+      <a:fillRef idx="1">
+        <a:scrgbClr r="0" g="0" b="0"/>
+      </a:fillRef>
+      <a:effectRef idx="0">
+        <a:scrgbClr r="0" g="0" b="0"/>
+      </a:effectRef>
+      <a:fontRef idx="minor"/>
+    </dgm:style>
+  </dgm:styleLbl>
+  <dgm:styleLbl name="asst0">
+    <dgm:scene3d>
+      <a:camera prst="orthographicFront"/>
+      <a:lightRig rig="threePt" dir="t"/>
+    </dgm:scene3d>
+    <dgm:sp3d/>
+    <dgm:txPr/>
+    <dgm:style>
+      <a:lnRef idx="2">
+        <a:scrgbClr r="0" g="0" b="0"/>
+      </a:lnRef>
+      <a:fillRef idx="1">
+        <a:scrgbClr r="0" g="0" b="0"/>
+      </a:fillRef>
+      <a:effectRef idx="0">
+        <a:scrgbClr r="0" g="0" b="0"/>
+      </a:effectRef>
+      <a:fontRef idx="minor">
+        <a:schemeClr val="lt1"/>
+      </a:fontRef>
+    </dgm:style>
+  </dgm:styleLbl>
+  <dgm:styleLbl name="asst1">
+    <dgm:scene3d>
+      <a:camera prst="orthographicFront"/>
+      <a:lightRig rig="threePt" dir="t"/>
+    </dgm:scene3d>
+    <dgm:sp3d/>
+    <dgm:txPr/>
+    <dgm:style>
+      <a:lnRef idx="2">
+        <a:scrgbClr r="0" g="0" b="0"/>
+      </a:lnRef>
+      <a:fillRef idx="1">
+        <a:scrgbClr r="0" g="0" b="0"/>
+      </a:fillRef>
+      <a:effectRef idx="0">
+        <a:scrgbClr r="0" g="0" b="0"/>
+      </a:effectRef>
+      <a:fontRef idx="minor">
+        <a:schemeClr val="lt1"/>
+      </a:fontRef>
+    </dgm:style>
+  </dgm:styleLbl>
+  <dgm:styleLbl name="asst2">
+    <dgm:scene3d>
+      <a:camera prst="orthographicFront"/>
+      <a:lightRig rig="threePt" dir="t"/>
+    </dgm:scene3d>
+    <dgm:sp3d/>
+    <dgm:txPr/>
+    <dgm:style>
+      <a:lnRef idx="2">
+        <a:scrgbClr r="0" g="0" b="0"/>
+      </a:lnRef>
+      <a:fillRef idx="1">
+        <a:scrgbClr r="0" g="0" b="0"/>
+      </a:fillRef>
+      <a:effectRef idx="0">
+        <a:scrgbClr r="0" g="0" b="0"/>
+      </a:effectRef>
+      <a:fontRef idx="minor">
+        <a:schemeClr val="lt1"/>
+      </a:fontRef>
+    </dgm:style>
+  </dgm:styleLbl>
+  <dgm:styleLbl name="asst3">
+    <dgm:scene3d>
+      <a:camera prst="orthographicFront"/>
+      <a:lightRig rig="threePt" dir="t"/>
+    </dgm:scene3d>
+    <dgm:sp3d/>
+    <dgm:txPr/>
+    <dgm:style>
+      <a:lnRef idx="2">
+        <a:scrgbClr r="0" g="0" b="0"/>
+      </a:lnRef>
+      <a:fillRef idx="1">
+        <a:scrgbClr r="0" g="0" b="0"/>
+      </a:fillRef>
+      <a:effectRef idx="0">
+        <a:scrgbClr r="0" g="0" b="0"/>
+      </a:effectRef>
+      <a:fontRef idx="minor">
+        <a:schemeClr val="lt1"/>
+      </a:fontRef>
+    </dgm:style>
+  </dgm:styleLbl>
+  <dgm:styleLbl name="asst4">
+    <dgm:scene3d>
+      <a:camera prst="orthographicFront"/>
+      <a:lightRig rig="threePt" dir="t"/>
+    </dgm:scene3d>
+    <dgm:sp3d/>
+    <dgm:txPr/>
+    <dgm:style>
+      <a:lnRef idx="2">
+        <a:scrgbClr r="0" g="0" b="0"/>
+      </a:lnRef>
+      <a:fillRef idx="1">
+        <a:scrgbClr r="0" g="0" b="0"/>
+      </a:fillRef>
+      <a:effectRef idx="0">
+        <a:scrgbClr r="0" g="0" b="0"/>
+      </a:effectRef>
+      <a:fontRef idx="minor">
+        <a:schemeClr val="lt1"/>
+      </a:fontRef>
+    </dgm:style>
+  </dgm:styleLbl>
+  <dgm:styleLbl name="parChTrans2D1">
+    <dgm:scene3d>
+      <a:camera prst="orthographicFront"/>
+      <a:lightRig rig="threePt" dir="t"/>
+    </dgm:scene3d>
+    <dgm:sp3d/>
+    <dgm:txPr/>
+    <dgm:style>
+      <a:lnRef idx="2">
+        <a:scrgbClr r="0" g="0" b="0"/>
+      </a:lnRef>
+      <a:fillRef idx="1">
+        <a:scrgbClr r="0" g="0" b="0"/>
+      </a:fillRef>
+      <a:effectRef idx="0">
+        <a:scrgbClr r="0" g="0" b="0"/>
+      </a:effectRef>
+      <a:fontRef idx="minor">
+        <a:schemeClr val="lt1"/>
+      </a:fontRef>
+    </dgm:style>
+  </dgm:styleLbl>
+  <dgm:styleLbl name="parChTrans2D2">
+    <dgm:scene3d>
+      <a:camera prst="orthographicFront"/>
+      <a:lightRig rig="threePt" dir="t"/>
+    </dgm:scene3d>
+    <dgm:sp3d/>
+    <dgm:txPr/>
+    <dgm:style>
+      <a:lnRef idx="2">
+        <a:scrgbClr r="0" g="0" b="0"/>
+      </a:lnRef>
+      <a:fillRef idx="1">
+        <a:scrgbClr r="0" g="0" b="0"/>
+      </a:fillRef>
+      <a:effectRef idx="0">
+        <a:scrgbClr r="0" g="0" b="0"/>
+      </a:effectRef>
+      <a:fontRef idx="minor">
+        <a:schemeClr val="lt1"/>
+      </a:fontRef>
+    </dgm:style>
+  </dgm:styleLbl>
+  <dgm:styleLbl name="parChTrans2D3">
+    <dgm:scene3d>
+      <a:camera prst="orthographicFront"/>
+      <a:lightRig rig="threePt" dir="t"/>
+    </dgm:scene3d>
+    <dgm:sp3d/>
+    <dgm:txPr/>
+    <dgm:style>
+      <a:lnRef idx="2">
+        <a:scrgbClr r="0" g="0" b="0"/>
+      </a:lnRef>
+      <a:fillRef idx="1">
+        <a:scrgbClr r="0" g="0" b="0"/>
+      </a:fillRef>
+      <a:effectRef idx="0">
+        <a:scrgbClr r="0" g="0" b="0"/>
+      </a:effectRef>
+      <a:fontRef idx="minor">
+        <a:schemeClr val="lt1"/>
+      </a:fontRef>
+    </dgm:style>
+  </dgm:styleLbl>
+  <dgm:styleLbl name="parChTrans2D4">
+    <dgm:scene3d>
+      <a:camera prst="orthographicFront"/>
+      <a:lightRig rig="threePt" dir="t"/>
+    </dgm:scene3d>
+    <dgm:sp3d/>
+    <dgm:txPr/>
+    <dgm:style>
+      <a:lnRef idx="2">
+        <a:scrgbClr r="0" g="0" b="0"/>
+      </a:lnRef>
+      <a:fillRef idx="1">
+        <a:scrgbClr r="0" g="0" b="0"/>
+      </a:fillRef>
+      <a:effectRef idx="0">
+        <a:scrgbClr r="0" g="0" b="0"/>
+      </a:effectRef>
+      <a:fontRef idx="minor">
+        <a:schemeClr val="lt1"/>
+      </a:fontRef>
+    </dgm:style>
+  </dgm:styleLbl>
+  <dgm:styleLbl name="parChTrans1D1">
+    <dgm:scene3d>
+      <a:camera prst="orthographicFront"/>
+      <a:lightRig rig="threePt" dir="t"/>
+    </dgm:scene3d>
+    <dgm:sp3d/>
+    <dgm:txPr/>
+    <dgm:style>
+      <a:lnRef idx="2">
+        <a:scrgbClr r="0" g="0" b="0"/>
+      </a:lnRef>
+      <a:fillRef idx="0">
+        <a:scrgbClr r="0" g="0" b="0"/>
+      </a:fillRef>
+      <a:effectRef idx="0">
+        <a:scrgbClr r="0" g="0" b="0"/>
+      </a:effectRef>
+      <a:fontRef idx="minor"/>
+    </dgm:style>
+  </dgm:styleLbl>
+  <dgm:styleLbl name="parChTrans1D2">
+    <dgm:scene3d>
+      <a:camera prst="orthographicFront"/>
+      <a:lightRig rig="threePt" dir="t"/>
+    </dgm:scene3d>
+    <dgm:sp3d/>
+    <dgm:txPr/>
+    <dgm:style>
+      <a:lnRef idx="2">
+        <a:scrgbClr r="0" g="0" b="0"/>
+      </a:lnRef>
+      <a:fillRef idx="0">
+        <a:scrgbClr r="0" g="0" b="0"/>
+      </a:fillRef>
+      <a:effectRef idx="0">
+        <a:scrgbClr r="0" g="0" b="0"/>
+      </a:effectRef>
+      <a:fontRef idx="minor"/>
+    </dgm:style>
+  </dgm:styleLbl>
+  <dgm:styleLbl name="parChTrans1D3">
+    <dgm:scene3d>
+      <a:camera prst="orthographicFront"/>
+      <a:lightRig rig="threePt" dir="t"/>
+    </dgm:scene3d>
+    <dgm:sp3d/>
+    <dgm:txPr/>
+    <dgm:style>
+      <a:lnRef idx="2">
+        <a:scrgbClr r="0" g="0" b="0"/>
+      </a:lnRef>
+      <a:fillRef idx="0">
+        <a:scrgbClr r="0" g="0" b="0"/>
+      </a:fillRef>
+      <a:effectRef idx="0">
+        <a:scrgbClr r="0" g="0" b="0"/>
+      </a:effectRef>
+      <a:fontRef idx="minor"/>
+    </dgm:style>
+  </dgm:styleLbl>
+  <dgm:styleLbl name="parChTrans1D4">
+    <dgm:scene3d>
+      <a:camera prst="orthographicFront"/>
+      <a:lightRig rig="threePt" dir="t"/>
+    </dgm:scene3d>
+    <dgm:sp3d/>
+    <dgm:txPr/>
+    <dgm:style>
+      <a:lnRef idx="2">
+        <a:scrgbClr r="0" g="0" b="0"/>
+      </a:lnRef>
+      <a:fillRef idx="0">
+        <a:scrgbClr r="0" g="0" b="0"/>
+      </a:fillRef>
+      <a:effectRef idx="0">
+        <a:scrgbClr r="0" g="0" b="0"/>
+      </a:effectRef>
+      <a:fontRef idx="minor"/>
+    </dgm:style>
+  </dgm:styleLbl>
+  <dgm:styleLbl name="fgAcc1">
+    <dgm:scene3d>
+      <a:camera prst="orthographicFront"/>
+      <a:lightRig rig="threePt" dir="t"/>
+    </dgm:scene3d>
+    <dgm:sp3d/>
+    <dgm:txPr/>
+    <dgm:style>
+      <a:lnRef idx="2">
+        <a:scrgbClr r="0" g="0" b="0"/>
+      </a:lnRef>
+      <a:fillRef idx="1">
+        <a:scrgbClr r="0" g="0" b="0"/>
+      </a:fillRef>
+      <a:effectRef idx="0">
+        <a:scrgbClr r="0" g="0" b="0"/>
+      </a:effectRef>
+      <a:fontRef idx="minor"/>
+    </dgm:style>
+  </dgm:styleLbl>
+  <dgm:styleLbl name="conFgAcc1">
+    <dgm:scene3d>
+      <a:camera prst="orthographicFront"/>
+      <a:lightRig rig="threePt" dir="t"/>
+    </dgm:scene3d>
+    <dgm:sp3d/>
+    <dgm:txPr/>
+    <dgm:style>
+      <a:lnRef idx="2">
+        <a:scrgbClr r="0" g="0" b="0"/>
+      </a:lnRef>
+      <a:fillRef idx="1">
+        <a:scrgbClr r="0" g="0" b="0"/>
+      </a:fillRef>
+      <a:effectRef idx="0">
+        <a:scrgbClr r="0" g="0" b="0"/>
+      </a:effectRef>
+      <a:fontRef idx="minor"/>
+    </dgm:style>
+  </dgm:styleLbl>
+  <dgm:styleLbl name="alignAcc1">
+    <dgm:scene3d>
+      <a:camera prst="orthographicFront"/>
+      <a:lightRig rig="threePt" dir="t"/>
+    </dgm:scene3d>
+    <dgm:sp3d/>
+    <dgm:txPr/>
+    <dgm:style>
+      <a:lnRef idx="2">
+        <a:scrgbClr r="0" g="0" b="0"/>
+      </a:lnRef>
+      <a:fillRef idx="1">
+        <a:scrgbClr r="0" g="0" b="0"/>
+      </a:fillRef>
+      <a:effectRef idx="0">
+        <a:scrgbClr r="0" g="0" b="0"/>
+      </a:effectRef>
+      <a:fontRef idx="minor"/>
+    </dgm:style>
+  </dgm:styleLbl>
+  <dgm:styleLbl name="trAlignAcc1">
+    <dgm:scene3d>
+      <a:camera prst="orthographicFront"/>
+      <a:lightRig rig="threePt" dir="t"/>
+    </dgm:scene3d>
+    <dgm:sp3d/>
+    <dgm:txPr/>
+    <dgm:style>
+      <a:lnRef idx="1">
+        <a:scrgbClr r="0" g="0" b="0"/>
+      </a:lnRef>
+      <a:fillRef idx="1">
+        <a:scrgbClr r="0" g="0" b="0"/>
+      </a:fillRef>
+      <a:effectRef idx="0">
+        <a:scrgbClr r="0" g="0" b="0"/>
+      </a:effectRef>
+      <a:fontRef idx="minor"/>
+    </dgm:style>
+  </dgm:styleLbl>
+  <dgm:styleLbl name="bgAcc1">
+    <dgm:scene3d>
+      <a:camera prst="orthographicFront"/>
+      <a:lightRig rig="threePt" dir="t"/>
+    </dgm:scene3d>
+    <dgm:sp3d/>
+    <dgm:txPr/>
+    <dgm:style>
+      <a:lnRef idx="2">
+        <a:scrgbClr r="0" g="0" b="0"/>
+      </a:lnRef>
+      <a:fillRef idx="1">
+        <a:scrgbClr r="0" g="0" b="0"/>
+      </a:fillRef>
+      <a:effectRef idx="0">
+        <a:scrgbClr r="0" g="0" b="0"/>
+      </a:effectRef>
+      <a:fontRef idx="minor"/>
+    </dgm:style>
+  </dgm:styleLbl>
+  <dgm:styleLbl name="solidFgAcc1">
+    <dgm:scene3d>
+      <a:camera prst="orthographicFront"/>
+      <a:lightRig rig="threePt" dir="t"/>
+    </dgm:scene3d>
+    <dgm:sp3d/>
+    <dgm:txPr/>
+    <dgm:style>
+      <a:lnRef idx="2">
+        <a:scrgbClr r="0" g="0" b="0"/>
+      </a:lnRef>
+      <a:fillRef idx="1">
+        <a:scrgbClr r="0" g="0" b="0"/>
+      </a:fillRef>
+      <a:effectRef idx="0">
+        <a:scrgbClr r="0" g="0" b="0"/>
+      </a:effectRef>
+      <a:fontRef idx="minor"/>
+    </dgm:style>
+  </dgm:styleLbl>
+  <dgm:styleLbl name="solidAlignAcc1">
+    <dgm:scene3d>
+      <a:camera prst="orthographicFront"/>
+      <a:lightRig rig="threePt" dir="t"/>
+    </dgm:scene3d>
+    <dgm:sp3d/>
+    <dgm:txPr/>
+    <dgm:style>
+      <a:lnRef idx="2">
+        <a:scrgbClr r="0" g="0" b="0"/>
+      </a:lnRef>
+      <a:fillRef idx="1">
+        <a:scrgbClr r="0" g="0" b="0"/>
+      </a:fillRef>
+      <a:effectRef idx="0">
+        <a:scrgbClr r="0" g="0" b="0"/>
+      </a:effectRef>
+      <a:fontRef idx="minor"/>
+    </dgm:style>
+  </dgm:styleLbl>
+  <dgm:styleLbl name="solidBgAcc1">
+    <dgm:scene3d>
+      <a:camera prst="orthographicFront"/>
+      <a:lightRig rig="threePt" dir="t"/>
+    </dgm:scene3d>
+    <dgm:sp3d/>
+    <dgm:txPr/>
+    <dgm:style>
+      <a:lnRef idx="2">
+        <a:scrgbClr r="0" g="0" b="0"/>
+      </a:lnRef>
+      <a:fillRef idx="1">
+        <a:scrgbClr r="0" g="0" b="0"/>
+      </a:fillRef>
+      <a:effectRef idx="0">
+        <a:scrgbClr r="0" g="0" b="0"/>
+      </a:effectRef>
+      <a:fontRef idx="minor"/>
+    </dgm:style>
+  </dgm:styleLbl>
+  <dgm:styleLbl name="fgAccFollowNode1">
+    <dgm:scene3d>
+      <a:camera prst="orthographicFront"/>
+      <a:lightRig rig="threePt" dir="t"/>
+    </dgm:scene3d>
+    <dgm:sp3d/>
+    <dgm:txPr/>
+    <dgm:style>
+      <a:lnRef idx="2">
+        <a:scrgbClr r="0" g="0" b="0"/>
+      </a:lnRef>
+      <a:fillRef idx="1">
+        <a:scrgbClr r="0" g="0" b="0"/>
+      </a:fillRef>
+      <a:effectRef idx="0">
+        <a:scrgbClr r="0" g="0" b="0"/>
+      </a:effectRef>
+      <a:fontRef idx="minor"/>
+    </dgm:style>
+  </dgm:styleLbl>
+  <dgm:styleLbl name="alignAccFollowNode1">
+    <dgm:scene3d>
+      <a:camera prst="orthographicFront"/>
+      <a:lightRig rig="threePt" dir="t"/>
+    </dgm:scene3d>
+    <dgm:sp3d/>
+    <dgm:txPr/>
+    <dgm:style>
+      <a:lnRef idx="2">
+        <a:scrgbClr r="0" g="0" b="0"/>
+      </a:lnRef>
+      <a:fillRef idx="1">
+        <a:scrgbClr r="0" g="0" b="0"/>
+      </a:fillRef>
+      <a:effectRef idx="0">
+        <a:scrgbClr r="0" g="0" b="0"/>
+      </a:effectRef>
+      <a:fontRef idx="minor"/>
+    </dgm:style>
+  </dgm:styleLbl>
+  <dgm:styleLbl name="bgAccFollowNode1">
+    <dgm:scene3d>
+      <a:camera prst="orthographicFront"/>
+      <a:lightRig rig="threePt" dir="t"/>
+    </dgm:scene3d>
+    <dgm:sp3d/>
+    <dgm:txPr/>
+    <dgm:style>
+      <a:lnRef idx="2">
+        <a:scrgbClr r="0" g="0" b="0"/>
+      </a:lnRef>
+      <a:fillRef idx="1">
+        <a:scrgbClr r="0" g="0" b="0"/>
+      </a:fillRef>
+      <a:effectRef idx="0">
+        <a:scrgbClr r="0" g="0" b="0"/>
+      </a:effectRef>
+      <a:fontRef idx="minor"/>
+    </dgm:style>
+  </dgm:styleLbl>
+  <dgm:styleLbl name="fgAcc0">
+    <dgm:scene3d>
+      <a:camera prst="orthographicFront"/>
+      <a:lightRig rig="threePt" dir="t"/>
+    </dgm:scene3d>
+    <dgm:sp3d/>
+    <dgm:txPr/>
+    <dgm:style>
+      <a:lnRef idx="2">
+        <a:scrgbClr r="0" g="0" b="0"/>
+      </a:lnRef>
+      <a:fillRef idx="1">
+        <a:scrgbClr r="0" g="0" b="0"/>
+      </a:fillRef>
+      <a:effectRef idx="0">
+        <a:scrgbClr r="0" g="0" b="0"/>
+      </a:effectRef>
+      <a:fontRef idx="minor"/>
+    </dgm:style>
+  </dgm:styleLbl>
+  <dgm:styleLbl name="fgAcc2">
+    <dgm:scene3d>
+      <a:camera prst="orthographicFront"/>
+      <a:lightRig rig="threePt" dir="t"/>
+    </dgm:scene3d>
+    <dgm:sp3d/>
+    <dgm:txPr/>
+    <dgm:style>
+      <a:lnRef idx="2">
+        <a:scrgbClr r="0" g="0" b="0"/>
+      </a:lnRef>
+      <a:fillRef idx="1">
+        <a:scrgbClr r="0" g="0" b="0"/>
+      </a:fillRef>
+      <a:effectRef idx="0">
+        <a:scrgbClr r="0" g="0" b="0"/>
+      </a:effectRef>
+      <a:fontRef idx="minor"/>
+    </dgm:style>
+  </dgm:styleLbl>
+  <dgm:styleLbl name="fgAcc3">
+    <dgm:scene3d>
+      <a:camera prst="orthographicFront"/>
+      <a:lightRig rig="threePt" dir="t"/>
+    </dgm:scene3d>
+    <dgm:sp3d/>
+    <dgm:txPr/>
+    <dgm:style>
+      <a:lnRef idx="2">
+        <a:scrgbClr r="0" g="0" b="0"/>
+      </a:lnRef>
+      <a:fillRef idx="1">
+        <a:scrgbClr r="0" g="0" b="0"/>
+      </a:fillRef>
+      <a:effectRef idx="0">
+        <a:scrgbClr r="0" g="0" b="0"/>
+      </a:effectRef>
+      <a:fontRef idx="minor"/>
+    </dgm:style>
+  </dgm:styleLbl>
+  <dgm:styleLbl name="fgAcc4">
+    <dgm:scene3d>
+      <a:camera prst="orthographicFront"/>
+      <a:lightRig rig="threePt" dir="t"/>
+    </dgm:scene3d>
+    <dgm:sp3d/>
+    <dgm:txPr/>
+    <dgm:style>
+      <a:lnRef idx="2">
+        <a:scrgbClr r="0" g="0" b="0"/>
+      </a:lnRef>
+      <a:fillRef idx="1">
+        <a:scrgbClr r="0" g="0" b="0"/>
+      </a:fillRef>
+      <a:effectRef idx="0">
+        <a:scrgbClr r="0" g="0" b="0"/>
+      </a:effectRef>
+      <a:fontRef idx="minor"/>
+    </dgm:style>
+  </dgm:styleLbl>
+  <dgm:styleLbl name="bgShp">
+    <dgm:scene3d>
+      <a:camera prst="orthographicFront"/>
+      <a:lightRig rig="threePt" dir="t"/>
+    </dgm:scene3d>
+    <dgm:sp3d/>
+    <dgm:txPr/>
+    <dgm:style>
+      <a:lnRef idx="0">
+        <a:scrgbClr r="0" g="0" b="0"/>
+      </a:lnRef>
+      <a:fillRef idx="1">
+        <a:scrgbClr r="0" g="0" b="0"/>
+      </a:fillRef>
+      <a:effectRef idx="0">
+        <a:scrgbClr r="0" g="0" b="0"/>
+      </a:effectRef>
+      <a:fontRef idx="minor"/>
+    </dgm:style>
+  </dgm:styleLbl>
+  <dgm:styleLbl name="dkBgShp">
+    <dgm:scene3d>
+      <a:camera prst="orthographicFront"/>
+      <a:lightRig rig="threePt" dir="t"/>
+    </dgm:scene3d>
+    <dgm:sp3d/>
+    <dgm:txPr/>
+    <dgm:style>
+      <a:lnRef idx="0">
+        <a:scrgbClr r="0" g="0" b="0"/>
+      </a:lnRef>
+      <a:fillRef idx="1">
+        <a:scrgbClr r="0" g="0" b="0"/>
+      </a:fillRef>
+      <a:effectRef idx="0">
+        <a:scrgbClr r="0" g="0" b="0"/>
+      </a:effectRef>
+      <a:fontRef idx="minor"/>
+    </dgm:style>
+  </dgm:styleLbl>
+  <dgm:styleLbl name="trBgShp">
+    <dgm:scene3d>
+      <a:camera prst="orthographicFront"/>
+      <a:lightRig rig="threePt" dir="t"/>
+    </dgm:scene3d>
+    <dgm:sp3d/>
+    <dgm:txPr/>
+    <dgm:style>
+      <a:lnRef idx="0">
+        <a:scrgbClr r="0" g="0" b="0"/>
+      </a:lnRef>
+      <a:fillRef idx="1">
+        <a:scrgbClr r="0" g="0" b="0"/>
+      </a:fillRef>
+      <a:effectRef idx="0">
+        <a:scrgbClr r="0" g="0" b="0"/>
+      </a:effectRef>
+      <a:fontRef idx="minor"/>
+    </dgm:style>
+  </dgm:styleLbl>
+  <dgm:styleLbl name="fgShp">
+    <dgm:scene3d>
+      <a:camera prst="orthographicFront"/>
+      <a:lightRig rig="threePt" dir="t"/>
+    </dgm:scene3d>
+    <dgm:sp3d/>
+    <dgm:txPr/>
+    <dgm:style>
+      <a:lnRef idx="2">
+        <a:scrgbClr r="0" g="0" b="0"/>
+      </a:lnRef>
+      <a:fillRef idx="1">
+        <a:scrgbClr r="0" g="0" b="0"/>
+      </a:fillRef>
+      <a:effectRef idx="0">
+        <a:scrgbClr r="0" g="0" b="0"/>
+      </a:effectRef>
+      <a:fontRef idx="minor"/>
+    </dgm:style>
+  </dgm:styleLbl>
+  <dgm:styleLbl name="revTx">
+    <dgm:scene3d>
+      <a:camera prst="orthographicFront"/>
+      <a:lightRig rig="threePt" dir="t"/>
+    </dgm:scene3d>
+    <dgm:sp3d/>
+    <dgm:txPr/>
+    <dgm:style>
+      <a:lnRef idx="0">
+        <a:scrgbClr r="0" g="0" b="0"/>
+      </a:lnRef>
+      <a:fillRef idx="0">
+        <a:scrgbClr r="0" g="0" b="0"/>
+      </a:fillRef>
+      <a:effectRef idx="0">
+        <a:scrgbClr r="0" g="0" b="0"/>
+      </a:effectRef>
+      <a:fontRef idx="minor"/>
+    </dgm:style>
+  </dgm:styleLbl>
+</dgm:styleDef>
+</file>
+
+<file path=ppt/diagrams/quickStyle2.xml><?xml version="1.0" encoding="utf-8"?>
 <dgm:styleDef xmlns:dgm="http://schemas.openxmlformats.org/drawingml/2006/diagram" xmlns:a="http://schemas.openxmlformats.org/drawingml/2006/main" uniqueId="urn:microsoft.com/office/officeart/2005/8/quickstyle/simple1">
   <dgm:title val=""/>
   <dgm:desc val=""/>
@@ -4350,7 +11108,7 @@
           <a:p>
             <a:fld id="{B904E2B0-A8F6-417E-B341-E764BD2233EF}" type="datetimeFigureOut">
               <a:rPr lang="zh-TW" altLang="en-US" smtClean="0"/>
-              <a:t>2026/1/22</a:t>
+              <a:t>2026/3/19</a:t>
             </a:fld>
             <a:endParaRPr lang="zh-TW" altLang="en-US"/>
           </a:p>
@@ -5061,7 +11819,7 @@
           <a:p>
             <a:fld id="{5BBEAD13-0566-4C6C-97E7-55F17F24B09F}" type="datetimeFigureOut">
               <a:rPr lang="zh-TW" altLang="en-US" smtClean="0"/>
-              <a:t>2026/1/22</a:t>
+              <a:t>2026/3/19</a:t>
             </a:fld>
             <a:endParaRPr lang="zh-TW" altLang="en-US"/>
           </a:p>
@@ -5226,7 +11984,7 @@
           <a:p>
             <a:fld id="{5BBEAD13-0566-4C6C-97E7-55F17F24B09F}" type="datetimeFigureOut">
               <a:rPr lang="zh-TW" altLang="en-US" smtClean="0"/>
-              <a:t>2026/1/22</a:t>
+              <a:t>2026/3/19</a:t>
             </a:fld>
             <a:endParaRPr lang="zh-TW" altLang="en-US"/>
           </a:p>
@@ -5401,7 +12159,7 @@
           <a:p>
             <a:fld id="{5BBEAD13-0566-4C6C-97E7-55F17F24B09F}" type="datetimeFigureOut">
               <a:rPr lang="zh-TW" altLang="en-US" smtClean="0"/>
-              <a:t>2026/1/22</a:t>
+              <a:t>2026/3/19</a:t>
             </a:fld>
             <a:endParaRPr lang="zh-TW" altLang="en-US"/>
           </a:p>
@@ -5566,7 +12324,7 @@
           <a:p>
             <a:fld id="{5BBEAD13-0566-4C6C-97E7-55F17F24B09F}" type="datetimeFigureOut">
               <a:rPr lang="zh-TW" altLang="en-US" smtClean="0"/>
-              <a:t>2026/1/22</a:t>
+              <a:t>2026/3/19</a:t>
             </a:fld>
             <a:endParaRPr lang="zh-TW" altLang="en-US"/>
           </a:p>
@@ -5807,7 +12565,7 @@
           <a:p>
             <a:fld id="{5BBEAD13-0566-4C6C-97E7-55F17F24B09F}" type="datetimeFigureOut">
               <a:rPr lang="zh-TW" altLang="en-US" smtClean="0"/>
-              <a:t>2026/1/22</a:t>
+              <a:t>2026/3/19</a:t>
             </a:fld>
             <a:endParaRPr lang="zh-TW" altLang="en-US"/>
           </a:p>
@@ -6090,7 +12848,7 @@
           <a:p>
             <a:fld id="{5BBEAD13-0566-4C6C-97E7-55F17F24B09F}" type="datetimeFigureOut">
               <a:rPr lang="zh-TW" altLang="en-US" smtClean="0"/>
-              <a:t>2026/1/22</a:t>
+              <a:t>2026/3/19</a:t>
             </a:fld>
             <a:endParaRPr lang="zh-TW" altLang="en-US"/>
           </a:p>
@@ -6507,7 +13265,7 @@
           <a:p>
             <a:fld id="{5BBEAD13-0566-4C6C-97E7-55F17F24B09F}" type="datetimeFigureOut">
               <a:rPr lang="zh-TW" altLang="en-US" smtClean="0"/>
-              <a:t>2026/1/22</a:t>
+              <a:t>2026/3/19</a:t>
             </a:fld>
             <a:endParaRPr lang="zh-TW" altLang="en-US"/>
           </a:p>
@@ -6620,7 +13378,7 @@
           <a:p>
             <a:fld id="{5BBEAD13-0566-4C6C-97E7-55F17F24B09F}" type="datetimeFigureOut">
               <a:rPr lang="zh-TW" altLang="en-US" smtClean="0"/>
-              <a:t>2026/1/22</a:t>
+              <a:t>2026/3/19</a:t>
             </a:fld>
             <a:endParaRPr lang="zh-TW" altLang="en-US"/>
           </a:p>
@@ -6710,7 +13468,7 @@
           <a:p>
             <a:fld id="{5BBEAD13-0566-4C6C-97E7-55F17F24B09F}" type="datetimeFigureOut">
               <a:rPr lang="zh-TW" altLang="en-US" smtClean="0"/>
-              <a:t>2026/1/22</a:t>
+              <a:t>2026/3/19</a:t>
             </a:fld>
             <a:endParaRPr lang="zh-TW" altLang="en-US"/>
           </a:p>
@@ -6982,7 +13740,7 @@
           <a:p>
             <a:fld id="{5BBEAD13-0566-4C6C-97E7-55F17F24B09F}" type="datetimeFigureOut">
               <a:rPr lang="zh-TW" altLang="en-US" smtClean="0"/>
-              <a:t>2026/1/22</a:t>
+              <a:t>2026/3/19</a:t>
             </a:fld>
             <a:endParaRPr lang="zh-TW" altLang="en-US"/>
           </a:p>
@@ -7230,7 +13988,7 @@
           <a:p>
             <a:fld id="{5BBEAD13-0566-4C6C-97E7-55F17F24B09F}" type="datetimeFigureOut">
               <a:rPr lang="zh-TW" altLang="en-US" smtClean="0"/>
-              <a:t>2026/1/22</a:t>
+              <a:t>2026/3/19</a:t>
             </a:fld>
             <a:endParaRPr lang="zh-TW" altLang="en-US"/>
           </a:p>
@@ -7438,7 +14196,7 @@
           <a:p>
             <a:fld id="{5BBEAD13-0566-4C6C-97E7-55F17F24B09F}" type="datetimeFigureOut">
               <a:rPr lang="zh-TW" altLang="en-US" smtClean="0"/>
-              <a:t>2026/1/22</a:t>
+              <a:t>2026/3/19</a:t>
             </a:fld>
             <a:endParaRPr lang="zh-TW" altLang="en-US"/>
           </a:p>
@@ -8045,14 +14803,7 @@
                 <a:latin typeface="標楷體" panose="03000509000000000000" pitchFamily="65" charset="-120"/>
                 <a:ea typeface="標楷體" panose="03000509000000000000" pitchFamily="65" charset="-120"/>
               </a:rPr>
-              <a:t>      </a:t>
-            </a:r>
-            <a:r>
-              <a:rPr lang="zh-TW" altLang="en-US" dirty="0" smtClean="0">
-                <a:latin typeface="標楷體" panose="03000509000000000000" pitchFamily="65" charset="-120"/>
-                <a:ea typeface="標楷體" panose="03000509000000000000" pitchFamily="65" charset="-120"/>
-              </a:rPr>
-              <a:t>  </a:t>
+              <a:t>        </a:t>
             </a:r>
             <a:r>
               <a:rPr lang="en-US" altLang="zh-TW" dirty="0" smtClean="0">
@@ -8214,11 +14965,6 @@
               </a:rPr>
               <a:t>變化量預測目標：是否罹患三高</a:t>
             </a:r>
-            <a:endParaRPr lang="zh-TW" altLang="en-US" dirty="0">
-              <a:latin typeface="Times New Roman" panose="02020603050405020304" pitchFamily="18" charset="0"/>
-              <a:ea typeface="標楷體" panose="03000509000000000000" pitchFamily="65" charset="-120"/>
-              <a:cs typeface="Times New Roman" panose="02020603050405020304" pitchFamily="18" charset="0"/>
-            </a:endParaRPr>
           </a:p>
         </p:txBody>
       </p:sp>
@@ -8226,6 +14972,58 @@
     <p:extLst>
       <p:ext uri="{BB962C8B-B14F-4D97-AF65-F5344CB8AC3E}">
         <p14:creationId xmlns:p14="http://schemas.microsoft.com/office/powerpoint/2010/main" val="3362909714"/>
+      </p:ext>
+    </p:extLst>
+  </p:cSld>
+  <p:clrMapOvr>
+    <a:masterClrMapping/>
+  </p:clrMapOvr>
+</p:sld>
+</file>
+
+<file path=ppt/slides/slide3.xml><?xml version="1.0" encoding="utf-8"?>
+<p:sld xmlns:a="http://schemas.openxmlformats.org/drawingml/2006/main" xmlns:r="http://schemas.openxmlformats.org/officeDocument/2006/relationships" xmlns:p="http://schemas.openxmlformats.org/presentationml/2006/main">
+  <p:cSld>
+    <p:spTree>
+      <p:nvGrpSpPr>
+        <p:cNvPr id="1" name=""/>
+        <p:cNvGrpSpPr/>
+        <p:nvPr/>
+      </p:nvGrpSpPr>
+      <p:grpSpPr>
+        <a:xfrm>
+          <a:off x="0" y="0"/>
+          <a:ext cx="0" cy="0"/>
+          <a:chOff x="0" y="0"/>
+          <a:chExt cx="0" cy="0"/>
+        </a:xfrm>
+      </p:grpSpPr>
+      <p:graphicFrame>
+        <p:nvGraphicFramePr>
+          <p:cNvPr id="2" name="資料庫圖表 1"/>
+          <p:cNvGraphicFramePr/>
+          <p:nvPr>
+            <p:extLst>
+              <p:ext uri="{D42A27DB-BD31-4B8C-83A1-F6EECF244321}">
+                <p14:modId xmlns:p14="http://schemas.microsoft.com/office/powerpoint/2010/main" val="171206636"/>
+              </p:ext>
+            </p:extLst>
+          </p:nvPr>
+        </p:nvGraphicFramePr>
+        <p:xfrm>
+          <a:off x="1524000" y="1397000"/>
+          <a:ext cx="6096000" cy="4064000"/>
+        </p:xfrm>
+        <a:graphic>
+          <a:graphicData uri="http://schemas.openxmlformats.org/drawingml/2006/diagram">
+            <dgm:relIds xmlns:dgm="http://schemas.openxmlformats.org/drawingml/2006/diagram" xmlns:r="http://schemas.openxmlformats.org/officeDocument/2006/relationships" r:dm="rId2" r:lo="rId3" r:qs="rId4" r:cs="rId5"/>
+          </a:graphicData>
+        </a:graphic>
+      </p:graphicFrame>
+    </p:spTree>
+    <p:extLst>
+      <p:ext uri="{BB962C8B-B14F-4D97-AF65-F5344CB8AC3E}">
+        <p14:creationId xmlns:p14="http://schemas.microsoft.com/office/powerpoint/2010/main" val="2508134473"/>
       </p:ext>
     </p:extLst>
   </p:cSld>

--- a/docs/00_thesis/figures/論文流程圖.pptx
+++ b/docs/00_thesis/figures/論文流程圖.pptx
@@ -3293,7 +3293,7 @@
         <a:lstStyle/>
         <a:p>
           <a:r>
-            <a:rPr lang="en-US" altLang="zh-TW" dirty="0" err="1" smtClean="0">
+            <a:rPr lang="en-US" altLang="zh-TW" dirty="0" smtClean="0">
               <a:solidFill>
                 <a:schemeClr val="tx1"/>
               </a:solidFill>
@@ -3301,7 +3301,7 @@
               <a:ea typeface="標楷體" panose="03000509000000000000" pitchFamily="65" charset="-120"/>
               <a:cs typeface="Times New Roman" panose="02020603050405020304" pitchFamily="18" charset="0"/>
             </a:rPr>
-            <a:t>PySR</a:t>
+            <a:t>SR</a:t>
           </a:r>
           <a:endParaRPr lang="zh-TW" altLang="en-US" dirty="0">
             <a:solidFill>
@@ -3738,6 +3738,13 @@
         </dgm:presLayoutVars>
       </dgm:prSet>
       <dgm:spPr/>
+      <dgm:t>
+        <a:bodyPr/>
+        <a:lstStyle/>
+        <a:p>
+          <a:endParaRPr lang="zh-TW" altLang="en-US"/>
+        </a:p>
+      </dgm:t>
     </dgm:pt>
     <dgm:pt modelId="{34D71FE7-425F-4EE3-AFDF-AA9C0005EC00}" type="pres">
       <dgm:prSet presAssocID="{C0379C3D-44CF-4B46-B585-05D4CA04D08F}" presName="hierRoot1" presStyleCnt="0">
@@ -3758,10 +3765,24 @@
         </dgm:presLayoutVars>
       </dgm:prSet>
       <dgm:spPr/>
+      <dgm:t>
+        <a:bodyPr/>
+        <a:lstStyle/>
+        <a:p>
+          <a:endParaRPr lang="zh-TW" altLang="en-US"/>
+        </a:p>
+      </dgm:t>
     </dgm:pt>
     <dgm:pt modelId="{61BDDE93-DD40-4087-A945-D2649C41B8E9}" type="pres">
       <dgm:prSet presAssocID="{C0379C3D-44CF-4B46-B585-05D4CA04D08F}" presName="rootConnector1" presStyleLbl="node1" presStyleIdx="0" presStyleCnt="0"/>
       <dgm:spPr/>
+      <dgm:t>
+        <a:bodyPr/>
+        <a:lstStyle/>
+        <a:p>
+          <a:endParaRPr lang="zh-TW" altLang="en-US"/>
+        </a:p>
+      </dgm:t>
     </dgm:pt>
     <dgm:pt modelId="{8441C452-B462-474B-A346-A7EFDCA3D2F1}" type="pres">
       <dgm:prSet presAssocID="{C0379C3D-44CF-4B46-B585-05D4CA04D08F}" presName="hierChild2" presStyleCnt="0"/>
@@ -3770,6 +3791,13 @@
     <dgm:pt modelId="{3193C511-743D-4E69-9E1D-0740D16ABB9F}" type="pres">
       <dgm:prSet presAssocID="{C6313A3D-C187-4442-A89E-4A7FE10EBD0B}" presName="Name37" presStyleLbl="parChTrans1D2" presStyleIdx="0" presStyleCnt="3"/>
       <dgm:spPr/>
+      <dgm:t>
+        <a:bodyPr/>
+        <a:lstStyle/>
+        <a:p>
+          <a:endParaRPr lang="zh-TW" altLang="en-US"/>
+        </a:p>
+      </dgm:t>
     </dgm:pt>
     <dgm:pt modelId="{AEC697C2-71C9-4A4D-B40B-8D6A25D4588F}" type="pres">
       <dgm:prSet presAssocID="{E5CCB25E-C655-4324-8217-14EF320224DF}" presName="hierRoot2" presStyleCnt="0">
@@ -3801,6 +3829,13 @@
     <dgm:pt modelId="{72AC598E-578D-4A32-8CE1-C7314E12EC37}" type="pres">
       <dgm:prSet presAssocID="{E5CCB25E-C655-4324-8217-14EF320224DF}" presName="rootConnector" presStyleLbl="node2" presStyleIdx="0" presStyleCnt="3"/>
       <dgm:spPr/>
+      <dgm:t>
+        <a:bodyPr/>
+        <a:lstStyle/>
+        <a:p>
+          <a:endParaRPr lang="zh-TW" altLang="en-US"/>
+        </a:p>
+      </dgm:t>
     </dgm:pt>
     <dgm:pt modelId="{F6C77B8F-08AB-43F7-A50B-D3EF073FC12A}" type="pres">
       <dgm:prSet presAssocID="{E5CCB25E-C655-4324-8217-14EF320224DF}" presName="hierChild4" presStyleCnt="0"/>
@@ -3809,6 +3844,13 @@
     <dgm:pt modelId="{E6B87659-DCA8-4621-B7CA-CA955397BA11}" type="pres">
       <dgm:prSet presAssocID="{8D222D37-B8A0-43AD-9933-E6199901A620}" presName="Name37" presStyleLbl="parChTrans1D3" presStyleIdx="0" presStyleCnt="8"/>
       <dgm:spPr/>
+      <dgm:t>
+        <a:bodyPr/>
+        <a:lstStyle/>
+        <a:p>
+          <a:endParaRPr lang="zh-TW" altLang="en-US"/>
+        </a:p>
+      </dgm:t>
     </dgm:pt>
     <dgm:pt modelId="{CC374027-09BA-4FC7-8623-E69442FA328E}" type="pres">
       <dgm:prSet presAssocID="{F6631F0D-4003-4FCC-A63D-7640B86D3CF7}" presName="hierRoot2" presStyleCnt="0">
@@ -3840,6 +3882,13 @@
     <dgm:pt modelId="{3FE6DC64-57E8-4D54-A2F6-7F35A6B26A3C}" type="pres">
       <dgm:prSet presAssocID="{F6631F0D-4003-4FCC-A63D-7640B86D3CF7}" presName="rootConnector" presStyleLbl="node3" presStyleIdx="0" presStyleCnt="8"/>
       <dgm:spPr/>
+      <dgm:t>
+        <a:bodyPr/>
+        <a:lstStyle/>
+        <a:p>
+          <a:endParaRPr lang="zh-TW" altLang="en-US"/>
+        </a:p>
+      </dgm:t>
     </dgm:pt>
     <dgm:pt modelId="{87A74855-54C6-406F-A62A-3F4DC0154CAD}" type="pres">
       <dgm:prSet presAssocID="{F6631F0D-4003-4FCC-A63D-7640B86D3CF7}" presName="hierChild4" presStyleCnt="0"/>
@@ -3852,6 +3901,13 @@
     <dgm:pt modelId="{060ACBB8-EB96-4241-88F8-0A4B28010FA5}" type="pres">
       <dgm:prSet presAssocID="{9F725B02-6E85-4887-8D8B-9306B1D3AB18}" presName="Name37" presStyleLbl="parChTrans1D3" presStyleIdx="1" presStyleCnt="8"/>
       <dgm:spPr/>
+      <dgm:t>
+        <a:bodyPr/>
+        <a:lstStyle/>
+        <a:p>
+          <a:endParaRPr lang="zh-TW" altLang="en-US"/>
+        </a:p>
+      </dgm:t>
     </dgm:pt>
     <dgm:pt modelId="{5980EB20-8273-42D1-BD97-ABD17A5CBBD6}" type="pres">
       <dgm:prSet presAssocID="{ACA71FF6-43D1-4D9C-8997-F22E3A014CCA}" presName="hierRoot2" presStyleCnt="0">
@@ -3872,10 +3928,24 @@
         </dgm:presLayoutVars>
       </dgm:prSet>
       <dgm:spPr/>
+      <dgm:t>
+        <a:bodyPr/>
+        <a:lstStyle/>
+        <a:p>
+          <a:endParaRPr lang="zh-TW" altLang="en-US"/>
+        </a:p>
+      </dgm:t>
     </dgm:pt>
     <dgm:pt modelId="{88497726-0A8F-4453-B9B5-15C1B21B5E45}" type="pres">
       <dgm:prSet presAssocID="{ACA71FF6-43D1-4D9C-8997-F22E3A014CCA}" presName="rootConnector" presStyleLbl="node3" presStyleIdx="1" presStyleCnt="8"/>
       <dgm:spPr/>
+      <dgm:t>
+        <a:bodyPr/>
+        <a:lstStyle/>
+        <a:p>
+          <a:endParaRPr lang="zh-TW" altLang="en-US"/>
+        </a:p>
+      </dgm:t>
     </dgm:pt>
     <dgm:pt modelId="{8763669A-C80D-4647-AE45-C7B6A524B694}" type="pres">
       <dgm:prSet presAssocID="{ACA71FF6-43D1-4D9C-8997-F22E3A014CCA}" presName="hierChild4" presStyleCnt="0"/>
@@ -3888,6 +3958,13 @@
     <dgm:pt modelId="{077A16B0-89CC-4A48-832B-C25F0878DF36}" type="pres">
       <dgm:prSet presAssocID="{DC6511A6-2DC1-4CCB-86DB-BEFDAB64DDE4}" presName="Name37" presStyleLbl="parChTrans1D3" presStyleIdx="2" presStyleCnt="8"/>
       <dgm:spPr/>
+      <dgm:t>
+        <a:bodyPr/>
+        <a:lstStyle/>
+        <a:p>
+          <a:endParaRPr lang="zh-TW" altLang="en-US"/>
+        </a:p>
+      </dgm:t>
     </dgm:pt>
     <dgm:pt modelId="{03EBD7C5-A39C-4D61-8FC1-A64B1467CAC0}" type="pres">
       <dgm:prSet presAssocID="{DBA5AD7A-C2C2-47CC-9C41-F03684C8A584}" presName="hierRoot2" presStyleCnt="0">
@@ -3908,10 +3985,24 @@
         </dgm:presLayoutVars>
       </dgm:prSet>
       <dgm:spPr/>
+      <dgm:t>
+        <a:bodyPr/>
+        <a:lstStyle/>
+        <a:p>
+          <a:endParaRPr lang="zh-TW" altLang="en-US"/>
+        </a:p>
+      </dgm:t>
     </dgm:pt>
     <dgm:pt modelId="{8AE016EA-9964-4DAC-9E10-04A800F48939}" type="pres">
       <dgm:prSet presAssocID="{DBA5AD7A-C2C2-47CC-9C41-F03684C8A584}" presName="rootConnector" presStyleLbl="node3" presStyleIdx="2" presStyleCnt="8"/>
       <dgm:spPr/>
+      <dgm:t>
+        <a:bodyPr/>
+        <a:lstStyle/>
+        <a:p>
+          <a:endParaRPr lang="zh-TW" altLang="en-US"/>
+        </a:p>
+      </dgm:t>
     </dgm:pt>
     <dgm:pt modelId="{15841B15-E005-4D95-8111-4450B8F876B0}" type="pres">
       <dgm:prSet presAssocID="{DBA5AD7A-C2C2-47CC-9C41-F03684C8A584}" presName="hierChild4" presStyleCnt="0"/>
@@ -3928,6 +4019,13 @@
     <dgm:pt modelId="{CD932D47-FAA9-4BEA-94A0-664BBD2AA555}" type="pres">
       <dgm:prSet presAssocID="{F85D92B1-E28E-466A-B1AF-ADDB99C02FC6}" presName="Name37" presStyleLbl="parChTrans1D2" presStyleIdx="1" presStyleCnt="3"/>
       <dgm:spPr/>
+      <dgm:t>
+        <a:bodyPr/>
+        <a:lstStyle/>
+        <a:p>
+          <a:endParaRPr lang="zh-TW" altLang="en-US"/>
+        </a:p>
+      </dgm:t>
     </dgm:pt>
     <dgm:pt modelId="{F2359C8B-E123-493B-9B89-048E791E2169}" type="pres">
       <dgm:prSet presAssocID="{6C87DEF1-267E-484B-BC33-85913E3EC10F}" presName="hierRoot2" presStyleCnt="0">
@@ -3959,6 +4057,13 @@
     <dgm:pt modelId="{EB5C76B9-D527-4D3B-989E-1EAE2115F0ED}" type="pres">
       <dgm:prSet presAssocID="{6C87DEF1-267E-484B-BC33-85913E3EC10F}" presName="rootConnector" presStyleLbl="node2" presStyleIdx="1" presStyleCnt="3"/>
       <dgm:spPr/>
+      <dgm:t>
+        <a:bodyPr/>
+        <a:lstStyle/>
+        <a:p>
+          <a:endParaRPr lang="zh-TW" altLang="en-US"/>
+        </a:p>
+      </dgm:t>
     </dgm:pt>
     <dgm:pt modelId="{E6E0D52E-2965-4827-BB76-3FC5E37FA703}" type="pres">
       <dgm:prSet presAssocID="{6C87DEF1-267E-484B-BC33-85913E3EC10F}" presName="hierChild4" presStyleCnt="0"/>
@@ -3967,6 +4072,13 @@
     <dgm:pt modelId="{AD79323F-1B49-4729-A289-6D620D749A9F}" type="pres">
       <dgm:prSet presAssocID="{D21D1992-ADB0-4EF0-93AB-1E9F75434F52}" presName="Name37" presStyleLbl="parChTrans1D3" presStyleIdx="3" presStyleCnt="8"/>
       <dgm:spPr/>
+      <dgm:t>
+        <a:bodyPr/>
+        <a:lstStyle/>
+        <a:p>
+          <a:endParaRPr lang="zh-TW" altLang="en-US"/>
+        </a:p>
+      </dgm:t>
     </dgm:pt>
     <dgm:pt modelId="{E44A8880-D179-421A-BDBE-FF75BD67D32D}" type="pres">
       <dgm:prSet presAssocID="{847724BD-9062-4C15-867D-9A40745D5942}" presName="hierRoot2" presStyleCnt="0">
@@ -3998,6 +4110,13 @@
     <dgm:pt modelId="{003BFD0D-2BBC-46B3-A380-154B3A06829E}" type="pres">
       <dgm:prSet presAssocID="{847724BD-9062-4C15-867D-9A40745D5942}" presName="rootConnector" presStyleLbl="node3" presStyleIdx="3" presStyleCnt="8"/>
       <dgm:spPr/>
+      <dgm:t>
+        <a:bodyPr/>
+        <a:lstStyle/>
+        <a:p>
+          <a:endParaRPr lang="zh-TW" altLang="en-US"/>
+        </a:p>
+      </dgm:t>
     </dgm:pt>
     <dgm:pt modelId="{F7C775FA-93FB-4EFB-B25E-9EAAFE65ED7B}" type="pres">
       <dgm:prSet presAssocID="{847724BD-9062-4C15-867D-9A40745D5942}" presName="hierChild4" presStyleCnt="0"/>
@@ -4010,6 +4129,13 @@
     <dgm:pt modelId="{F67BB4F9-FCC2-4C90-A5EA-73862D03E224}" type="pres">
       <dgm:prSet presAssocID="{A9C07280-0A72-472E-BE76-F36D22C350B5}" presName="Name37" presStyleLbl="parChTrans1D3" presStyleIdx="4" presStyleCnt="8"/>
       <dgm:spPr/>
+      <dgm:t>
+        <a:bodyPr/>
+        <a:lstStyle/>
+        <a:p>
+          <a:endParaRPr lang="zh-TW" altLang="en-US"/>
+        </a:p>
+      </dgm:t>
     </dgm:pt>
     <dgm:pt modelId="{61EFBF08-F3FD-4234-850E-27EEB7C3840C}" type="pres">
       <dgm:prSet presAssocID="{422C33F5-672E-4B0C-B552-ED3DD9F2941B}" presName="hierRoot2" presStyleCnt="0">
@@ -4030,10 +4156,24 @@
         </dgm:presLayoutVars>
       </dgm:prSet>
       <dgm:spPr/>
+      <dgm:t>
+        <a:bodyPr/>
+        <a:lstStyle/>
+        <a:p>
+          <a:endParaRPr lang="zh-TW" altLang="en-US"/>
+        </a:p>
+      </dgm:t>
     </dgm:pt>
     <dgm:pt modelId="{B7FD21A3-9BC2-4ED9-A7A1-C733E512343E}" type="pres">
       <dgm:prSet presAssocID="{422C33F5-672E-4B0C-B552-ED3DD9F2941B}" presName="rootConnector" presStyleLbl="node3" presStyleIdx="4" presStyleCnt="8"/>
       <dgm:spPr/>
+      <dgm:t>
+        <a:bodyPr/>
+        <a:lstStyle/>
+        <a:p>
+          <a:endParaRPr lang="zh-TW" altLang="en-US"/>
+        </a:p>
+      </dgm:t>
     </dgm:pt>
     <dgm:pt modelId="{C77B128E-43FB-4EA9-8528-90CD104B401C}" type="pres">
       <dgm:prSet presAssocID="{422C33F5-672E-4B0C-B552-ED3DD9F2941B}" presName="hierChild4" presStyleCnt="0"/>
@@ -4042,6 +4182,13 @@
     <dgm:pt modelId="{A827EF7B-3FD3-4F9A-8747-368E792DAF1A}" type="pres">
       <dgm:prSet presAssocID="{97DF12F3-EBEE-4710-B22F-47A71C2D3BA0}" presName="Name37" presStyleLbl="parChTrans1D4" presStyleIdx="0" presStyleCnt="3"/>
       <dgm:spPr/>
+      <dgm:t>
+        <a:bodyPr/>
+        <a:lstStyle/>
+        <a:p>
+          <a:endParaRPr lang="zh-TW" altLang="en-US"/>
+        </a:p>
+      </dgm:t>
     </dgm:pt>
     <dgm:pt modelId="{63FC3916-A554-49C1-891A-AA19B7D5C0B3}" type="pres">
       <dgm:prSet presAssocID="{1140E081-3CE3-4E40-84D1-D5CCA58BE7C7}" presName="hierRoot2" presStyleCnt="0">
@@ -4073,6 +4220,13 @@
     <dgm:pt modelId="{9D3CD290-6F82-471F-948C-49054C263DDB}" type="pres">
       <dgm:prSet presAssocID="{1140E081-3CE3-4E40-84D1-D5CCA58BE7C7}" presName="rootConnector" presStyleLbl="node4" presStyleIdx="0" presStyleCnt="3"/>
       <dgm:spPr/>
+      <dgm:t>
+        <a:bodyPr/>
+        <a:lstStyle/>
+        <a:p>
+          <a:endParaRPr lang="zh-TW" altLang="en-US"/>
+        </a:p>
+      </dgm:t>
     </dgm:pt>
     <dgm:pt modelId="{5FB6C452-5109-44F6-ADC6-6176B854ABBC}" type="pres">
       <dgm:prSet presAssocID="{1140E081-3CE3-4E40-84D1-D5CCA58BE7C7}" presName="hierChild4" presStyleCnt="0"/>
@@ -4085,6 +4239,13 @@
     <dgm:pt modelId="{E40D1708-260F-4EE2-8BF4-0AF5CCE2572C}" type="pres">
       <dgm:prSet presAssocID="{9AB43360-E212-49CE-A503-6F806BF9B862}" presName="Name37" presStyleLbl="parChTrans1D4" presStyleIdx="1" presStyleCnt="3"/>
       <dgm:spPr/>
+      <dgm:t>
+        <a:bodyPr/>
+        <a:lstStyle/>
+        <a:p>
+          <a:endParaRPr lang="zh-TW" altLang="en-US"/>
+        </a:p>
+      </dgm:t>
     </dgm:pt>
     <dgm:pt modelId="{235B3544-6DF5-4DE6-B763-09C412CE3761}" type="pres">
       <dgm:prSet presAssocID="{6B759DC2-3439-4108-98CB-B36DA3EC8CED}" presName="hierRoot2" presStyleCnt="0">
@@ -4116,6 +4277,13 @@
     <dgm:pt modelId="{85433A55-D717-48BC-8149-9AC20B91C08B}" type="pres">
       <dgm:prSet presAssocID="{6B759DC2-3439-4108-98CB-B36DA3EC8CED}" presName="rootConnector" presStyleLbl="node4" presStyleIdx="1" presStyleCnt="3"/>
       <dgm:spPr/>
+      <dgm:t>
+        <a:bodyPr/>
+        <a:lstStyle/>
+        <a:p>
+          <a:endParaRPr lang="zh-TW" altLang="en-US"/>
+        </a:p>
+      </dgm:t>
     </dgm:pt>
     <dgm:pt modelId="{2D342578-2CBA-4143-94A7-BD4245625C52}" type="pres">
       <dgm:prSet presAssocID="{6B759DC2-3439-4108-98CB-B36DA3EC8CED}" presName="hierChild4" presStyleCnt="0"/>
@@ -4128,6 +4296,13 @@
     <dgm:pt modelId="{4D520FF4-990B-4A55-A2D2-83A63539A647}" type="pres">
       <dgm:prSet presAssocID="{EFAA1426-84F3-4105-B915-EC8BECDA4C5D}" presName="Name37" presStyleLbl="parChTrans1D4" presStyleIdx="2" presStyleCnt="3"/>
       <dgm:spPr/>
+      <dgm:t>
+        <a:bodyPr/>
+        <a:lstStyle/>
+        <a:p>
+          <a:endParaRPr lang="zh-TW" altLang="en-US"/>
+        </a:p>
+      </dgm:t>
     </dgm:pt>
     <dgm:pt modelId="{39C7AD21-223F-4497-88DB-891105BF6347}" type="pres">
       <dgm:prSet presAssocID="{2F023172-4E61-4511-AFCA-923C95EC486B}" presName="hierRoot2" presStyleCnt="0">
@@ -4159,6 +4334,13 @@
     <dgm:pt modelId="{3B846DCB-5246-4C95-9EC1-CF6D85158CF9}" type="pres">
       <dgm:prSet presAssocID="{2F023172-4E61-4511-AFCA-923C95EC486B}" presName="rootConnector" presStyleLbl="node4" presStyleIdx="2" presStyleCnt="3"/>
       <dgm:spPr/>
+      <dgm:t>
+        <a:bodyPr/>
+        <a:lstStyle/>
+        <a:p>
+          <a:endParaRPr lang="zh-TW" altLang="en-US"/>
+        </a:p>
+      </dgm:t>
     </dgm:pt>
     <dgm:pt modelId="{EB8432E4-ECAB-44FC-A1FD-6FA259D0157A}" type="pres">
       <dgm:prSet presAssocID="{2F023172-4E61-4511-AFCA-923C95EC486B}" presName="hierChild4" presStyleCnt="0"/>
@@ -4175,6 +4357,13 @@
     <dgm:pt modelId="{AB1BFC6C-8F27-4F6C-97A6-D6FB13839B51}" type="pres">
       <dgm:prSet presAssocID="{02E01EF1-C250-4B76-9AAA-4A4D9BCAEAE0}" presName="Name37" presStyleLbl="parChTrans1D3" presStyleIdx="5" presStyleCnt="8"/>
       <dgm:spPr/>
+      <dgm:t>
+        <a:bodyPr/>
+        <a:lstStyle/>
+        <a:p>
+          <a:endParaRPr lang="zh-TW" altLang="en-US"/>
+        </a:p>
+      </dgm:t>
     </dgm:pt>
     <dgm:pt modelId="{201740FA-0624-498F-9EAA-7E43A2DAA88B}" type="pres">
       <dgm:prSet presAssocID="{01E943C2-F60A-4160-9AE4-B70A3B038017}" presName="hierRoot2" presStyleCnt="0">
@@ -4206,6 +4395,13 @@
     <dgm:pt modelId="{0AC2DA91-A00E-43D1-A5D1-CA5DB1708CE7}" type="pres">
       <dgm:prSet presAssocID="{01E943C2-F60A-4160-9AE4-B70A3B038017}" presName="rootConnector" presStyleLbl="node3" presStyleIdx="5" presStyleCnt="8"/>
       <dgm:spPr/>
+      <dgm:t>
+        <a:bodyPr/>
+        <a:lstStyle/>
+        <a:p>
+          <a:endParaRPr lang="zh-TW" altLang="en-US"/>
+        </a:p>
+      </dgm:t>
     </dgm:pt>
     <dgm:pt modelId="{B32D8C34-E30F-4CA2-AD5C-0CA79DF6CA93}" type="pres">
       <dgm:prSet presAssocID="{01E943C2-F60A-4160-9AE4-B70A3B038017}" presName="hierChild4" presStyleCnt="0"/>
@@ -4218,6 +4414,13 @@
     <dgm:pt modelId="{9D42B076-C679-4CE2-BF26-8BA0F459E855}" type="pres">
       <dgm:prSet presAssocID="{8CBAA709-5B5F-4F4E-823F-B523AAB1D352}" presName="Name37" presStyleLbl="parChTrans1D3" presStyleIdx="6" presStyleCnt="8"/>
       <dgm:spPr/>
+      <dgm:t>
+        <a:bodyPr/>
+        <a:lstStyle/>
+        <a:p>
+          <a:endParaRPr lang="zh-TW" altLang="en-US"/>
+        </a:p>
+      </dgm:t>
     </dgm:pt>
     <dgm:pt modelId="{E1E43C58-5AEB-473A-A912-49DFC2C8A53F}" type="pres">
       <dgm:prSet presAssocID="{1842372B-728C-4BC7-9D83-15230F10A614}" presName="hierRoot2" presStyleCnt="0">
@@ -4238,10 +4441,24 @@
         </dgm:presLayoutVars>
       </dgm:prSet>
       <dgm:spPr/>
+      <dgm:t>
+        <a:bodyPr/>
+        <a:lstStyle/>
+        <a:p>
+          <a:endParaRPr lang="zh-TW" altLang="en-US"/>
+        </a:p>
+      </dgm:t>
     </dgm:pt>
     <dgm:pt modelId="{6B9FBD9E-2002-4113-8EDF-34E3BA90846F}" type="pres">
       <dgm:prSet presAssocID="{1842372B-728C-4BC7-9D83-15230F10A614}" presName="rootConnector" presStyleLbl="node3" presStyleIdx="6" presStyleCnt="8"/>
       <dgm:spPr/>
+      <dgm:t>
+        <a:bodyPr/>
+        <a:lstStyle/>
+        <a:p>
+          <a:endParaRPr lang="zh-TW" altLang="en-US"/>
+        </a:p>
+      </dgm:t>
     </dgm:pt>
     <dgm:pt modelId="{EDD88F62-777B-4A85-B340-2CEA09FBE2E3}" type="pres">
       <dgm:prSet presAssocID="{1842372B-728C-4BC7-9D83-15230F10A614}" presName="hierChild4" presStyleCnt="0"/>
@@ -4258,6 +4475,13 @@
     <dgm:pt modelId="{E3D46B2D-06D6-4D5B-AB6B-02310BD3571E}" type="pres">
       <dgm:prSet presAssocID="{7ADADAE6-FA49-433C-B86B-563F2A7A34E3}" presName="Name37" presStyleLbl="parChTrans1D2" presStyleIdx="2" presStyleCnt="3"/>
       <dgm:spPr/>
+      <dgm:t>
+        <a:bodyPr/>
+        <a:lstStyle/>
+        <a:p>
+          <a:endParaRPr lang="zh-TW" altLang="en-US"/>
+        </a:p>
+      </dgm:t>
     </dgm:pt>
     <dgm:pt modelId="{4BF979C6-F76A-412C-BBDF-F897DC87EE64}" type="pres">
       <dgm:prSet presAssocID="{65C778D0-7669-4D4B-B4D6-4CD1381A0BF3}" presName="hierRoot2" presStyleCnt="0">
@@ -4289,6 +4513,13 @@
     <dgm:pt modelId="{370DC1AA-D00A-4062-9EAA-2B2F33F61C82}" type="pres">
       <dgm:prSet presAssocID="{65C778D0-7669-4D4B-B4D6-4CD1381A0BF3}" presName="rootConnector" presStyleLbl="node2" presStyleIdx="2" presStyleCnt="3"/>
       <dgm:spPr/>
+      <dgm:t>
+        <a:bodyPr/>
+        <a:lstStyle/>
+        <a:p>
+          <a:endParaRPr lang="zh-TW" altLang="en-US"/>
+        </a:p>
+      </dgm:t>
     </dgm:pt>
     <dgm:pt modelId="{349A7559-2FB9-41B2-92EF-D297E9A3A3E9}" type="pres">
       <dgm:prSet presAssocID="{65C778D0-7669-4D4B-B4D6-4CD1381A0BF3}" presName="hierChild4" presStyleCnt="0"/>
@@ -4297,6 +4528,13 @@
     <dgm:pt modelId="{50609ABF-9BA2-4F31-946D-BF9C35D435FA}" type="pres">
       <dgm:prSet presAssocID="{F5F23906-48D7-4EF9-A256-60463F51DB60}" presName="Name37" presStyleLbl="parChTrans1D3" presStyleIdx="7" presStyleCnt="8"/>
       <dgm:spPr/>
+      <dgm:t>
+        <a:bodyPr/>
+        <a:lstStyle/>
+        <a:p>
+          <a:endParaRPr lang="zh-TW" altLang="en-US"/>
+        </a:p>
+      </dgm:t>
     </dgm:pt>
     <dgm:pt modelId="{27CD699F-7113-4516-89F4-F2E20D446619}" type="pres">
       <dgm:prSet presAssocID="{1256CB85-BA23-4513-9CCD-B3AE1CAF87CC}" presName="hierRoot2" presStyleCnt="0">
@@ -4328,6 +4566,13 @@
     <dgm:pt modelId="{A2A59F6A-7566-4E8D-8E63-E8C4DA376E5F}" type="pres">
       <dgm:prSet presAssocID="{1256CB85-BA23-4513-9CCD-B3AE1CAF87CC}" presName="rootConnector" presStyleLbl="node3" presStyleIdx="7" presStyleCnt="8"/>
       <dgm:spPr/>
+      <dgm:t>
+        <a:bodyPr/>
+        <a:lstStyle/>
+        <a:p>
+          <a:endParaRPr lang="zh-TW" altLang="en-US"/>
+        </a:p>
+      </dgm:t>
     </dgm:pt>
     <dgm:pt modelId="{4E517C8C-D5AB-45CF-A17D-B3EF77DDCBD8}" type="pres">
       <dgm:prSet presAssocID="{1256CB85-BA23-4513-9CCD-B3AE1CAF87CC}" presName="hierChild4" presStyleCnt="0"/>
@@ -4347,66 +4592,66 @@
     </dgm:pt>
   </dgm:ptLst>
   <dgm:cxnLst>
+    <dgm:cxn modelId="{BEE9318E-195B-4B53-BC4C-5CD437085BA5}" srcId="{6C87DEF1-267E-484B-BC33-85913E3EC10F}" destId="{01E943C2-F60A-4160-9AE4-B70A3B038017}" srcOrd="2" destOrd="0" parTransId="{02E01EF1-C250-4B76-9AAA-4A4D9BCAEAE0}" sibTransId="{1E2C944A-0A38-4685-A0BC-3B9082352F80}"/>
+    <dgm:cxn modelId="{C3BBBF89-454D-4003-BF18-86C84AEA71FD}" type="presOf" srcId="{1140E081-3CE3-4E40-84D1-D5CCA58BE7C7}" destId="{9D3CD290-6F82-471F-948C-49054C263DDB}" srcOrd="1" destOrd="0" presId="urn:microsoft.com/office/officeart/2005/8/layout/orgChart1"/>
+    <dgm:cxn modelId="{16A039EF-929E-4D75-BCF1-AF42B6CB5EA1}" type="presOf" srcId="{C0379C3D-44CF-4B46-B585-05D4CA04D08F}" destId="{1619B013-66DD-4112-A89F-479A43573186}" srcOrd="0" destOrd="0" presId="urn:microsoft.com/office/officeart/2005/8/layout/orgChart1"/>
+    <dgm:cxn modelId="{73F09D0E-1071-422C-AB1A-C9B2B24539FB}" type="presOf" srcId="{65C778D0-7669-4D4B-B4D6-4CD1381A0BF3}" destId="{5B674A70-3154-4944-B2C8-8AFF4B2D7C3C}" srcOrd="0" destOrd="0" presId="urn:microsoft.com/office/officeart/2005/8/layout/orgChart1"/>
+    <dgm:cxn modelId="{71CB9AFD-B018-4D1D-BBC9-D98D08CC723E}" type="presOf" srcId="{9AB43360-E212-49CE-A503-6F806BF9B862}" destId="{E40D1708-260F-4EE2-8BF4-0AF5CCE2572C}" srcOrd="0" destOrd="0" presId="urn:microsoft.com/office/officeart/2005/8/layout/orgChart1"/>
+    <dgm:cxn modelId="{7343985B-FF23-4ABD-9625-C96E3889ECF9}" type="presOf" srcId="{2F023172-4E61-4511-AFCA-923C95EC486B}" destId="{3B846DCB-5246-4C95-9EC1-CF6D85158CF9}" srcOrd="1" destOrd="0" presId="urn:microsoft.com/office/officeart/2005/8/layout/orgChart1"/>
+    <dgm:cxn modelId="{DBCA2FE9-3991-492D-95E4-EAFCD18666FE}" srcId="{6C87DEF1-267E-484B-BC33-85913E3EC10F}" destId="{1842372B-728C-4BC7-9D83-15230F10A614}" srcOrd="3" destOrd="0" parTransId="{8CBAA709-5B5F-4F4E-823F-B523AAB1D352}" sibTransId="{5A114E51-C5C1-4628-BAD2-613F15CC6CFB}"/>
+    <dgm:cxn modelId="{30A1F083-28D9-420B-8338-E645749A0574}" type="presOf" srcId="{6C87DEF1-267E-484B-BC33-85913E3EC10F}" destId="{EB5C76B9-D527-4D3B-989E-1EAE2115F0ED}" srcOrd="1" destOrd="0" presId="urn:microsoft.com/office/officeart/2005/8/layout/orgChart1"/>
+    <dgm:cxn modelId="{7C069E50-9694-4531-B7A2-74D41359417F}" srcId="{422C33F5-672E-4B0C-B552-ED3DD9F2941B}" destId="{1140E081-3CE3-4E40-84D1-D5CCA58BE7C7}" srcOrd="0" destOrd="0" parTransId="{97DF12F3-EBEE-4710-B22F-47A71C2D3BA0}" sibTransId="{C5F6C251-A1A6-4005-9D84-BF0C1D14B06A}"/>
+    <dgm:cxn modelId="{E439C1C7-854A-4D8C-8D80-EB117F31A47C}" type="presOf" srcId="{847724BD-9062-4C15-867D-9A40745D5942}" destId="{003BFD0D-2BBC-46B3-A380-154B3A06829E}" srcOrd="1" destOrd="0" presId="urn:microsoft.com/office/officeart/2005/8/layout/orgChart1"/>
+    <dgm:cxn modelId="{75B35406-F01A-498A-BD80-03CF0EA5A03F}" type="presOf" srcId="{F85D92B1-E28E-466A-B1AF-ADDB99C02FC6}" destId="{CD932D47-FAA9-4BEA-94A0-664BBD2AA555}" srcOrd="0" destOrd="0" presId="urn:microsoft.com/office/officeart/2005/8/layout/orgChart1"/>
+    <dgm:cxn modelId="{A59A3917-3430-4887-B7BB-607F305BD5D3}" type="presOf" srcId="{2F023172-4E61-4511-AFCA-923C95EC486B}" destId="{5A047950-A498-4E53-A417-C812BDE16A6B}" srcOrd="0" destOrd="0" presId="urn:microsoft.com/office/officeart/2005/8/layout/orgChart1"/>
     <dgm:cxn modelId="{EE756A95-7060-4C59-91C5-E31ABF186BFC}" type="presOf" srcId="{65C778D0-7669-4D4B-B4D6-4CD1381A0BF3}" destId="{370DC1AA-D00A-4062-9EAA-2B2F33F61C82}" srcOrd="1" destOrd="0" presId="urn:microsoft.com/office/officeart/2005/8/layout/orgChart1"/>
+    <dgm:cxn modelId="{37C086BA-50A8-48A6-BC88-F57613CE337F}" srcId="{C0379C3D-44CF-4B46-B585-05D4CA04D08F}" destId="{E5CCB25E-C655-4324-8217-14EF320224DF}" srcOrd="0" destOrd="0" parTransId="{C6313A3D-C187-4442-A89E-4A7FE10EBD0B}" sibTransId="{F2E2BC6B-9378-45F0-9818-1DB3A2541053}"/>
+    <dgm:cxn modelId="{51AF7F02-7677-4A26-BD2A-D6630CAAF4A2}" type="presOf" srcId="{ACA71FF6-43D1-4D9C-8997-F22E3A014CCA}" destId="{88497726-0A8F-4453-B9B5-15C1B21B5E45}" srcOrd="1" destOrd="0" presId="urn:microsoft.com/office/officeart/2005/8/layout/orgChart1"/>
+    <dgm:cxn modelId="{2F490ACC-C135-4B98-B151-626C345CCD1A}" type="presOf" srcId="{8CBAA709-5B5F-4F4E-823F-B523AAB1D352}" destId="{9D42B076-C679-4CE2-BF26-8BA0F459E855}" srcOrd="0" destOrd="0" presId="urn:microsoft.com/office/officeart/2005/8/layout/orgChart1"/>
+    <dgm:cxn modelId="{787823C2-5318-4AEF-926F-23543DB53719}" type="presOf" srcId="{8D222D37-B8A0-43AD-9933-E6199901A620}" destId="{E6B87659-DCA8-4621-B7CA-CA955397BA11}" srcOrd="0" destOrd="0" presId="urn:microsoft.com/office/officeart/2005/8/layout/orgChart1"/>
+    <dgm:cxn modelId="{3EF35756-3F98-4356-9146-9CB399B4034D}" type="presOf" srcId="{DBA5AD7A-C2C2-47CC-9C41-F03684C8A584}" destId="{A1098950-1343-4150-AB97-8EE58E881BBC}" srcOrd="0" destOrd="0" presId="urn:microsoft.com/office/officeart/2005/8/layout/orgChart1"/>
+    <dgm:cxn modelId="{C0490902-9416-479A-A65B-1F53953BD05E}" type="presOf" srcId="{1842372B-728C-4BC7-9D83-15230F10A614}" destId="{6526E14F-2EB7-47D7-868A-C44A055D4594}" srcOrd="0" destOrd="0" presId="urn:microsoft.com/office/officeart/2005/8/layout/orgChart1"/>
+    <dgm:cxn modelId="{96322DE2-0E2C-4518-B0C3-ACA03CC26944}" type="presOf" srcId="{DBA5AD7A-C2C2-47CC-9C41-F03684C8A584}" destId="{8AE016EA-9964-4DAC-9E10-04A800F48939}" srcOrd="1" destOrd="0" presId="urn:microsoft.com/office/officeart/2005/8/layout/orgChart1"/>
+    <dgm:cxn modelId="{F0C538F1-1BCD-4137-AF7D-994EEBD8D569}" type="presOf" srcId="{C0379C3D-44CF-4B46-B585-05D4CA04D08F}" destId="{61BDDE93-DD40-4087-A945-D2649C41B8E9}" srcOrd="1" destOrd="0" presId="urn:microsoft.com/office/officeart/2005/8/layout/orgChart1"/>
+    <dgm:cxn modelId="{A27B3C5F-DB75-41A4-8EBB-84770534D6B1}" srcId="{6C87DEF1-267E-484B-BC33-85913E3EC10F}" destId="{847724BD-9062-4C15-867D-9A40745D5942}" srcOrd="0" destOrd="0" parTransId="{D21D1992-ADB0-4EF0-93AB-1E9F75434F52}" sibTransId="{B070D5F0-61D4-4887-B12C-43BBA3301FE4}"/>
+    <dgm:cxn modelId="{4003D128-8F10-43A0-B6F3-71131E47FDCF}" srcId="{422C33F5-672E-4B0C-B552-ED3DD9F2941B}" destId="{2F023172-4E61-4511-AFCA-923C95EC486B}" srcOrd="2" destOrd="0" parTransId="{EFAA1426-84F3-4105-B915-EC8BECDA4C5D}" sibTransId="{623BE7AE-2B15-4D80-8224-B9BB04470764}"/>
+    <dgm:cxn modelId="{12269922-752E-4FFE-ADBE-32E860FDD1EC}" srcId="{F6D9FE41-73BC-40EF-BC24-17E24345C112}" destId="{C0379C3D-44CF-4B46-B585-05D4CA04D08F}" srcOrd="0" destOrd="0" parTransId="{10912338-BE3D-4008-A98C-20FF266BA640}" sibTransId="{B47AC820-1576-44FE-B75A-462F9A3E1A9E}"/>
+    <dgm:cxn modelId="{3E7FE24D-958E-4913-AAF7-8D0EB1E07640}" type="presOf" srcId="{6B759DC2-3439-4108-98CB-B36DA3EC8CED}" destId="{CB29D046-9C3E-498D-9B0F-548827F377BC}" srcOrd="0" destOrd="0" presId="urn:microsoft.com/office/officeart/2005/8/layout/orgChart1"/>
+    <dgm:cxn modelId="{26BD471B-F22A-4FB4-85C3-5B1ED3F7F8A2}" type="presOf" srcId="{E5CCB25E-C655-4324-8217-14EF320224DF}" destId="{72AC598E-578D-4A32-8CE1-C7314E12EC37}" srcOrd="1" destOrd="0" presId="urn:microsoft.com/office/officeart/2005/8/layout/orgChart1"/>
+    <dgm:cxn modelId="{7EDFCF15-729B-4032-9B17-7ABB32677736}" srcId="{C0379C3D-44CF-4B46-B585-05D4CA04D08F}" destId="{6C87DEF1-267E-484B-BC33-85913E3EC10F}" srcOrd="1" destOrd="0" parTransId="{F85D92B1-E28E-466A-B1AF-ADDB99C02FC6}" sibTransId="{DE255746-BC0D-4C76-8C21-7DB9F286F9DD}"/>
+    <dgm:cxn modelId="{7CF64986-F992-4523-93C3-5C373F05369E}" srcId="{E5CCB25E-C655-4324-8217-14EF320224DF}" destId="{F6631F0D-4003-4FCC-A63D-7640B86D3CF7}" srcOrd="0" destOrd="0" parTransId="{8D222D37-B8A0-43AD-9933-E6199901A620}" sibTransId="{3614496C-0600-46E1-9F6D-6FA1F7F4EDF8}"/>
+    <dgm:cxn modelId="{CE1CDD17-E178-411D-94F9-139C7C4277D5}" srcId="{C0379C3D-44CF-4B46-B585-05D4CA04D08F}" destId="{65C778D0-7669-4D4B-B4D6-4CD1381A0BF3}" srcOrd="2" destOrd="0" parTransId="{7ADADAE6-FA49-433C-B86B-563F2A7A34E3}" sibTransId="{BECAC3D4-83DB-447E-8C69-B505D93CDF0D}"/>
+    <dgm:cxn modelId="{DD68B110-2365-4AFD-B783-5ECCE1DAADFB}" type="presOf" srcId="{1140E081-3CE3-4E40-84D1-D5CCA58BE7C7}" destId="{E92B3A66-DD20-43A7-B574-7DCF7E4CEB01}" srcOrd="0" destOrd="0" presId="urn:microsoft.com/office/officeart/2005/8/layout/orgChart1"/>
+    <dgm:cxn modelId="{C8F33616-4B8E-417C-A253-087A371A8EAB}" type="presOf" srcId="{ACA71FF6-43D1-4D9C-8997-F22E3A014CCA}" destId="{06EACE6F-B329-4F8A-9DF8-AA96E79B9847}" srcOrd="0" destOrd="0" presId="urn:microsoft.com/office/officeart/2005/8/layout/orgChart1"/>
+    <dgm:cxn modelId="{E0AD15E1-166E-4AD6-A4E5-79E4C6730600}" type="presOf" srcId="{847724BD-9062-4C15-867D-9A40745D5942}" destId="{471E24C0-93B7-4A88-8409-904FB0ABBFE3}" srcOrd="0" destOrd="0" presId="urn:microsoft.com/office/officeart/2005/8/layout/orgChart1"/>
+    <dgm:cxn modelId="{B2D7024A-36EC-41B1-B6B4-AD878B90E3D5}" type="presOf" srcId="{C6313A3D-C187-4442-A89E-4A7FE10EBD0B}" destId="{3193C511-743D-4E69-9E1D-0740D16ABB9F}" srcOrd="0" destOrd="0" presId="urn:microsoft.com/office/officeart/2005/8/layout/orgChart1"/>
+    <dgm:cxn modelId="{BB2A7FAC-1E29-4F83-9A2E-5F954D36FD38}" type="presOf" srcId="{DC6511A6-2DC1-4CCB-86DB-BEFDAB64DDE4}" destId="{077A16B0-89CC-4A48-832B-C25F0878DF36}" srcOrd="0" destOrd="0" presId="urn:microsoft.com/office/officeart/2005/8/layout/orgChart1"/>
+    <dgm:cxn modelId="{586F05A7-8C5A-4A3F-8306-5868E0C9DBC3}" srcId="{E5CCB25E-C655-4324-8217-14EF320224DF}" destId="{ACA71FF6-43D1-4D9C-8997-F22E3A014CCA}" srcOrd="1" destOrd="0" parTransId="{9F725B02-6E85-4887-8D8B-9306B1D3AB18}" sibTransId="{C39592C2-B966-4C4F-B193-F1D61E4F2F4C}"/>
+    <dgm:cxn modelId="{8AD1475D-2600-4C89-9E12-2D3173936D7A}" type="presOf" srcId="{1256CB85-BA23-4513-9CCD-B3AE1CAF87CC}" destId="{F225889A-7CC3-4DBC-816A-0F9DBFD05802}" srcOrd="0" destOrd="0" presId="urn:microsoft.com/office/officeart/2005/8/layout/orgChart1"/>
+    <dgm:cxn modelId="{0E0EF20E-EF6C-471E-A1CF-0CBEA2F88E17}" type="presOf" srcId="{01E943C2-F60A-4160-9AE4-B70A3B038017}" destId="{F0E27AB9-22B8-45F7-A29B-1D5ABB37A7A1}" srcOrd="0" destOrd="0" presId="urn:microsoft.com/office/officeart/2005/8/layout/orgChart1"/>
+    <dgm:cxn modelId="{ECF41754-E2B8-44CC-99FC-E1E4DDA4CF46}" type="presOf" srcId="{1256CB85-BA23-4513-9CCD-B3AE1CAF87CC}" destId="{A2A59F6A-7566-4E8D-8E63-E8C4DA376E5F}" srcOrd="1" destOrd="0" presId="urn:microsoft.com/office/officeart/2005/8/layout/orgChart1"/>
+    <dgm:cxn modelId="{D4984BE0-C415-454F-887F-272459B53897}" type="presOf" srcId="{1842372B-728C-4BC7-9D83-15230F10A614}" destId="{6B9FBD9E-2002-4113-8EDF-34E3BA90846F}" srcOrd="1" destOrd="0" presId="urn:microsoft.com/office/officeart/2005/8/layout/orgChart1"/>
+    <dgm:cxn modelId="{DC37FE11-C388-4BB7-BD2D-F5169A5056DB}" type="presOf" srcId="{6C87DEF1-267E-484B-BC33-85913E3EC10F}" destId="{A92999D2-594E-4F7C-AC3B-8EAC9358F8AD}" srcOrd="0" destOrd="0" presId="urn:microsoft.com/office/officeart/2005/8/layout/orgChart1"/>
+    <dgm:cxn modelId="{6737E2B2-C690-453C-B99B-59653A7E8FA4}" type="presOf" srcId="{F6631F0D-4003-4FCC-A63D-7640B86D3CF7}" destId="{52D48C03-8467-41A2-BB1B-AA409C672855}" srcOrd="0" destOrd="0" presId="urn:microsoft.com/office/officeart/2005/8/layout/orgChart1"/>
+    <dgm:cxn modelId="{9CF24023-7CFF-445B-96D8-25F45AE94B9D}" type="presOf" srcId="{F6631F0D-4003-4FCC-A63D-7640B86D3CF7}" destId="{3FE6DC64-57E8-4D54-A2F6-7F35A6B26A3C}" srcOrd="1" destOrd="0" presId="urn:microsoft.com/office/officeart/2005/8/layout/orgChart1"/>
+    <dgm:cxn modelId="{1BAA918E-7678-49B1-AE03-270D07DC379C}" srcId="{422C33F5-672E-4B0C-B552-ED3DD9F2941B}" destId="{6B759DC2-3439-4108-98CB-B36DA3EC8CED}" srcOrd="1" destOrd="0" parTransId="{9AB43360-E212-49CE-A503-6F806BF9B862}" sibTransId="{3EBA5F64-3216-49C6-895D-1AD7176E6164}"/>
+    <dgm:cxn modelId="{F2F418A4-DD23-47BA-B48E-E1A136286599}" type="presOf" srcId="{6B759DC2-3439-4108-98CB-B36DA3EC8CED}" destId="{85433A55-D717-48BC-8149-9AC20B91C08B}" srcOrd="1" destOrd="0" presId="urn:microsoft.com/office/officeart/2005/8/layout/orgChart1"/>
+    <dgm:cxn modelId="{63317037-27B8-408D-9A70-965E41D3ABFC}" type="presOf" srcId="{01E943C2-F60A-4160-9AE4-B70A3B038017}" destId="{0AC2DA91-A00E-43D1-A5D1-CA5DB1708CE7}" srcOrd="1" destOrd="0" presId="urn:microsoft.com/office/officeart/2005/8/layout/orgChart1"/>
+    <dgm:cxn modelId="{326146F0-26C8-47F7-8E0C-14B88C9F3262}" type="presOf" srcId="{7ADADAE6-FA49-433C-B86B-563F2A7A34E3}" destId="{E3D46B2D-06D6-4D5B-AB6B-02310BD3571E}" srcOrd="0" destOrd="0" presId="urn:microsoft.com/office/officeart/2005/8/layout/orgChart1"/>
+    <dgm:cxn modelId="{577BC35A-F66A-4BBD-9E22-41C20C76A6D6}" type="presOf" srcId="{A9C07280-0A72-472E-BE76-F36D22C350B5}" destId="{F67BB4F9-FCC2-4C90-A5EA-73862D03E224}" srcOrd="0" destOrd="0" presId="urn:microsoft.com/office/officeart/2005/8/layout/orgChart1"/>
     <dgm:cxn modelId="{4F6B3212-C6D6-4F95-A1D1-266E5480D278}" srcId="{6C87DEF1-267E-484B-BC33-85913E3EC10F}" destId="{422C33F5-672E-4B0C-B552-ED3DD9F2941B}" srcOrd="1" destOrd="0" parTransId="{A9C07280-0A72-472E-BE76-F36D22C350B5}" sibTransId="{A03C0CAF-CC62-4B51-9DF9-C3283A2C0FD4}"/>
-    <dgm:cxn modelId="{2F490ACC-C135-4B98-B151-626C345CCD1A}" type="presOf" srcId="{8CBAA709-5B5F-4F4E-823F-B523AAB1D352}" destId="{9D42B076-C679-4CE2-BF26-8BA0F459E855}" srcOrd="0" destOrd="0" presId="urn:microsoft.com/office/officeart/2005/8/layout/orgChart1"/>
-    <dgm:cxn modelId="{E0AD15E1-166E-4AD6-A4E5-79E4C6730600}" type="presOf" srcId="{847724BD-9062-4C15-867D-9A40745D5942}" destId="{471E24C0-93B7-4A88-8409-904FB0ABBFE3}" srcOrd="0" destOrd="0" presId="urn:microsoft.com/office/officeart/2005/8/layout/orgChart1"/>
-    <dgm:cxn modelId="{C0490902-9416-479A-A65B-1F53953BD05E}" type="presOf" srcId="{1842372B-728C-4BC7-9D83-15230F10A614}" destId="{6526E14F-2EB7-47D7-868A-C44A055D4594}" srcOrd="0" destOrd="0" presId="urn:microsoft.com/office/officeart/2005/8/layout/orgChart1"/>
-    <dgm:cxn modelId="{12269922-752E-4FFE-ADBE-32E860FDD1EC}" srcId="{F6D9FE41-73BC-40EF-BC24-17E24345C112}" destId="{C0379C3D-44CF-4B46-B585-05D4CA04D08F}" srcOrd="0" destOrd="0" parTransId="{10912338-BE3D-4008-A98C-20FF266BA640}" sibTransId="{B47AC820-1576-44FE-B75A-462F9A3E1A9E}"/>
+    <dgm:cxn modelId="{8DB37ED5-3602-4C34-885E-F678559BCBC9}" srcId="{E5CCB25E-C655-4324-8217-14EF320224DF}" destId="{DBA5AD7A-C2C2-47CC-9C41-F03684C8A584}" srcOrd="2" destOrd="0" parTransId="{DC6511A6-2DC1-4CCB-86DB-BEFDAB64DDE4}" sibTransId="{8B91D15F-64A3-4AD7-8589-73646BCC8EA1}"/>
+    <dgm:cxn modelId="{FC8D6FE8-44D1-4893-9A68-D4A14F718688}" type="presOf" srcId="{422C33F5-672E-4B0C-B552-ED3DD9F2941B}" destId="{B7FD21A3-9BC2-4ED9-A7A1-C733E512343E}" srcOrd="1" destOrd="0" presId="urn:microsoft.com/office/officeart/2005/8/layout/orgChart1"/>
     <dgm:cxn modelId="{3852DE4C-3E13-4A0B-B796-8B24FB1CD4B5}" type="presOf" srcId="{D21D1992-ADB0-4EF0-93AB-1E9F75434F52}" destId="{AD79323F-1B49-4729-A289-6D620D749A9F}" srcOrd="0" destOrd="0" presId="urn:microsoft.com/office/officeart/2005/8/layout/orgChart1"/>
-    <dgm:cxn modelId="{BB2A7FAC-1E29-4F83-9A2E-5F954D36FD38}" type="presOf" srcId="{DC6511A6-2DC1-4CCB-86DB-BEFDAB64DDE4}" destId="{077A16B0-89CC-4A48-832B-C25F0878DF36}" srcOrd="0" destOrd="0" presId="urn:microsoft.com/office/officeart/2005/8/layout/orgChart1"/>
-    <dgm:cxn modelId="{577BC35A-F66A-4BBD-9E22-41C20C76A6D6}" type="presOf" srcId="{A9C07280-0A72-472E-BE76-F36D22C350B5}" destId="{F67BB4F9-FCC2-4C90-A5EA-73862D03E224}" srcOrd="0" destOrd="0" presId="urn:microsoft.com/office/officeart/2005/8/layout/orgChart1"/>
-    <dgm:cxn modelId="{9CF24023-7CFF-445B-96D8-25F45AE94B9D}" type="presOf" srcId="{F6631F0D-4003-4FCC-A63D-7640B86D3CF7}" destId="{3FE6DC64-57E8-4D54-A2F6-7F35A6B26A3C}" srcOrd="1" destOrd="0" presId="urn:microsoft.com/office/officeart/2005/8/layout/orgChart1"/>
-    <dgm:cxn modelId="{63317037-27B8-408D-9A70-965E41D3ABFC}" type="presOf" srcId="{01E943C2-F60A-4160-9AE4-B70A3B038017}" destId="{0AC2DA91-A00E-43D1-A5D1-CA5DB1708CE7}" srcOrd="1" destOrd="0" presId="urn:microsoft.com/office/officeart/2005/8/layout/orgChart1"/>
-    <dgm:cxn modelId="{16A039EF-929E-4D75-BCF1-AF42B6CB5EA1}" type="presOf" srcId="{C0379C3D-44CF-4B46-B585-05D4CA04D08F}" destId="{1619B013-66DD-4112-A89F-479A43573186}" srcOrd="0" destOrd="0" presId="urn:microsoft.com/office/officeart/2005/8/layout/orgChart1"/>
-    <dgm:cxn modelId="{8DB37ED5-3602-4C34-885E-F678559BCBC9}" srcId="{E5CCB25E-C655-4324-8217-14EF320224DF}" destId="{DBA5AD7A-C2C2-47CC-9C41-F03684C8A584}" srcOrd="2" destOrd="0" parTransId="{DC6511A6-2DC1-4CCB-86DB-BEFDAB64DDE4}" sibTransId="{8B91D15F-64A3-4AD7-8589-73646BCC8EA1}"/>
-    <dgm:cxn modelId="{C8F33616-4B8E-417C-A253-087A371A8EAB}" type="presOf" srcId="{ACA71FF6-43D1-4D9C-8997-F22E3A014CCA}" destId="{06EACE6F-B329-4F8A-9DF8-AA96E79B9847}" srcOrd="0" destOrd="0" presId="urn:microsoft.com/office/officeart/2005/8/layout/orgChart1"/>
-    <dgm:cxn modelId="{ECF41754-E2B8-44CC-99FC-E1E4DDA4CF46}" type="presOf" srcId="{1256CB85-BA23-4513-9CCD-B3AE1CAF87CC}" destId="{A2A59F6A-7566-4E8D-8E63-E8C4DA376E5F}" srcOrd="1" destOrd="0" presId="urn:microsoft.com/office/officeart/2005/8/layout/orgChart1"/>
+    <dgm:cxn modelId="{9D151346-9D01-4501-A5D2-05AAC8E43844}" type="presOf" srcId="{9F725B02-6E85-4887-8D8B-9306B1D3AB18}" destId="{060ACBB8-EB96-4241-88F8-0A4B28010FA5}" srcOrd="0" destOrd="0" presId="urn:microsoft.com/office/officeart/2005/8/layout/orgChart1"/>
+    <dgm:cxn modelId="{E5BCC7D4-C778-4DFA-9D99-D4CCA6E21C4C}" type="presOf" srcId="{02E01EF1-C250-4B76-9AAA-4A4D9BCAEAE0}" destId="{AB1BFC6C-8F27-4F6C-97A6-D6FB13839B51}" srcOrd="0" destOrd="0" presId="urn:microsoft.com/office/officeart/2005/8/layout/orgChart1"/>
+    <dgm:cxn modelId="{79C1DC50-BE1A-4B01-A9CF-B533299D421C}" type="presOf" srcId="{EFAA1426-84F3-4105-B915-EC8BECDA4C5D}" destId="{4D520FF4-990B-4A55-A2D2-83A63539A647}" srcOrd="0" destOrd="0" presId="urn:microsoft.com/office/officeart/2005/8/layout/orgChart1"/>
+    <dgm:cxn modelId="{380037F8-4EB3-4846-9D1F-E132FED828F8}" type="presOf" srcId="{97DF12F3-EBEE-4710-B22F-47A71C2D3BA0}" destId="{A827EF7B-3FD3-4F9A-8747-368E792DAF1A}" srcOrd="0" destOrd="0" presId="urn:microsoft.com/office/officeart/2005/8/layout/orgChart1"/>
+    <dgm:cxn modelId="{3715A702-2990-4779-853F-F58E6308CCAC}" type="presOf" srcId="{F6D9FE41-73BC-40EF-BC24-17E24345C112}" destId="{7F34AD9F-69E3-46E3-9A0D-23B0CDB74BF3}" srcOrd="0" destOrd="0" presId="urn:microsoft.com/office/officeart/2005/8/layout/orgChart1"/>
     <dgm:cxn modelId="{59C40AFD-10D9-4E4B-BECD-6F06668E797D}" srcId="{65C778D0-7669-4D4B-B4D6-4CD1381A0BF3}" destId="{1256CB85-BA23-4513-9CCD-B3AE1CAF87CC}" srcOrd="0" destOrd="0" parTransId="{F5F23906-48D7-4EF9-A256-60463F51DB60}" sibTransId="{ADBE4A46-BE9F-481C-B56C-B6B8EDD11E1E}"/>
-    <dgm:cxn modelId="{787823C2-5318-4AEF-926F-23543DB53719}" type="presOf" srcId="{8D222D37-B8A0-43AD-9933-E6199901A620}" destId="{E6B87659-DCA8-4621-B7CA-CA955397BA11}" srcOrd="0" destOrd="0" presId="urn:microsoft.com/office/officeart/2005/8/layout/orgChart1"/>
-    <dgm:cxn modelId="{0E0EF20E-EF6C-471E-A1CF-0CBEA2F88E17}" type="presOf" srcId="{01E943C2-F60A-4160-9AE4-B70A3B038017}" destId="{F0E27AB9-22B8-45F7-A29B-1D5ABB37A7A1}" srcOrd="0" destOrd="0" presId="urn:microsoft.com/office/officeart/2005/8/layout/orgChart1"/>
-    <dgm:cxn modelId="{3EF35756-3F98-4356-9146-9CB399B4034D}" type="presOf" srcId="{DBA5AD7A-C2C2-47CC-9C41-F03684C8A584}" destId="{A1098950-1343-4150-AB97-8EE58E881BBC}" srcOrd="0" destOrd="0" presId="urn:microsoft.com/office/officeart/2005/8/layout/orgChart1"/>
-    <dgm:cxn modelId="{26BD471B-F22A-4FB4-85C3-5B1ED3F7F8A2}" type="presOf" srcId="{E5CCB25E-C655-4324-8217-14EF320224DF}" destId="{72AC598E-578D-4A32-8CE1-C7314E12EC37}" srcOrd="1" destOrd="0" presId="urn:microsoft.com/office/officeart/2005/8/layout/orgChart1"/>
-    <dgm:cxn modelId="{1BAA918E-7678-49B1-AE03-270D07DC379C}" srcId="{422C33F5-672E-4B0C-B552-ED3DD9F2941B}" destId="{6B759DC2-3439-4108-98CB-B36DA3EC8CED}" srcOrd="1" destOrd="0" parTransId="{9AB43360-E212-49CE-A503-6F806BF9B862}" sibTransId="{3EBA5F64-3216-49C6-895D-1AD7176E6164}"/>
-    <dgm:cxn modelId="{E5BCC7D4-C778-4DFA-9D99-D4CCA6E21C4C}" type="presOf" srcId="{02E01EF1-C250-4B76-9AAA-4A4D9BCAEAE0}" destId="{AB1BFC6C-8F27-4F6C-97A6-D6FB13839B51}" srcOrd="0" destOrd="0" presId="urn:microsoft.com/office/officeart/2005/8/layout/orgChart1"/>
+    <dgm:cxn modelId="{AB312A38-ACB4-41A2-A988-39AECE046E4D}" type="presOf" srcId="{F5F23906-48D7-4EF9-A256-60463F51DB60}" destId="{50609ABF-9BA2-4F31-946D-BF9C35D435FA}" srcOrd="0" destOrd="0" presId="urn:microsoft.com/office/officeart/2005/8/layout/orgChart1"/>
     <dgm:cxn modelId="{DF4A1E84-C851-4C3D-B0C5-275D06AC7C84}" type="presOf" srcId="{E5CCB25E-C655-4324-8217-14EF320224DF}" destId="{BE086ED0-A51B-4215-B42F-E94C05C504E5}" srcOrd="0" destOrd="0" presId="urn:microsoft.com/office/officeart/2005/8/layout/orgChart1"/>
     <dgm:cxn modelId="{0FFBBE3C-75C4-4EC4-925D-0B374733E7CD}" type="presOf" srcId="{422C33F5-672E-4B0C-B552-ED3DD9F2941B}" destId="{0F256B01-4570-4068-A359-7B9777BAC5E2}" srcOrd="0" destOrd="0" presId="urn:microsoft.com/office/officeart/2005/8/layout/orgChart1"/>
-    <dgm:cxn modelId="{75B35406-F01A-498A-BD80-03CF0EA5A03F}" type="presOf" srcId="{F85D92B1-E28E-466A-B1AF-ADDB99C02FC6}" destId="{CD932D47-FAA9-4BEA-94A0-664BBD2AA555}" srcOrd="0" destOrd="0" presId="urn:microsoft.com/office/officeart/2005/8/layout/orgChart1"/>
-    <dgm:cxn modelId="{3E7FE24D-958E-4913-AAF7-8D0EB1E07640}" type="presOf" srcId="{6B759DC2-3439-4108-98CB-B36DA3EC8CED}" destId="{CB29D046-9C3E-498D-9B0F-548827F377BC}" srcOrd="0" destOrd="0" presId="urn:microsoft.com/office/officeart/2005/8/layout/orgChart1"/>
-    <dgm:cxn modelId="{FC8D6FE8-44D1-4893-9A68-D4A14F718688}" type="presOf" srcId="{422C33F5-672E-4B0C-B552-ED3DD9F2941B}" destId="{B7FD21A3-9BC2-4ED9-A7A1-C733E512343E}" srcOrd="1" destOrd="0" presId="urn:microsoft.com/office/officeart/2005/8/layout/orgChart1"/>
-    <dgm:cxn modelId="{71CB9AFD-B018-4D1D-BBC9-D98D08CC723E}" type="presOf" srcId="{9AB43360-E212-49CE-A503-6F806BF9B862}" destId="{E40D1708-260F-4EE2-8BF4-0AF5CCE2572C}" srcOrd="0" destOrd="0" presId="urn:microsoft.com/office/officeart/2005/8/layout/orgChart1"/>
-    <dgm:cxn modelId="{4003D128-8F10-43A0-B6F3-71131E47FDCF}" srcId="{422C33F5-672E-4B0C-B552-ED3DD9F2941B}" destId="{2F023172-4E61-4511-AFCA-923C95EC486B}" srcOrd="2" destOrd="0" parTransId="{EFAA1426-84F3-4105-B915-EC8BECDA4C5D}" sibTransId="{623BE7AE-2B15-4D80-8224-B9BB04470764}"/>
-    <dgm:cxn modelId="{6737E2B2-C690-453C-B99B-59653A7E8FA4}" type="presOf" srcId="{F6631F0D-4003-4FCC-A63D-7640B86D3CF7}" destId="{52D48C03-8467-41A2-BB1B-AA409C672855}" srcOrd="0" destOrd="0" presId="urn:microsoft.com/office/officeart/2005/8/layout/orgChart1"/>
-    <dgm:cxn modelId="{E439C1C7-854A-4D8C-8D80-EB117F31A47C}" type="presOf" srcId="{847724BD-9062-4C15-867D-9A40745D5942}" destId="{003BFD0D-2BBC-46B3-A380-154B3A06829E}" srcOrd="1" destOrd="0" presId="urn:microsoft.com/office/officeart/2005/8/layout/orgChart1"/>
-    <dgm:cxn modelId="{8AD1475D-2600-4C89-9E12-2D3173936D7A}" type="presOf" srcId="{1256CB85-BA23-4513-9CCD-B3AE1CAF87CC}" destId="{F225889A-7CC3-4DBC-816A-0F9DBFD05802}" srcOrd="0" destOrd="0" presId="urn:microsoft.com/office/officeart/2005/8/layout/orgChart1"/>
-    <dgm:cxn modelId="{9D151346-9D01-4501-A5D2-05AAC8E43844}" type="presOf" srcId="{9F725B02-6E85-4887-8D8B-9306B1D3AB18}" destId="{060ACBB8-EB96-4241-88F8-0A4B28010FA5}" srcOrd="0" destOrd="0" presId="urn:microsoft.com/office/officeart/2005/8/layout/orgChart1"/>
-    <dgm:cxn modelId="{7343985B-FF23-4ABD-9625-C96E3889ECF9}" type="presOf" srcId="{2F023172-4E61-4511-AFCA-923C95EC486B}" destId="{3B846DCB-5246-4C95-9EC1-CF6D85158CF9}" srcOrd="1" destOrd="0" presId="urn:microsoft.com/office/officeart/2005/8/layout/orgChart1"/>
-    <dgm:cxn modelId="{7CF64986-F992-4523-93C3-5C373F05369E}" srcId="{E5CCB25E-C655-4324-8217-14EF320224DF}" destId="{F6631F0D-4003-4FCC-A63D-7640B86D3CF7}" srcOrd="0" destOrd="0" parTransId="{8D222D37-B8A0-43AD-9933-E6199901A620}" sibTransId="{3614496C-0600-46E1-9F6D-6FA1F7F4EDF8}"/>
-    <dgm:cxn modelId="{30A1F083-28D9-420B-8338-E645749A0574}" type="presOf" srcId="{6C87DEF1-267E-484B-BC33-85913E3EC10F}" destId="{EB5C76B9-D527-4D3B-989E-1EAE2115F0ED}" srcOrd="1" destOrd="0" presId="urn:microsoft.com/office/officeart/2005/8/layout/orgChart1"/>
-    <dgm:cxn modelId="{3715A702-2990-4779-853F-F58E6308CCAC}" type="presOf" srcId="{F6D9FE41-73BC-40EF-BC24-17E24345C112}" destId="{7F34AD9F-69E3-46E3-9A0D-23B0CDB74BF3}" srcOrd="0" destOrd="0" presId="urn:microsoft.com/office/officeart/2005/8/layout/orgChart1"/>
-    <dgm:cxn modelId="{A27B3C5F-DB75-41A4-8EBB-84770534D6B1}" srcId="{6C87DEF1-267E-484B-BC33-85913E3EC10F}" destId="{847724BD-9062-4C15-867D-9A40745D5942}" srcOrd="0" destOrd="0" parTransId="{D21D1992-ADB0-4EF0-93AB-1E9F75434F52}" sibTransId="{B070D5F0-61D4-4887-B12C-43BBA3301FE4}"/>
-    <dgm:cxn modelId="{37C086BA-50A8-48A6-BC88-F57613CE337F}" srcId="{C0379C3D-44CF-4B46-B585-05D4CA04D08F}" destId="{E5CCB25E-C655-4324-8217-14EF320224DF}" srcOrd="0" destOrd="0" parTransId="{C6313A3D-C187-4442-A89E-4A7FE10EBD0B}" sibTransId="{F2E2BC6B-9378-45F0-9818-1DB3A2541053}"/>
-    <dgm:cxn modelId="{BEE9318E-195B-4B53-BC4C-5CD437085BA5}" srcId="{6C87DEF1-267E-484B-BC33-85913E3EC10F}" destId="{01E943C2-F60A-4160-9AE4-B70A3B038017}" srcOrd="2" destOrd="0" parTransId="{02E01EF1-C250-4B76-9AAA-4A4D9BCAEAE0}" sibTransId="{1E2C944A-0A38-4685-A0BC-3B9082352F80}"/>
-    <dgm:cxn modelId="{B2D7024A-36EC-41B1-B6B4-AD878B90E3D5}" type="presOf" srcId="{C6313A3D-C187-4442-A89E-4A7FE10EBD0B}" destId="{3193C511-743D-4E69-9E1D-0740D16ABB9F}" srcOrd="0" destOrd="0" presId="urn:microsoft.com/office/officeart/2005/8/layout/orgChart1"/>
-    <dgm:cxn modelId="{D4984BE0-C415-454F-887F-272459B53897}" type="presOf" srcId="{1842372B-728C-4BC7-9D83-15230F10A614}" destId="{6B9FBD9E-2002-4113-8EDF-34E3BA90846F}" srcOrd="1" destOrd="0" presId="urn:microsoft.com/office/officeart/2005/8/layout/orgChart1"/>
-    <dgm:cxn modelId="{96322DE2-0E2C-4518-B0C3-ACA03CC26944}" type="presOf" srcId="{DBA5AD7A-C2C2-47CC-9C41-F03684C8A584}" destId="{8AE016EA-9964-4DAC-9E10-04A800F48939}" srcOrd="1" destOrd="0" presId="urn:microsoft.com/office/officeart/2005/8/layout/orgChart1"/>
-    <dgm:cxn modelId="{F2F418A4-DD23-47BA-B48E-E1A136286599}" type="presOf" srcId="{6B759DC2-3439-4108-98CB-B36DA3EC8CED}" destId="{85433A55-D717-48BC-8149-9AC20B91C08B}" srcOrd="1" destOrd="0" presId="urn:microsoft.com/office/officeart/2005/8/layout/orgChart1"/>
-    <dgm:cxn modelId="{A59A3917-3430-4887-B7BB-607F305BD5D3}" type="presOf" srcId="{2F023172-4E61-4511-AFCA-923C95EC486B}" destId="{5A047950-A498-4E53-A417-C812BDE16A6B}" srcOrd="0" destOrd="0" presId="urn:microsoft.com/office/officeart/2005/8/layout/orgChart1"/>
-    <dgm:cxn modelId="{51AF7F02-7677-4A26-BD2A-D6630CAAF4A2}" type="presOf" srcId="{ACA71FF6-43D1-4D9C-8997-F22E3A014CCA}" destId="{88497726-0A8F-4453-B9B5-15C1B21B5E45}" srcOrd="1" destOrd="0" presId="urn:microsoft.com/office/officeart/2005/8/layout/orgChart1"/>
-    <dgm:cxn modelId="{326146F0-26C8-47F7-8E0C-14B88C9F3262}" type="presOf" srcId="{7ADADAE6-FA49-433C-B86B-563F2A7A34E3}" destId="{E3D46B2D-06D6-4D5B-AB6B-02310BD3571E}" srcOrd="0" destOrd="0" presId="urn:microsoft.com/office/officeart/2005/8/layout/orgChart1"/>
-    <dgm:cxn modelId="{380037F8-4EB3-4846-9D1F-E132FED828F8}" type="presOf" srcId="{97DF12F3-EBEE-4710-B22F-47A71C2D3BA0}" destId="{A827EF7B-3FD3-4F9A-8747-368E792DAF1A}" srcOrd="0" destOrd="0" presId="urn:microsoft.com/office/officeart/2005/8/layout/orgChart1"/>
-    <dgm:cxn modelId="{DC37FE11-C388-4BB7-BD2D-F5169A5056DB}" type="presOf" srcId="{6C87DEF1-267E-484B-BC33-85913E3EC10F}" destId="{A92999D2-594E-4F7C-AC3B-8EAC9358F8AD}" srcOrd="0" destOrd="0" presId="urn:microsoft.com/office/officeart/2005/8/layout/orgChart1"/>
-    <dgm:cxn modelId="{C3BBBF89-454D-4003-BF18-86C84AEA71FD}" type="presOf" srcId="{1140E081-3CE3-4E40-84D1-D5CCA58BE7C7}" destId="{9D3CD290-6F82-471F-948C-49054C263DDB}" srcOrd="1" destOrd="0" presId="urn:microsoft.com/office/officeart/2005/8/layout/orgChart1"/>
-    <dgm:cxn modelId="{AB312A38-ACB4-41A2-A988-39AECE046E4D}" type="presOf" srcId="{F5F23906-48D7-4EF9-A256-60463F51DB60}" destId="{50609ABF-9BA2-4F31-946D-BF9C35D435FA}" srcOrd="0" destOrd="0" presId="urn:microsoft.com/office/officeart/2005/8/layout/orgChart1"/>
-    <dgm:cxn modelId="{DD68B110-2365-4AFD-B783-5ECCE1DAADFB}" type="presOf" srcId="{1140E081-3CE3-4E40-84D1-D5CCA58BE7C7}" destId="{E92B3A66-DD20-43A7-B574-7DCF7E4CEB01}" srcOrd="0" destOrd="0" presId="urn:microsoft.com/office/officeart/2005/8/layout/orgChart1"/>
-    <dgm:cxn modelId="{DBCA2FE9-3991-492D-95E4-EAFCD18666FE}" srcId="{6C87DEF1-267E-484B-BC33-85913E3EC10F}" destId="{1842372B-728C-4BC7-9D83-15230F10A614}" srcOrd="3" destOrd="0" parTransId="{8CBAA709-5B5F-4F4E-823F-B523AAB1D352}" sibTransId="{5A114E51-C5C1-4628-BAD2-613F15CC6CFB}"/>
-    <dgm:cxn modelId="{73F09D0E-1071-422C-AB1A-C9B2B24539FB}" type="presOf" srcId="{65C778D0-7669-4D4B-B4D6-4CD1381A0BF3}" destId="{5B674A70-3154-4944-B2C8-8AFF4B2D7C3C}" srcOrd="0" destOrd="0" presId="urn:microsoft.com/office/officeart/2005/8/layout/orgChart1"/>
-    <dgm:cxn modelId="{79C1DC50-BE1A-4B01-A9CF-B533299D421C}" type="presOf" srcId="{EFAA1426-84F3-4105-B915-EC8BECDA4C5D}" destId="{4D520FF4-990B-4A55-A2D2-83A63539A647}" srcOrd="0" destOrd="0" presId="urn:microsoft.com/office/officeart/2005/8/layout/orgChart1"/>
-    <dgm:cxn modelId="{7EDFCF15-729B-4032-9B17-7ABB32677736}" srcId="{C0379C3D-44CF-4B46-B585-05D4CA04D08F}" destId="{6C87DEF1-267E-484B-BC33-85913E3EC10F}" srcOrd="1" destOrd="0" parTransId="{F85D92B1-E28E-466A-B1AF-ADDB99C02FC6}" sibTransId="{DE255746-BC0D-4C76-8C21-7DB9F286F9DD}"/>
-    <dgm:cxn modelId="{7C069E50-9694-4531-B7A2-74D41359417F}" srcId="{422C33F5-672E-4B0C-B552-ED3DD9F2941B}" destId="{1140E081-3CE3-4E40-84D1-D5CCA58BE7C7}" srcOrd="0" destOrd="0" parTransId="{97DF12F3-EBEE-4710-B22F-47A71C2D3BA0}" sibTransId="{C5F6C251-A1A6-4005-9D84-BF0C1D14B06A}"/>
-    <dgm:cxn modelId="{CE1CDD17-E178-411D-94F9-139C7C4277D5}" srcId="{C0379C3D-44CF-4B46-B585-05D4CA04D08F}" destId="{65C778D0-7669-4D4B-B4D6-4CD1381A0BF3}" srcOrd="2" destOrd="0" parTransId="{7ADADAE6-FA49-433C-B86B-563F2A7A34E3}" sibTransId="{BECAC3D4-83DB-447E-8C69-B505D93CDF0D}"/>
-    <dgm:cxn modelId="{586F05A7-8C5A-4A3F-8306-5868E0C9DBC3}" srcId="{E5CCB25E-C655-4324-8217-14EF320224DF}" destId="{ACA71FF6-43D1-4D9C-8997-F22E3A014CCA}" srcOrd="1" destOrd="0" parTransId="{9F725B02-6E85-4887-8D8B-9306B1D3AB18}" sibTransId="{C39592C2-B966-4C4F-B193-F1D61E4F2F4C}"/>
-    <dgm:cxn modelId="{F0C538F1-1BCD-4137-AF7D-994EEBD8D569}" type="presOf" srcId="{C0379C3D-44CF-4B46-B585-05D4CA04D08F}" destId="{61BDDE93-DD40-4087-A945-D2649C41B8E9}" srcOrd="1" destOrd="0" presId="urn:microsoft.com/office/officeart/2005/8/layout/orgChart1"/>
     <dgm:cxn modelId="{F07FBA25-C6BC-4DC2-AEBC-1082D32992C1}" type="presParOf" srcId="{7F34AD9F-69E3-46E3-9A0D-23B0CDB74BF3}" destId="{34D71FE7-425F-4EE3-AFDF-AA9C0005EC00}" srcOrd="0" destOrd="0" presId="urn:microsoft.com/office/officeart/2005/8/layout/orgChart1"/>
     <dgm:cxn modelId="{751D16DE-4A9C-415E-B6D6-D9F5646A95FF}" type="presParOf" srcId="{34D71FE7-425F-4EE3-AFDF-AA9C0005EC00}" destId="{F1890DE0-7062-4AEE-90BD-8033034F9ABC}" srcOrd="0" destOrd="0" presId="urn:microsoft.com/office/officeart/2005/8/layout/orgChart1"/>
     <dgm:cxn modelId="{3B5924F0-87EB-4C5D-96DD-47C6E12902EE}" type="presParOf" srcId="{F1890DE0-7062-4AEE-90BD-8033034F9ABC}" destId="{1619B013-66DD-4112-A89F-479A43573186}" srcOrd="0" destOrd="0" presId="urn:microsoft.com/office/officeart/2005/8/layout/orgChart1"/>
@@ -7634,7 +7879,7 @@
             </a:spcAft>
           </a:pPr>
           <a:r>
-            <a:rPr lang="en-US" altLang="zh-TW" sz="1400" kern="1200" dirty="0" err="1" smtClean="0">
+            <a:rPr lang="en-US" altLang="zh-TW" sz="1400" kern="1200" dirty="0" smtClean="0">
               <a:solidFill>
                 <a:schemeClr val="tx1"/>
               </a:solidFill>
@@ -7642,7 +7887,7 @@
               <a:ea typeface="標楷體" panose="03000509000000000000" pitchFamily="65" charset="-120"/>
               <a:cs typeface="Times New Roman" panose="02020603050405020304" pitchFamily="18" charset="0"/>
             </a:rPr>
-            <a:t>PySR</a:t>
+            <a:t>SR</a:t>
           </a:r>
           <a:endParaRPr lang="zh-TW" altLang="en-US" sz="1400" kern="1200" dirty="0">
             <a:solidFill>
@@ -11108,7 +11353,7 @@
           <a:p>
             <a:fld id="{B904E2B0-A8F6-417E-B341-E764BD2233EF}" type="datetimeFigureOut">
               <a:rPr lang="zh-TW" altLang="en-US" smtClean="0"/>
-              <a:t>2026/3/19</a:t>
+              <a:t>2026/6/27</a:t>
             </a:fld>
             <a:endParaRPr lang="zh-TW" altLang="en-US"/>
           </a:p>
@@ -11819,7 +12064,7 @@
           <a:p>
             <a:fld id="{5BBEAD13-0566-4C6C-97E7-55F17F24B09F}" type="datetimeFigureOut">
               <a:rPr lang="zh-TW" altLang="en-US" smtClean="0"/>
-              <a:t>2026/3/19</a:t>
+              <a:t>2026/6/27</a:t>
             </a:fld>
             <a:endParaRPr lang="zh-TW" altLang="en-US"/>
           </a:p>
@@ -11984,7 +12229,7 @@
           <a:p>
             <a:fld id="{5BBEAD13-0566-4C6C-97E7-55F17F24B09F}" type="datetimeFigureOut">
               <a:rPr lang="zh-TW" altLang="en-US" smtClean="0"/>
-              <a:t>2026/3/19</a:t>
+              <a:t>2026/6/27</a:t>
             </a:fld>
             <a:endParaRPr lang="zh-TW" altLang="en-US"/>
           </a:p>
@@ -12159,7 +12404,7 @@
           <a:p>
             <a:fld id="{5BBEAD13-0566-4C6C-97E7-55F17F24B09F}" type="datetimeFigureOut">
               <a:rPr lang="zh-TW" altLang="en-US" smtClean="0"/>
-              <a:t>2026/3/19</a:t>
+              <a:t>2026/6/27</a:t>
             </a:fld>
             <a:endParaRPr lang="zh-TW" altLang="en-US"/>
           </a:p>
@@ -12324,7 +12569,7 @@
           <a:p>
             <a:fld id="{5BBEAD13-0566-4C6C-97E7-55F17F24B09F}" type="datetimeFigureOut">
               <a:rPr lang="zh-TW" altLang="en-US" smtClean="0"/>
-              <a:t>2026/3/19</a:t>
+              <a:t>2026/6/27</a:t>
             </a:fld>
             <a:endParaRPr lang="zh-TW" altLang="en-US"/>
           </a:p>
@@ -12565,7 +12810,7 @@
           <a:p>
             <a:fld id="{5BBEAD13-0566-4C6C-97E7-55F17F24B09F}" type="datetimeFigureOut">
               <a:rPr lang="zh-TW" altLang="en-US" smtClean="0"/>
-              <a:t>2026/3/19</a:t>
+              <a:t>2026/6/27</a:t>
             </a:fld>
             <a:endParaRPr lang="zh-TW" altLang="en-US"/>
           </a:p>
@@ -12848,7 +13093,7 @@
           <a:p>
             <a:fld id="{5BBEAD13-0566-4C6C-97E7-55F17F24B09F}" type="datetimeFigureOut">
               <a:rPr lang="zh-TW" altLang="en-US" smtClean="0"/>
-              <a:t>2026/3/19</a:t>
+              <a:t>2026/6/27</a:t>
             </a:fld>
             <a:endParaRPr lang="zh-TW" altLang="en-US"/>
           </a:p>
@@ -13265,7 +13510,7 @@
           <a:p>
             <a:fld id="{5BBEAD13-0566-4C6C-97E7-55F17F24B09F}" type="datetimeFigureOut">
               <a:rPr lang="zh-TW" altLang="en-US" smtClean="0"/>
-              <a:t>2026/3/19</a:t>
+              <a:t>2026/6/27</a:t>
             </a:fld>
             <a:endParaRPr lang="zh-TW" altLang="en-US"/>
           </a:p>
@@ -13378,7 +13623,7 @@
           <a:p>
             <a:fld id="{5BBEAD13-0566-4C6C-97E7-55F17F24B09F}" type="datetimeFigureOut">
               <a:rPr lang="zh-TW" altLang="en-US" smtClean="0"/>
-              <a:t>2026/3/19</a:t>
+              <a:t>2026/6/27</a:t>
             </a:fld>
             <a:endParaRPr lang="zh-TW" altLang="en-US"/>
           </a:p>
@@ -13468,7 +13713,7 @@
           <a:p>
             <a:fld id="{5BBEAD13-0566-4C6C-97E7-55F17F24B09F}" type="datetimeFigureOut">
               <a:rPr lang="zh-TW" altLang="en-US" smtClean="0"/>
-              <a:t>2026/3/19</a:t>
+              <a:t>2026/6/27</a:t>
             </a:fld>
             <a:endParaRPr lang="zh-TW" altLang="en-US"/>
           </a:p>
@@ -13740,7 +13985,7 @@
           <a:p>
             <a:fld id="{5BBEAD13-0566-4C6C-97E7-55F17F24B09F}" type="datetimeFigureOut">
               <a:rPr lang="zh-TW" altLang="en-US" smtClean="0"/>
-              <a:t>2026/3/19</a:t>
+              <a:t>2026/6/27</a:t>
             </a:fld>
             <a:endParaRPr lang="zh-TW" altLang="en-US"/>
           </a:p>
@@ -13988,7 +14233,7 @@
           <a:p>
             <a:fld id="{5BBEAD13-0566-4C6C-97E7-55F17F24B09F}" type="datetimeFigureOut">
               <a:rPr lang="zh-TW" altLang="en-US" smtClean="0"/>
-              <a:t>2026/3/19</a:t>
+              <a:t>2026/6/27</a:t>
             </a:fld>
             <a:endParaRPr lang="zh-TW" altLang="en-US"/>
           </a:p>
@@ -14196,7 +14441,7 @@
           <a:p>
             <a:fld id="{5BBEAD13-0566-4C6C-97E7-55F17F24B09F}" type="datetimeFigureOut">
               <a:rPr lang="zh-TW" altLang="en-US" smtClean="0"/>
-              <a:t>2026/3/19</a:t>
+              <a:t>2026/6/27</a:t>
             </a:fld>
             <a:endParaRPr lang="zh-TW" altLang="en-US"/>
           </a:p>
@@ -15005,7 +15250,7 @@
           <p:nvPr>
             <p:extLst>
               <p:ext uri="{D42A27DB-BD31-4B8C-83A1-F6EECF244321}">
-                <p14:modId xmlns:p14="http://schemas.microsoft.com/office/powerpoint/2010/main" val="171206636"/>
+                <p14:modId xmlns:p14="http://schemas.microsoft.com/office/powerpoint/2010/main" val="2620655420"/>
               </p:ext>
             </p:extLst>
           </p:nvPr>
